--- a/slide/pratica/02/Aula02 - Busca Ativa.pptx
+++ b/slide/pratica/02/Aula02 - Busca Ativa.pptx
@@ -4,6 +4,9 @@
   <p:sldMasterIdLst>
     <p:sldMasterId id="2147483648" r:id="rId1"/>
   </p:sldMasterIdLst>
+  <p:notesMasterIdLst>
+    <p:notesMasterId r:id="rId23"/>
+  </p:notesMasterIdLst>
   <p:sldIdLst>
     <p:sldId id="256" r:id="rId2"/>
     <p:sldId id="257" r:id="rId3"/>
@@ -27,9 +30,6 @@
     <p:sldId id="275" r:id="rId21"/>
     <p:sldId id="276" r:id="rId22"/>
   </p:sldIdLst>
-  <p:notesMasterIdLst>
-    <p:notesMasterId r:id="rId23"/>
-  </p:notesMasterIdLst>
   <p:sldSz cx="12192000" cy="6858000"/>
   <p:notesSz cx="6858000" cy="12192000"/>
   <p:defaultTextStyle>
@@ -124,6 +124,11 @@
       </a:defRPr>
     </a:lvl9pPr>
   </p:defaultTextStyle>
+  <p:extLst>
+    <p:ext uri="{EFAFB233-063F-42B5-8137-9DF3F51BA10A}">
+      <p15:sldGuideLst xmlns:p15="http://schemas.microsoft.com/office/powerpoint/2012/main"/>
+    </p:ext>
+  </p:extLst>
 </p:presentation>
 </file>
 
@@ -149,234 +154,10 @@
           <a:chExt cx="0" cy="0"/>
         </a:xfrm>
       </p:grpSpPr>
-      <p:sp>
-        <p:nvSpPr>
-          <p:cNvPr id="2" name="Header Placeholder 1"/>
-          <p:cNvSpPr>
-            <a:spLocks noGrp="1"/>
-          </p:cNvSpPr>
-          <p:nvPr>
-            <p:ph type="hdr" sz="quarter"/>
-          </p:nvPr>
-        </p:nvSpPr>
-        <p:spPr>
-          <a:xfrm>
-            <a:off x="0" y="0"/>
-            <a:ext cx="2971800" cy="458788"/>
-          </a:xfrm>
-          <a:prstGeom prst="rect">
-            <a:avLst/>
-          </a:prstGeom>
-        </p:spPr>
-        <p:txBody>
-          <a:bodyPr vert="horz" lIns="91440" tIns="45720" rIns="91440" bIns="45720" rtlCol="0"/>
-          <a:lstStyle>
-            <a:lvl1pPr algn="l">
-              <a:defRPr sz="1200"/>
-            </a:lvl1pPr>
-          </a:lstStyle>
-          <a:p>
-            <a:endParaRPr lang="en-US"/>
-          </a:p>
-        </p:txBody>
-      </p:sp>
-      <p:sp>
-        <p:nvSpPr>
-          <p:cNvPr id="3" name="Date Placeholder 2"/>
-          <p:cNvSpPr>
-            <a:spLocks noGrp="1"/>
-          </p:cNvSpPr>
-          <p:nvPr>
-            <p:ph type="dt" idx="1"/>
-          </p:nvPr>
-        </p:nvSpPr>
-        <p:spPr>
-          <a:xfrm>
-            <a:off x="3884613" y="0"/>
-            <a:ext cx="2971800" cy="458788"/>
-          </a:xfrm>
-          <a:prstGeom prst="rect">
-            <a:avLst/>
-          </a:prstGeom>
-        </p:spPr>
-        <p:txBody>
-          <a:bodyPr vert="horz" lIns="91440" tIns="45720" rIns="91440" bIns="45720" rtlCol="0"/>
-          <a:lstStyle>
-            <a:lvl1pPr algn="r">
-              <a:defRPr sz="1200"/>
-            </a:lvl1pPr>
-          </a:lstStyle>
-          <a:p>
-            <a:fld id="{5282F153-3F37-0F45-9E97-73ACFA13230C}" type="datetimeFigureOut">
-              <a:rPr lang="en-US"/>
-              <a:t>7/23/19</a:t>
-            </a:fld>
-            <a:endParaRPr lang="en-US"/>
-          </a:p>
-        </p:txBody>
-      </p:sp>
-      <p:sp>
-        <p:nvSpPr>
-          <p:cNvPr id="4" name="Slide Image Placeholder 3"/>
-          <p:cNvSpPr>
-            <a:spLocks noGrp="1" noRot="1" noChangeAspect="1"/>
-          </p:cNvSpPr>
-          <p:nvPr>
-            <p:ph type="sldImg" idx="2"/>
-          </p:nvPr>
-        </p:nvSpPr>
-        <p:spPr>
-          <a:xfrm>
-            <a:off x="685800" y="1143000"/>
-            <a:ext cx="5486400" cy="3086100"/>
-          </a:xfrm>
-          <a:prstGeom prst="rect">
-            <a:avLst/>
-          </a:prstGeom>
-          <a:noFill/>
-          <a:ln w="12700">
-            <a:solidFill>
-              <a:prstClr val="black"/>
-            </a:solidFill>
-          </a:ln>
-        </p:spPr>
-        <p:txBody>
-          <a:bodyPr vert="horz" lIns="91440" tIns="45720" rIns="91440" bIns="45720" rtlCol="0" anchor="ctr"/>
-          <a:lstStyle/>
-          <a:p>
-            <a:endParaRPr lang="en-US"/>
-          </a:p>
-        </p:txBody>
-      </p:sp>
-      <p:sp>
-        <p:nvSpPr>
-          <p:cNvPr id="5" name="Notes Placeholder 4"/>
-          <p:cNvSpPr>
-            <a:spLocks noGrp="1"/>
-          </p:cNvSpPr>
-          <p:nvPr>
-            <p:ph type="body" sz="quarter" idx="3"/>
-          </p:nvPr>
-        </p:nvSpPr>
-        <p:spPr>
-          <a:xfrm>
-            <a:off x="685800" y="4400550"/>
-            <a:ext cx="5486400" cy="3600450"/>
-          </a:xfrm>
-          <a:prstGeom prst="rect">
-            <a:avLst/>
-          </a:prstGeom>
-        </p:spPr>
-        <p:txBody>
-          <a:bodyPr vert="horz" lIns="91440" tIns="45720" rIns="91440" bIns="45720" rtlCol="0"/>
-          <a:lstStyle/>
-          <a:p>
-            <a:pPr lvl="0"/>
-            <a:r>
-              <a:rPr lang="en-US"/>
-              <a:t>Click to edit Master text styles</a:t>
-            </a:r>
-          </a:p>
-          <a:p>
-            <a:pPr lvl="1"/>
-            <a:r>
-              <a:rPr lang="en-US"/>
-              <a:t>Second level</a:t>
-            </a:r>
-          </a:p>
-          <a:p>
-            <a:pPr lvl="2"/>
-            <a:r>
-              <a:rPr lang="en-US"/>
-              <a:t>Third level</a:t>
-            </a:r>
-          </a:p>
-          <a:p>
-            <a:pPr lvl="3"/>
-            <a:r>
-              <a:rPr lang="en-US"/>
-              <a:t>Fourth level</a:t>
-            </a:r>
-          </a:p>
-          <a:p>
-            <a:pPr lvl="4"/>
-            <a:r>
-              <a:rPr lang="en-US"/>
-              <a:t>Fifth level</a:t>
-            </a:r>
-          </a:p>
-        </p:txBody>
-      </p:sp>
-      <p:sp>
-        <p:nvSpPr>
-          <p:cNvPr id="6" name="Footer Placeholder 5"/>
-          <p:cNvSpPr>
-            <a:spLocks noGrp="1"/>
-          </p:cNvSpPr>
-          <p:nvPr>
-            <p:ph type="ftr" sz="quarter" idx="4"/>
-          </p:nvPr>
-        </p:nvSpPr>
-        <p:spPr>
-          <a:xfrm>
-            <a:off x="0" y="8685213"/>
-            <a:ext cx="2971800" cy="458787"/>
-          </a:xfrm>
-          <a:prstGeom prst="rect">
-            <a:avLst/>
-          </a:prstGeom>
-        </p:spPr>
-        <p:txBody>
-          <a:bodyPr vert="horz" lIns="91440" tIns="45720" rIns="91440" bIns="45720" rtlCol="0" anchor="b"/>
-          <a:lstStyle>
-            <a:lvl1pPr algn="l">
-              <a:defRPr sz="1200"/>
-            </a:lvl1pPr>
-          </a:lstStyle>
-          <a:p>
-            <a:endParaRPr lang="en-US"/>
-          </a:p>
-        </p:txBody>
-      </p:sp>
-      <p:sp>
-        <p:nvSpPr>
-          <p:cNvPr id="7" name="Slide Number Placeholder 6"/>
-          <p:cNvSpPr>
-            <a:spLocks noGrp="1"/>
-          </p:cNvSpPr>
-          <p:nvPr>
-            <p:ph type="sldNum" sz="quarter" idx="5"/>
-          </p:nvPr>
-        </p:nvSpPr>
-        <p:spPr>
-          <a:xfrm>
-            <a:off x="3884613" y="8685213"/>
-            <a:ext cx="2971800" cy="458787"/>
-          </a:xfrm>
-          <a:prstGeom prst="rect">
-            <a:avLst/>
-          </a:prstGeom>
-        </p:spPr>
-        <p:txBody>
-          <a:bodyPr vert="horz" lIns="91440" tIns="45720" rIns="91440" bIns="45720" rtlCol="0" anchor="b"/>
-          <a:lstStyle>
-            <a:lvl1pPr algn="r">
-              <a:defRPr sz="1200"/>
-            </a:lvl1pPr>
-          </a:lstStyle>
-          <a:p>
-            <a:fld id="{CE5E9CC1-C706-0F49-92D6-E571CC5EEA8F}" type="slidenum">
-              <a:rPr lang="en-US"/>
-              <a:t>‹#›</a:t>
-            </a:fld>
-            <a:endParaRPr lang="en-US"/>
-          </a:p>
-        </p:txBody>
-      </p:sp>
     </p:spTree>
     <p:extLst>
       <p:ext uri="{BB962C8B-B14F-4D97-AF65-F5344CB8AC3E}">
-        <p14:creationId xmlns:p14="http://schemas.microsoft.com/office/powerpoint/2010/main" val="1024086991"/>
+        <p14:creationId xmlns:p14="http://schemas.microsoft.com/office/powerpoint/2010/main" val="765254858"/>
       </p:ext>
     </p:extLst>
   </p:cSld>
@@ -524,7 +305,6 @@
               <a:rPr lang="en-US" dirty="0"/>
               <a:t>Contextualizar: esta aula é diferente das demais — hoje o foco é garantir que todo mundo embarcou, não avançar conteúdo novo.</a:t>
             </a:r>
-            <a:endParaRPr lang="en-US" dirty="0"/>
           </a:p>
         </p:txBody>
       </p:sp>
@@ -612,7 +392,6 @@
               <a:rPr lang="en-US" dirty="0"/>
               <a:t>Pausa proposital: dar tempo real para quem está atrasado resolver com o professor antes de seguir para o desafio.</a:t>
             </a:r>
-            <a:endParaRPr lang="en-US" dirty="0"/>
           </a:p>
         </p:txBody>
       </p:sp>
@@ -700,7 +479,6 @@
               <a:rPr lang="en-US" dirty="0"/>
               <a:t>Enquadrar como convite, não obrigação — reforçar que quem ainda está resolvendo o onboarding não precisa se preocupar com isso agora.</a:t>
             </a:r>
-            <a:endParaRPr lang="en-US" dirty="0"/>
           </a:p>
         </p:txBody>
       </p:sp>
@@ -788,7 +566,6 @@
               <a:rPr lang="en-US" dirty="0"/>
               <a:t>Deixar o desafio no quadro (ou projetado) enquanto os alunos leem as pistas no próximo slide.</a:t>
             </a:r>
-            <a:endParaRPr lang="en-US" dirty="0"/>
           </a:p>
         </p:txBody>
       </p:sp>
@@ -876,7 +653,6 @@
               <a:rPr lang="en-US" dirty="0"/>
               <a:t>Dar 3-4 minutos para a turma tentar sozinha antes de mostrar a dica da tabela.</a:t>
             </a:r>
-            <a:endParaRPr lang="en-US" dirty="0"/>
           </a:p>
         </p:txBody>
       </p:sp>
@@ -964,7 +740,6 @@
               <a:rPr lang="en-US" dirty="0"/>
               <a:t>Convidar alguém da turma a vir preencher o restante da tabela em voz alta antes de revelar a resolução.</a:t>
             </a:r>
-            <a:endParaRPr lang="en-US" dirty="0"/>
           </a:p>
         </p:txBody>
       </p:sp>
@@ -1052,7 +827,6 @@
               <a:rPr lang="en-US" dirty="0"/>
               <a:t>Ana = super-herói, Bruno = palhaço, Caio = pirata. Reforçar que cada passo eliminou uma opção só com as pistas, sem chute.</a:t>
             </a:r>
-            <a:endParaRPr lang="en-US" dirty="0"/>
           </a:p>
         </p:txBody>
       </p:sp>
@@ -1140,7 +914,6 @@
               <a:rPr lang="en-US" dirty="0"/>
               <a:t>Gancho direto para a Aula 03: o que parecia intuição vai virar notação formal.</a:t>
             </a:r>
-            <a:endParaRPr lang="en-US" dirty="0"/>
           </a:p>
         </p:txBody>
       </p:sp>
@@ -1228,7 +1001,6 @@
               <a:rPr lang="en-US" dirty="0"/>
               <a:t>Reforçar visualmente que hoje é uma pausa estratégica, não um desvio do curso.</a:t>
             </a:r>
-            <a:endParaRPr lang="en-US" dirty="0"/>
           </a:p>
         </p:txBody>
       </p:sp>
@@ -1316,7 +1088,6 @@
               <a:rPr lang="en-US" dirty="0"/>
               <a:t>Reservar 2 minutos no início da próxima aula para confirmar que a turma está 100% pronta para o conteúdo novo.</a:t>
             </a:r>
-            <a:endParaRPr lang="en-US" dirty="0"/>
           </a:p>
         </p:txBody>
       </p:sp>
@@ -1404,7 +1175,6 @@
               <a:rPr lang="en-US" dirty="0"/>
               <a:t>Estas referências dão o pano de fundo institucional de por que a busca ativa existe como política, não só como boa vontade do professor.</a:t>
             </a:r>
-            <a:endParaRPr lang="en-US" dirty="0"/>
           </a:p>
         </p:txBody>
       </p:sp>
@@ -1492,7 +1262,6 @@
               <a:rPr lang="en-US" dirty="0"/>
               <a:t>Deixar claro desde já: quem estiver em dia com tudo pode ir direto para o desafio opcional no fim da aula.</a:t>
             </a:r>
-            <a:endParaRPr lang="en-US" dirty="0"/>
           </a:p>
         </p:txBody>
       </p:sp>
@@ -1580,7 +1349,6 @@
               <a:rPr lang="en-US" dirty="0"/>
               <a:t>Estes materiais são de apoio — não é obrigatório assistir tudo antes da próxima aula.</a:t>
             </a:r>
-            <a:endParaRPr lang="en-US" dirty="0"/>
           </a:p>
         </p:txBody>
       </p:sp>
@@ -1668,7 +1436,6 @@
               <a:rPr lang="en-US" dirty="0"/>
               <a:t>Fechar retomando o convite: quem topou o desafio já viu, na prática, o assunto da próxima aula.</a:t>
             </a:r>
-            <a:endParaRPr lang="en-US" dirty="0"/>
           </a:p>
         </p:txBody>
       </p:sp>
@@ -1756,7 +1523,6 @@
               <a:rPr lang="en-US" dirty="0"/>
               <a:t>Enfatizar: busca ativa não é fiscalização, é antecipação de suporte.</a:t>
             </a:r>
-            <a:endParaRPr lang="en-US" dirty="0"/>
           </a:p>
         </p:txBody>
       </p:sp>
@@ -1844,7 +1610,6 @@
               <a:rPr lang="en-US" dirty="0"/>
               <a:t>Pedir exemplos da própria turma: que outras 'buscas ativas' do dia a dia eles já receberam?</a:t>
             </a:r>
-            <a:endParaRPr lang="en-US" dirty="0"/>
           </a:p>
         </p:txBody>
       </p:sp>
@@ -1932,7 +1697,6 @@
               <a:rPr lang="en-US" dirty="0"/>
               <a:t>Este é o recado emocional da aula: reduzir o estigma de ser contatado pela busca ativa.</a:t>
             </a:r>
-            <a:endParaRPr lang="en-US" dirty="0"/>
           </a:p>
         </p:txBody>
       </p:sp>
@@ -2020,7 +1784,6 @@
               <a:rPr lang="en-US" dirty="0"/>
               <a:t>Deixar claro que o diagrama é conceitual, não um dado estatístico real — a ideia é só mostrar a lógica do timing.</a:t>
             </a:r>
-            <a:endParaRPr lang="en-US" dirty="0"/>
           </a:p>
         </p:txBody>
       </p:sp>
@@ -2108,7 +1871,6 @@
               <a:rPr lang="en-US" dirty="0"/>
               <a:t>Deixar explícito o combinado: enquanto o professor confere e contata, o aluno confirma o próprio diagnóstico em paralelo.</a:t>
             </a:r>
-            <a:endParaRPr lang="en-US" dirty="0"/>
           </a:p>
         </p:txBody>
       </p:sp>
@@ -2196,7 +1958,6 @@
               <a:rPr lang="en-US" dirty="0"/>
               <a:t>Python também aparece no curso, mas só para comparação de sintaxe — o setup obrigatório é este aqui.</a:t>
             </a:r>
-            <a:endParaRPr lang="en-US" dirty="0"/>
           </a:p>
         </p:txBody>
       </p:sp>
@@ -2284,7 +2045,6 @@
               <a:rPr lang="en-US" dirty="0"/>
               <a:t>Se alguém ainda tiver dúvida de ementa, este é o momento de perguntar — não depois da prova.</a:t>
             </a:r>
-            <a:endParaRPr lang="en-US" dirty="0"/>
           </a:p>
         </p:txBody>
       </p:sp>
@@ -2357,6 +2117,11 @@
 <file path=ppt/slideMasters/slideMaster1.xml><?xml version="1.0" encoding="utf-8"?>
 <p:sldMaster xmlns:a="http://schemas.openxmlformats.org/drawingml/2006/main" xmlns:r="http://schemas.openxmlformats.org/officeDocument/2006/relationships" xmlns:p="http://schemas.openxmlformats.org/presentationml/2006/main">
   <p:cSld>
+    <p:bg>
+      <p:bgRef idx="1001">
+        <a:schemeClr val="bg1"/>
+      </p:bgRef>
+    </p:bg>
     <p:spTree>
       <p:nvGrpSpPr>
         <p:cNvPr id="1" name=""/>
@@ -2639,6 +2404,7 @@
         <a:solidFill>
           <a:srgbClr val="141B41"/>
         </a:solidFill>
+        <a:effectLst/>
       </p:bgPr>
     </p:bg>
     <p:spTree>
@@ -2705,14 +2471,14 @@
       </p:sp>
       <p:pic>
         <p:nvPicPr>
-          <p:cNvPr id="4" name="Image 0" descr="preencoded.png">    </p:cNvPr>
+          <p:cNvPr id="4" name="Image 0" descr="preencoded.png"/>
           <p:cNvPicPr>
             <a:picLocks noChangeAspect="1"/>
           </p:cNvPicPr>
           <p:nvPr/>
         </p:nvPicPr>
         <p:blipFill>
-          <a:blip r:embed="rId1">
+          <a:blip r:embed="rId3">
             <a:alphaModFix amt="22000"/>
           </a:blip>
           <a:stretch>
@@ -2750,11 +2516,11 @@
           <a:bodyPr wrap="square" lIns="0" tIns="0" rIns="0" bIns="0" rtlCol="0" anchor="ctr"/>
           <a:lstStyle/>
           <a:p>
-            <a:pPr indent="0" marL="0">
-              <a:buNone/>
-            </a:pPr>
-            <a:r>
-              <a:rPr lang="en-US" sz="1400" b="1" spc="300" kern="0" dirty="0">
+            <a:pPr marL="0" indent="0">
+              <a:buNone/>
+            </a:pPr>
+            <a:r>
+              <a:rPr lang="en-US" sz="1400" b="1" kern="0" spc="300" dirty="0">
                 <a:solidFill>
                   <a:srgbClr val="2FE6C7"/>
                 </a:solidFill>
@@ -2789,7 +2555,7 @@
           <a:bodyPr wrap="square" lIns="0" tIns="0" rIns="0" bIns="0" rtlCol="0" anchor="ctr"/>
           <a:lstStyle/>
           <a:p>
-            <a:pPr indent="0" marL="0">
+            <a:pPr marL="0" indent="0">
               <a:buNone/>
             </a:pPr>
             <a:r>
@@ -2828,7 +2594,7 @@
           <a:bodyPr wrap="square" lIns="0" tIns="0" rIns="0" bIns="0" rtlCol="0" anchor="ctr"/>
           <a:lstStyle/>
           <a:p>
-            <a:pPr indent="0" marL="0">
+            <a:pPr marL="0" indent="0">
               <a:buNone/>
             </a:pPr>
             <a:r>
@@ -2867,7 +2633,7 @@
           <a:bodyPr wrap="square" lIns="0" tIns="0" rIns="0" bIns="0" rtlCol="0" anchor="ctr"/>
           <a:lstStyle/>
           <a:p>
-            <a:pPr indent="0" marL="0">
+            <a:pPr marL="0" indent="0">
               <a:buNone/>
             </a:pPr>
             <a:r>
@@ -2906,11 +2672,11 @@
           <a:bodyPr wrap="square" lIns="0" tIns="0" rIns="0" bIns="0" rtlCol="0" anchor="ctr"/>
           <a:lstStyle/>
           <a:p>
-            <a:pPr indent="0" marL="0">
-              <a:buNone/>
-            </a:pPr>
-            <a:r>
-              <a:rPr lang="en-US" sz="1250" b="1" spc="100" kern="0" dirty="0">
+            <a:pPr marL="0" indent="0">
+              <a:buNone/>
+            </a:pPr>
+            <a:r>
+              <a:rPr lang="en-US" sz="1250" b="1" kern="0" spc="100" dirty="0">
                 <a:solidFill>
                   <a:srgbClr val="6F76B0"/>
                 </a:solidFill>
@@ -2940,6 +2706,7 @@
         <a:solidFill>
           <a:srgbClr val="141B41"/>
         </a:solidFill>
+        <a:effectLst/>
       </p:bgPr>
     </p:bg>
     <p:spTree>
@@ -3026,14 +2793,14 @@
       </p:sp>
       <p:pic>
         <p:nvPicPr>
-          <p:cNvPr id="5" name="Image 0" descr="preencoded.png">    </p:cNvPr>
+          <p:cNvPr id="5" name="Image 0" descr="preencoded.png"/>
           <p:cNvPicPr>
             <a:picLocks noChangeAspect="1"/>
           </p:cNvPicPr>
           <p:nvPr/>
         </p:nvPicPr>
         <p:blipFill>
-          <a:blip r:embed="rId1"/>
+          <a:blip r:embed="rId3"/>
           <a:stretch>
             <a:fillRect/>
           </a:stretch>
@@ -3069,11 +2836,11 @@
           <a:bodyPr wrap="square" lIns="0" tIns="0" rIns="0" bIns="0" rtlCol="0" anchor="ctr"/>
           <a:lstStyle/>
           <a:p>
-            <a:pPr indent="0" marL="0">
-              <a:buNone/>
-            </a:pPr>
-            <a:r>
-              <a:rPr lang="en-US" sz="1300" b="1" spc="200" kern="0" dirty="0">
+            <a:pPr marL="0" indent="0">
+              <a:buNone/>
+            </a:pPr>
+            <a:r>
+              <a:rPr lang="en-US" sz="1300" b="1" kern="0" spc="200" dirty="0">
                 <a:solidFill>
                   <a:srgbClr val="2FE6C7"/>
                 </a:solidFill>
@@ -3108,7 +2875,7 @@
           <a:bodyPr wrap="square" lIns="0" tIns="0" rIns="0" bIns="0" rtlCol="0" anchor="ctr"/>
           <a:lstStyle/>
           <a:p>
-            <a:pPr indent="0" marL="0">
+            <a:pPr marL="0" indent="0">
               <a:buNone/>
             </a:pPr>
             <a:r>
@@ -3147,7 +2914,7 @@
           <a:bodyPr wrap="square" lIns="0" tIns="0" rIns="0" bIns="0" rtlCol="0" anchor="ctr"/>
           <a:lstStyle/>
           <a:p>
-            <a:pPr indent="0" marL="0">
+            <a:pPr marL="0" indent="0">
               <a:lnSpc>
                 <a:spcPts val="2400"/>
               </a:lnSpc>
@@ -3189,7 +2956,7 @@
           <a:bodyPr wrap="square" lIns="0" tIns="0" rIns="0" bIns="0" rtlCol="0" anchor="ctr"/>
           <a:lstStyle/>
           <a:p>
-            <a:pPr indent="0" marL="0">
+            <a:pPr marL="0" indent="0">
               <a:buNone/>
             </a:pPr>
             <a:r>
@@ -3223,6 +2990,7 @@
         <a:solidFill>
           <a:srgbClr val="FFFFFF"/>
         </a:solidFill>
+        <a:effectLst/>
       </p:bgPr>
     </p:bg>
     <p:spTree>
@@ -3260,11 +3028,11 @@
           <a:bodyPr wrap="square" lIns="0" tIns="0" rIns="0" bIns="0" rtlCol="0" anchor="ctr"/>
           <a:lstStyle/>
           <a:p>
-            <a:pPr algn="l" indent="0" marL="0">
-              <a:buNone/>
-            </a:pPr>
-            <a:r>
-              <a:rPr lang="en-US" sz="1200" b="1" spc="200" kern="0" dirty="0">
+            <a:pPr marL="0" indent="0" algn="l">
+              <a:buNone/>
+            </a:pPr>
+            <a:r>
+              <a:rPr lang="en-US" sz="1200" b="1" kern="0" spc="200" dirty="0">
                 <a:solidFill>
                   <a:srgbClr val="6C4BC1"/>
                 </a:solidFill>
@@ -3299,7 +3067,7 @@
           <a:bodyPr wrap="square" lIns="0" tIns="0" rIns="0" bIns="0" rtlCol="0" anchor="ctr"/>
           <a:lstStyle/>
           <a:p>
-            <a:pPr algn="ctr" indent="0" marL="0">
+            <a:pPr marL="0" indent="0" algn="ctr">
               <a:buNone/>
             </a:pPr>
             <a:r>
@@ -3339,14 +3107,14 @@
       </p:sp>
       <p:pic>
         <p:nvPicPr>
-          <p:cNvPr id="5" name="Image 0" descr="preencoded.png">    </p:cNvPr>
+          <p:cNvPr id="5" name="Image 0" descr="preencoded.png"/>
           <p:cNvPicPr>
             <a:picLocks noChangeAspect="1"/>
           </p:cNvPicPr>
           <p:nvPr/>
         </p:nvPicPr>
         <p:blipFill>
-          <a:blip r:embed="rId1"/>
+          <a:blip r:embed="rId3"/>
           <a:stretch>
             <a:fillRect/>
           </a:stretch>
@@ -3382,7 +3150,7 @@
           <a:bodyPr wrap="square" lIns="0" tIns="0" rIns="0" bIns="0" rtlCol="0" anchor="ctr"/>
           <a:lstStyle/>
           <a:p>
-            <a:pPr algn="ctr" indent="0" marL="0">
+            <a:pPr marL="0" indent="0" algn="ctr">
               <a:lnSpc>
                 <a:spcPts val="2200"/>
               </a:lnSpc>
@@ -3424,7 +3192,7 @@
           <a:bodyPr wrap="square" lIns="0" tIns="0" rIns="0" bIns="0" rtlCol="0" anchor="ctr"/>
           <a:lstStyle/>
           <a:p>
-            <a:pPr algn="ctr" indent="0" marL="0">
+            <a:pPr marL="0" indent="0" algn="ctr">
               <a:buNone/>
             </a:pPr>
             <a:r>
@@ -3463,7 +3231,7 @@
           <a:bodyPr wrap="square" lIns="0" tIns="0" rIns="0" bIns="0" rtlCol="0" anchor="ctr"/>
           <a:lstStyle/>
           <a:p>
-            <a:pPr algn="r" indent="0" marL="0">
+            <a:pPr marL="0" indent="0" algn="r">
               <a:buNone/>
             </a:pPr>
             <a:r>
@@ -3497,6 +3265,7 @@
         <a:solidFill>
           <a:srgbClr val="141B41"/>
         </a:solidFill>
+        <a:effectLst/>
       </p:bgPr>
     </p:bg>
     <p:spTree>
@@ -3534,11 +3303,11 @@
           <a:bodyPr wrap="square" lIns="0" tIns="0" rIns="0" bIns="0" rtlCol="0" anchor="ctr"/>
           <a:lstStyle/>
           <a:p>
-            <a:pPr algn="l" indent="0" marL="0">
-              <a:buNone/>
-            </a:pPr>
-            <a:r>
-              <a:rPr lang="en-US" sz="1200" b="1" spc="200" kern="0" dirty="0">
+            <a:pPr marL="0" indent="0" algn="l">
+              <a:buNone/>
+            </a:pPr>
+            <a:r>
+              <a:rPr lang="en-US" sz="1200" b="1" kern="0" spc="200" dirty="0">
                 <a:solidFill>
                   <a:srgbClr val="2FE6C7"/>
                 </a:solidFill>
@@ -3573,7 +3342,7 @@
           <a:bodyPr wrap="square" lIns="0" tIns="0" rIns="0" bIns="0" rtlCol="0" anchor="ctr"/>
           <a:lstStyle/>
           <a:p>
-            <a:pPr indent="0" marL="0">
+            <a:pPr marL="0" indent="0">
               <a:buNone/>
             </a:pPr>
             <a:r>
@@ -3612,7 +3381,7 @@
           <a:bodyPr wrap="square" lIns="0" tIns="0" rIns="0" bIns="0" rtlCol="0" anchor="ctr"/>
           <a:lstStyle/>
           <a:p>
-            <a:pPr indent="0" marL="0">
+            <a:pPr marL="0" indent="0">
               <a:lnSpc>
                 <a:spcPts val="2000"/>
               </a:lnSpc>
@@ -3679,7 +3448,7 @@
           <a:bodyPr wrap="square" lIns="0" tIns="0" rIns="0" bIns="0" rtlCol="0" anchor="ctr"/>
           <a:lstStyle/>
           <a:p>
-            <a:pPr algn="ctr" indent="0" marL="0">
+            <a:pPr marL="0" indent="0" algn="ctr">
               <a:buNone/>
             </a:pPr>
             <a:r>
@@ -3718,7 +3487,7 @@
           <a:bodyPr wrap="square" lIns="0" tIns="0" rIns="0" bIns="0" rtlCol="0" anchor="ctr"/>
           <a:lstStyle/>
           <a:p>
-            <a:pPr algn="ctr" indent="0" marL="0">
+            <a:pPr marL="0" indent="0" algn="ctr">
               <a:buNone/>
             </a:pPr>
             <a:r>
@@ -3782,7 +3551,7 @@
           <a:bodyPr wrap="square" lIns="0" tIns="0" rIns="0" bIns="0" rtlCol="0" anchor="ctr"/>
           <a:lstStyle/>
           <a:p>
-            <a:pPr algn="ctr" indent="0" marL="0">
+            <a:pPr marL="0" indent="0" algn="ctr">
               <a:buNone/>
             </a:pPr>
             <a:r>
@@ -3821,7 +3590,7 @@
           <a:bodyPr wrap="square" lIns="0" tIns="0" rIns="0" bIns="0" rtlCol="0" anchor="ctr"/>
           <a:lstStyle/>
           <a:p>
-            <a:pPr algn="ctr" indent="0" marL="0">
+            <a:pPr marL="0" indent="0" algn="ctr">
               <a:buNone/>
             </a:pPr>
             <a:r>
@@ -3885,7 +3654,7 @@
           <a:bodyPr wrap="square" lIns="0" tIns="0" rIns="0" bIns="0" rtlCol="0" anchor="ctr"/>
           <a:lstStyle/>
           <a:p>
-            <a:pPr algn="ctr" indent="0" marL="0">
+            <a:pPr marL="0" indent="0" algn="ctr">
               <a:buNone/>
             </a:pPr>
             <a:r>
@@ -3924,7 +3693,7 @@
           <a:bodyPr wrap="square" lIns="0" tIns="0" rIns="0" bIns="0" rtlCol="0" anchor="ctr"/>
           <a:lstStyle/>
           <a:p>
-            <a:pPr algn="ctr" indent="0" marL="0">
+            <a:pPr marL="0" indent="0" algn="ctr">
               <a:buNone/>
             </a:pPr>
             <a:r>
@@ -3963,11 +3732,11 @@
           <a:bodyPr wrap="square" lIns="0" tIns="0" rIns="0" bIns="0" rtlCol="0" anchor="ctr"/>
           <a:lstStyle/>
           <a:p>
-            <a:pPr indent="0" marL="0">
-              <a:buNone/>
-            </a:pPr>
-            <a:r>
-              <a:rPr lang="en-US" sz="1100" b="1" spc="150" kern="0" dirty="0">
+            <a:pPr marL="0" indent="0">
+              <a:buNone/>
+            </a:pPr>
+            <a:r>
+              <a:rPr lang="en-US" sz="1100" b="1" kern="0" spc="150" dirty="0">
                 <a:solidFill>
                   <a:srgbClr val="8A90C6"/>
                 </a:solidFill>
@@ -4025,217 +3794,7 @@
       </p:sp>
       <p:pic>
         <p:nvPicPr>
-          <p:cNvPr id="17" name="Image 0" descr="preencoded.png">    </p:cNvPr>
-          <p:cNvPicPr>
-            <a:picLocks noChangeAspect="1"/>
-          </p:cNvPicPr>
-          <p:nvPr/>
-        </p:nvPicPr>
-        <p:blipFill>
-          <a:blip r:embed="rId1"/>
-          <a:stretch>
-            <a:fillRect/>
-          </a:stretch>
-        </p:blipFill>
-        <p:spPr>
-          <a:xfrm>
-            <a:off x="978408" y="5276088"/>
-            <a:ext cx="374904" cy="374904"/>
-          </a:xfrm>
-          <a:prstGeom prst="rect">
-            <a:avLst/>
-          </a:prstGeom>
-        </p:spPr>
-      </p:pic>
-      <p:sp>
-        <p:nvSpPr>
-          <p:cNvPr id="18" name="Text 15"/>
-          <p:cNvSpPr/>
-          <p:nvPr/>
-        </p:nvSpPr>
-        <p:spPr>
-          <a:xfrm>
-            <a:off x="1600200" y="4937760"/>
-            <a:ext cx="2194560" cy="1051560"/>
-          </a:xfrm>
-          <a:prstGeom prst="rect">
-            <a:avLst/>
-          </a:prstGeom>
-          <a:noFill/>
-          <a:ln/>
-        </p:spPr>
-        <p:txBody>
-          <a:bodyPr wrap="square" lIns="0" tIns="0" rIns="0" bIns="0" rtlCol="0" anchor="ctr"/>
-          <a:lstStyle/>
-          <a:p>
-            <a:pPr indent="0" marL="0">
-              <a:buNone/>
-            </a:pPr>
-            <a:r>
-              <a:rPr lang="en-US" sz="1550" b="1" dirty="0">
-                <a:solidFill>
-                  <a:srgbClr val="FFFFFF"/>
-                </a:solidFill>
-                <a:latin typeface="Calibri" pitchFamily="34" charset="0"/>
-                <a:ea typeface="Calibri" pitchFamily="34" charset="-122"/>
-                <a:cs typeface="Calibri" pitchFamily="34" charset="-120"/>
-              </a:rPr>
-              <a:t>Pirata</a:t>
-            </a:r>
-            <a:endParaRPr lang="en-US" sz="1550" dirty="0"/>
-          </a:p>
-        </p:txBody>
-      </p:sp>
-      <p:sp>
-        <p:nvSpPr>
-          <p:cNvPr id="19" name="Shape 16"/>
-          <p:cNvSpPr/>
-          <p:nvPr/>
-        </p:nvSpPr>
-        <p:spPr>
-          <a:xfrm>
-            <a:off x="4251960" y="4937760"/>
-            <a:ext cx="3291840" cy="1051560"/>
-          </a:xfrm>
-          <a:prstGeom prst="roundRect">
-            <a:avLst>
-              <a:gd name="adj" fmla="val 8696"/>
-            </a:avLst>
-          </a:prstGeom>
-          <a:solidFill>
-            <a:srgbClr val="232C63"/>
-          </a:solidFill>
-          <a:ln/>
-        </p:spPr>
-      </p:sp>
-      <p:sp>
-        <p:nvSpPr>
-          <p:cNvPr id="20" name="Shape 17"/>
-          <p:cNvSpPr/>
-          <p:nvPr/>
-        </p:nvSpPr>
-        <p:spPr>
-          <a:xfrm>
-            <a:off x="4480560" y="5166360"/>
-            <a:ext cx="594360" cy="594360"/>
-          </a:xfrm>
-          <a:prstGeom prst="ellipse">
-            <a:avLst/>
-          </a:prstGeom>
-          <a:solidFill>
-            <a:srgbClr val="6C4BC1"/>
-          </a:solidFill>
-          <a:ln/>
-        </p:spPr>
-      </p:sp>
-      <p:pic>
-        <p:nvPicPr>
-          <p:cNvPr id="21" name="Image 1" descr="preencoded.png">    </p:cNvPr>
-          <p:cNvPicPr>
-            <a:picLocks noChangeAspect="1"/>
-          </p:cNvPicPr>
-          <p:nvPr/>
-        </p:nvPicPr>
-        <p:blipFill>
-          <a:blip r:embed="rId2"/>
-          <a:stretch>
-            <a:fillRect/>
-          </a:stretch>
-        </p:blipFill>
-        <p:spPr>
-          <a:xfrm>
-            <a:off x="4590288" y="5276088"/>
-            <a:ext cx="374904" cy="374904"/>
-          </a:xfrm>
-          <a:prstGeom prst="rect">
-            <a:avLst/>
-          </a:prstGeom>
-        </p:spPr>
-      </p:pic>
-      <p:sp>
-        <p:nvSpPr>
-          <p:cNvPr id="22" name="Text 18"/>
-          <p:cNvSpPr/>
-          <p:nvPr/>
-        </p:nvSpPr>
-        <p:spPr>
-          <a:xfrm>
-            <a:off x="5212080" y="4937760"/>
-            <a:ext cx="2194560" cy="1051560"/>
-          </a:xfrm>
-          <a:prstGeom prst="rect">
-            <a:avLst/>
-          </a:prstGeom>
-          <a:noFill/>
-          <a:ln/>
-        </p:spPr>
-        <p:txBody>
-          <a:bodyPr wrap="square" lIns="0" tIns="0" rIns="0" bIns="0" rtlCol="0" anchor="ctr"/>
-          <a:lstStyle/>
-          <a:p>
-            <a:pPr indent="0" marL="0">
-              <a:buNone/>
-            </a:pPr>
-            <a:r>
-              <a:rPr lang="en-US" sz="1550" b="1" dirty="0">
-                <a:solidFill>
-                  <a:srgbClr val="FFFFFF"/>
-                </a:solidFill>
-                <a:latin typeface="Calibri" pitchFamily="34" charset="0"/>
-                <a:ea typeface="Calibri" pitchFamily="34" charset="-122"/>
-                <a:cs typeface="Calibri" pitchFamily="34" charset="-120"/>
-              </a:rPr>
-              <a:t>Super-herói</a:t>
-            </a:r>
-            <a:endParaRPr lang="en-US" sz="1550" dirty="0"/>
-          </a:p>
-        </p:txBody>
-      </p:sp>
-      <p:sp>
-        <p:nvSpPr>
-          <p:cNvPr id="23" name="Shape 19"/>
-          <p:cNvSpPr/>
-          <p:nvPr/>
-        </p:nvSpPr>
-        <p:spPr>
-          <a:xfrm>
-            <a:off x="7863840" y="4937760"/>
-            <a:ext cx="3291840" cy="1051560"/>
-          </a:xfrm>
-          <a:prstGeom prst="roundRect">
-            <a:avLst>
-              <a:gd name="adj" fmla="val 8696"/>
-            </a:avLst>
-          </a:prstGeom>
-          <a:solidFill>
-            <a:srgbClr val="232C63"/>
-          </a:solidFill>
-          <a:ln/>
-        </p:spPr>
-      </p:sp>
-      <p:sp>
-        <p:nvSpPr>
-          <p:cNvPr id="24" name="Shape 20"/>
-          <p:cNvSpPr/>
-          <p:nvPr/>
-        </p:nvSpPr>
-        <p:spPr>
-          <a:xfrm>
-            <a:off x="8092440" y="5166360"/>
-            <a:ext cx="594360" cy="594360"/>
-          </a:xfrm>
-          <a:prstGeom prst="ellipse">
-            <a:avLst/>
-          </a:prstGeom>
-          <a:solidFill>
-            <a:srgbClr val="6C4BC1"/>
-          </a:solidFill>
-          <a:ln/>
-        </p:spPr>
-      </p:sp>
-      <p:pic>
-        <p:nvPicPr>
-          <p:cNvPr id="25" name="Image 2" descr="preencoded.png">    </p:cNvPr>
+          <p:cNvPr id="17" name="Image 0" descr="preencoded.png"/>
           <p:cNvPicPr>
             <a:picLocks noChangeAspect="1"/>
           </p:cNvPicPr>
@@ -4249,6 +3808,216 @@
         </p:blipFill>
         <p:spPr>
           <a:xfrm>
+            <a:off x="978408" y="5276088"/>
+            <a:ext cx="374904" cy="374904"/>
+          </a:xfrm>
+          <a:prstGeom prst="rect">
+            <a:avLst/>
+          </a:prstGeom>
+        </p:spPr>
+      </p:pic>
+      <p:sp>
+        <p:nvSpPr>
+          <p:cNvPr id="18" name="Text 15"/>
+          <p:cNvSpPr/>
+          <p:nvPr/>
+        </p:nvSpPr>
+        <p:spPr>
+          <a:xfrm>
+            <a:off x="1600200" y="4937760"/>
+            <a:ext cx="2194560" cy="1051560"/>
+          </a:xfrm>
+          <a:prstGeom prst="rect">
+            <a:avLst/>
+          </a:prstGeom>
+          <a:noFill/>
+          <a:ln/>
+        </p:spPr>
+        <p:txBody>
+          <a:bodyPr wrap="square" lIns="0" tIns="0" rIns="0" bIns="0" rtlCol="0" anchor="ctr"/>
+          <a:lstStyle/>
+          <a:p>
+            <a:pPr marL="0" indent="0">
+              <a:buNone/>
+            </a:pPr>
+            <a:r>
+              <a:rPr lang="en-US" sz="1550" b="1" dirty="0">
+                <a:solidFill>
+                  <a:srgbClr val="FFFFFF"/>
+                </a:solidFill>
+                <a:latin typeface="Calibri" pitchFamily="34" charset="0"/>
+                <a:ea typeface="Calibri" pitchFamily="34" charset="-122"/>
+                <a:cs typeface="Calibri" pitchFamily="34" charset="-120"/>
+              </a:rPr>
+              <a:t>Pirata</a:t>
+            </a:r>
+            <a:endParaRPr lang="en-US" sz="1550" dirty="0"/>
+          </a:p>
+        </p:txBody>
+      </p:sp>
+      <p:sp>
+        <p:nvSpPr>
+          <p:cNvPr id="19" name="Shape 16"/>
+          <p:cNvSpPr/>
+          <p:nvPr/>
+        </p:nvSpPr>
+        <p:spPr>
+          <a:xfrm>
+            <a:off x="4251960" y="4937760"/>
+            <a:ext cx="3291840" cy="1051560"/>
+          </a:xfrm>
+          <a:prstGeom prst="roundRect">
+            <a:avLst>
+              <a:gd name="adj" fmla="val 8696"/>
+            </a:avLst>
+          </a:prstGeom>
+          <a:solidFill>
+            <a:srgbClr val="232C63"/>
+          </a:solidFill>
+          <a:ln/>
+        </p:spPr>
+      </p:sp>
+      <p:sp>
+        <p:nvSpPr>
+          <p:cNvPr id="20" name="Shape 17"/>
+          <p:cNvSpPr/>
+          <p:nvPr/>
+        </p:nvSpPr>
+        <p:spPr>
+          <a:xfrm>
+            <a:off x="4480560" y="5166360"/>
+            <a:ext cx="594360" cy="594360"/>
+          </a:xfrm>
+          <a:prstGeom prst="ellipse">
+            <a:avLst/>
+          </a:prstGeom>
+          <a:solidFill>
+            <a:srgbClr val="6C4BC1"/>
+          </a:solidFill>
+          <a:ln/>
+        </p:spPr>
+      </p:sp>
+      <p:pic>
+        <p:nvPicPr>
+          <p:cNvPr id="21" name="Image 1" descr="preencoded.png"/>
+          <p:cNvPicPr>
+            <a:picLocks noChangeAspect="1"/>
+          </p:cNvPicPr>
+          <p:nvPr/>
+        </p:nvPicPr>
+        <p:blipFill>
+          <a:blip r:embed="rId4"/>
+          <a:stretch>
+            <a:fillRect/>
+          </a:stretch>
+        </p:blipFill>
+        <p:spPr>
+          <a:xfrm>
+            <a:off x="4590288" y="5276088"/>
+            <a:ext cx="374904" cy="374904"/>
+          </a:xfrm>
+          <a:prstGeom prst="rect">
+            <a:avLst/>
+          </a:prstGeom>
+        </p:spPr>
+      </p:pic>
+      <p:sp>
+        <p:nvSpPr>
+          <p:cNvPr id="22" name="Text 18"/>
+          <p:cNvSpPr/>
+          <p:nvPr/>
+        </p:nvSpPr>
+        <p:spPr>
+          <a:xfrm>
+            <a:off x="5212080" y="4937760"/>
+            <a:ext cx="2194560" cy="1051560"/>
+          </a:xfrm>
+          <a:prstGeom prst="rect">
+            <a:avLst/>
+          </a:prstGeom>
+          <a:noFill/>
+          <a:ln/>
+        </p:spPr>
+        <p:txBody>
+          <a:bodyPr wrap="square" lIns="0" tIns="0" rIns="0" bIns="0" rtlCol="0" anchor="ctr"/>
+          <a:lstStyle/>
+          <a:p>
+            <a:pPr marL="0" indent="0">
+              <a:buNone/>
+            </a:pPr>
+            <a:r>
+              <a:rPr lang="en-US" sz="1550" b="1" dirty="0">
+                <a:solidFill>
+                  <a:srgbClr val="FFFFFF"/>
+                </a:solidFill>
+                <a:latin typeface="Calibri" pitchFamily="34" charset="0"/>
+                <a:ea typeface="Calibri" pitchFamily="34" charset="-122"/>
+                <a:cs typeface="Calibri" pitchFamily="34" charset="-120"/>
+              </a:rPr>
+              <a:t>Super-herói</a:t>
+            </a:r>
+            <a:endParaRPr lang="en-US" sz="1550" dirty="0"/>
+          </a:p>
+        </p:txBody>
+      </p:sp>
+      <p:sp>
+        <p:nvSpPr>
+          <p:cNvPr id="23" name="Shape 19"/>
+          <p:cNvSpPr/>
+          <p:nvPr/>
+        </p:nvSpPr>
+        <p:spPr>
+          <a:xfrm>
+            <a:off x="7863840" y="4937760"/>
+            <a:ext cx="3291840" cy="1051560"/>
+          </a:xfrm>
+          <a:prstGeom prst="roundRect">
+            <a:avLst>
+              <a:gd name="adj" fmla="val 8696"/>
+            </a:avLst>
+          </a:prstGeom>
+          <a:solidFill>
+            <a:srgbClr val="232C63"/>
+          </a:solidFill>
+          <a:ln/>
+        </p:spPr>
+      </p:sp>
+      <p:sp>
+        <p:nvSpPr>
+          <p:cNvPr id="24" name="Shape 20"/>
+          <p:cNvSpPr/>
+          <p:nvPr/>
+        </p:nvSpPr>
+        <p:spPr>
+          <a:xfrm>
+            <a:off x="8092440" y="5166360"/>
+            <a:ext cx="594360" cy="594360"/>
+          </a:xfrm>
+          <a:prstGeom prst="ellipse">
+            <a:avLst/>
+          </a:prstGeom>
+          <a:solidFill>
+            <a:srgbClr val="6C4BC1"/>
+          </a:solidFill>
+          <a:ln/>
+        </p:spPr>
+      </p:sp>
+      <p:pic>
+        <p:nvPicPr>
+          <p:cNvPr id="25" name="Image 2" descr="preencoded.png"/>
+          <p:cNvPicPr>
+            <a:picLocks noChangeAspect="1"/>
+          </p:cNvPicPr>
+          <p:nvPr/>
+        </p:nvPicPr>
+        <p:blipFill>
+          <a:blip r:embed="rId5"/>
+          <a:stretch>
+            <a:fillRect/>
+          </a:stretch>
+        </p:blipFill>
+        <p:spPr>
+          <a:xfrm>
             <a:off x="8202168" y="5276088"/>
             <a:ext cx="374904" cy="374904"/>
           </a:xfrm>
@@ -4278,7 +4047,7 @@
           <a:bodyPr wrap="square" lIns="0" tIns="0" rIns="0" bIns="0" rtlCol="0" anchor="ctr"/>
           <a:lstStyle/>
           <a:p>
-            <a:pPr indent="0" marL="0">
+            <a:pPr marL="0" indent="0">
               <a:buNone/>
             </a:pPr>
             <a:r>
@@ -4317,7 +4086,7 @@
           <a:bodyPr wrap="square" lIns="0" tIns="0" rIns="0" bIns="0" rtlCol="0" anchor="ctr"/>
           <a:lstStyle/>
           <a:p>
-            <a:pPr algn="r" indent="0" marL="0">
+            <a:pPr marL="0" indent="0" algn="r">
               <a:buNone/>
             </a:pPr>
             <a:r>
@@ -4351,6 +4120,7 @@
         <a:solidFill>
           <a:srgbClr val="141B41"/>
         </a:solidFill>
+        <a:effectLst/>
       </p:bgPr>
     </p:bg>
     <p:spTree>
@@ -4388,11 +4158,11 @@
           <a:bodyPr wrap="square" lIns="0" tIns="0" rIns="0" bIns="0" rtlCol="0" anchor="ctr"/>
           <a:lstStyle/>
           <a:p>
-            <a:pPr algn="l" indent="0" marL="0">
-              <a:buNone/>
-            </a:pPr>
-            <a:r>
-              <a:rPr lang="en-US" sz="1200" b="1" spc="200" kern="0" dirty="0">
+            <a:pPr marL="0" indent="0" algn="l">
+              <a:buNone/>
+            </a:pPr>
+            <a:r>
+              <a:rPr lang="en-US" sz="1200" b="1" kern="0" spc="200" dirty="0">
                 <a:solidFill>
                   <a:srgbClr val="2FE6C7"/>
                 </a:solidFill>
@@ -4427,7 +4197,7 @@
           <a:bodyPr wrap="square" lIns="0" tIns="0" rIns="0" bIns="0" rtlCol="0" anchor="ctr"/>
           <a:lstStyle/>
           <a:p>
-            <a:pPr indent="0" marL="0">
+            <a:pPr marL="0" indent="0">
               <a:buNone/>
             </a:pPr>
             <a:r>
@@ -4466,7 +4236,7 @@
           <a:bodyPr wrap="square" lIns="0" tIns="0" rIns="0" bIns="0" rtlCol="0" anchor="ctr"/>
           <a:lstStyle/>
           <a:p>
-            <a:pPr indent="0" marL="0">
+            <a:pPr marL="0" indent="0">
               <a:buNone/>
             </a:pPr>
             <a:r>
@@ -4547,7 +4317,7 @@
           <a:bodyPr wrap="square" lIns="0" tIns="0" rIns="0" bIns="0" rtlCol="0" anchor="ctr"/>
           <a:lstStyle/>
           <a:p>
-            <a:pPr algn="ctr" indent="0" marL="0">
+            <a:pPr marL="0" indent="0" algn="ctr">
               <a:buNone/>
             </a:pPr>
             <a:r>
@@ -4567,295 +4337,7 @@
       </p:sp>
       <p:pic>
         <p:nvPicPr>
-          <p:cNvPr id="8" name="Image 0" descr="preencoded.png">    </p:cNvPr>
-          <p:cNvPicPr>
-            <a:picLocks noChangeAspect="1"/>
-          </p:cNvPicPr>
-          <p:nvPr/>
-        </p:nvPicPr>
-        <p:blipFill>
-          <a:blip r:embed="rId1"/>
-          <a:stretch>
-            <a:fillRect/>
-          </a:stretch>
-        </p:blipFill>
-        <p:spPr>
-          <a:xfrm>
-            <a:off x="10241280" y="2697480"/>
-            <a:ext cx="320040" cy="320040"/>
-          </a:xfrm>
-          <a:prstGeom prst="rect">
-            <a:avLst/>
-          </a:prstGeom>
-        </p:spPr>
-      </p:pic>
-      <p:sp>
-        <p:nvSpPr>
-          <p:cNvPr id="9" name="Text 6"/>
-          <p:cNvSpPr/>
-          <p:nvPr/>
-        </p:nvSpPr>
-        <p:spPr>
-          <a:xfrm>
-            <a:off x="1691640" y="2331720"/>
-            <a:ext cx="8321040" cy="1051560"/>
-          </a:xfrm>
-          <a:prstGeom prst="rect">
-            <a:avLst/>
-          </a:prstGeom>
-          <a:noFill/>
-          <a:ln/>
-        </p:spPr>
-        <p:txBody>
-          <a:bodyPr wrap="square" lIns="0" tIns="0" rIns="0" bIns="0" rtlCol="0" anchor="ctr"/>
-          <a:lstStyle/>
-          <a:p>
-            <a:pPr indent="0" marL="0">
-              <a:buNone/>
-            </a:pPr>
-            <a:r>
-              <a:rPr lang="en-US" sz="1600" dirty="0">
-                <a:solidFill>
-                  <a:srgbClr val="FFFFFF"/>
-                </a:solidFill>
-                <a:latin typeface="Calibri" pitchFamily="34" charset="0"/>
-                <a:ea typeface="Calibri" pitchFamily="34" charset="-122"/>
-                <a:cs typeface="Calibri" pitchFamily="34" charset="-120"/>
-              </a:rPr>
-              <a:t>Ana não estava vestida de pirata.</a:t>
-            </a:r>
-            <a:endParaRPr lang="en-US" sz="1600" dirty="0"/>
-          </a:p>
-        </p:txBody>
-      </p:sp>
-      <p:sp>
-        <p:nvSpPr>
-          <p:cNvPr id="10" name="Shape 7"/>
-          <p:cNvSpPr/>
-          <p:nvPr/>
-        </p:nvSpPr>
-        <p:spPr>
-          <a:xfrm>
-            <a:off x="640080" y="3593592"/>
-            <a:ext cx="10881360" cy="1051560"/>
-          </a:xfrm>
-          <a:prstGeom prst="roundRect">
-            <a:avLst>
-              <a:gd name="adj" fmla="val 10435"/>
-            </a:avLst>
-          </a:prstGeom>
-          <a:solidFill>
-            <a:srgbClr val="232C63"/>
-          </a:solidFill>
-          <a:ln/>
-        </p:spPr>
-      </p:sp>
-      <p:sp>
-        <p:nvSpPr>
-          <p:cNvPr id="11" name="Shape 8"/>
-          <p:cNvSpPr/>
-          <p:nvPr/>
-        </p:nvSpPr>
-        <p:spPr>
-          <a:xfrm>
-            <a:off x="896112" y="3849624"/>
-            <a:ext cx="548640" cy="548640"/>
-          </a:xfrm>
-          <a:prstGeom prst="ellipse">
-            <a:avLst/>
-          </a:prstGeom>
-          <a:solidFill>
-            <a:srgbClr val="2FE6C7"/>
-          </a:solidFill>
-          <a:ln/>
-        </p:spPr>
-      </p:sp>
-      <p:sp>
-        <p:nvSpPr>
-          <p:cNvPr id="12" name="Text 9"/>
-          <p:cNvSpPr/>
-          <p:nvPr/>
-        </p:nvSpPr>
-        <p:spPr>
-          <a:xfrm>
-            <a:off x="896112" y="3849624"/>
-            <a:ext cx="548640" cy="548640"/>
-          </a:xfrm>
-          <a:prstGeom prst="rect">
-            <a:avLst/>
-          </a:prstGeom>
-          <a:noFill/>
-          <a:ln/>
-        </p:spPr>
-        <p:txBody>
-          <a:bodyPr wrap="square" lIns="0" tIns="0" rIns="0" bIns="0" rtlCol="0" anchor="ctr"/>
-          <a:lstStyle/>
-          <a:p>
-            <a:pPr algn="ctr" indent="0" marL="0">
-              <a:buNone/>
-            </a:pPr>
-            <a:r>
-              <a:rPr lang="en-US" sz="2000" b="1" dirty="0">
-                <a:solidFill>
-                  <a:srgbClr val="141B41"/>
-                </a:solidFill>
-                <a:latin typeface="Cambria" pitchFamily="34" charset="0"/>
-                <a:ea typeface="Cambria" pitchFamily="34" charset="-122"/>
-                <a:cs typeface="Cambria" pitchFamily="34" charset="-120"/>
-              </a:rPr>
-              <a:t>2</a:t>
-            </a:r>
-            <a:endParaRPr lang="en-US" sz="2000" dirty="0"/>
-          </a:p>
-        </p:txBody>
-      </p:sp>
-      <p:pic>
-        <p:nvPicPr>
-          <p:cNvPr id="13" name="Image 1" descr="preencoded.png">    </p:cNvPr>
-          <p:cNvPicPr>
-            <a:picLocks noChangeAspect="1"/>
-          </p:cNvPicPr>
-          <p:nvPr/>
-        </p:nvPicPr>
-        <p:blipFill>
-          <a:blip r:embed="rId2"/>
-          <a:stretch>
-            <a:fillRect/>
-          </a:stretch>
-        </p:blipFill>
-        <p:spPr>
-          <a:xfrm>
-            <a:off x="10241280" y="3959352"/>
-            <a:ext cx="320040" cy="320040"/>
-          </a:xfrm>
-          <a:prstGeom prst="rect">
-            <a:avLst/>
-          </a:prstGeom>
-        </p:spPr>
-      </p:pic>
-      <p:sp>
-        <p:nvSpPr>
-          <p:cNvPr id="14" name="Text 10"/>
-          <p:cNvSpPr/>
-          <p:nvPr/>
-        </p:nvSpPr>
-        <p:spPr>
-          <a:xfrm>
-            <a:off x="1691640" y="3593592"/>
-            <a:ext cx="8321040" cy="1051560"/>
-          </a:xfrm>
-          <a:prstGeom prst="rect">
-            <a:avLst/>
-          </a:prstGeom>
-          <a:noFill/>
-          <a:ln/>
-        </p:spPr>
-        <p:txBody>
-          <a:bodyPr wrap="square" lIns="0" tIns="0" rIns="0" bIns="0" rtlCol="0" anchor="ctr"/>
-          <a:lstStyle/>
-          <a:p>
-            <a:pPr indent="0" marL="0">
-              <a:buNone/>
-            </a:pPr>
-            <a:r>
-              <a:rPr lang="en-US" sz="1600" dirty="0">
-                <a:solidFill>
-                  <a:srgbClr val="FFFFFF"/>
-                </a:solidFill>
-                <a:latin typeface="Calibri" pitchFamily="34" charset="0"/>
-                <a:ea typeface="Calibri" pitchFamily="34" charset="-122"/>
-                <a:cs typeface="Calibri" pitchFamily="34" charset="-120"/>
-              </a:rPr>
-              <a:t>Quem estava de super-herói não é Bruno.</a:t>
-            </a:r>
-            <a:endParaRPr lang="en-US" sz="1600" dirty="0"/>
-          </a:p>
-        </p:txBody>
-      </p:sp>
-      <p:sp>
-        <p:nvSpPr>
-          <p:cNvPr id="15" name="Shape 11"/>
-          <p:cNvSpPr/>
-          <p:nvPr/>
-        </p:nvSpPr>
-        <p:spPr>
-          <a:xfrm>
-            <a:off x="640080" y="4855464"/>
-            <a:ext cx="10881360" cy="1051560"/>
-          </a:xfrm>
-          <a:prstGeom prst="roundRect">
-            <a:avLst>
-              <a:gd name="adj" fmla="val 10435"/>
-            </a:avLst>
-          </a:prstGeom>
-          <a:solidFill>
-            <a:srgbClr val="232C63"/>
-          </a:solidFill>
-          <a:ln/>
-        </p:spPr>
-      </p:sp>
-      <p:sp>
-        <p:nvSpPr>
-          <p:cNvPr id="16" name="Shape 12"/>
-          <p:cNvSpPr/>
-          <p:nvPr/>
-        </p:nvSpPr>
-        <p:spPr>
-          <a:xfrm>
-            <a:off x="896112" y="5111496"/>
-            <a:ext cx="548640" cy="548640"/>
-          </a:xfrm>
-          <a:prstGeom prst="ellipse">
-            <a:avLst/>
-          </a:prstGeom>
-          <a:solidFill>
-            <a:srgbClr val="2FE6C7"/>
-          </a:solidFill>
-          <a:ln/>
-        </p:spPr>
-      </p:sp>
-      <p:sp>
-        <p:nvSpPr>
-          <p:cNvPr id="17" name="Text 13"/>
-          <p:cNvSpPr/>
-          <p:nvPr/>
-        </p:nvSpPr>
-        <p:spPr>
-          <a:xfrm>
-            <a:off x="896112" y="5111496"/>
-            <a:ext cx="548640" cy="548640"/>
-          </a:xfrm>
-          <a:prstGeom prst="rect">
-            <a:avLst/>
-          </a:prstGeom>
-          <a:noFill/>
-          <a:ln/>
-        </p:spPr>
-        <p:txBody>
-          <a:bodyPr wrap="square" lIns="0" tIns="0" rIns="0" bIns="0" rtlCol="0" anchor="ctr"/>
-          <a:lstStyle/>
-          <a:p>
-            <a:pPr algn="ctr" indent="0" marL="0">
-              <a:buNone/>
-            </a:pPr>
-            <a:r>
-              <a:rPr lang="en-US" sz="2000" b="1" dirty="0">
-                <a:solidFill>
-                  <a:srgbClr val="141B41"/>
-                </a:solidFill>
-                <a:latin typeface="Cambria" pitchFamily="34" charset="0"/>
-                <a:ea typeface="Cambria" pitchFamily="34" charset="-122"/>
-                <a:cs typeface="Cambria" pitchFamily="34" charset="-120"/>
-              </a:rPr>
-              <a:t>3</a:t>
-            </a:r>
-            <a:endParaRPr lang="en-US" sz="2000" dirty="0"/>
-          </a:p>
-        </p:txBody>
-      </p:sp>
-      <p:pic>
-        <p:nvPicPr>
-          <p:cNvPr id="18" name="Image 2" descr="preencoded.png">    </p:cNvPr>
+          <p:cNvPr id="8" name="Image 0" descr="preencoded.png"/>
           <p:cNvPicPr>
             <a:picLocks noChangeAspect="1"/>
           </p:cNvPicPr>
@@ -4869,6 +4351,294 @@
         </p:blipFill>
         <p:spPr>
           <a:xfrm>
+            <a:off x="10241280" y="2697480"/>
+            <a:ext cx="320040" cy="320040"/>
+          </a:xfrm>
+          <a:prstGeom prst="rect">
+            <a:avLst/>
+          </a:prstGeom>
+        </p:spPr>
+      </p:pic>
+      <p:sp>
+        <p:nvSpPr>
+          <p:cNvPr id="9" name="Text 6"/>
+          <p:cNvSpPr/>
+          <p:nvPr/>
+        </p:nvSpPr>
+        <p:spPr>
+          <a:xfrm>
+            <a:off x="1691640" y="2331720"/>
+            <a:ext cx="8321040" cy="1051560"/>
+          </a:xfrm>
+          <a:prstGeom prst="rect">
+            <a:avLst/>
+          </a:prstGeom>
+          <a:noFill/>
+          <a:ln/>
+        </p:spPr>
+        <p:txBody>
+          <a:bodyPr wrap="square" lIns="0" tIns="0" rIns="0" bIns="0" rtlCol="0" anchor="ctr"/>
+          <a:lstStyle/>
+          <a:p>
+            <a:pPr marL="0" indent="0">
+              <a:buNone/>
+            </a:pPr>
+            <a:r>
+              <a:rPr lang="en-US" sz="1600" dirty="0">
+                <a:solidFill>
+                  <a:srgbClr val="FFFFFF"/>
+                </a:solidFill>
+                <a:latin typeface="Calibri" pitchFamily="34" charset="0"/>
+                <a:ea typeface="Calibri" pitchFamily="34" charset="-122"/>
+                <a:cs typeface="Calibri" pitchFamily="34" charset="-120"/>
+              </a:rPr>
+              <a:t>Ana não estava vestida de pirata.</a:t>
+            </a:r>
+            <a:endParaRPr lang="en-US" sz="1600" dirty="0"/>
+          </a:p>
+        </p:txBody>
+      </p:sp>
+      <p:sp>
+        <p:nvSpPr>
+          <p:cNvPr id="10" name="Shape 7"/>
+          <p:cNvSpPr/>
+          <p:nvPr/>
+        </p:nvSpPr>
+        <p:spPr>
+          <a:xfrm>
+            <a:off x="640080" y="3593592"/>
+            <a:ext cx="10881360" cy="1051560"/>
+          </a:xfrm>
+          <a:prstGeom prst="roundRect">
+            <a:avLst>
+              <a:gd name="adj" fmla="val 10435"/>
+            </a:avLst>
+          </a:prstGeom>
+          <a:solidFill>
+            <a:srgbClr val="232C63"/>
+          </a:solidFill>
+          <a:ln/>
+        </p:spPr>
+      </p:sp>
+      <p:sp>
+        <p:nvSpPr>
+          <p:cNvPr id="11" name="Shape 8"/>
+          <p:cNvSpPr/>
+          <p:nvPr/>
+        </p:nvSpPr>
+        <p:spPr>
+          <a:xfrm>
+            <a:off x="896112" y="3849624"/>
+            <a:ext cx="548640" cy="548640"/>
+          </a:xfrm>
+          <a:prstGeom prst="ellipse">
+            <a:avLst/>
+          </a:prstGeom>
+          <a:solidFill>
+            <a:srgbClr val="2FE6C7"/>
+          </a:solidFill>
+          <a:ln/>
+        </p:spPr>
+      </p:sp>
+      <p:sp>
+        <p:nvSpPr>
+          <p:cNvPr id="12" name="Text 9"/>
+          <p:cNvSpPr/>
+          <p:nvPr/>
+        </p:nvSpPr>
+        <p:spPr>
+          <a:xfrm>
+            <a:off x="896112" y="3849624"/>
+            <a:ext cx="548640" cy="548640"/>
+          </a:xfrm>
+          <a:prstGeom prst="rect">
+            <a:avLst/>
+          </a:prstGeom>
+          <a:noFill/>
+          <a:ln/>
+        </p:spPr>
+        <p:txBody>
+          <a:bodyPr wrap="square" lIns="0" tIns="0" rIns="0" bIns="0" rtlCol="0" anchor="ctr"/>
+          <a:lstStyle/>
+          <a:p>
+            <a:pPr marL="0" indent="0" algn="ctr">
+              <a:buNone/>
+            </a:pPr>
+            <a:r>
+              <a:rPr lang="en-US" sz="2000" b="1" dirty="0">
+                <a:solidFill>
+                  <a:srgbClr val="141B41"/>
+                </a:solidFill>
+                <a:latin typeface="Cambria" pitchFamily="34" charset="0"/>
+                <a:ea typeface="Cambria" pitchFamily="34" charset="-122"/>
+                <a:cs typeface="Cambria" pitchFamily="34" charset="-120"/>
+              </a:rPr>
+              <a:t>2</a:t>
+            </a:r>
+            <a:endParaRPr lang="en-US" sz="2000" dirty="0"/>
+          </a:p>
+        </p:txBody>
+      </p:sp>
+      <p:pic>
+        <p:nvPicPr>
+          <p:cNvPr id="13" name="Image 1" descr="preencoded.png"/>
+          <p:cNvPicPr>
+            <a:picLocks noChangeAspect="1"/>
+          </p:cNvPicPr>
+          <p:nvPr/>
+        </p:nvPicPr>
+        <p:blipFill>
+          <a:blip r:embed="rId3"/>
+          <a:stretch>
+            <a:fillRect/>
+          </a:stretch>
+        </p:blipFill>
+        <p:spPr>
+          <a:xfrm>
+            <a:off x="10241280" y="3959352"/>
+            <a:ext cx="320040" cy="320040"/>
+          </a:xfrm>
+          <a:prstGeom prst="rect">
+            <a:avLst/>
+          </a:prstGeom>
+        </p:spPr>
+      </p:pic>
+      <p:sp>
+        <p:nvSpPr>
+          <p:cNvPr id="14" name="Text 10"/>
+          <p:cNvSpPr/>
+          <p:nvPr/>
+        </p:nvSpPr>
+        <p:spPr>
+          <a:xfrm>
+            <a:off x="1691640" y="3593592"/>
+            <a:ext cx="8321040" cy="1051560"/>
+          </a:xfrm>
+          <a:prstGeom prst="rect">
+            <a:avLst/>
+          </a:prstGeom>
+          <a:noFill/>
+          <a:ln/>
+        </p:spPr>
+        <p:txBody>
+          <a:bodyPr wrap="square" lIns="0" tIns="0" rIns="0" bIns="0" rtlCol="0" anchor="ctr"/>
+          <a:lstStyle/>
+          <a:p>
+            <a:pPr marL="0" indent="0">
+              <a:buNone/>
+            </a:pPr>
+            <a:r>
+              <a:rPr lang="en-US" sz="1600" dirty="0">
+                <a:solidFill>
+                  <a:srgbClr val="FFFFFF"/>
+                </a:solidFill>
+                <a:latin typeface="Calibri" pitchFamily="34" charset="0"/>
+                <a:ea typeface="Calibri" pitchFamily="34" charset="-122"/>
+                <a:cs typeface="Calibri" pitchFamily="34" charset="-120"/>
+              </a:rPr>
+              <a:t>Quem estava de super-herói não é Bruno.</a:t>
+            </a:r>
+            <a:endParaRPr lang="en-US" sz="1600" dirty="0"/>
+          </a:p>
+        </p:txBody>
+      </p:sp>
+      <p:sp>
+        <p:nvSpPr>
+          <p:cNvPr id="15" name="Shape 11"/>
+          <p:cNvSpPr/>
+          <p:nvPr/>
+        </p:nvSpPr>
+        <p:spPr>
+          <a:xfrm>
+            <a:off x="640080" y="4855464"/>
+            <a:ext cx="10881360" cy="1051560"/>
+          </a:xfrm>
+          <a:prstGeom prst="roundRect">
+            <a:avLst>
+              <a:gd name="adj" fmla="val 10435"/>
+            </a:avLst>
+          </a:prstGeom>
+          <a:solidFill>
+            <a:srgbClr val="232C63"/>
+          </a:solidFill>
+          <a:ln/>
+        </p:spPr>
+      </p:sp>
+      <p:sp>
+        <p:nvSpPr>
+          <p:cNvPr id="16" name="Shape 12"/>
+          <p:cNvSpPr/>
+          <p:nvPr/>
+        </p:nvSpPr>
+        <p:spPr>
+          <a:xfrm>
+            <a:off x="896112" y="5111496"/>
+            <a:ext cx="548640" cy="548640"/>
+          </a:xfrm>
+          <a:prstGeom prst="ellipse">
+            <a:avLst/>
+          </a:prstGeom>
+          <a:solidFill>
+            <a:srgbClr val="2FE6C7"/>
+          </a:solidFill>
+          <a:ln/>
+        </p:spPr>
+      </p:sp>
+      <p:sp>
+        <p:nvSpPr>
+          <p:cNvPr id="17" name="Text 13"/>
+          <p:cNvSpPr/>
+          <p:nvPr/>
+        </p:nvSpPr>
+        <p:spPr>
+          <a:xfrm>
+            <a:off x="896112" y="5111496"/>
+            <a:ext cx="548640" cy="548640"/>
+          </a:xfrm>
+          <a:prstGeom prst="rect">
+            <a:avLst/>
+          </a:prstGeom>
+          <a:noFill/>
+          <a:ln/>
+        </p:spPr>
+        <p:txBody>
+          <a:bodyPr wrap="square" lIns="0" tIns="0" rIns="0" bIns="0" rtlCol="0" anchor="ctr"/>
+          <a:lstStyle/>
+          <a:p>
+            <a:pPr marL="0" indent="0" algn="ctr">
+              <a:buNone/>
+            </a:pPr>
+            <a:r>
+              <a:rPr lang="en-US" sz="2000" b="1" dirty="0">
+                <a:solidFill>
+                  <a:srgbClr val="141B41"/>
+                </a:solidFill>
+                <a:latin typeface="Cambria" pitchFamily="34" charset="0"/>
+                <a:ea typeface="Cambria" pitchFamily="34" charset="-122"/>
+                <a:cs typeface="Cambria" pitchFamily="34" charset="-120"/>
+              </a:rPr>
+              <a:t>3</a:t>
+            </a:r>
+            <a:endParaRPr lang="en-US" sz="2000" dirty="0"/>
+          </a:p>
+        </p:txBody>
+      </p:sp>
+      <p:pic>
+        <p:nvPicPr>
+          <p:cNvPr id="18" name="Image 2" descr="preencoded.png"/>
+          <p:cNvPicPr>
+            <a:picLocks noChangeAspect="1"/>
+          </p:cNvPicPr>
+          <p:nvPr/>
+        </p:nvPicPr>
+        <p:blipFill>
+          <a:blip r:embed="rId3"/>
+          <a:stretch>
+            <a:fillRect/>
+          </a:stretch>
+        </p:blipFill>
+        <p:spPr>
+          <a:xfrm>
             <a:off x="10241280" y="5221224"/>
             <a:ext cx="320040" cy="320040"/>
           </a:xfrm>
@@ -4898,7 +4668,7 @@
           <a:bodyPr wrap="square" lIns="0" tIns="0" rIns="0" bIns="0" rtlCol="0" anchor="ctr"/>
           <a:lstStyle/>
           <a:p>
-            <a:pPr indent="0" marL="0">
+            <a:pPr marL="0" indent="0">
               <a:buNone/>
             </a:pPr>
             <a:r>
@@ -4937,7 +4707,7 @@
           <a:bodyPr wrap="square" lIns="0" tIns="0" rIns="0" bIns="0" rtlCol="0" anchor="ctr"/>
           <a:lstStyle/>
           <a:p>
-            <a:pPr algn="r" indent="0" marL="0">
+            <a:pPr marL="0" indent="0" algn="r">
               <a:buNone/>
             </a:pPr>
             <a:r>
@@ -4971,6 +4741,7 @@
         <a:solidFill>
           <a:srgbClr val="FFFFFF"/>
         </a:solidFill>
+        <a:effectLst/>
       </p:bgPr>
     </p:bg>
     <p:spTree>
@@ -5008,11 +4779,11 @@
           <a:bodyPr wrap="square" lIns="0" tIns="0" rIns="0" bIns="0" rtlCol="0" anchor="ctr"/>
           <a:lstStyle/>
           <a:p>
-            <a:pPr algn="l" indent="0" marL="0">
-              <a:buNone/>
-            </a:pPr>
-            <a:r>
-              <a:rPr lang="en-US" sz="1200" b="1" spc="200" kern="0" dirty="0">
+            <a:pPr marL="0" indent="0" algn="l">
+              <a:buNone/>
+            </a:pPr>
+            <a:r>
+              <a:rPr lang="en-US" sz="1200" b="1" kern="0" spc="200" dirty="0">
                 <a:solidFill>
                   <a:srgbClr val="6C4BC1"/>
                 </a:solidFill>
@@ -5047,7 +4818,7 @@
           <a:bodyPr wrap="square" lIns="0" tIns="0" rIns="0" bIns="0" rtlCol="0" anchor="ctr"/>
           <a:lstStyle/>
           <a:p>
-            <a:pPr indent="0" marL="0">
+            <a:pPr marL="0" indent="0">
               <a:buNone/>
             </a:pPr>
             <a:r>
@@ -5086,7 +4857,7 @@
           <a:bodyPr wrap="square" lIns="0" tIns="0" rIns="0" bIns="0" rtlCol="0" anchor="ctr"/>
           <a:lstStyle/>
           <a:p>
-            <a:pPr indent="0" marL="0">
+            <a:pPr marL="0" indent="0">
               <a:lnSpc>
                 <a:spcPts val="1900"/>
               </a:lnSpc>
@@ -5130,10 +4901,34 @@
             <a:tbl>
               <a:tblPr/>
               <a:tblGrid>
-                <a:gridCol w="1920240"/>
-                <a:gridCol w="2258568"/>
-                <a:gridCol w="2258568"/>
-                <a:gridCol w="2249424"/>
+                <a:gridCol w="1920240">
+                  <a:extLst>
+                    <a:ext uri="{9D8B030D-6E8A-4147-A177-3AD203B41FA5}">
+                      <a16:colId xmlns:a16="http://schemas.microsoft.com/office/drawing/2014/main" val="20000"/>
+                    </a:ext>
+                  </a:extLst>
+                </a:gridCol>
+                <a:gridCol w="2258568">
+                  <a:extLst>
+                    <a:ext uri="{9D8B030D-6E8A-4147-A177-3AD203B41FA5}">
+                      <a16:colId xmlns:a16="http://schemas.microsoft.com/office/drawing/2014/main" val="20001"/>
+                    </a:ext>
+                  </a:extLst>
+                </a:gridCol>
+                <a:gridCol w="2258568">
+                  <a:extLst>
+                    <a:ext uri="{9D8B030D-6E8A-4147-A177-3AD203B41FA5}">
+                      <a16:colId xmlns:a16="http://schemas.microsoft.com/office/drawing/2014/main" val="20002"/>
+                    </a:ext>
+                  </a:extLst>
+                </a:gridCol>
+                <a:gridCol w="2249424">
+                  <a:extLst>
+                    <a:ext uri="{9D8B030D-6E8A-4147-A177-3AD203B41FA5}">
+                      <a16:colId xmlns:a16="http://schemas.microsoft.com/office/drawing/2014/main" val="20003"/>
+                    </a:ext>
+                  </a:extLst>
+                </a:gridCol>
               </a:tblGrid>
               <a:tr h="640080">
                 <a:tc>
@@ -5141,13 +4936,13 @@
                     <a:bodyPr/>
                     <a:lstStyle/>
                     <a:p>
-                      <a:pPr indent="0" marL="0">
+                      <a:pPr marL="0" indent="0">
                         <a:buNone/>
                       </a:pPr>
                       <a:endParaRPr lang="en-US" sz="1200" dirty="0"/>
                     </a:p>
                   </a:txBody>
-                  <a:tcPr marL="91440" marR="91440" marT="45720" marB="45720">
+                  <a:tcPr>
                     <a:lnL w="38100" cap="flat" cmpd="sng" algn="ctr">
                       <a:solidFill>
                         <a:srgbClr val="FFFFFF"/>
@@ -5194,7 +4989,7 @@
                     <a:bodyPr/>
                     <a:lstStyle/>
                     <a:p>
-                      <a:pPr algn="ctr" indent="0" marL="0">
+                      <a:pPr marL="0" indent="0" algn="ctr">
                         <a:buNone/>
                       </a:pPr>
                       <a:r>
@@ -5215,7 +5010,7 @@
                       </a:endParaRPr>
                     </a:p>
                   </a:txBody>
-                  <a:tcPr marL="91440" marR="91440" marT="45720" marB="45720" anchor="ctr">
+                  <a:tcPr anchor="ctr">
                     <a:lnL w="38100" cap="flat" cmpd="sng" algn="ctr">
                       <a:solidFill>
                         <a:srgbClr val="FFFFFF"/>
@@ -5262,7 +5057,7 @@
                     <a:bodyPr/>
                     <a:lstStyle/>
                     <a:p>
-                      <a:pPr algn="ctr" indent="0" marL="0">
+                      <a:pPr marL="0" indent="0" algn="ctr">
                         <a:buNone/>
                       </a:pPr>
                       <a:r>
@@ -5283,7 +5078,7 @@
                       </a:endParaRPr>
                     </a:p>
                   </a:txBody>
-                  <a:tcPr marL="91440" marR="91440" marT="45720" marB="45720" anchor="ctr">
+                  <a:tcPr anchor="ctr">
                     <a:lnL w="38100" cap="flat" cmpd="sng" algn="ctr">
                       <a:solidFill>
                         <a:srgbClr val="FFFFFF"/>
@@ -5330,7 +5125,7 @@
                     <a:bodyPr/>
                     <a:lstStyle/>
                     <a:p>
-                      <a:pPr algn="ctr" indent="0" marL="0">
+                      <a:pPr marL="0" indent="0" algn="ctr">
                         <a:buNone/>
                       </a:pPr>
                       <a:r>
@@ -5351,7 +5146,7 @@
                       </a:endParaRPr>
                     </a:p>
                   </a:txBody>
-                  <a:tcPr marL="91440" marR="91440" marT="45720" marB="45720" anchor="ctr">
+                  <a:tcPr anchor="ctr">
                     <a:lnL w="38100" cap="flat" cmpd="sng" algn="ctr">
                       <a:solidFill>
                         <a:srgbClr val="FFFFFF"/>
@@ -5393,6 +5188,11 @@
                     </a:solidFill>
                   </a:tcPr>
                 </a:tc>
+                <a:extLst>
+                  <a:ext uri="{0D108BD9-81ED-4DB2-BD59-A6C34878D82A}">
+                    <a16:rowId xmlns:a16="http://schemas.microsoft.com/office/drawing/2014/main" val="10000"/>
+                  </a:ext>
+                </a:extLst>
               </a:tr>
               <a:tr h="777240">
                 <a:tc>
@@ -5400,7 +5200,7 @@
                     <a:bodyPr/>
                     <a:lstStyle/>
                     <a:p>
-                      <a:pPr algn="ctr" indent="0" marL="0">
+                      <a:pPr marL="0" indent="0" algn="ctr">
                         <a:buNone/>
                       </a:pPr>
                       <a:r>
@@ -5421,7 +5221,7 @@
                       </a:endParaRPr>
                     </a:p>
                   </a:txBody>
-                  <a:tcPr marL="91440" marR="91440" marT="45720" marB="45720" anchor="ctr">
+                  <a:tcPr anchor="ctr">
                     <a:lnL w="38100" cap="flat" cmpd="sng" algn="ctr">
                       <a:solidFill>
                         <a:srgbClr val="FFFFFF"/>
@@ -5468,7 +5268,7 @@
                     <a:bodyPr/>
                     <a:lstStyle/>
                     <a:p>
-                      <a:pPr algn="ctr" indent="0" marL="0">
+                      <a:pPr marL="0" indent="0" algn="ctr">
                         <a:buNone/>
                       </a:pPr>
                       <a:r>
@@ -5489,7 +5289,7 @@
                       </a:endParaRPr>
                     </a:p>
                   </a:txBody>
-                  <a:tcPr marL="91440" marR="91440" marT="45720" marB="45720" anchor="ctr">
+                  <a:tcPr anchor="ctr">
                     <a:lnL w="38100" cap="flat" cmpd="sng" algn="ctr">
                       <a:solidFill>
                         <a:srgbClr val="FFFFFF"/>
@@ -5536,7 +5336,7 @@
                     <a:bodyPr/>
                     <a:lstStyle/>
                     <a:p>
-                      <a:pPr algn="ctr" indent="0" marL="0">
+                      <a:pPr marL="0" indent="0" algn="ctr">
                         <a:buNone/>
                       </a:pPr>
                       <a:r>
@@ -5557,7 +5357,7 @@
                       </a:endParaRPr>
                     </a:p>
                   </a:txBody>
-                  <a:tcPr marL="91440" marR="91440" marT="45720" marB="45720" anchor="ctr">
+                  <a:tcPr anchor="ctr">
                     <a:lnL w="38100" cap="flat" cmpd="sng" algn="ctr">
                       <a:solidFill>
                         <a:srgbClr val="FFFFFF"/>
@@ -5604,7 +5404,7 @@
                     <a:bodyPr/>
                     <a:lstStyle/>
                     <a:p>
-                      <a:pPr algn="ctr" indent="0" marL="0">
+                      <a:pPr marL="0" indent="0" algn="ctr">
                         <a:buNone/>
                       </a:pPr>
                       <a:r>
@@ -5625,7 +5425,7 @@
                       </a:endParaRPr>
                     </a:p>
                   </a:txBody>
-                  <a:tcPr marL="91440" marR="91440" marT="45720" marB="45720" anchor="ctr">
+                  <a:tcPr anchor="ctr">
                     <a:lnL w="38100" cap="flat" cmpd="sng" algn="ctr">
                       <a:solidFill>
                         <a:srgbClr val="FFFFFF"/>
@@ -5667,6 +5467,11 @@
                     </a:solidFill>
                   </a:tcPr>
                 </a:tc>
+                <a:extLst>
+                  <a:ext uri="{0D108BD9-81ED-4DB2-BD59-A6C34878D82A}">
+                    <a16:rowId xmlns:a16="http://schemas.microsoft.com/office/drawing/2014/main" val="10001"/>
+                  </a:ext>
+                </a:extLst>
               </a:tr>
               <a:tr h="777240">
                 <a:tc>
@@ -5674,7 +5479,7 @@
                     <a:bodyPr/>
                     <a:lstStyle/>
                     <a:p>
-                      <a:pPr algn="ctr" indent="0" marL="0">
+                      <a:pPr marL="0" indent="0" algn="ctr">
                         <a:buNone/>
                       </a:pPr>
                       <a:r>
@@ -5695,7 +5500,7 @@
                       </a:endParaRPr>
                     </a:p>
                   </a:txBody>
-                  <a:tcPr marL="91440" marR="91440" marT="45720" marB="45720" anchor="ctr">
+                  <a:tcPr anchor="ctr">
                     <a:lnL w="38100" cap="flat" cmpd="sng" algn="ctr">
                       <a:solidFill>
                         <a:srgbClr val="FFFFFF"/>
@@ -5742,7 +5547,7 @@
                     <a:bodyPr/>
                     <a:lstStyle/>
                     <a:p>
-                      <a:pPr algn="ctr" indent="0" marL="0">
+                      <a:pPr marL="0" indent="0" algn="ctr">
                         <a:buNone/>
                       </a:pPr>
                       <a:r>
@@ -5763,7 +5568,7 @@
                       </a:endParaRPr>
                     </a:p>
                   </a:txBody>
-                  <a:tcPr marL="91440" marR="91440" marT="45720" marB="45720" anchor="ctr">
+                  <a:tcPr anchor="ctr">
                     <a:lnL w="38100" cap="flat" cmpd="sng" algn="ctr">
                       <a:solidFill>
                         <a:srgbClr val="FFFFFF"/>
@@ -5810,7 +5615,7 @@
                     <a:bodyPr/>
                     <a:lstStyle/>
                     <a:p>
-                      <a:pPr algn="ctr" indent="0" marL="0">
+                      <a:pPr marL="0" indent="0" algn="ctr">
                         <a:buNone/>
                       </a:pPr>
                       <a:r>
@@ -5831,7 +5636,7 @@
                       </a:endParaRPr>
                     </a:p>
                   </a:txBody>
-                  <a:tcPr marL="91440" marR="91440" marT="45720" marB="45720" anchor="ctr">
+                  <a:tcPr anchor="ctr">
                     <a:lnL w="38100" cap="flat" cmpd="sng" algn="ctr">
                       <a:solidFill>
                         <a:srgbClr val="FFFFFF"/>
@@ -5878,7 +5683,7 @@
                     <a:bodyPr/>
                     <a:lstStyle/>
                     <a:p>
-                      <a:pPr algn="ctr" indent="0" marL="0">
+                      <a:pPr marL="0" indent="0" algn="ctr">
                         <a:buNone/>
                       </a:pPr>
                       <a:r>
@@ -5899,7 +5704,7 @@
                       </a:endParaRPr>
                     </a:p>
                   </a:txBody>
-                  <a:tcPr marL="91440" marR="91440" marT="45720" marB="45720" anchor="ctr">
+                  <a:tcPr anchor="ctr">
                     <a:lnL w="38100" cap="flat" cmpd="sng" algn="ctr">
                       <a:solidFill>
                         <a:srgbClr val="FFFFFF"/>
@@ -5941,6 +5746,11 @@
                     </a:solidFill>
                   </a:tcPr>
                 </a:tc>
+                <a:extLst>
+                  <a:ext uri="{0D108BD9-81ED-4DB2-BD59-A6C34878D82A}">
+                    <a16:rowId xmlns:a16="http://schemas.microsoft.com/office/drawing/2014/main" val="10002"/>
+                  </a:ext>
+                </a:extLst>
               </a:tr>
               <a:tr h="777240">
                 <a:tc>
@@ -5948,7 +5758,7 @@
                     <a:bodyPr/>
                     <a:lstStyle/>
                     <a:p>
-                      <a:pPr algn="ctr" indent="0" marL="0">
+                      <a:pPr marL="0" indent="0" algn="ctr">
                         <a:buNone/>
                       </a:pPr>
                       <a:r>
@@ -5969,7 +5779,7 @@
                       </a:endParaRPr>
                     </a:p>
                   </a:txBody>
-                  <a:tcPr marL="91440" marR="91440" marT="45720" marB="45720" anchor="ctr">
+                  <a:tcPr anchor="ctr">
                     <a:lnL w="38100" cap="flat" cmpd="sng" algn="ctr">
                       <a:solidFill>
                         <a:srgbClr val="FFFFFF"/>
@@ -6016,7 +5826,7 @@
                     <a:bodyPr/>
                     <a:lstStyle/>
                     <a:p>
-                      <a:pPr algn="ctr" indent="0" marL="0">
+                      <a:pPr marL="0" indent="0" algn="ctr">
                         <a:buNone/>
                       </a:pPr>
                       <a:r>
@@ -6037,7 +5847,7 @@
                       </a:endParaRPr>
                     </a:p>
                   </a:txBody>
-                  <a:tcPr marL="91440" marR="91440" marT="45720" marB="45720" anchor="ctr">
+                  <a:tcPr anchor="ctr">
                     <a:lnL w="38100" cap="flat" cmpd="sng" algn="ctr">
                       <a:solidFill>
                         <a:srgbClr val="FFFFFF"/>
@@ -6084,7 +5894,7 @@
                     <a:bodyPr/>
                     <a:lstStyle/>
                     <a:p>
-                      <a:pPr algn="ctr" indent="0" marL="0">
+                      <a:pPr marL="0" indent="0" algn="ctr">
                         <a:buNone/>
                       </a:pPr>
                       <a:r>
@@ -6105,7 +5915,7 @@
                       </a:endParaRPr>
                     </a:p>
                   </a:txBody>
-                  <a:tcPr marL="91440" marR="91440" marT="45720" marB="45720" anchor="ctr">
+                  <a:tcPr anchor="ctr">
                     <a:lnL w="38100" cap="flat" cmpd="sng" algn="ctr">
                       <a:solidFill>
                         <a:srgbClr val="FFFFFF"/>
@@ -6152,7 +5962,7 @@
                     <a:bodyPr/>
                     <a:lstStyle/>
                     <a:p>
-                      <a:pPr algn="ctr" indent="0" marL="0">
+                      <a:pPr marL="0" indent="0" algn="ctr">
                         <a:buNone/>
                       </a:pPr>
                       <a:r>
@@ -6173,7 +5983,7 @@
                       </a:endParaRPr>
                     </a:p>
                   </a:txBody>
-                  <a:tcPr marL="91440" marR="91440" marT="45720" marB="45720" anchor="ctr">
+                  <a:tcPr anchor="ctr">
                     <a:lnL w="38100" cap="flat" cmpd="sng" algn="ctr">
                       <a:solidFill>
                         <a:srgbClr val="FFFFFF"/>
@@ -6215,6 +6025,11 @@
                     </a:solidFill>
                   </a:tcPr>
                 </a:tc>
+                <a:extLst>
+                  <a:ext uri="{0D108BD9-81ED-4DB2-BD59-A6C34878D82A}">
+                    <a16:rowId xmlns:a16="http://schemas.microsoft.com/office/drawing/2014/main" val="10003"/>
+                  </a:ext>
+                </a:extLst>
               </a:tr>
             </a:tbl>
           </a:graphicData>
@@ -6241,7 +6056,7 @@
           <a:bodyPr wrap="square" lIns="0" tIns="0" rIns="0" bIns="0" rtlCol="0" anchor="ctr"/>
           <a:lstStyle/>
           <a:p>
-            <a:pPr algn="ctr" indent="0" marL="0">
+            <a:pPr marL="0" indent="0" algn="ctr">
               <a:buNone/>
             </a:pPr>
             <a:r>
@@ -6280,7 +6095,7 @@
           <a:bodyPr wrap="square" lIns="0" tIns="0" rIns="0" bIns="0" rtlCol="0" anchor="ctr"/>
           <a:lstStyle/>
           <a:p>
-            <a:pPr algn="r" indent="0" marL="0">
+            <a:pPr marL="0" indent="0" algn="r">
               <a:buNone/>
             </a:pPr>
             <a:r>
@@ -6314,6 +6129,7 @@
         <a:solidFill>
           <a:srgbClr val="FFFFFF"/>
         </a:solidFill>
+        <a:effectLst/>
       </p:bgPr>
     </p:bg>
     <p:spTree>
@@ -6351,11 +6167,11 @@
           <a:bodyPr wrap="square" lIns="0" tIns="0" rIns="0" bIns="0" rtlCol="0" anchor="ctr"/>
           <a:lstStyle/>
           <a:p>
-            <a:pPr algn="l" indent="0" marL="0">
-              <a:buNone/>
-            </a:pPr>
-            <a:r>
-              <a:rPr lang="en-US" sz="1200" b="1" spc="200" kern="0" dirty="0">
+            <a:pPr marL="0" indent="0" algn="l">
+              <a:buNone/>
+            </a:pPr>
+            <a:r>
+              <a:rPr lang="en-US" sz="1200" b="1" kern="0" spc="200" dirty="0">
                 <a:solidFill>
                   <a:srgbClr val="6C4BC1"/>
                 </a:solidFill>
@@ -6390,7 +6206,7 @@
           <a:bodyPr wrap="square" lIns="0" tIns="0" rIns="0" bIns="0" rtlCol="0" anchor="ctr"/>
           <a:lstStyle/>
           <a:p>
-            <a:pPr indent="0" marL="0">
+            <a:pPr marL="0" indent="0">
               <a:buNone/>
             </a:pPr>
             <a:r>
@@ -6431,10 +6247,34 @@
             <a:tbl>
               <a:tblPr/>
               <a:tblGrid>
-                <a:gridCol w="1188720"/>
-                <a:gridCol w="1325880"/>
-                <a:gridCol w="1325880"/>
-                <a:gridCol w="1280160"/>
+                <a:gridCol w="1188720">
+                  <a:extLst>
+                    <a:ext uri="{9D8B030D-6E8A-4147-A177-3AD203B41FA5}">
+                      <a16:colId xmlns:a16="http://schemas.microsoft.com/office/drawing/2014/main" val="20000"/>
+                    </a:ext>
+                  </a:extLst>
+                </a:gridCol>
+                <a:gridCol w="1325880">
+                  <a:extLst>
+                    <a:ext uri="{9D8B030D-6E8A-4147-A177-3AD203B41FA5}">
+                      <a16:colId xmlns:a16="http://schemas.microsoft.com/office/drawing/2014/main" val="20001"/>
+                    </a:ext>
+                  </a:extLst>
+                </a:gridCol>
+                <a:gridCol w="1325880">
+                  <a:extLst>
+                    <a:ext uri="{9D8B030D-6E8A-4147-A177-3AD203B41FA5}">
+                      <a16:colId xmlns:a16="http://schemas.microsoft.com/office/drawing/2014/main" val="20002"/>
+                    </a:ext>
+                  </a:extLst>
+                </a:gridCol>
+                <a:gridCol w="1280160">
+                  <a:extLst>
+                    <a:ext uri="{9D8B030D-6E8A-4147-A177-3AD203B41FA5}">
+                      <a16:colId xmlns:a16="http://schemas.microsoft.com/office/drawing/2014/main" val="20003"/>
+                    </a:ext>
+                  </a:extLst>
+                </a:gridCol>
               </a:tblGrid>
               <a:tr h="502920">
                 <a:tc>
@@ -6442,13 +6282,13 @@
                     <a:bodyPr/>
                     <a:lstStyle/>
                     <a:p>
-                      <a:pPr indent="0" marL="0">
+                      <a:pPr marL="0" indent="0">
                         <a:buNone/>
                       </a:pPr>
                       <a:endParaRPr lang="en-US" sz="1200" dirty="0"/>
                     </a:p>
                   </a:txBody>
-                  <a:tcPr marL="91440" marR="91440" marT="45720" marB="45720">
+                  <a:tcPr>
                     <a:lnL w="38100" cap="flat" cmpd="sng" algn="ctr">
                       <a:solidFill>
                         <a:srgbClr val="FFFFFF"/>
@@ -6495,7 +6335,7 @@
                     <a:bodyPr/>
                     <a:lstStyle/>
                     <a:p>
-                      <a:pPr algn="ctr" indent="0" marL="0">
+                      <a:pPr marL="0" indent="0" algn="ctr">
                         <a:buNone/>
                       </a:pPr>
                       <a:r>
@@ -6516,7 +6356,7 @@
                       </a:endParaRPr>
                     </a:p>
                   </a:txBody>
-                  <a:tcPr marL="91440" marR="91440" marT="45720" marB="45720" anchor="ctr">
+                  <a:tcPr anchor="ctr">
                     <a:lnL w="38100" cap="flat" cmpd="sng" algn="ctr">
                       <a:solidFill>
                         <a:srgbClr val="FFFFFF"/>
@@ -6563,7 +6403,7 @@
                     <a:bodyPr/>
                     <a:lstStyle/>
                     <a:p>
-                      <a:pPr algn="ctr" indent="0" marL="0">
+                      <a:pPr marL="0" indent="0" algn="ctr">
                         <a:buNone/>
                       </a:pPr>
                       <a:r>
@@ -6584,7 +6424,7 @@
                       </a:endParaRPr>
                     </a:p>
                   </a:txBody>
-                  <a:tcPr marL="91440" marR="91440" marT="45720" marB="45720" anchor="ctr">
+                  <a:tcPr anchor="ctr">
                     <a:lnL w="38100" cap="flat" cmpd="sng" algn="ctr">
                       <a:solidFill>
                         <a:srgbClr val="FFFFFF"/>
@@ -6631,7 +6471,7 @@
                     <a:bodyPr/>
                     <a:lstStyle/>
                     <a:p>
-                      <a:pPr algn="ctr" indent="0" marL="0">
+                      <a:pPr marL="0" indent="0" algn="ctr">
                         <a:buNone/>
                       </a:pPr>
                       <a:r>
@@ -6652,7 +6492,7 @@
                       </a:endParaRPr>
                     </a:p>
                   </a:txBody>
-                  <a:tcPr marL="91440" marR="91440" marT="45720" marB="45720" anchor="ctr">
+                  <a:tcPr anchor="ctr">
                     <a:lnL w="38100" cap="flat" cmpd="sng" algn="ctr">
                       <a:solidFill>
                         <a:srgbClr val="FFFFFF"/>
@@ -6694,6 +6534,11 @@
                     </a:solidFill>
                   </a:tcPr>
                 </a:tc>
+                <a:extLst>
+                  <a:ext uri="{0D108BD9-81ED-4DB2-BD59-A6C34878D82A}">
+                    <a16:rowId xmlns:a16="http://schemas.microsoft.com/office/drawing/2014/main" val="10000"/>
+                  </a:ext>
+                </a:extLst>
               </a:tr>
               <a:tr h="621792">
                 <a:tc>
@@ -6701,7 +6546,7 @@
                     <a:bodyPr/>
                     <a:lstStyle/>
                     <a:p>
-                      <a:pPr algn="ctr" indent="0" marL="0">
+                      <a:pPr marL="0" indent="0" algn="ctr">
                         <a:buNone/>
                       </a:pPr>
                       <a:r>
@@ -6722,7 +6567,7 @@
                       </a:endParaRPr>
                     </a:p>
                   </a:txBody>
-                  <a:tcPr marL="91440" marR="91440" marT="45720" marB="45720" anchor="ctr">
+                  <a:tcPr anchor="ctr">
                     <a:lnL w="38100" cap="flat" cmpd="sng" algn="ctr">
                       <a:solidFill>
                         <a:srgbClr val="FFFFFF"/>
@@ -6769,7 +6614,7 @@
                     <a:bodyPr/>
                     <a:lstStyle/>
                     <a:p>
-                      <a:pPr algn="ctr" indent="0" marL="0">
+                      <a:pPr marL="0" indent="0" algn="ctr">
                         <a:buNone/>
                       </a:pPr>
                       <a:r>
@@ -6790,7 +6635,7 @@
                       </a:endParaRPr>
                     </a:p>
                   </a:txBody>
-                  <a:tcPr marL="91440" marR="91440" marT="45720" marB="45720" anchor="ctr">
+                  <a:tcPr anchor="ctr">
                     <a:lnL w="38100" cap="flat" cmpd="sng" algn="ctr">
                       <a:solidFill>
                         <a:srgbClr val="FFFFFF"/>
@@ -6837,7 +6682,7 @@
                     <a:bodyPr/>
                     <a:lstStyle/>
                     <a:p>
-                      <a:pPr algn="ctr" indent="0" marL="0">
+                      <a:pPr marL="0" indent="0" algn="ctr">
                         <a:buNone/>
                       </a:pPr>
                       <a:r>
@@ -6858,7 +6703,7 @@
                       </a:endParaRPr>
                     </a:p>
                   </a:txBody>
-                  <a:tcPr marL="91440" marR="91440" marT="45720" marB="45720" anchor="ctr">
+                  <a:tcPr anchor="ctr">
                     <a:lnL w="38100" cap="flat" cmpd="sng" algn="ctr">
                       <a:solidFill>
                         <a:srgbClr val="FFFFFF"/>
@@ -6905,7 +6750,7 @@
                     <a:bodyPr/>
                     <a:lstStyle/>
                     <a:p>
-                      <a:pPr algn="ctr" indent="0" marL="0">
+                      <a:pPr marL="0" indent="0" algn="ctr">
                         <a:buNone/>
                       </a:pPr>
                       <a:r>
@@ -6926,7 +6771,7 @@
                       </a:endParaRPr>
                     </a:p>
                   </a:txBody>
-                  <a:tcPr marL="91440" marR="91440" marT="45720" marB="45720" anchor="ctr">
+                  <a:tcPr anchor="ctr">
                     <a:lnL w="38100" cap="flat" cmpd="sng" algn="ctr">
                       <a:solidFill>
                         <a:srgbClr val="FFFFFF"/>
@@ -6968,6 +6813,11 @@
                     </a:solidFill>
                   </a:tcPr>
                 </a:tc>
+                <a:extLst>
+                  <a:ext uri="{0D108BD9-81ED-4DB2-BD59-A6C34878D82A}">
+                    <a16:rowId xmlns:a16="http://schemas.microsoft.com/office/drawing/2014/main" val="10001"/>
+                  </a:ext>
+                </a:extLst>
               </a:tr>
               <a:tr h="621792">
                 <a:tc>
@@ -6975,7 +6825,7 @@
                     <a:bodyPr/>
                     <a:lstStyle/>
                     <a:p>
-                      <a:pPr algn="ctr" indent="0" marL="0">
+                      <a:pPr marL="0" indent="0" algn="ctr">
                         <a:buNone/>
                       </a:pPr>
                       <a:r>
@@ -6996,7 +6846,7 @@
                       </a:endParaRPr>
                     </a:p>
                   </a:txBody>
-                  <a:tcPr marL="91440" marR="91440" marT="45720" marB="45720" anchor="ctr">
+                  <a:tcPr anchor="ctr">
                     <a:lnL w="38100" cap="flat" cmpd="sng" algn="ctr">
                       <a:solidFill>
                         <a:srgbClr val="FFFFFF"/>
@@ -7043,7 +6893,7 @@
                     <a:bodyPr/>
                     <a:lstStyle/>
                     <a:p>
-                      <a:pPr algn="ctr" indent="0" marL="0">
+                      <a:pPr marL="0" indent="0" algn="ctr">
                         <a:buNone/>
                       </a:pPr>
                       <a:r>
@@ -7064,7 +6914,7 @@
                       </a:endParaRPr>
                     </a:p>
                   </a:txBody>
-                  <a:tcPr marL="91440" marR="91440" marT="45720" marB="45720" anchor="ctr">
+                  <a:tcPr anchor="ctr">
                     <a:lnL w="38100" cap="flat" cmpd="sng" algn="ctr">
                       <a:solidFill>
                         <a:srgbClr val="FFFFFF"/>
@@ -7111,7 +6961,7 @@
                     <a:bodyPr/>
                     <a:lstStyle/>
                     <a:p>
-                      <a:pPr algn="ctr" indent="0" marL="0">
+                      <a:pPr marL="0" indent="0" algn="ctr">
                         <a:buNone/>
                       </a:pPr>
                       <a:r>
@@ -7132,7 +6982,7 @@
                       </a:endParaRPr>
                     </a:p>
                   </a:txBody>
-                  <a:tcPr marL="91440" marR="91440" marT="45720" marB="45720" anchor="ctr">
+                  <a:tcPr anchor="ctr">
                     <a:lnL w="38100" cap="flat" cmpd="sng" algn="ctr">
                       <a:solidFill>
                         <a:srgbClr val="FFFFFF"/>
@@ -7179,7 +7029,7 @@
                     <a:bodyPr/>
                     <a:lstStyle/>
                     <a:p>
-                      <a:pPr algn="ctr" indent="0" marL="0">
+                      <a:pPr marL="0" indent="0" algn="ctr">
                         <a:buNone/>
                       </a:pPr>
                       <a:r>
@@ -7200,7 +7050,7 @@
                       </a:endParaRPr>
                     </a:p>
                   </a:txBody>
-                  <a:tcPr marL="91440" marR="91440" marT="45720" marB="45720" anchor="ctr">
+                  <a:tcPr anchor="ctr">
                     <a:lnL w="38100" cap="flat" cmpd="sng" algn="ctr">
                       <a:solidFill>
                         <a:srgbClr val="FFFFFF"/>
@@ -7242,6 +7092,11 @@
                     </a:solidFill>
                   </a:tcPr>
                 </a:tc>
+                <a:extLst>
+                  <a:ext uri="{0D108BD9-81ED-4DB2-BD59-A6C34878D82A}">
+                    <a16:rowId xmlns:a16="http://schemas.microsoft.com/office/drawing/2014/main" val="10002"/>
+                  </a:ext>
+                </a:extLst>
               </a:tr>
               <a:tr h="621792">
                 <a:tc>
@@ -7249,7 +7104,7 @@
                     <a:bodyPr/>
                     <a:lstStyle/>
                     <a:p>
-                      <a:pPr algn="ctr" indent="0" marL="0">
+                      <a:pPr marL="0" indent="0" algn="ctr">
                         <a:buNone/>
                       </a:pPr>
                       <a:r>
@@ -7270,7 +7125,7 @@
                       </a:endParaRPr>
                     </a:p>
                   </a:txBody>
-                  <a:tcPr marL="91440" marR="91440" marT="45720" marB="45720" anchor="ctr">
+                  <a:tcPr anchor="ctr">
                     <a:lnL w="38100" cap="flat" cmpd="sng" algn="ctr">
                       <a:solidFill>
                         <a:srgbClr val="FFFFFF"/>
@@ -7317,7 +7172,7 @@
                     <a:bodyPr/>
                     <a:lstStyle/>
                     <a:p>
-                      <a:pPr algn="ctr" indent="0" marL="0">
+                      <a:pPr marL="0" indent="0" algn="ctr">
                         <a:buNone/>
                       </a:pPr>
                       <a:r>
@@ -7338,7 +7193,7 @@
                       </a:endParaRPr>
                     </a:p>
                   </a:txBody>
-                  <a:tcPr marL="91440" marR="91440" marT="45720" marB="45720" anchor="ctr">
+                  <a:tcPr anchor="ctr">
                     <a:lnL w="38100" cap="flat" cmpd="sng" algn="ctr">
                       <a:solidFill>
                         <a:srgbClr val="FFFFFF"/>
@@ -7385,7 +7240,7 @@
                     <a:bodyPr/>
                     <a:lstStyle/>
                     <a:p>
-                      <a:pPr algn="ctr" indent="0" marL="0">
+                      <a:pPr marL="0" indent="0" algn="ctr">
                         <a:buNone/>
                       </a:pPr>
                       <a:r>
@@ -7406,7 +7261,7 @@
                       </a:endParaRPr>
                     </a:p>
                   </a:txBody>
-                  <a:tcPr marL="91440" marR="91440" marT="45720" marB="45720" anchor="ctr">
+                  <a:tcPr anchor="ctr">
                     <a:lnL w="38100" cap="flat" cmpd="sng" algn="ctr">
                       <a:solidFill>
                         <a:srgbClr val="FFFFFF"/>
@@ -7453,7 +7308,7 @@
                     <a:bodyPr/>
                     <a:lstStyle/>
                     <a:p>
-                      <a:pPr algn="ctr" indent="0" marL="0">
+                      <a:pPr marL="0" indent="0" algn="ctr">
                         <a:buNone/>
                       </a:pPr>
                       <a:r>
@@ -7474,7 +7329,7 @@
                       </a:endParaRPr>
                     </a:p>
                   </a:txBody>
-                  <a:tcPr marL="91440" marR="91440" marT="45720" marB="45720" anchor="ctr">
+                  <a:tcPr anchor="ctr">
                     <a:lnL w="38100" cap="flat" cmpd="sng" algn="ctr">
                       <a:solidFill>
                         <a:srgbClr val="FFFFFF"/>
@@ -7516,6 +7371,11 @@
                     </a:solidFill>
                   </a:tcPr>
                 </a:tc>
+                <a:extLst>
+                  <a:ext uri="{0D108BD9-81ED-4DB2-BD59-A6C34878D82A}">
+                    <a16:rowId xmlns:a16="http://schemas.microsoft.com/office/drawing/2014/main" val="10003"/>
+                  </a:ext>
+                </a:extLst>
               </a:tr>
             </a:tbl>
           </a:graphicData>
@@ -7562,7 +7422,7 @@
           <a:bodyPr wrap="square" lIns="0" tIns="0" rIns="0" bIns="0" rtlCol="0" anchor="ctr"/>
           <a:lstStyle/>
           <a:p>
-            <a:pPr algn="ctr" indent="0" marL="0">
+            <a:pPr marL="0" indent="0" algn="ctr">
               <a:buNone/>
             </a:pPr>
             <a:r>
@@ -7601,7 +7461,7 @@
           <a:bodyPr wrap="square" lIns="0" tIns="0" rIns="0" bIns="0" rtlCol="0" anchor="ctr"/>
           <a:lstStyle/>
           <a:p>
-            <a:pPr indent="0" marL="0">
+            <a:pPr marL="0" indent="0">
               <a:buNone/>
             </a:pPr>
             <a:r>
@@ -7640,7 +7500,7 @@
           <a:bodyPr wrap="square" lIns="0" tIns="0" rIns="0" bIns="0" rtlCol="0" anchor="ctr"/>
           <a:lstStyle/>
           <a:p>
-            <a:pPr indent="0" marL="0">
+            <a:pPr marL="0" indent="0">
               <a:lnSpc>
                 <a:spcPts val="1600"/>
               </a:lnSpc>
@@ -7702,7 +7562,7 @@
           <a:bodyPr wrap="square" lIns="0" tIns="0" rIns="0" bIns="0" rtlCol="0" anchor="ctr"/>
           <a:lstStyle/>
           <a:p>
-            <a:pPr algn="ctr" indent="0" marL="0">
+            <a:pPr marL="0" indent="0" algn="ctr">
               <a:buNone/>
             </a:pPr>
             <a:r>
@@ -7741,7 +7601,7 @@
           <a:bodyPr wrap="square" lIns="0" tIns="0" rIns="0" bIns="0" rtlCol="0" anchor="ctr"/>
           <a:lstStyle/>
           <a:p>
-            <a:pPr indent="0" marL="0">
+            <a:pPr marL="0" indent="0">
               <a:buNone/>
             </a:pPr>
             <a:r>
@@ -7780,7 +7640,7 @@
           <a:bodyPr wrap="square" lIns="0" tIns="0" rIns="0" bIns="0" rtlCol="0" anchor="ctr"/>
           <a:lstStyle/>
           <a:p>
-            <a:pPr indent="0" marL="0">
+            <a:pPr marL="0" indent="0">
               <a:lnSpc>
                 <a:spcPts val="1600"/>
               </a:lnSpc>
@@ -7842,7 +7702,7 @@
           <a:bodyPr wrap="square" lIns="0" tIns="0" rIns="0" bIns="0" rtlCol="0" anchor="ctr"/>
           <a:lstStyle/>
           <a:p>
-            <a:pPr algn="ctr" indent="0" marL="0">
+            <a:pPr marL="0" indent="0" algn="ctr">
               <a:buNone/>
             </a:pPr>
             <a:r>
@@ -7881,7 +7741,7 @@
           <a:bodyPr wrap="square" lIns="0" tIns="0" rIns="0" bIns="0" rtlCol="0" anchor="ctr"/>
           <a:lstStyle/>
           <a:p>
-            <a:pPr indent="0" marL="0">
+            <a:pPr marL="0" indent="0">
               <a:buNone/>
             </a:pPr>
             <a:r>
@@ -7901,7 +7761,7 @@
       </p:sp>
       <p:sp>
         <p:nvSpPr>
-          <p:cNvPr id="16" name="Text 13"/>
+          <p:cNvPr id="4" name="Text 13"/>
           <p:cNvSpPr/>
           <p:nvPr/>
         </p:nvSpPr>
@@ -7920,7 +7780,7 @@
           <a:bodyPr wrap="square" lIns="0" tIns="0" rIns="0" bIns="0" rtlCol="0" anchor="ctr"/>
           <a:lstStyle/>
           <a:p>
-            <a:pPr indent="0" marL="0">
+            <a:pPr marL="0" indent="0">
               <a:lnSpc>
                 <a:spcPts val="1600"/>
               </a:lnSpc>
@@ -7982,7 +7842,7 @@
           <a:bodyPr wrap="square" lIns="0" tIns="0" rIns="0" bIns="0" rtlCol="0" anchor="ctr"/>
           <a:lstStyle/>
           <a:p>
-            <a:pPr algn="ctr" indent="0" marL="0">
+            <a:pPr marL="0" indent="0" algn="ctr">
               <a:buNone/>
             </a:pPr>
             <a:r>
@@ -8021,7 +7881,7 @@
           <a:bodyPr wrap="square" lIns="0" tIns="0" rIns="0" bIns="0" rtlCol="0" anchor="ctr"/>
           <a:lstStyle/>
           <a:p>
-            <a:pPr indent="0" marL="0">
+            <a:pPr marL="0" indent="0">
               <a:buNone/>
             </a:pPr>
             <a:r>
@@ -8060,7 +7920,7 @@
           <a:bodyPr wrap="square" lIns="0" tIns="0" rIns="0" bIns="0" rtlCol="0" anchor="ctr"/>
           <a:lstStyle/>
           <a:p>
-            <a:pPr indent="0" marL="0">
+            <a:pPr marL="0" indent="0">
               <a:lnSpc>
                 <a:spcPts val="1600"/>
               </a:lnSpc>
@@ -8102,7 +7962,7 @@
           <a:bodyPr wrap="square" lIns="0" tIns="0" rIns="0" bIns="0" rtlCol="0" anchor="ctr"/>
           <a:lstStyle/>
           <a:p>
-            <a:pPr algn="r" indent="0" marL="0">
+            <a:pPr marL="0" indent="0" algn="r">
               <a:buNone/>
             </a:pPr>
             <a:r>
@@ -8136,6 +7996,7 @@
         <a:solidFill>
           <a:srgbClr val="FFFFFF"/>
         </a:solidFill>
+        <a:effectLst/>
       </p:bgPr>
     </p:bg>
     <p:spTree>
@@ -8173,11 +8034,11 @@
           <a:bodyPr wrap="square" lIns="0" tIns="0" rIns="0" bIns="0" rtlCol="0" anchor="ctr"/>
           <a:lstStyle/>
           <a:p>
-            <a:pPr algn="l" indent="0" marL="0">
-              <a:buNone/>
-            </a:pPr>
-            <a:r>
-              <a:rPr lang="en-US" sz="1200" b="1" spc="200" kern="0" dirty="0">
+            <a:pPr marL="0" indent="0" algn="l">
+              <a:buNone/>
+            </a:pPr>
+            <a:r>
+              <a:rPr lang="en-US" sz="1200" b="1" kern="0" spc="200" dirty="0">
                 <a:solidFill>
                   <a:srgbClr val="6C4BC1"/>
                 </a:solidFill>
@@ -8212,7 +8073,7 @@
           <a:bodyPr wrap="square" lIns="0" tIns="0" rIns="0" bIns="0" rtlCol="0" anchor="ctr"/>
           <a:lstStyle/>
           <a:p>
-            <a:pPr algn="ctr" indent="0" marL="0">
+            <a:pPr marL="0" indent="0" algn="ctr">
               <a:buNone/>
             </a:pPr>
             <a:r>
@@ -8252,14 +8113,14 @@
       </p:sp>
       <p:pic>
         <p:nvPicPr>
-          <p:cNvPr id="5" name="Image 0" descr="preencoded.png">    </p:cNvPr>
+          <p:cNvPr id="5" name="Image 0" descr="preencoded.png"/>
           <p:cNvPicPr>
             <a:picLocks noChangeAspect="1"/>
           </p:cNvPicPr>
           <p:nvPr/>
         </p:nvPicPr>
         <p:blipFill>
-          <a:blip r:embed="rId1"/>
+          <a:blip r:embed="rId3"/>
           <a:stretch>
             <a:fillRect/>
           </a:stretch>
@@ -8295,7 +8156,7 @@
           <a:bodyPr wrap="square" lIns="0" tIns="0" rIns="0" bIns="0" rtlCol="0" anchor="ctr"/>
           <a:lstStyle/>
           <a:p>
-            <a:pPr algn="ctr" indent="0" marL="0">
+            <a:pPr marL="0" indent="0" algn="ctr">
               <a:lnSpc>
                 <a:spcPts val="2200"/>
               </a:lnSpc>
@@ -8337,7 +8198,7 @@
           <a:bodyPr wrap="square" lIns="0" tIns="0" rIns="0" bIns="0" rtlCol="0" anchor="ctr"/>
           <a:lstStyle/>
           <a:p>
-            <a:pPr algn="ctr" indent="0" marL="0">
+            <a:pPr marL="0" indent="0" algn="ctr">
               <a:lnSpc>
                 <a:spcPts val="2000"/>
               </a:lnSpc>
@@ -8354,12 +8215,6 @@
               </a:rPr>
               <a:t>Se você resolveu “no olho”, parabéns: você já está pensando como a matemática que vamos formalizar em </a:t>
             </a:r>
-            <a:pPr algn="ctr" indent="0" marL="0">
-              <a:lnSpc>
-                <a:spcPts val="2000"/>
-              </a:lnSpc>
-              <a:buNone/>
-            </a:pPr>
             <a:r>
               <a:rPr lang="en-US" sz="1400" i="1" u="sng" dirty="0">
                 <a:solidFill>
@@ -8368,7 +8223,7 @@
                 <a:latin typeface="Calibri" pitchFamily="34" charset="0"/>
                 <a:ea typeface="Calibri" pitchFamily="34" charset="-122"/>
                 <a:cs typeface="Calibri" pitchFamily="34" charset="-120"/>
-                <a:hlinkClick r:id="rId2" invalidUrl="" action="" tgtFrame="" tooltip="" history="1" highlightClick="0" endSnd="0">
+                <a:hlinkClick r:id="rId4">
                   <a:extLst>
                     <a:ext uri="{A12FA001-AC4F-418D-AE19-62706E023703}">
                       <ahyp:hlinkClr xmlns:ahyp="http://schemas.microsoft.com/office/drawing/2018/hyperlinkcolor" val="tx"/>
@@ -8378,12 +8233,6 @@
               </a:rPr>
               <a:t>Fundamentos de Lógica</a:t>
             </a:r>
-            <a:pPr algn="ctr" indent="0" marL="0">
-              <a:lnSpc>
-                <a:spcPts val="2000"/>
-              </a:lnSpc>
-              <a:buNone/>
-            </a:pPr>
             <a:r>
               <a:rPr lang="en-US" sz="1400" i="1" dirty="0">
                 <a:solidFill>
@@ -8420,7 +8269,7 @@
           <a:bodyPr wrap="square" lIns="0" tIns="0" rIns="0" bIns="0" rtlCol="0" anchor="ctr"/>
           <a:lstStyle/>
           <a:p>
-            <a:pPr algn="r" indent="0" marL="0">
+            <a:pPr marL="0" indent="0" algn="r">
               <a:buNone/>
             </a:pPr>
             <a:r>
@@ -8454,6 +8303,7 @@
         <a:solidFill>
           <a:srgbClr val="FFFFFF"/>
         </a:solidFill>
+        <a:effectLst/>
       </p:bgPr>
     </p:bg>
     <p:spTree>
@@ -8491,11 +8341,11 @@
           <a:bodyPr wrap="square" lIns="0" tIns="0" rIns="0" bIns="0" rtlCol="0" anchor="ctr"/>
           <a:lstStyle/>
           <a:p>
-            <a:pPr algn="l" indent="0" marL="0">
-              <a:buNone/>
-            </a:pPr>
-            <a:r>
-              <a:rPr lang="en-US" sz="1200" b="1" spc="200" kern="0" dirty="0">
+            <a:pPr marL="0" indent="0" algn="l">
+              <a:buNone/>
+            </a:pPr>
+            <a:r>
+              <a:rPr lang="en-US" sz="1200" b="1" kern="0" spc="200" dirty="0">
                 <a:solidFill>
                   <a:srgbClr val="6C4BC1"/>
                 </a:solidFill>
@@ -8530,7 +8380,7 @@
           <a:bodyPr wrap="square" lIns="0" tIns="0" rIns="0" bIns="0" rtlCol="0" anchor="ctr"/>
           <a:lstStyle/>
           <a:p>
-            <a:pPr indent="0" marL="0">
+            <a:pPr marL="0" indent="0">
               <a:buNone/>
             </a:pPr>
             <a:r>
@@ -8590,14 +8440,14 @@
       </p:sp>
       <p:pic>
         <p:nvPicPr>
-          <p:cNvPr id="6" name="Image 0" descr="preencoded.png">    </p:cNvPr>
+          <p:cNvPr id="6" name="Image 0" descr="preencoded.png"/>
           <p:cNvPicPr>
             <a:picLocks noChangeAspect="1"/>
           </p:cNvPicPr>
           <p:nvPr/>
         </p:nvPicPr>
         <p:blipFill>
-          <a:blip r:embed="rId1"/>
+          <a:blip r:embed="rId3"/>
           <a:stretch>
             <a:fillRect/>
           </a:stretch>
@@ -8633,7 +8483,7 @@
           <a:bodyPr wrap="square" lIns="0" tIns="0" rIns="0" bIns="0" rtlCol="0" anchor="ctr"/>
           <a:lstStyle/>
           <a:p>
-            <a:pPr algn="ctr" indent="0" marL="0">
+            <a:pPr marL="0" indent="0" algn="ctr">
               <a:buNone/>
             </a:pPr>
             <a:r>
@@ -8672,7 +8522,7 @@
           <a:bodyPr wrap="square" lIns="0" tIns="0" rIns="0" bIns="0" rtlCol="0" anchor="ctr"/>
           <a:lstStyle/>
           <a:p>
-            <a:pPr algn="ctr" indent="0" marL="0">
+            <a:pPr marL="0" indent="0" algn="ctr">
               <a:buNone/>
             </a:pPr>
             <a:r>
@@ -8733,11 +8583,11 @@
           <a:bodyPr wrap="square" lIns="0" tIns="0" rIns="0" bIns="0" rtlCol="0" anchor="ctr"/>
           <a:lstStyle/>
           <a:p>
-            <a:pPr algn="ctr" indent="0" marL="0">
-              <a:buNone/>
-            </a:pPr>
-            <a:r>
-              <a:rPr lang="en-US" sz="950" b="1" spc="50" kern="0" dirty="0">
+            <a:pPr marL="0" indent="0" algn="ctr">
+              <a:buNone/>
+            </a:pPr>
+            <a:r>
+              <a:rPr lang="en-US" sz="950" b="1" kern="0" spc="50" dirty="0">
                 <a:solidFill>
                   <a:srgbClr val="141B41"/>
                 </a:solidFill>
@@ -8773,14 +8623,14 @@
       </p:sp>
       <p:pic>
         <p:nvPicPr>
-          <p:cNvPr id="12" name="Image 1" descr="preencoded.png">    </p:cNvPr>
+          <p:cNvPr id="12" name="Image 1" descr="preencoded.png"/>
           <p:cNvPicPr>
             <a:picLocks noChangeAspect="1"/>
           </p:cNvPicPr>
           <p:nvPr/>
         </p:nvPicPr>
         <p:blipFill>
-          <a:blip r:embed="rId2"/>
+          <a:blip r:embed="rId4"/>
           <a:stretch>
             <a:fillRect/>
           </a:stretch>
@@ -8816,7 +8666,7 @@
           <a:bodyPr wrap="square" lIns="0" tIns="0" rIns="0" bIns="0" rtlCol="0" anchor="ctr"/>
           <a:lstStyle/>
           <a:p>
-            <a:pPr algn="ctr" indent="0" marL="0">
+            <a:pPr marL="0" indent="0" algn="ctr">
               <a:buNone/>
             </a:pPr>
             <a:r>
@@ -8855,7 +8705,7 @@
           <a:bodyPr wrap="square" lIns="0" tIns="0" rIns="0" bIns="0" rtlCol="0" anchor="ctr"/>
           <a:lstStyle/>
           <a:p>
-            <a:pPr algn="ctr" indent="0" marL="0">
+            <a:pPr marL="0" indent="0" algn="ctr">
               <a:buNone/>
             </a:pPr>
             <a:r>
@@ -8900,14 +8750,14 @@
       </p:sp>
       <p:pic>
         <p:nvPicPr>
-          <p:cNvPr id="16" name="Image 2" descr="preencoded.png">    </p:cNvPr>
+          <p:cNvPr id="16" name="Image 2" descr="preencoded.png"/>
           <p:cNvPicPr>
             <a:picLocks noChangeAspect="1"/>
           </p:cNvPicPr>
           <p:nvPr/>
         </p:nvPicPr>
         <p:blipFill>
-          <a:blip r:embed="rId3"/>
+          <a:blip r:embed="rId5"/>
           <a:stretch>
             <a:fillRect/>
           </a:stretch>
@@ -8943,7 +8793,7 @@
           <a:bodyPr wrap="square" lIns="0" tIns="0" rIns="0" bIns="0" rtlCol="0" anchor="ctr"/>
           <a:lstStyle/>
           <a:p>
-            <a:pPr algn="ctr" indent="0" marL="0">
+            <a:pPr marL="0" indent="0" algn="ctr">
               <a:buNone/>
             </a:pPr>
             <a:r>
@@ -8982,7 +8832,7 @@
           <a:bodyPr wrap="square" lIns="0" tIns="0" rIns="0" bIns="0" rtlCol="0" anchor="ctr"/>
           <a:lstStyle/>
           <a:p>
-            <a:pPr algn="ctr" indent="0" marL="0">
+            <a:pPr marL="0" indent="0" algn="ctr">
               <a:buNone/>
             </a:pPr>
             <a:r>
@@ -9021,7 +8871,7 @@
           <a:bodyPr wrap="square" lIns="0" tIns="0" rIns="0" bIns="0" rtlCol="0" anchor="ctr"/>
           <a:lstStyle/>
           <a:p>
-            <a:pPr algn="ctr" indent="0" marL="0">
+            <a:pPr marL="0" indent="0" algn="ctr">
               <a:buNone/>
             </a:pPr>
             <a:r>
@@ -9060,7 +8910,7 @@
           <a:bodyPr wrap="square" lIns="0" tIns="0" rIns="0" bIns="0" rtlCol="0" anchor="ctr"/>
           <a:lstStyle/>
           <a:p>
-            <a:pPr algn="r" indent="0" marL="0">
+            <a:pPr marL="0" indent="0" algn="r">
               <a:buNone/>
             </a:pPr>
             <a:r>
@@ -9094,6 +8944,7 @@
         <a:solidFill>
           <a:srgbClr val="FFFFFF"/>
         </a:solidFill>
+        <a:effectLst/>
       </p:bgPr>
     </p:bg>
     <p:spTree>
@@ -9131,11 +8982,11 @@
           <a:bodyPr wrap="square" lIns="0" tIns="0" rIns="0" bIns="0" rtlCol="0" anchor="ctr"/>
           <a:lstStyle/>
           <a:p>
-            <a:pPr algn="l" indent="0" marL="0">
-              <a:buNone/>
-            </a:pPr>
-            <a:r>
-              <a:rPr lang="en-US" sz="1200" b="1" spc="200" kern="0" dirty="0">
+            <a:pPr marL="0" indent="0" algn="l">
+              <a:buNone/>
+            </a:pPr>
+            <a:r>
+              <a:rPr lang="en-US" sz="1200" b="1" kern="0" spc="200" dirty="0">
                 <a:solidFill>
                   <a:srgbClr val="6C4BC1"/>
                 </a:solidFill>
@@ -9170,7 +9021,7 @@
           <a:bodyPr wrap="square" lIns="0" tIns="0" rIns="0" bIns="0" rtlCol="0" anchor="ctr"/>
           <a:lstStyle/>
           <a:p>
-            <a:pPr indent="0" marL="0">
+            <a:pPr marL="0" indent="0">
               <a:buNone/>
             </a:pPr>
             <a:r>
@@ -9259,14 +9110,14 @@
       </p:sp>
       <p:pic>
         <p:nvPicPr>
-          <p:cNvPr id="7" name="Image 0" descr="preencoded.png">    </p:cNvPr>
+          <p:cNvPr id="7" name="Image 0" descr="preencoded.png"/>
           <p:cNvPicPr>
             <a:picLocks noChangeAspect="1"/>
           </p:cNvPicPr>
           <p:nvPr/>
         </p:nvPicPr>
         <p:blipFill>
-          <a:blip r:embed="rId1"/>
+          <a:blip r:embed="rId3"/>
           <a:stretch>
             <a:fillRect/>
           </a:stretch>
@@ -9302,7 +9153,7 @@
           <a:bodyPr wrap="square" lIns="0" tIns="0" rIns="0" bIns="0" rtlCol="0" anchor="ctr"/>
           <a:lstStyle/>
           <a:p>
-            <a:pPr indent="0" marL="0">
+            <a:pPr marL="0" indent="0">
               <a:lnSpc>
                 <a:spcPts val="1800"/>
               </a:lnSpc>
@@ -9344,7 +9195,7 @@
           <a:bodyPr wrap="square" lIns="0" tIns="0" rIns="0" bIns="0" rtlCol="0" anchor="ctr"/>
           <a:lstStyle/>
           <a:p>
-            <a:pPr indent="0" marL="0">
+            <a:pPr marL="0" indent="0">
               <a:lnSpc>
                 <a:spcPts val="1600"/>
               </a:lnSpc>
@@ -9436,14 +9287,14 @@
       </p:sp>
       <p:pic>
         <p:nvPicPr>
-          <p:cNvPr id="13" name="Image 1" descr="preencoded.png">    </p:cNvPr>
+          <p:cNvPr id="13" name="Image 1" descr="preencoded.png"/>
           <p:cNvPicPr>
             <a:picLocks noChangeAspect="1"/>
           </p:cNvPicPr>
           <p:nvPr/>
         </p:nvPicPr>
         <p:blipFill>
-          <a:blip r:embed="rId2"/>
+          <a:blip r:embed="rId4"/>
           <a:stretch>
             <a:fillRect/>
           </a:stretch>
@@ -9479,7 +9330,7 @@
           <a:bodyPr wrap="square" lIns="0" tIns="0" rIns="0" bIns="0" rtlCol="0" anchor="ctr"/>
           <a:lstStyle/>
           <a:p>
-            <a:pPr indent="0" marL="0">
+            <a:pPr marL="0" indent="0">
               <a:lnSpc>
                 <a:spcPts val="1800"/>
               </a:lnSpc>
@@ -9521,7 +9372,7 @@
           <a:bodyPr wrap="square" lIns="0" tIns="0" rIns="0" bIns="0" rtlCol="0" anchor="ctr"/>
           <a:lstStyle/>
           <a:p>
-            <a:pPr indent="0" marL="0">
+            <a:pPr marL="0" indent="0">
               <a:lnSpc>
                 <a:spcPts val="1600"/>
               </a:lnSpc>
@@ -9613,14 +9464,14 @@
       </p:sp>
       <p:pic>
         <p:nvPicPr>
-          <p:cNvPr id="19" name="Image 2" descr="preencoded.png">    </p:cNvPr>
+          <p:cNvPr id="19" name="Image 2" descr="preencoded.png"/>
           <p:cNvPicPr>
             <a:picLocks noChangeAspect="1"/>
           </p:cNvPicPr>
           <p:nvPr/>
         </p:nvPicPr>
         <p:blipFill>
-          <a:blip r:embed="rId3"/>
+          <a:blip r:embed="rId5"/>
           <a:stretch>
             <a:fillRect/>
           </a:stretch>
@@ -9656,7 +9507,7 @@
           <a:bodyPr wrap="square" lIns="0" tIns="0" rIns="0" bIns="0" rtlCol="0" anchor="ctr"/>
           <a:lstStyle/>
           <a:p>
-            <a:pPr indent="0" marL="0">
+            <a:pPr marL="0" indent="0">
               <a:lnSpc>
                 <a:spcPts val="1800"/>
               </a:lnSpc>
@@ -9698,7 +9549,7 @@
           <a:bodyPr wrap="square" lIns="0" tIns="0" rIns="0" bIns="0" rtlCol="0" anchor="ctr"/>
           <a:lstStyle/>
           <a:p>
-            <a:pPr indent="0" marL="0">
+            <a:pPr marL="0" indent="0">
               <a:lnSpc>
                 <a:spcPts val="1600"/>
               </a:lnSpc>
@@ -9740,7 +9591,7 @@
           <a:bodyPr wrap="square" lIns="0" tIns="0" rIns="0" bIns="0" rtlCol="0" anchor="ctr"/>
           <a:lstStyle/>
           <a:p>
-            <a:pPr algn="r" indent="0" marL="0">
+            <a:pPr marL="0" indent="0" algn="r">
               <a:buNone/>
             </a:pPr>
             <a:r>
@@ -9774,6 +9625,7 @@
         <a:solidFill>
           <a:srgbClr val="FFFFFF"/>
         </a:solidFill>
+        <a:effectLst/>
       </p:bgPr>
     </p:bg>
     <p:spTree>
@@ -9811,11 +9663,11 @@
           <a:bodyPr wrap="square" lIns="0" tIns="0" rIns="0" bIns="0" rtlCol="0" anchor="ctr"/>
           <a:lstStyle/>
           <a:p>
-            <a:pPr algn="l" indent="0" marL="0">
-              <a:buNone/>
-            </a:pPr>
-            <a:r>
-              <a:rPr lang="en-US" sz="1200" b="1" spc="200" kern="0" dirty="0">
+            <a:pPr marL="0" indent="0" algn="l">
+              <a:buNone/>
+            </a:pPr>
+            <a:r>
+              <a:rPr lang="en-US" sz="1200" b="1" kern="0" spc="200" dirty="0">
                 <a:solidFill>
                   <a:srgbClr val="6C4BC1"/>
                 </a:solidFill>
@@ -9850,7 +9702,7 @@
           <a:bodyPr wrap="square" lIns="0" tIns="0" rIns="0" bIns="0" rtlCol="0" anchor="ctr"/>
           <a:lstStyle/>
           <a:p>
-            <a:pPr indent="0" marL="0">
+            <a:pPr marL="0" indent="0">
               <a:buNone/>
             </a:pPr>
             <a:r>
@@ -9889,7 +9741,7 @@
           <a:bodyPr wrap="square" lIns="0" tIns="0" rIns="0" bIns="0" rtlCol="0" anchor="ctr"/>
           <a:lstStyle/>
           <a:p>
-            <a:pPr indent="0" marL="0">
+            <a:pPr marL="0" indent="0">
               <a:buNone/>
             </a:pPr>
             <a:r>
@@ -9951,14 +9803,14 @@
       </p:sp>
       <p:pic>
         <p:nvPicPr>
-          <p:cNvPr id="7" name="Image 0" descr="preencoded.png">    </p:cNvPr>
+          <p:cNvPr id="7" name="Image 0" descr="preencoded.png"/>
           <p:cNvPicPr>
             <a:picLocks noChangeAspect="1"/>
           </p:cNvPicPr>
           <p:nvPr/>
         </p:nvPicPr>
         <p:blipFill>
-          <a:blip r:embed="rId1"/>
+          <a:blip r:embed="rId3"/>
           <a:stretch>
             <a:fillRect/>
           </a:stretch>
@@ -9994,7 +9846,7 @@
           <a:bodyPr wrap="square" lIns="0" tIns="0" rIns="0" bIns="0" rtlCol="0" anchor="ctr"/>
           <a:lstStyle/>
           <a:p>
-            <a:pPr indent="0" marL="0">
+            <a:pPr marL="0" indent="0">
               <a:buNone/>
             </a:pPr>
             <a:r>
@@ -10033,7 +9885,7 @@
           <a:bodyPr wrap="square" lIns="0" tIns="0" rIns="0" bIns="0" rtlCol="0" anchor="ctr"/>
           <a:lstStyle/>
           <a:p>
-            <a:pPr indent="0" marL="0">
+            <a:pPr marL="0" indent="0">
               <a:lnSpc>
                 <a:spcPts val="1800"/>
               </a:lnSpc>
@@ -10098,14 +9950,14 @@
       </p:sp>
       <p:pic>
         <p:nvPicPr>
-          <p:cNvPr id="12" name="Image 1" descr="preencoded.png">    </p:cNvPr>
+          <p:cNvPr id="12" name="Image 1" descr="preencoded.png"/>
           <p:cNvPicPr>
             <a:picLocks noChangeAspect="1"/>
           </p:cNvPicPr>
           <p:nvPr/>
         </p:nvPicPr>
         <p:blipFill>
-          <a:blip r:embed="rId2"/>
+          <a:blip r:embed="rId3"/>
           <a:stretch>
             <a:fillRect/>
           </a:stretch>
@@ -10141,7 +9993,7 @@
           <a:bodyPr wrap="square" lIns="0" tIns="0" rIns="0" bIns="0" rtlCol="0" anchor="ctr"/>
           <a:lstStyle/>
           <a:p>
-            <a:pPr indent="0" marL="0">
+            <a:pPr marL="0" indent="0">
               <a:buNone/>
             </a:pPr>
             <a:r>
@@ -10180,7 +10032,7 @@
           <a:bodyPr wrap="square" lIns="0" tIns="0" rIns="0" bIns="0" rtlCol="0" anchor="ctr"/>
           <a:lstStyle/>
           <a:p>
-            <a:pPr indent="0" marL="0">
+            <a:pPr marL="0" indent="0">
               <a:lnSpc>
                 <a:spcPts val="1800"/>
               </a:lnSpc>
@@ -10222,7 +10074,7 @@
           <a:bodyPr wrap="square" lIns="0" tIns="0" rIns="0" bIns="0" rtlCol="0" anchor="ctr"/>
           <a:lstStyle/>
           <a:p>
-            <a:pPr algn="r" indent="0" marL="0">
+            <a:pPr marL="0" indent="0" algn="r">
               <a:buNone/>
             </a:pPr>
             <a:r>
@@ -10256,6 +10108,7 @@
         <a:solidFill>
           <a:srgbClr val="FFFFFF"/>
         </a:solidFill>
+        <a:effectLst/>
       </p:bgPr>
     </p:bg>
     <p:spTree>
@@ -10293,11 +10146,11 @@
           <a:bodyPr wrap="square" lIns="0" tIns="0" rIns="0" bIns="0" rtlCol="0" anchor="ctr"/>
           <a:lstStyle/>
           <a:p>
-            <a:pPr algn="l" indent="0" marL="0">
-              <a:buNone/>
-            </a:pPr>
-            <a:r>
-              <a:rPr lang="en-US" sz="1200" b="1" spc="200" kern="0" dirty="0">
+            <a:pPr marL="0" indent="0" algn="l">
+              <a:buNone/>
+            </a:pPr>
+            <a:r>
+              <a:rPr lang="en-US" sz="1200" b="1" kern="0" spc="200" dirty="0">
                 <a:solidFill>
                   <a:srgbClr val="6C4BC1"/>
                 </a:solidFill>
@@ -10332,7 +10185,7 @@
           <a:bodyPr wrap="square" lIns="0" tIns="0" rIns="0" bIns="0" rtlCol="0" anchor="ctr"/>
           <a:lstStyle/>
           <a:p>
-            <a:pPr indent="0" marL="0">
+            <a:pPr marL="0" indent="0">
               <a:buNone/>
             </a:pPr>
             <a:r>
@@ -10372,251 +10225,7 @@
       </p:sp>
       <p:pic>
         <p:nvPicPr>
-          <p:cNvPr id="5" name="Image 0" descr="preencoded.png">    </p:cNvPr>
-          <p:cNvPicPr>
-            <a:picLocks noChangeAspect="1"/>
-          </p:cNvPicPr>
-          <p:nvPr/>
-        </p:nvPicPr>
-        <p:blipFill>
-          <a:blip r:embed="rId1"/>
-          <a:stretch>
-            <a:fillRect/>
-          </a:stretch>
-        </p:blipFill>
-        <p:spPr>
-          <a:xfrm>
-            <a:off x="786384" y="2020824"/>
-            <a:ext cx="329184" cy="329184"/>
-          </a:xfrm>
-          <a:prstGeom prst="rect">
-            <a:avLst/>
-          </a:prstGeom>
-        </p:spPr>
-      </p:pic>
-      <p:sp>
-        <p:nvSpPr>
-          <p:cNvPr id="6" name="Text 3"/>
-          <p:cNvSpPr/>
-          <p:nvPr/>
-        </p:nvSpPr>
-        <p:spPr>
-          <a:xfrm>
-            <a:off x="1508760" y="1847088"/>
-            <a:ext cx="9692640" cy="365760"/>
-          </a:xfrm>
-          <a:prstGeom prst="rect">
-            <a:avLst/>
-          </a:prstGeom>
-          <a:noFill/>
-          <a:ln/>
-        </p:spPr>
-        <p:txBody>
-          <a:bodyPr wrap="square" lIns="0" tIns="0" rIns="0" bIns="0" rtlCol="0" anchor="ctr"/>
-          <a:lstStyle/>
-          <a:p>
-            <a:pPr indent="0" marL="0">
-              <a:buNone/>
-            </a:pPr>
-            <a:r>
-              <a:rPr lang="en-US" sz="1800" b="1" dirty="0">
-                <a:solidFill>
-                  <a:srgbClr val="1B1B2F"/>
-                </a:solidFill>
-                <a:latin typeface="Calibri" pitchFamily="34" charset="0"/>
-                <a:ea typeface="Calibri" pitchFamily="34" charset="-122"/>
-                <a:cs typeface="Calibri" pitchFamily="34" charset="-120"/>
-              </a:rPr>
-              <a:t>O que é Busca Ativa</a:t>
-            </a:r>
-            <a:endParaRPr lang="en-US" sz="1800" dirty="0"/>
-          </a:p>
-        </p:txBody>
-      </p:sp>
-      <p:sp>
-        <p:nvSpPr>
-          <p:cNvPr id="7" name="Text 4"/>
-          <p:cNvSpPr/>
-          <p:nvPr/>
-        </p:nvSpPr>
-        <p:spPr>
-          <a:xfrm>
-            <a:off x="1508760" y="2185416"/>
-            <a:ext cx="9692640" cy="457200"/>
-          </a:xfrm>
-          <a:prstGeom prst="rect">
-            <a:avLst/>
-          </a:prstGeom>
-          <a:noFill/>
-          <a:ln/>
-        </p:spPr>
-        <p:txBody>
-          <a:bodyPr wrap="square" lIns="0" tIns="0" rIns="0" bIns="0" rtlCol="0" anchor="ctr"/>
-          <a:lstStyle/>
-          <a:p>
-            <a:pPr indent="0" marL="0">
-              <a:buNone/>
-            </a:pPr>
-            <a:r>
-              <a:rPr lang="en-US" sz="1350" dirty="0">
-                <a:solidFill>
-                  <a:srgbClr val="6B6B80"/>
-                </a:solidFill>
-                <a:latin typeface="Calibri" pitchFamily="34" charset="0"/>
-                <a:ea typeface="Calibri" pitchFamily="34" charset="-122"/>
-                <a:cs typeface="Calibri" pitchFamily="34" charset="-120"/>
-              </a:rPr>
-              <a:t>O que é essa prática e por que a instituição investe tempo de aula nisso.</a:t>
-            </a:r>
-            <a:endParaRPr lang="en-US" sz="1350" dirty="0"/>
-          </a:p>
-        </p:txBody>
-      </p:sp>
-      <p:sp>
-        <p:nvSpPr>
-          <p:cNvPr id="8" name="Shape 5"/>
-          <p:cNvSpPr/>
-          <p:nvPr/>
-        </p:nvSpPr>
-        <p:spPr>
-          <a:xfrm>
-            <a:off x="640080" y="2990088"/>
-            <a:ext cx="621792" cy="621792"/>
-          </a:xfrm>
-          <a:prstGeom prst="ellipse">
-            <a:avLst/>
-          </a:prstGeom>
-          <a:solidFill>
-            <a:srgbClr val="6C4BC1"/>
-          </a:solidFill>
-          <a:ln/>
-        </p:spPr>
-      </p:sp>
-      <p:pic>
-        <p:nvPicPr>
-          <p:cNvPr id="9" name="Image 1" descr="preencoded.png">    </p:cNvPr>
-          <p:cNvPicPr>
-            <a:picLocks noChangeAspect="1"/>
-          </p:cNvPicPr>
-          <p:nvPr/>
-        </p:nvPicPr>
-        <p:blipFill>
-          <a:blip r:embed="rId2"/>
-          <a:stretch>
-            <a:fillRect/>
-          </a:stretch>
-        </p:blipFill>
-        <p:spPr>
-          <a:xfrm>
-            <a:off x="786384" y="3136392"/>
-            <a:ext cx="329184" cy="329184"/>
-          </a:xfrm>
-          <a:prstGeom prst="rect">
-            <a:avLst/>
-          </a:prstGeom>
-        </p:spPr>
-      </p:pic>
-      <p:sp>
-        <p:nvSpPr>
-          <p:cNvPr id="10" name="Text 6"/>
-          <p:cNvSpPr/>
-          <p:nvPr/>
-        </p:nvSpPr>
-        <p:spPr>
-          <a:xfrm>
-            <a:off x="1508760" y="2962656"/>
-            <a:ext cx="9692640" cy="365760"/>
-          </a:xfrm>
-          <a:prstGeom prst="rect">
-            <a:avLst/>
-          </a:prstGeom>
-          <a:noFill/>
-          <a:ln/>
-        </p:spPr>
-        <p:txBody>
-          <a:bodyPr wrap="square" lIns="0" tIns="0" rIns="0" bIns="0" rtlCol="0" anchor="ctr"/>
-          <a:lstStyle/>
-          <a:p>
-            <a:pPr indent="0" marL="0">
-              <a:buNone/>
-            </a:pPr>
-            <a:r>
-              <a:rPr lang="en-US" sz="1800" b="1" dirty="0">
-                <a:solidFill>
-                  <a:srgbClr val="1B1B2F"/>
-                </a:solidFill>
-                <a:latin typeface="Calibri" pitchFamily="34" charset="0"/>
-                <a:ea typeface="Calibri" pitchFamily="34" charset="-122"/>
-                <a:cs typeface="Calibri" pitchFamily="34" charset="-120"/>
-              </a:rPr>
-              <a:t>Como a aula funciona na prática</a:t>
-            </a:r>
-            <a:endParaRPr lang="en-US" sz="1800" dirty="0"/>
-          </a:p>
-        </p:txBody>
-      </p:sp>
-      <p:sp>
-        <p:nvSpPr>
-          <p:cNvPr id="11" name="Text 7"/>
-          <p:cNvSpPr/>
-          <p:nvPr/>
-        </p:nvSpPr>
-        <p:spPr>
-          <a:xfrm>
-            <a:off x="1508760" y="3300984"/>
-            <a:ext cx="9692640" cy="457200"/>
-          </a:xfrm>
-          <a:prstGeom prst="rect">
-            <a:avLst/>
-          </a:prstGeom>
-          <a:noFill/>
-          <a:ln/>
-        </p:spPr>
-        <p:txBody>
-          <a:bodyPr wrap="square" lIns="0" tIns="0" rIns="0" bIns="0" rtlCol="0" anchor="ctr"/>
-          <a:lstStyle/>
-          <a:p>
-            <a:pPr indent="0" marL="0">
-              <a:buNone/>
-            </a:pPr>
-            <a:r>
-              <a:rPr lang="en-US" sz="1350" dirty="0">
-                <a:solidFill>
-                  <a:srgbClr val="6B6B80"/>
-                </a:solidFill>
-                <a:latin typeface="Calibri" pitchFamily="34" charset="0"/>
-                <a:ea typeface="Calibri" pitchFamily="34" charset="-122"/>
-                <a:cs typeface="Calibri" pitchFamily="34" charset="-120"/>
-              </a:rPr>
-              <a:t>O que o professor faz, o que você faz — os papéis de hoje.</a:t>
-            </a:r>
-            <a:endParaRPr lang="en-US" sz="1350" dirty="0"/>
-          </a:p>
-        </p:txBody>
-      </p:sp>
-      <p:sp>
-        <p:nvSpPr>
-          <p:cNvPr id="12" name="Shape 8"/>
-          <p:cNvSpPr/>
-          <p:nvPr/>
-        </p:nvSpPr>
-        <p:spPr>
-          <a:xfrm>
-            <a:off x="640080" y="4105656"/>
-            <a:ext cx="621792" cy="621792"/>
-          </a:xfrm>
-          <a:prstGeom prst="ellipse">
-            <a:avLst/>
-          </a:prstGeom>
-          <a:solidFill>
-            <a:srgbClr val="6C4BC1"/>
-          </a:solidFill>
-          <a:ln/>
-        </p:spPr>
-      </p:sp>
-      <p:pic>
-        <p:nvPicPr>
-          <p:cNvPr id="13" name="Image 2" descr="preencoded.png">    </p:cNvPr>
+          <p:cNvPr id="5" name="Image 0" descr="preencoded.png"/>
           <p:cNvPicPr>
             <a:picLocks noChangeAspect="1"/>
           </p:cNvPicPr>
@@ -10630,7 +10239,7 @@
         </p:blipFill>
         <p:spPr>
           <a:xfrm>
-            <a:off x="786384" y="4251960"/>
+            <a:off x="786384" y="2020824"/>
             <a:ext cx="329184" cy="329184"/>
           </a:xfrm>
           <a:prstGeom prst="rect">
@@ -10640,13 +10249,13 @@
       </p:pic>
       <p:sp>
         <p:nvSpPr>
-          <p:cNvPr id="14" name="Text 9"/>
-          <p:cNvSpPr/>
-          <p:nvPr/>
-        </p:nvSpPr>
-        <p:spPr>
-          <a:xfrm>
-            <a:off x="1508760" y="4078224"/>
+          <p:cNvPr id="6" name="Text 3"/>
+          <p:cNvSpPr/>
+          <p:nvPr/>
+        </p:nvSpPr>
+        <p:spPr>
+          <a:xfrm>
+            <a:off x="1508760" y="1847088"/>
             <a:ext cx="9692640" cy="365760"/>
           </a:xfrm>
           <a:prstGeom prst="rect">
@@ -10659,7 +10268,7 @@
           <a:bodyPr wrap="square" lIns="0" tIns="0" rIns="0" bIns="0" rtlCol="0" anchor="ctr"/>
           <a:lstStyle/>
           <a:p>
-            <a:pPr indent="0" marL="0">
+            <a:pPr marL="0" indent="0">
               <a:buNone/>
             </a:pPr>
             <a:r>
@@ -10671,7 +10280,7 @@
                 <a:ea typeface="Calibri" pitchFamily="34" charset="-122"/>
                 <a:cs typeface="Calibri" pitchFamily="34" charset="-120"/>
               </a:rPr>
-              <a:t>Diagnóstico rápido de onboarding</a:t>
+              <a:t>O que é Busca Ativa</a:t>
             </a:r>
             <a:endParaRPr lang="en-US" sz="1800" dirty="0"/>
           </a:p>
@@ -10679,13 +10288,13 @@
       </p:sp>
       <p:sp>
         <p:nvSpPr>
-          <p:cNvPr id="15" name="Text 10"/>
-          <p:cNvSpPr/>
-          <p:nvPr/>
-        </p:nvSpPr>
-        <p:spPr>
-          <a:xfrm>
-            <a:off x="1508760" y="4416552"/>
+          <p:cNvPr id="7" name="Text 4"/>
+          <p:cNvSpPr/>
+          <p:nvPr/>
+        </p:nvSpPr>
+        <p:spPr>
+          <a:xfrm>
+            <a:off x="1508760" y="2185416"/>
             <a:ext cx="9692640" cy="457200"/>
           </a:xfrm>
           <a:prstGeom prst="rect">
@@ -10698,7 +10307,7 @@
           <a:bodyPr wrap="square" lIns="0" tIns="0" rIns="0" bIns="0" rtlCol="0" anchor="ctr"/>
           <a:lstStyle/>
           <a:p>
-            <a:pPr indent="0" marL="0">
+            <a:pPr marL="0" indent="0">
               <a:buNone/>
             </a:pPr>
             <a:r>
@@ -10710,7 +10319,7 @@
                 <a:ea typeface="Calibri" pitchFamily="34" charset="-122"/>
                 <a:cs typeface="Calibri" pitchFamily="34" charset="-120"/>
               </a:rPr>
-              <a:t>Ferramentas, acesso e dúvidas de ementa, tudo num checklist.</a:t>
+              <a:t>O que é essa prática e por que a instituição investe tempo de aula nisso.</a:t>
             </a:r>
             <a:endParaRPr lang="en-US" sz="1350" dirty="0"/>
           </a:p>
@@ -10718,13 +10327,13 @@
       </p:sp>
       <p:sp>
         <p:nvSpPr>
-          <p:cNvPr id="16" name="Shape 11"/>
-          <p:cNvSpPr/>
-          <p:nvPr/>
-        </p:nvSpPr>
-        <p:spPr>
-          <a:xfrm>
-            <a:off x="640080" y="5221224"/>
+          <p:cNvPr id="8" name="Shape 5"/>
+          <p:cNvSpPr/>
+          <p:nvPr/>
+        </p:nvSpPr>
+        <p:spPr>
+          <a:xfrm>
+            <a:off x="640080" y="2990088"/>
             <a:ext cx="621792" cy="621792"/>
           </a:xfrm>
           <a:prstGeom prst="ellipse">
@@ -10738,7 +10347,7 @@
       </p:sp>
       <p:pic>
         <p:nvPicPr>
-          <p:cNvPr id="17" name="Image 3" descr="preencoded.png">    </p:cNvPr>
+          <p:cNvPr id="9" name="Image 1" descr="preencoded.png"/>
           <p:cNvPicPr>
             <a:picLocks noChangeAspect="1"/>
           </p:cNvPicPr>
@@ -10752,6 +10361,250 @@
         </p:blipFill>
         <p:spPr>
           <a:xfrm>
+            <a:off x="786384" y="3136392"/>
+            <a:ext cx="329184" cy="329184"/>
+          </a:xfrm>
+          <a:prstGeom prst="rect">
+            <a:avLst/>
+          </a:prstGeom>
+        </p:spPr>
+      </p:pic>
+      <p:sp>
+        <p:nvSpPr>
+          <p:cNvPr id="10" name="Text 6"/>
+          <p:cNvSpPr/>
+          <p:nvPr/>
+        </p:nvSpPr>
+        <p:spPr>
+          <a:xfrm>
+            <a:off x="1508760" y="2962656"/>
+            <a:ext cx="9692640" cy="365760"/>
+          </a:xfrm>
+          <a:prstGeom prst="rect">
+            <a:avLst/>
+          </a:prstGeom>
+          <a:noFill/>
+          <a:ln/>
+        </p:spPr>
+        <p:txBody>
+          <a:bodyPr wrap="square" lIns="0" tIns="0" rIns="0" bIns="0" rtlCol="0" anchor="ctr"/>
+          <a:lstStyle/>
+          <a:p>
+            <a:pPr marL="0" indent="0">
+              <a:buNone/>
+            </a:pPr>
+            <a:r>
+              <a:rPr lang="en-US" sz="1800" b="1" dirty="0">
+                <a:solidFill>
+                  <a:srgbClr val="1B1B2F"/>
+                </a:solidFill>
+                <a:latin typeface="Calibri" pitchFamily="34" charset="0"/>
+                <a:ea typeface="Calibri" pitchFamily="34" charset="-122"/>
+                <a:cs typeface="Calibri" pitchFamily="34" charset="-120"/>
+              </a:rPr>
+              <a:t>Como a aula funciona na prática</a:t>
+            </a:r>
+            <a:endParaRPr lang="en-US" sz="1800" dirty="0"/>
+          </a:p>
+        </p:txBody>
+      </p:sp>
+      <p:sp>
+        <p:nvSpPr>
+          <p:cNvPr id="11" name="Text 7"/>
+          <p:cNvSpPr/>
+          <p:nvPr/>
+        </p:nvSpPr>
+        <p:spPr>
+          <a:xfrm>
+            <a:off x="1508760" y="3300984"/>
+            <a:ext cx="9692640" cy="457200"/>
+          </a:xfrm>
+          <a:prstGeom prst="rect">
+            <a:avLst/>
+          </a:prstGeom>
+          <a:noFill/>
+          <a:ln/>
+        </p:spPr>
+        <p:txBody>
+          <a:bodyPr wrap="square" lIns="0" tIns="0" rIns="0" bIns="0" rtlCol="0" anchor="ctr"/>
+          <a:lstStyle/>
+          <a:p>
+            <a:pPr marL="0" indent="0">
+              <a:buNone/>
+            </a:pPr>
+            <a:r>
+              <a:rPr lang="en-US" sz="1350" dirty="0">
+                <a:solidFill>
+                  <a:srgbClr val="6B6B80"/>
+                </a:solidFill>
+                <a:latin typeface="Calibri" pitchFamily="34" charset="0"/>
+                <a:ea typeface="Calibri" pitchFamily="34" charset="-122"/>
+                <a:cs typeface="Calibri" pitchFamily="34" charset="-120"/>
+              </a:rPr>
+              <a:t>O que o professor faz, o que você faz — os papéis de hoje.</a:t>
+            </a:r>
+            <a:endParaRPr lang="en-US" sz="1350" dirty="0"/>
+          </a:p>
+        </p:txBody>
+      </p:sp>
+      <p:sp>
+        <p:nvSpPr>
+          <p:cNvPr id="12" name="Shape 8"/>
+          <p:cNvSpPr/>
+          <p:nvPr/>
+        </p:nvSpPr>
+        <p:spPr>
+          <a:xfrm>
+            <a:off x="640080" y="4105656"/>
+            <a:ext cx="621792" cy="621792"/>
+          </a:xfrm>
+          <a:prstGeom prst="ellipse">
+            <a:avLst/>
+          </a:prstGeom>
+          <a:solidFill>
+            <a:srgbClr val="6C4BC1"/>
+          </a:solidFill>
+          <a:ln/>
+        </p:spPr>
+      </p:sp>
+      <p:pic>
+        <p:nvPicPr>
+          <p:cNvPr id="13" name="Image 2" descr="preencoded.png"/>
+          <p:cNvPicPr>
+            <a:picLocks noChangeAspect="1"/>
+          </p:cNvPicPr>
+          <p:nvPr/>
+        </p:nvPicPr>
+        <p:blipFill>
+          <a:blip r:embed="rId5"/>
+          <a:stretch>
+            <a:fillRect/>
+          </a:stretch>
+        </p:blipFill>
+        <p:spPr>
+          <a:xfrm>
+            <a:off x="786384" y="4251960"/>
+            <a:ext cx="329184" cy="329184"/>
+          </a:xfrm>
+          <a:prstGeom prst="rect">
+            <a:avLst/>
+          </a:prstGeom>
+        </p:spPr>
+      </p:pic>
+      <p:sp>
+        <p:nvSpPr>
+          <p:cNvPr id="14" name="Text 9"/>
+          <p:cNvSpPr/>
+          <p:nvPr/>
+        </p:nvSpPr>
+        <p:spPr>
+          <a:xfrm>
+            <a:off x="1508760" y="4078224"/>
+            <a:ext cx="9692640" cy="365760"/>
+          </a:xfrm>
+          <a:prstGeom prst="rect">
+            <a:avLst/>
+          </a:prstGeom>
+          <a:noFill/>
+          <a:ln/>
+        </p:spPr>
+        <p:txBody>
+          <a:bodyPr wrap="square" lIns="0" tIns="0" rIns="0" bIns="0" rtlCol="0" anchor="ctr"/>
+          <a:lstStyle/>
+          <a:p>
+            <a:pPr marL="0" indent="0">
+              <a:buNone/>
+            </a:pPr>
+            <a:r>
+              <a:rPr lang="en-US" sz="1800" b="1" dirty="0">
+                <a:solidFill>
+                  <a:srgbClr val="1B1B2F"/>
+                </a:solidFill>
+                <a:latin typeface="Calibri" pitchFamily="34" charset="0"/>
+                <a:ea typeface="Calibri" pitchFamily="34" charset="-122"/>
+                <a:cs typeface="Calibri" pitchFamily="34" charset="-120"/>
+              </a:rPr>
+              <a:t>Diagnóstico rápido de onboarding</a:t>
+            </a:r>
+            <a:endParaRPr lang="en-US" sz="1800" dirty="0"/>
+          </a:p>
+        </p:txBody>
+      </p:sp>
+      <p:sp>
+        <p:nvSpPr>
+          <p:cNvPr id="15" name="Text 10"/>
+          <p:cNvSpPr/>
+          <p:nvPr/>
+        </p:nvSpPr>
+        <p:spPr>
+          <a:xfrm>
+            <a:off x="1508760" y="4416552"/>
+            <a:ext cx="9692640" cy="457200"/>
+          </a:xfrm>
+          <a:prstGeom prst="rect">
+            <a:avLst/>
+          </a:prstGeom>
+          <a:noFill/>
+          <a:ln/>
+        </p:spPr>
+        <p:txBody>
+          <a:bodyPr wrap="square" lIns="0" tIns="0" rIns="0" bIns="0" rtlCol="0" anchor="ctr"/>
+          <a:lstStyle/>
+          <a:p>
+            <a:pPr marL="0" indent="0">
+              <a:buNone/>
+            </a:pPr>
+            <a:r>
+              <a:rPr lang="en-US" sz="1350" dirty="0">
+                <a:solidFill>
+                  <a:srgbClr val="6B6B80"/>
+                </a:solidFill>
+                <a:latin typeface="Calibri" pitchFamily="34" charset="0"/>
+                <a:ea typeface="Calibri" pitchFamily="34" charset="-122"/>
+                <a:cs typeface="Calibri" pitchFamily="34" charset="-120"/>
+              </a:rPr>
+              <a:t>Ferramentas, acesso e dúvidas de ementa, tudo num checklist.</a:t>
+            </a:r>
+            <a:endParaRPr lang="en-US" sz="1350" dirty="0"/>
+          </a:p>
+        </p:txBody>
+      </p:sp>
+      <p:sp>
+        <p:nvSpPr>
+          <p:cNvPr id="16" name="Shape 11"/>
+          <p:cNvSpPr/>
+          <p:nvPr/>
+        </p:nvSpPr>
+        <p:spPr>
+          <a:xfrm>
+            <a:off x="640080" y="5221224"/>
+            <a:ext cx="621792" cy="621792"/>
+          </a:xfrm>
+          <a:prstGeom prst="ellipse">
+            <a:avLst/>
+          </a:prstGeom>
+          <a:solidFill>
+            <a:srgbClr val="6C4BC1"/>
+          </a:solidFill>
+          <a:ln/>
+        </p:spPr>
+      </p:sp>
+      <p:pic>
+        <p:nvPicPr>
+          <p:cNvPr id="17" name="Image 3" descr="preencoded.png"/>
+          <p:cNvPicPr>
+            <a:picLocks noChangeAspect="1"/>
+          </p:cNvPicPr>
+          <p:nvPr/>
+        </p:nvPicPr>
+        <p:blipFill>
+          <a:blip r:embed="rId6"/>
+          <a:stretch>
+            <a:fillRect/>
+          </a:stretch>
+        </p:blipFill>
+        <p:spPr>
+          <a:xfrm>
             <a:off x="786384" y="5367528"/>
             <a:ext cx="329184" cy="329184"/>
           </a:xfrm>
@@ -10781,7 +10634,7 @@
           <a:bodyPr wrap="square" lIns="0" tIns="0" rIns="0" bIns="0" rtlCol="0" anchor="ctr"/>
           <a:lstStyle/>
           <a:p>
-            <a:pPr indent="0" marL="0">
+            <a:pPr marL="0" indent="0">
               <a:buNone/>
             </a:pPr>
             <a:r>
@@ -10820,7 +10673,7 @@
           <a:bodyPr wrap="square" lIns="0" tIns="0" rIns="0" bIns="0" rtlCol="0" anchor="ctr"/>
           <a:lstStyle/>
           <a:p>
-            <a:pPr indent="0" marL="0">
+            <a:pPr marL="0" indent="0">
               <a:buNone/>
             </a:pPr>
             <a:r>
@@ -10859,7 +10712,7 @@
           <a:bodyPr wrap="square" lIns="0" tIns="0" rIns="0" bIns="0" rtlCol="0" anchor="ctr"/>
           <a:lstStyle/>
           <a:p>
-            <a:pPr algn="r" indent="0" marL="0">
+            <a:pPr marL="0" indent="0" algn="r">
               <a:buNone/>
             </a:pPr>
             <a:r>
@@ -10893,6 +10746,7 @@
         <a:solidFill>
           <a:srgbClr val="FFFFFF"/>
         </a:solidFill>
+        <a:effectLst/>
       </p:bgPr>
     </p:bg>
     <p:spTree>
@@ -10930,11 +10784,11 @@
           <a:bodyPr wrap="square" lIns="0" tIns="0" rIns="0" bIns="0" rtlCol="0" anchor="ctr"/>
           <a:lstStyle/>
           <a:p>
-            <a:pPr algn="l" indent="0" marL="0">
-              <a:buNone/>
-            </a:pPr>
-            <a:r>
-              <a:rPr lang="en-US" sz="1200" b="1" spc="200" kern="0" dirty="0">
+            <a:pPr marL="0" indent="0" algn="l">
+              <a:buNone/>
+            </a:pPr>
+            <a:r>
+              <a:rPr lang="en-US" sz="1200" b="1" kern="0" spc="200" dirty="0">
                 <a:solidFill>
                   <a:srgbClr val="6C4BC1"/>
                 </a:solidFill>
@@ -10969,7 +10823,7 @@
           <a:bodyPr wrap="square" lIns="0" tIns="0" rIns="0" bIns="0" rtlCol="0" anchor="ctr"/>
           <a:lstStyle/>
           <a:p>
-            <a:pPr indent="0" marL="0">
+            <a:pPr marL="0" indent="0">
               <a:buNone/>
             </a:pPr>
             <a:r>
@@ -11031,14 +10885,14 @@
       </p:sp>
       <p:pic>
         <p:nvPicPr>
-          <p:cNvPr id="6" name="Image 0" descr="preencoded.png">    </p:cNvPr>
+          <p:cNvPr id="6" name="Image 0" descr="preencoded.png"/>
           <p:cNvPicPr>
             <a:picLocks noChangeAspect="1"/>
           </p:cNvPicPr>
           <p:nvPr/>
         </p:nvPicPr>
         <p:blipFill>
-          <a:blip r:embed="rId1"/>
+          <a:blip r:embed="rId3"/>
           <a:stretch>
             <a:fillRect/>
           </a:stretch>
@@ -11074,7 +10928,7 @@
           <a:bodyPr wrap="square" lIns="0" tIns="0" rIns="0" bIns="0" rtlCol="0" anchor="ctr"/>
           <a:lstStyle/>
           <a:p>
-            <a:pPr indent="0" marL="0">
+            <a:pPr marL="0" indent="0">
               <a:buNone/>
             </a:pPr>
             <a:r>
@@ -11113,7 +10967,7 @@
           <a:bodyPr wrap="square" lIns="0" tIns="0" rIns="0" bIns="0" rtlCol="0" anchor="ctr"/>
           <a:lstStyle/>
           <a:p>
-            <a:pPr indent="0" marL="0">
+            <a:pPr marL="0" indent="0">
               <a:lnSpc>
                 <a:spcPts val="1800"/>
               </a:lnSpc>
@@ -11130,7 +10984,7 @@
                 <a:latin typeface="Calibri" pitchFamily="34" charset="0"/>
                 <a:ea typeface="Calibri" pitchFamily="34" charset="-122"/>
                 <a:cs typeface="Calibri" pitchFamily="34" charset="-120"/>
-                <a:hlinkClick r:id="rId2" invalidUrl="" action="" tgtFrame="" tooltip="" history="1" highlightClick="0" endSnd="0">
+                <a:hlinkClick r:id="rId4">
                   <a:extLst>
                     <a:ext uri="{A12FA001-AC4F-418D-AE19-62706E023703}">
                       <ahyp:hlinkClr xmlns:ahyp="http://schemas.microsoft.com/office/drawing/2018/hyperlinkcolor" val="tx"/>
@@ -11140,7 +10994,21 @@
               </a:rPr>
               <a:t>Guia de instalação da turma</a:t>
             </a:r>
-            <a:pPr indent="0" marL="0">
+            <a:r>
+              <a:rPr lang="en-US" sz="1200" dirty="0">
+                <a:solidFill>
+                  <a:srgbClr val="6B6B80"/>
+                </a:solidFill>
+                <a:latin typeface="Calibri" pitchFamily="34" charset="0"/>
+                <a:ea typeface="Calibri" pitchFamily="34" charset="-122"/>
+                <a:cs typeface="Calibri" pitchFamily="34" charset="-120"/>
+              </a:rPr>
+              <a:t> — passo a passo oficial.</a:t>
+            </a:r>
+            <a:endParaRPr lang="en-US" sz="1200" dirty="0"/>
+          </a:p>
+          <a:p>
+            <a:pPr marL="0" indent="0">
               <a:lnSpc>
                 <a:spcPts val="1800"/>
               </a:lnSpc>
@@ -11158,12 +11026,12 @@
                 <a:ea typeface="Calibri" pitchFamily="34" charset="-122"/>
                 <a:cs typeface="Calibri" pitchFamily="34" charset="-120"/>
               </a:rPr>
-              <a:t> — passo a passo oficial.</a:t>
+              <a:t>SDK do .NET — documentação e instalador oficial: learn.microsoft.com/dotnet</a:t>
             </a:r>
             <a:endParaRPr lang="en-US" sz="1200" dirty="0"/>
           </a:p>
           <a:p>
-            <a:pPr indent="0" marL="0">
+            <a:pPr marL="0" indent="0">
               <a:lnSpc>
                 <a:spcPts val="1800"/>
               </a:lnSpc>
@@ -11173,20 +11041,27 @@
               <a:buNone/>
             </a:pPr>
             <a:r>
-              <a:rPr lang="en-US" sz="1200" dirty="0">
-                <a:solidFill>
-                  <a:srgbClr val="6B6B80"/>
-                </a:solidFill>
-                <a:latin typeface="Calibri" pitchFamily="34" charset="0"/>
-                <a:ea typeface="Calibri" pitchFamily="34" charset="-122"/>
-                <a:cs typeface="Calibri" pitchFamily="34" charset="-120"/>
-              </a:rPr>
-              <a:t>SDK do .NET — documentação e instalador oficial: learn.microsoft.com/dotnet</a:t>
+              <a:rPr lang="en-US" sz="1200" u="sng" dirty="0">
+                <a:solidFill>
+                  <a:srgbClr val="6C4BC1"/>
+                </a:solidFill>
+                <a:latin typeface="Calibri" pitchFamily="34" charset="0"/>
+                <a:ea typeface="Calibri" pitchFamily="34" charset="-122"/>
+                <a:cs typeface="Calibri" pitchFamily="34" charset="-120"/>
+                <a:hlinkClick r:id="rId5">
+                  <a:extLst>
+                    <a:ext uri="{A12FA001-AC4F-418D-AE19-62706E023703}">
+                      <ahyp:hlinkClr xmlns:ahyp="http://schemas.microsoft.com/office/drawing/2018/hyperlinkcolor" val="tx"/>
+                    </a:ext>
+                  </a:extLst>
+                </a:hlinkClick>
+              </a:rPr>
+              <a:t>Git — instalação oficial</a:t>
             </a:r>
             <a:endParaRPr lang="en-US" sz="1200" dirty="0"/>
           </a:p>
           <a:p>
-            <a:pPr indent="0" marL="0">
+            <a:pPr marL="0" indent="0">
               <a:lnSpc>
                 <a:spcPts val="1800"/>
               </a:lnSpc>
@@ -11196,6 +11071,17 @@
               <a:buNone/>
             </a:pPr>
             <a:r>
+              <a:rPr lang="en-US" sz="1200" dirty="0">
+                <a:solidFill>
+                  <a:srgbClr val="6B6B80"/>
+                </a:solidFill>
+                <a:latin typeface="Calibri" pitchFamily="34" charset="0"/>
+                <a:ea typeface="Calibri" pitchFamily="34" charset="-122"/>
+                <a:cs typeface="Calibri" pitchFamily="34" charset="-120"/>
+              </a:rPr>
+              <a:t>Python (opcional, para os exemplos comparativos): </a:t>
+            </a:r>
+            <a:r>
               <a:rPr lang="en-US" sz="1200" u="sng" dirty="0">
                 <a:solidFill>
                   <a:srgbClr val="6C4BC1"/>
@@ -11203,7 +11089,7 @@
                 <a:latin typeface="Calibri" pitchFamily="34" charset="0"/>
                 <a:ea typeface="Calibri" pitchFamily="34" charset="-122"/>
                 <a:cs typeface="Calibri" pitchFamily="34" charset="-120"/>
-                <a:hlinkClick r:id="rId3" invalidUrl="" action="" tgtFrame="" tooltip="" history="1" highlightClick="0" endSnd="0">
+                <a:hlinkClick r:id="rId6">
                   <a:extLst>
                     <a:ext uri="{A12FA001-AC4F-418D-AE19-62706E023703}">
                       <ahyp:hlinkClr xmlns:ahyp="http://schemas.microsoft.com/office/drawing/2018/hyperlinkcolor" val="tx"/>
@@ -11211,9 +11097,139 @@
                   </a:extLst>
                 </a:hlinkClick>
               </a:rPr>
-              <a:t>Git — instalação oficial</a:t>
-            </a:r>
-            <a:pPr indent="0" marL="0">
+              <a:t>python.org/downloads</a:t>
+            </a:r>
+            <a:endParaRPr lang="en-US" sz="1200" dirty="0"/>
+          </a:p>
+        </p:txBody>
+      </p:sp>
+      <p:sp>
+        <p:nvSpPr>
+          <p:cNvPr id="9" name="Shape 6"/>
+          <p:cNvSpPr/>
+          <p:nvPr/>
+        </p:nvSpPr>
+        <p:spPr>
+          <a:xfrm>
+            <a:off x="6263640" y="1691640"/>
+            <a:ext cx="5257800" cy="4251960"/>
+          </a:xfrm>
+          <a:prstGeom prst="roundRect">
+            <a:avLst>
+              <a:gd name="adj" fmla="val 2581"/>
+            </a:avLst>
+          </a:prstGeom>
+          <a:solidFill>
+            <a:srgbClr val="F3F1FB"/>
+          </a:solidFill>
+          <a:ln/>
+        </p:spPr>
+      </p:sp>
+      <p:sp>
+        <p:nvSpPr>
+          <p:cNvPr id="10" name="Shape 7"/>
+          <p:cNvSpPr/>
+          <p:nvPr/>
+        </p:nvSpPr>
+        <p:spPr>
+          <a:xfrm>
+            <a:off x="6519672" y="1947672"/>
+            <a:ext cx="475488" cy="475488"/>
+          </a:xfrm>
+          <a:prstGeom prst="ellipse">
+            <a:avLst/>
+          </a:prstGeom>
+          <a:solidFill>
+            <a:srgbClr val="6C4BC1"/>
+          </a:solidFill>
+          <a:ln/>
+        </p:spPr>
+      </p:sp>
+      <p:pic>
+        <p:nvPicPr>
+          <p:cNvPr id="11" name="Image 1" descr="preencoded.png"/>
+          <p:cNvPicPr>
+            <a:picLocks noChangeAspect="1"/>
+          </p:cNvPicPr>
+          <p:nvPr/>
+        </p:nvPicPr>
+        <p:blipFill>
+          <a:blip r:embed="rId7"/>
+          <a:stretch>
+            <a:fillRect/>
+          </a:stretch>
+        </p:blipFill>
+        <p:spPr>
+          <a:xfrm>
+            <a:off x="6665976" y="2093976"/>
+            <a:ext cx="182880" cy="182880"/>
+          </a:xfrm>
+          <a:prstGeom prst="rect">
+            <a:avLst/>
+          </a:prstGeom>
+        </p:spPr>
+      </p:pic>
+      <p:sp>
+        <p:nvSpPr>
+          <p:cNvPr id="12" name="Text 8"/>
+          <p:cNvSpPr/>
+          <p:nvPr/>
+        </p:nvSpPr>
+        <p:spPr>
+          <a:xfrm>
+            <a:off x="6519672" y="2532888"/>
+            <a:ext cx="4745736" cy="365760"/>
+          </a:xfrm>
+          <a:prstGeom prst="rect">
+            <a:avLst/>
+          </a:prstGeom>
+          <a:noFill/>
+          <a:ln/>
+        </p:spPr>
+        <p:txBody>
+          <a:bodyPr wrap="square" lIns="0" tIns="0" rIns="0" bIns="0" rtlCol="0" anchor="ctr"/>
+          <a:lstStyle/>
+          <a:p>
+            <a:pPr marL="0" indent="0">
+              <a:buNone/>
+            </a:pPr>
+            <a:r>
+              <a:rPr lang="en-US" sz="1550" b="1" dirty="0">
+                <a:solidFill>
+                  <a:srgbClr val="1B1B2F"/>
+                </a:solidFill>
+                <a:latin typeface="Calibri" pitchFamily="34" charset="0"/>
+                <a:ea typeface="Calibri" pitchFamily="34" charset="-122"/>
+                <a:cs typeface="Calibri" pitchFamily="34" charset="-120"/>
+              </a:rPr>
+              <a:t>Vídeos</a:t>
+            </a:r>
+            <a:endParaRPr lang="en-US" sz="1550" dirty="0"/>
+          </a:p>
+        </p:txBody>
+      </p:sp>
+      <p:sp>
+        <p:nvSpPr>
+          <p:cNvPr id="13" name="Text 9"/>
+          <p:cNvSpPr/>
+          <p:nvPr/>
+        </p:nvSpPr>
+        <p:spPr>
+          <a:xfrm>
+            <a:off x="6519672" y="2971800"/>
+            <a:ext cx="4745736" cy="2788920"/>
+          </a:xfrm>
+          <a:prstGeom prst="rect">
+            <a:avLst/>
+          </a:prstGeom>
+          <a:noFill/>
+          <a:ln/>
+        </p:spPr>
+        <p:txBody>
+          <a:bodyPr wrap="square" lIns="0" tIns="0" rIns="0" bIns="0" rtlCol="0" anchor="ctr"/>
+          <a:lstStyle/>
+          <a:p>
+            <a:pPr marL="0" indent="0">
               <a:lnSpc>
                 <a:spcPts val="1800"/>
               </a:lnSpc>
@@ -11222,10 +11238,39 @@
               </a:spcAft>
               <a:buNone/>
             </a:pPr>
+            <a:r>
+              <a:rPr lang="en-US" sz="1200" u="sng" dirty="0">
+                <a:solidFill>
+                  <a:srgbClr val="6C4BC1"/>
+                </a:solidFill>
+                <a:latin typeface="Calibri" pitchFamily="34" charset="0"/>
+                <a:ea typeface="Calibri" pitchFamily="34" charset="-122"/>
+                <a:cs typeface="Calibri" pitchFamily="34" charset="-120"/>
+                <a:hlinkClick r:id="rId8">
+                  <a:extLst>
+                    <a:ext uri="{A12FA001-AC4F-418D-AE19-62706E023703}">
+                      <ahyp:hlinkClr xmlns:ahyp="http://schemas.microsoft.com/office/drawing/2018/hyperlinkcolor" val="tx"/>
+                    </a:ext>
+                  </a:extLst>
+                </a:hlinkClick>
+              </a:rPr>
+              <a:t>Curso em Vídeo (Gustavo Guanabara)</a:t>
+            </a:r>
+            <a:r>
+              <a:rPr lang="en-US" sz="1200" dirty="0">
+                <a:solidFill>
+                  <a:srgbClr val="6B6B80"/>
+                </a:solidFill>
+                <a:latin typeface="Calibri" pitchFamily="34" charset="0"/>
+                <a:ea typeface="Calibri" pitchFamily="34" charset="-122"/>
+                <a:cs typeface="Calibri" pitchFamily="34" charset="-120"/>
+              </a:rPr>
+              <a:t> — série de Lógica de Programação, ótima para reforçar o “porquê” do raciocínio lógico antes da próxima aula.</a:t>
+            </a:r>
             <a:endParaRPr lang="en-US" sz="1200" dirty="0"/>
           </a:p>
           <a:p>
-            <a:pPr indent="0" marL="0">
+            <a:pPr marL="0" indent="0">
               <a:lnSpc>
                 <a:spcPts val="1800"/>
               </a:lnSpc>
@@ -11235,26 +11280,6 @@
               <a:buNone/>
             </a:pPr>
             <a:r>
-              <a:rPr lang="en-US" sz="1200" dirty="0">
-                <a:solidFill>
-                  <a:srgbClr val="6B6B80"/>
-                </a:solidFill>
-                <a:latin typeface="Calibri" pitchFamily="34" charset="0"/>
-                <a:ea typeface="Calibri" pitchFamily="34" charset="-122"/>
-                <a:cs typeface="Calibri" pitchFamily="34" charset="-120"/>
-              </a:rPr>
-              <a:t>Python (opcional, para os exemplos comparativos): </a:t>
-            </a:r>
-            <a:pPr indent="0" marL="0">
-              <a:lnSpc>
-                <a:spcPts val="1800"/>
-              </a:lnSpc>
-              <a:spcAft>
-                <a:spcPts val="1000"/>
-              </a:spcAft>
-              <a:buNone/>
-            </a:pPr>
-            <a:r>
               <a:rPr lang="en-US" sz="1200" u="sng" dirty="0">
                 <a:solidFill>
                   <a:srgbClr val="6C4BC1"/>
@@ -11262,7 +11287,7 @@
                 <a:latin typeface="Calibri" pitchFamily="34" charset="0"/>
                 <a:ea typeface="Calibri" pitchFamily="34" charset="-122"/>
                 <a:cs typeface="Calibri" pitchFamily="34" charset="-120"/>
-                <a:hlinkClick r:id="rId4" invalidUrl="" action="" tgtFrame="" tooltip="" history="1" highlightClick="0" endSnd="0">
+                <a:hlinkClick r:id="rId9">
                   <a:extLst>
                     <a:ext uri="{A12FA001-AC4F-418D-AE19-62706E023703}">
                       <ahyp:hlinkClr xmlns:ahyp="http://schemas.microsoft.com/office/drawing/2018/hyperlinkcolor" val="tx"/>
@@ -11270,224 +11295,8 @@
                   </a:extLst>
                 </a:hlinkClick>
               </a:rPr>
-              <a:t>python.org/downloads</a:t>
-            </a:r>
-            <a:endParaRPr lang="en-US" sz="1200" dirty="0"/>
-          </a:p>
-        </p:txBody>
-      </p:sp>
-      <p:sp>
-        <p:nvSpPr>
-          <p:cNvPr id="9" name="Shape 6"/>
-          <p:cNvSpPr/>
-          <p:nvPr/>
-        </p:nvSpPr>
-        <p:spPr>
-          <a:xfrm>
-            <a:off x="6263640" y="1691640"/>
-            <a:ext cx="5257800" cy="4251960"/>
-          </a:xfrm>
-          <a:prstGeom prst="roundRect">
-            <a:avLst>
-              <a:gd name="adj" fmla="val 2581"/>
-            </a:avLst>
-          </a:prstGeom>
-          <a:solidFill>
-            <a:srgbClr val="F3F1FB"/>
-          </a:solidFill>
-          <a:ln/>
-        </p:spPr>
-      </p:sp>
-      <p:sp>
-        <p:nvSpPr>
-          <p:cNvPr id="10" name="Shape 7"/>
-          <p:cNvSpPr/>
-          <p:nvPr/>
-        </p:nvSpPr>
-        <p:spPr>
-          <a:xfrm>
-            <a:off x="6519672" y="1947672"/>
-            <a:ext cx="475488" cy="475488"/>
-          </a:xfrm>
-          <a:prstGeom prst="ellipse">
-            <a:avLst/>
-          </a:prstGeom>
-          <a:solidFill>
-            <a:srgbClr val="6C4BC1"/>
-          </a:solidFill>
-          <a:ln/>
-        </p:spPr>
-      </p:sp>
-      <p:pic>
-        <p:nvPicPr>
-          <p:cNvPr id="11" name="Image 1" descr="preencoded.png">    </p:cNvPr>
-          <p:cNvPicPr>
-            <a:picLocks noChangeAspect="1"/>
-          </p:cNvPicPr>
-          <p:nvPr/>
-        </p:nvPicPr>
-        <p:blipFill>
-          <a:blip r:embed="rId5"/>
-          <a:stretch>
-            <a:fillRect/>
-          </a:stretch>
-        </p:blipFill>
-        <p:spPr>
-          <a:xfrm>
-            <a:off x="6665976" y="2093976"/>
-            <a:ext cx="182880" cy="182880"/>
-          </a:xfrm>
-          <a:prstGeom prst="rect">
-            <a:avLst/>
-          </a:prstGeom>
-        </p:spPr>
-      </p:pic>
-      <p:sp>
-        <p:nvSpPr>
-          <p:cNvPr id="12" name="Text 8"/>
-          <p:cNvSpPr/>
-          <p:nvPr/>
-        </p:nvSpPr>
-        <p:spPr>
-          <a:xfrm>
-            <a:off x="6519672" y="2532888"/>
-            <a:ext cx="4745736" cy="365760"/>
-          </a:xfrm>
-          <a:prstGeom prst="rect">
-            <a:avLst/>
-          </a:prstGeom>
-          <a:noFill/>
-          <a:ln/>
-        </p:spPr>
-        <p:txBody>
-          <a:bodyPr wrap="square" lIns="0" tIns="0" rIns="0" bIns="0" rtlCol="0" anchor="ctr"/>
-          <a:lstStyle/>
-          <a:p>
-            <a:pPr indent="0" marL="0">
-              <a:buNone/>
-            </a:pPr>
-            <a:r>
-              <a:rPr lang="en-US" sz="1550" b="1" dirty="0">
-                <a:solidFill>
-                  <a:srgbClr val="1B1B2F"/>
-                </a:solidFill>
-                <a:latin typeface="Calibri" pitchFamily="34" charset="0"/>
-                <a:ea typeface="Calibri" pitchFamily="34" charset="-122"/>
-                <a:cs typeface="Calibri" pitchFamily="34" charset="-120"/>
-              </a:rPr>
-              <a:t>Vídeos</a:t>
-            </a:r>
-            <a:endParaRPr lang="en-US" sz="1550" dirty="0"/>
-          </a:p>
-        </p:txBody>
-      </p:sp>
-      <p:sp>
-        <p:nvSpPr>
-          <p:cNvPr id="13" name="Text 9"/>
-          <p:cNvSpPr/>
-          <p:nvPr/>
-        </p:nvSpPr>
-        <p:spPr>
-          <a:xfrm>
-            <a:off x="6519672" y="2971800"/>
-            <a:ext cx="4745736" cy="2788920"/>
-          </a:xfrm>
-          <a:prstGeom prst="rect">
-            <a:avLst/>
-          </a:prstGeom>
-          <a:noFill/>
-          <a:ln/>
-        </p:spPr>
-        <p:txBody>
-          <a:bodyPr wrap="square" lIns="0" tIns="0" rIns="0" bIns="0" rtlCol="0" anchor="ctr"/>
-          <a:lstStyle/>
-          <a:p>
-            <a:pPr indent="0" marL="0">
-              <a:lnSpc>
-                <a:spcPts val="1800"/>
-              </a:lnSpc>
-              <a:spcAft>
-                <a:spcPts val="1000"/>
-              </a:spcAft>
-              <a:buNone/>
-            </a:pPr>
-            <a:r>
-              <a:rPr lang="en-US" sz="1200" u="sng" dirty="0">
-                <a:solidFill>
-                  <a:srgbClr val="6C4BC1"/>
-                </a:solidFill>
-                <a:latin typeface="Calibri" pitchFamily="34" charset="0"/>
-                <a:ea typeface="Calibri" pitchFamily="34" charset="-122"/>
-                <a:cs typeface="Calibri" pitchFamily="34" charset="-120"/>
-                <a:hlinkClick r:id="rId6" invalidUrl="" action="" tgtFrame="" tooltip="" history="1" highlightClick="0" endSnd="0">
-                  <a:extLst>
-                    <a:ext uri="{A12FA001-AC4F-418D-AE19-62706E023703}">
-                      <ahyp:hlinkClr xmlns:ahyp="http://schemas.microsoft.com/office/drawing/2018/hyperlinkcolor" val="tx"/>
-                    </a:ext>
-                  </a:extLst>
-                </a:hlinkClick>
-              </a:rPr>
-              <a:t>Curso em Vídeo (Gustavo Guanabara)</a:t>
-            </a:r>
-            <a:pPr indent="0" marL="0">
-              <a:lnSpc>
-                <a:spcPts val="1800"/>
-              </a:lnSpc>
-              <a:spcAft>
-                <a:spcPts val="1000"/>
-              </a:spcAft>
-              <a:buNone/>
-            </a:pPr>
-            <a:r>
-              <a:rPr lang="en-US" sz="1200" dirty="0">
-                <a:solidFill>
-                  <a:srgbClr val="6B6B80"/>
-                </a:solidFill>
-                <a:latin typeface="Calibri" pitchFamily="34" charset="0"/>
-                <a:ea typeface="Calibri" pitchFamily="34" charset="-122"/>
-                <a:cs typeface="Calibri" pitchFamily="34" charset="-120"/>
-              </a:rPr>
-              <a:t> — série de Lógica de Programação, ótima para reforçar o “porquê” do raciocínio lógico antes da próxima aula.</a:t>
-            </a:r>
-            <a:endParaRPr lang="en-US" sz="1200" dirty="0"/>
-          </a:p>
-          <a:p>
-            <a:pPr indent="0" marL="0">
-              <a:lnSpc>
-                <a:spcPts val="1800"/>
-              </a:lnSpc>
-              <a:spcAft>
-                <a:spcPts val="1000"/>
-              </a:spcAft>
-              <a:buNone/>
-            </a:pPr>
-            <a:r>
-              <a:rPr lang="en-US" sz="1200" u="sng" dirty="0">
-                <a:solidFill>
-                  <a:srgbClr val="6C4BC1"/>
-                </a:solidFill>
-                <a:latin typeface="Calibri" pitchFamily="34" charset="0"/>
-                <a:ea typeface="Calibri" pitchFamily="34" charset="-122"/>
-                <a:cs typeface="Calibri" pitchFamily="34" charset="-120"/>
-                <a:hlinkClick r:id="rId7" invalidUrl="" action="" tgtFrame="" tooltip="" history="1" highlightClick="0" endSnd="0">
-                  <a:extLst>
-                    <a:ext uri="{A12FA001-AC4F-418D-AE19-62706E023703}">
-                      <ahyp:hlinkClr xmlns:ahyp="http://schemas.microsoft.com/office/drawing/2018/hyperlinkcolor" val="tx"/>
-                    </a:ext>
-                  </a:extLst>
-                </a:hlinkClick>
-              </a:rPr>
               <a:t>Tutoriais de configuração de ambiente</a:t>
             </a:r>
-            <a:pPr indent="0" marL="0">
-              <a:lnSpc>
-                <a:spcPts val="1800"/>
-              </a:lnSpc>
-              <a:spcAft>
-                <a:spcPts val="1000"/>
-              </a:spcAft>
-              <a:buNone/>
-            </a:pPr>
             <a:r>
               <a:rPr lang="en-US" sz="1200" dirty="0">
                 <a:solidFill>
@@ -11524,7 +11333,7 @@
           <a:bodyPr wrap="square" lIns="0" tIns="0" rIns="0" bIns="0" rtlCol="0" anchor="ctr"/>
           <a:lstStyle/>
           <a:p>
-            <a:pPr algn="r" indent="0" marL="0">
+            <a:pPr marL="0" indent="0" algn="r">
               <a:buNone/>
             </a:pPr>
             <a:r>
@@ -11558,6 +11367,7 @@
         <a:solidFill>
           <a:srgbClr val="141B41"/>
         </a:solidFill>
+        <a:effectLst/>
       </p:bgPr>
     </p:bg>
     <p:spTree>
@@ -11644,14 +11454,14 @@
       </p:sp>
       <p:pic>
         <p:nvPicPr>
-          <p:cNvPr id="5" name="Image 0" descr="preencoded.png">    </p:cNvPr>
+          <p:cNvPr id="5" name="Image 0" descr="preencoded.png"/>
           <p:cNvPicPr>
             <a:picLocks noChangeAspect="1"/>
           </p:cNvPicPr>
           <p:nvPr/>
         </p:nvPicPr>
         <p:blipFill>
-          <a:blip r:embed="rId1"/>
+          <a:blip r:embed="rId3"/>
           <a:stretch>
             <a:fillRect/>
           </a:stretch>
@@ -11687,11 +11497,11 @@
           <a:bodyPr wrap="square" lIns="0" tIns="0" rIns="0" bIns="0" rtlCol="0" anchor="ctr"/>
           <a:lstStyle/>
           <a:p>
-            <a:pPr indent="0" marL="0">
-              <a:buNone/>
-            </a:pPr>
-            <a:r>
-              <a:rPr lang="en-US" sz="1300" b="1" spc="300" kern="0" dirty="0">
+            <a:pPr marL="0" indent="0">
+              <a:buNone/>
+            </a:pPr>
+            <a:r>
+              <a:rPr lang="en-US" sz="1300" b="1" kern="0" spc="300" dirty="0">
                 <a:solidFill>
                   <a:srgbClr val="2FE6C7"/>
                 </a:solidFill>
@@ -11726,7 +11536,7 @@
           <a:bodyPr wrap="square" lIns="0" tIns="0" rIns="0" bIns="0" rtlCol="0" anchor="ctr"/>
           <a:lstStyle/>
           <a:p>
-            <a:pPr indent="0" marL="0">
+            <a:pPr marL="0" indent="0">
               <a:buNone/>
             </a:pPr>
             <a:r>
@@ -11765,7 +11575,7 @@
           <a:bodyPr wrap="square" lIns="0" tIns="0" rIns="0" bIns="0" rtlCol="0" anchor="ctr"/>
           <a:lstStyle/>
           <a:p>
-            <a:pPr indent="0" marL="0">
+            <a:pPr marL="0" indent="0">
               <a:lnSpc>
                 <a:spcPts val="4000"/>
               </a:lnSpc>
@@ -11785,7 +11595,7 @@
             <a:endParaRPr lang="en-US" sz="3400" dirty="0"/>
           </a:p>
           <a:p>
-            <a:pPr indent="0" marL="0">
+            <a:pPr marL="0" indent="0">
               <a:lnSpc>
                 <a:spcPts val="4000"/>
               </a:lnSpc>
@@ -11827,7 +11637,7 @@
           <a:bodyPr wrap="square" lIns="0" tIns="0" rIns="0" bIns="0" rtlCol="0" anchor="ctr"/>
           <a:lstStyle/>
           <a:p>
-            <a:pPr indent="0" marL="0">
+            <a:pPr marL="0" indent="0">
               <a:buNone/>
             </a:pPr>
             <a:r>
@@ -11866,11 +11676,11 @@
           <a:bodyPr wrap="square" lIns="0" tIns="0" rIns="0" bIns="0" rtlCol="0" anchor="ctr"/>
           <a:lstStyle/>
           <a:p>
-            <a:pPr indent="0" marL="0">
-              <a:buNone/>
-            </a:pPr>
-            <a:r>
-              <a:rPr lang="en-US" sz="1150" spc="100" kern="0" dirty="0">
+            <a:pPr marL="0" indent="0">
+              <a:buNone/>
+            </a:pPr>
+            <a:r>
+              <a:rPr lang="en-US" sz="1150" kern="0" spc="100" dirty="0">
                 <a:solidFill>
                   <a:srgbClr val="6F76B0"/>
                 </a:solidFill>
@@ -11900,6 +11710,7 @@
         <a:solidFill>
           <a:srgbClr val="FFFFFF"/>
         </a:solidFill>
+        <a:effectLst/>
       </p:bgPr>
     </p:bg>
     <p:spTree>
@@ -11937,11 +11748,11 @@
           <a:bodyPr wrap="square" lIns="0" tIns="0" rIns="0" bIns="0" rtlCol="0" anchor="ctr"/>
           <a:lstStyle/>
           <a:p>
-            <a:pPr algn="l" indent="0" marL="0">
-              <a:buNone/>
-            </a:pPr>
-            <a:r>
-              <a:rPr lang="en-US" sz="1200" b="1" spc="200" kern="0" dirty="0">
+            <a:pPr marL="0" indent="0" algn="l">
+              <a:buNone/>
+            </a:pPr>
+            <a:r>
+              <a:rPr lang="en-US" sz="1200" b="1" kern="0" spc="200" dirty="0">
                 <a:solidFill>
                   <a:srgbClr val="6C4BC1"/>
                 </a:solidFill>
@@ -11976,7 +11787,7 @@
           <a:bodyPr wrap="square" lIns="0" tIns="0" rIns="0" bIns="0" rtlCol="0" anchor="ctr"/>
           <a:lstStyle/>
           <a:p>
-            <a:pPr indent="0" marL="0">
+            <a:pPr marL="0" indent="0">
               <a:buNone/>
             </a:pPr>
             <a:r>
@@ -12015,7 +11826,7 @@
           <a:bodyPr wrap="square" lIns="0" tIns="0" rIns="0" bIns="0" rtlCol="0" anchor="ctr"/>
           <a:lstStyle/>
           <a:p>
-            <a:pPr indent="0" marL="0">
+            <a:pPr marL="0" indent="0">
               <a:lnSpc>
                 <a:spcPts val="2200"/>
               </a:lnSpc>
@@ -12057,7 +11868,7 @@
           <a:bodyPr wrap="square" lIns="0" tIns="0" rIns="0" bIns="0" rtlCol="0" anchor="ctr"/>
           <a:lstStyle/>
           <a:p>
-            <a:pPr indent="0" marL="0">
+            <a:pPr marL="0" indent="0">
               <a:lnSpc>
                 <a:spcPts val="2200"/>
               </a:lnSpc>
@@ -12122,251 +11933,7 @@
       </p:sp>
       <p:pic>
         <p:nvPicPr>
-          <p:cNvPr id="8" name="Image 0" descr="preencoded.png">    </p:cNvPr>
-          <p:cNvPicPr>
-            <a:picLocks noChangeAspect="1"/>
-          </p:cNvPicPr>
-          <p:nvPr/>
-        </p:nvPicPr>
-        <p:blipFill>
-          <a:blip r:embed="rId1"/>
-          <a:stretch>
-            <a:fillRect/>
-          </a:stretch>
-        </p:blipFill>
-        <p:spPr>
-          <a:xfrm>
-            <a:off x="6821424" y="1380744"/>
-            <a:ext cx="256032" cy="256032"/>
-          </a:xfrm>
-          <a:prstGeom prst="rect">
-            <a:avLst/>
-          </a:prstGeom>
-        </p:spPr>
-      </p:pic>
-      <p:sp>
-        <p:nvSpPr>
-          <p:cNvPr id="9" name="Text 6"/>
-          <p:cNvSpPr/>
-          <p:nvPr/>
-        </p:nvSpPr>
-        <p:spPr>
-          <a:xfrm>
-            <a:off x="7452360" y="1216152"/>
-            <a:ext cx="3931920" cy="411480"/>
-          </a:xfrm>
-          <a:prstGeom prst="rect">
-            <a:avLst/>
-          </a:prstGeom>
-          <a:noFill/>
-          <a:ln/>
-        </p:spPr>
-        <p:txBody>
-          <a:bodyPr wrap="square" lIns="0" tIns="0" rIns="0" bIns="0" rtlCol="0" anchor="ctr"/>
-          <a:lstStyle/>
-          <a:p>
-            <a:pPr indent="0" marL="0">
-              <a:buNone/>
-            </a:pPr>
-            <a:r>
-              <a:rPr lang="en-US" sz="1600" b="1" dirty="0">
-                <a:solidFill>
-                  <a:srgbClr val="1B1B2F"/>
-                </a:solidFill>
-                <a:latin typeface="Calibri" pitchFamily="34" charset="0"/>
-                <a:ea typeface="Calibri" pitchFamily="34" charset="-122"/>
-                <a:cs typeface="Calibri" pitchFamily="34" charset="-120"/>
-              </a:rPr>
-              <a:t>Checagem</a:t>
-            </a:r>
-            <a:endParaRPr lang="en-US" sz="1600" dirty="0"/>
-          </a:p>
-        </p:txBody>
-      </p:sp>
-      <p:sp>
-        <p:nvSpPr>
-          <p:cNvPr id="10" name="Text 7"/>
-          <p:cNvSpPr/>
-          <p:nvPr/>
-        </p:nvSpPr>
-        <p:spPr>
-          <a:xfrm>
-            <a:off x="7452360" y="1673352"/>
-            <a:ext cx="3931920" cy="365760"/>
-          </a:xfrm>
-          <a:prstGeom prst="rect">
-            <a:avLst/>
-          </a:prstGeom>
-          <a:noFill/>
-          <a:ln/>
-        </p:spPr>
-        <p:txBody>
-          <a:bodyPr wrap="square" lIns="0" tIns="0" rIns="0" bIns="0" rtlCol="0" anchor="ctr"/>
-          <a:lstStyle/>
-          <a:p>
-            <a:pPr indent="0" marL="0">
-              <a:buNone/>
-            </a:pPr>
-            <a:r>
-              <a:rPr lang="en-US" sz="1250" i="1" dirty="0">
-                <a:solidFill>
-                  <a:srgbClr val="6C4BC1"/>
-                </a:solidFill>
-                <a:latin typeface="Calibri" pitchFamily="34" charset="0"/>
-                <a:ea typeface="Calibri" pitchFamily="34" charset="-122"/>
-                <a:cs typeface="Calibri" pitchFamily="34" charset="-120"/>
-              </a:rPr>
-              <a:t>Frequência e desempenho monitorados</a:t>
-            </a:r>
-            <a:endParaRPr lang="en-US" sz="1250" dirty="0"/>
-          </a:p>
-        </p:txBody>
-      </p:sp>
-      <p:sp>
-        <p:nvSpPr>
-          <p:cNvPr id="11" name="Shape 8"/>
-          <p:cNvSpPr/>
-          <p:nvPr/>
-        </p:nvSpPr>
-        <p:spPr>
-          <a:xfrm>
-            <a:off x="6675120" y="2834640"/>
-            <a:ext cx="548640" cy="548640"/>
-          </a:xfrm>
-          <a:prstGeom prst="ellipse">
-            <a:avLst/>
-          </a:prstGeom>
-          <a:solidFill>
-            <a:srgbClr val="6C4BC1"/>
-          </a:solidFill>
-          <a:ln/>
-        </p:spPr>
-      </p:sp>
-      <p:pic>
-        <p:nvPicPr>
-          <p:cNvPr id="12" name="Image 1" descr="preencoded.png">    </p:cNvPr>
-          <p:cNvPicPr>
-            <a:picLocks noChangeAspect="1"/>
-          </p:cNvPicPr>
-          <p:nvPr/>
-        </p:nvPicPr>
-        <p:blipFill>
-          <a:blip r:embed="rId2"/>
-          <a:stretch>
-            <a:fillRect/>
-          </a:stretch>
-        </p:blipFill>
-        <p:spPr>
-          <a:xfrm>
-            <a:off x="6821424" y="2980944"/>
-            <a:ext cx="256032" cy="256032"/>
-          </a:xfrm>
-          <a:prstGeom prst="rect">
-            <a:avLst/>
-          </a:prstGeom>
-        </p:spPr>
-      </p:pic>
-      <p:sp>
-        <p:nvSpPr>
-          <p:cNvPr id="13" name="Text 9"/>
-          <p:cNvSpPr/>
-          <p:nvPr/>
-        </p:nvSpPr>
-        <p:spPr>
-          <a:xfrm>
-            <a:off x="7452360" y="2816352"/>
-            <a:ext cx="3931920" cy="411480"/>
-          </a:xfrm>
-          <a:prstGeom prst="rect">
-            <a:avLst/>
-          </a:prstGeom>
-          <a:noFill/>
-          <a:ln/>
-        </p:spPr>
-        <p:txBody>
-          <a:bodyPr wrap="square" lIns="0" tIns="0" rIns="0" bIns="0" rtlCol="0" anchor="ctr"/>
-          <a:lstStyle/>
-          <a:p>
-            <a:pPr indent="0" marL="0">
-              <a:buNone/>
-            </a:pPr>
-            <a:r>
-              <a:rPr lang="en-US" sz="1600" b="1" dirty="0">
-                <a:solidFill>
-                  <a:srgbClr val="1B1B2F"/>
-                </a:solidFill>
-                <a:latin typeface="Calibri" pitchFamily="34" charset="0"/>
-                <a:ea typeface="Calibri" pitchFamily="34" charset="-122"/>
-                <a:cs typeface="Calibri" pitchFamily="34" charset="-120"/>
-              </a:rPr>
-              <a:t>Contato direto</a:t>
-            </a:r>
-            <a:endParaRPr lang="en-US" sz="1600" dirty="0"/>
-          </a:p>
-        </p:txBody>
-      </p:sp>
-      <p:sp>
-        <p:nvSpPr>
-          <p:cNvPr id="14" name="Text 10"/>
-          <p:cNvSpPr/>
-          <p:nvPr/>
-        </p:nvSpPr>
-        <p:spPr>
-          <a:xfrm>
-            <a:off x="7452360" y="3273552"/>
-            <a:ext cx="3931920" cy="365760"/>
-          </a:xfrm>
-          <a:prstGeom prst="rect">
-            <a:avLst/>
-          </a:prstGeom>
-          <a:noFill/>
-          <a:ln/>
-        </p:spPr>
-        <p:txBody>
-          <a:bodyPr wrap="square" lIns="0" tIns="0" rIns="0" bIns="0" rtlCol="0" anchor="ctr"/>
-          <a:lstStyle/>
-          <a:p>
-            <a:pPr indent="0" marL="0">
-              <a:buNone/>
-            </a:pPr>
-            <a:r>
-              <a:rPr lang="en-US" sz="1250" i="1" dirty="0">
-                <a:solidFill>
-                  <a:srgbClr val="6C4BC1"/>
-                </a:solidFill>
-                <a:latin typeface="Calibri" pitchFamily="34" charset="0"/>
-                <a:ea typeface="Calibri" pitchFamily="34" charset="-122"/>
-                <a:cs typeface="Calibri" pitchFamily="34" charset="-120"/>
-              </a:rPr>
-              <a:t>Mensagem, e-mail ou conversa individual</a:t>
-            </a:r>
-            <a:endParaRPr lang="en-US" sz="1250" dirty="0"/>
-          </a:p>
-        </p:txBody>
-      </p:sp>
-      <p:sp>
-        <p:nvSpPr>
-          <p:cNvPr id="15" name="Shape 11"/>
-          <p:cNvSpPr/>
-          <p:nvPr/>
-        </p:nvSpPr>
-        <p:spPr>
-          <a:xfrm>
-            <a:off x="6675120" y="4434840"/>
-            <a:ext cx="548640" cy="548640"/>
-          </a:xfrm>
-          <a:prstGeom prst="ellipse">
-            <a:avLst/>
-          </a:prstGeom>
-          <a:solidFill>
-            <a:srgbClr val="6C4BC1"/>
-          </a:solidFill>
-          <a:ln/>
-        </p:spPr>
-      </p:sp>
-      <p:pic>
-        <p:nvPicPr>
-          <p:cNvPr id="16" name="Image 2" descr="preencoded.png">    </p:cNvPr>
+          <p:cNvPr id="8" name="Image 0" descr="preencoded.png"/>
           <p:cNvPicPr>
             <a:picLocks noChangeAspect="1"/>
           </p:cNvPicPr>
@@ -12380,6 +11947,250 @@
         </p:blipFill>
         <p:spPr>
           <a:xfrm>
+            <a:off x="6821424" y="1380744"/>
+            <a:ext cx="256032" cy="256032"/>
+          </a:xfrm>
+          <a:prstGeom prst="rect">
+            <a:avLst/>
+          </a:prstGeom>
+        </p:spPr>
+      </p:pic>
+      <p:sp>
+        <p:nvSpPr>
+          <p:cNvPr id="9" name="Text 6"/>
+          <p:cNvSpPr/>
+          <p:nvPr/>
+        </p:nvSpPr>
+        <p:spPr>
+          <a:xfrm>
+            <a:off x="7452360" y="1216152"/>
+            <a:ext cx="3931920" cy="411480"/>
+          </a:xfrm>
+          <a:prstGeom prst="rect">
+            <a:avLst/>
+          </a:prstGeom>
+          <a:noFill/>
+          <a:ln/>
+        </p:spPr>
+        <p:txBody>
+          <a:bodyPr wrap="square" lIns="0" tIns="0" rIns="0" bIns="0" rtlCol="0" anchor="ctr"/>
+          <a:lstStyle/>
+          <a:p>
+            <a:pPr marL="0" indent="0">
+              <a:buNone/>
+            </a:pPr>
+            <a:r>
+              <a:rPr lang="en-US" sz="1600" b="1" dirty="0">
+                <a:solidFill>
+                  <a:srgbClr val="1B1B2F"/>
+                </a:solidFill>
+                <a:latin typeface="Calibri" pitchFamily="34" charset="0"/>
+                <a:ea typeface="Calibri" pitchFamily="34" charset="-122"/>
+                <a:cs typeface="Calibri" pitchFamily="34" charset="-120"/>
+              </a:rPr>
+              <a:t>Checagem</a:t>
+            </a:r>
+            <a:endParaRPr lang="en-US" sz="1600" dirty="0"/>
+          </a:p>
+        </p:txBody>
+      </p:sp>
+      <p:sp>
+        <p:nvSpPr>
+          <p:cNvPr id="10" name="Text 7"/>
+          <p:cNvSpPr/>
+          <p:nvPr/>
+        </p:nvSpPr>
+        <p:spPr>
+          <a:xfrm>
+            <a:off x="7452360" y="1673352"/>
+            <a:ext cx="3931920" cy="365760"/>
+          </a:xfrm>
+          <a:prstGeom prst="rect">
+            <a:avLst/>
+          </a:prstGeom>
+          <a:noFill/>
+          <a:ln/>
+        </p:spPr>
+        <p:txBody>
+          <a:bodyPr wrap="square" lIns="0" tIns="0" rIns="0" bIns="0" rtlCol="0" anchor="ctr"/>
+          <a:lstStyle/>
+          <a:p>
+            <a:pPr marL="0" indent="0">
+              <a:buNone/>
+            </a:pPr>
+            <a:r>
+              <a:rPr lang="en-US" sz="1250" i="1" dirty="0">
+                <a:solidFill>
+                  <a:srgbClr val="6C4BC1"/>
+                </a:solidFill>
+                <a:latin typeface="Calibri" pitchFamily="34" charset="0"/>
+                <a:ea typeface="Calibri" pitchFamily="34" charset="-122"/>
+                <a:cs typeface="Calibri" pitchFamily="34" charset="-120"/>
+              </a:rPr>
+              <a:t>Frequência e desempenho monitorados</a:t>
+            </a:r>
+            <a:endParaRPr lang="en-US" sz="1250" dirty="0"/>
+          </a:p>
+        </p:txBody>
+      </p:sp>
+      <p:sp>
+        <p:nvSpPr>
+          <p:cNvPr id="11" name="Shape 8"/>
+          <p:cNvSpPr/>
+          <p:nvPr/>
+        </p:nvSpPr>
+        <p:spPr>
+          <a:xfrm>
+            <a:off x="6675120" y="2834640"/>
+            <a:ext cx="548640" cy="548640"/>
+          </a:xfrm>
+          <a:prstGeom prst="ellipse">
+            <a:avLst/>
+          </a:prstGeom>
+          <a:solidFill>
+            <a:srgbClr val="6C4BC1"/>
+          </a:solidFill>
+          <a:ln/>
+        </p:spPr>
+      </p:sp>
+      <p:pic>
+        <p:nvPicPr>
+          <p:cNvPr id="12" name="Image 1" descr="preencoded.png"/>
+          <p:cNvPicPr>
+            <a:picLocks noChangeAspect="1"/>
+          </p:cNvPicPr>
+          <p:nvPr/>
+        </p:nvPicPr>
+        <p:blipFill>
+          <a:blip r:embed="rId4"/>
+          <a:stretch>
+            <a:fillRect/>
+          </a:stretch>
+        </p:blipFill>
+        <p:spPr>
+          <a:xfrm>
+            <a:off x="6821424" y="2980944"/>
+            <a:ext cx="256032" cy="256032"/>
+          </a:xfrm>
+          <a:prstGeom prst="rect">
+            <a:avLst/>
+          </a:prstGeom>
+        </p:spPr>
+      </p:pic>
+      <p:sp>
+        <p:nvSpPr>
+          <p:cNvPr id="13" name="Text 9"/>
+          <p:cNvSpPr/>
+          <p:nvPr/>
+        </p:nvSpPr>
+        <p:spPr>
+          <a:xfrm>
+            <a:off x="7452360" y="2816352"/>
+            <a:ext cx="3931920" cy="411480"/>
+          </a:xfrm>
+          <a:prstGeom prst="rect">
+            <a:avLst/>
+          </a:prstGeom>
+          <a:noFill/>
+          <a:ln/>
+        </p:spPr>
+        <p:txBody>
+          <a:bodyPr wrap="square" lIns="0" tIns="0" rIns="0" bIns="0" rtlCol="0" anchor="ctr"/>
+          <a:lstStyle/>
+          <a:p>
+            <a:pPr marL="0" indent="0">
+              <a:buNone/>
+            </a:pPr>
+            <a:r>
+              <a:rPr lang="en-US" sz="1600" b="1" dirty="0">
+                <a:solidFill>
+                  <a:srgbClr val="1B1B2F"/>
+                </a:solidFill>
+                <a:latin typeface="Calibri" pitchFamily="34" charset="0"/>
+                <a:ea typeface="Calibri" pitchFamily="34" charset="-122"/>
+                <a:cs typeface="Calibri" pitchFamily="34" charset="-120"/>
+              </a:rPr>
+              <a:t>Contato direto</a:t>
+            </a:r>
+            <a:endParaRPr lang="en-US" sz="1600" dirty="0"/>
+          </a:p>
+        </p:txBody>
+      </p:sp>
+      <p:sp>
+        <p:nvSpPr>
+          <p:cNvPr id="14" name="Text 10"/>
+          <p:cNvSpPr/>
+          <p:nvPr/>
+        </p:nvSpPr>
+        <p:spPr>
+          <a:xfrm>
+            <a:off x="7452360" y="3273552"/>
+            <a:ext cx="3931920" cy="365760"/>
+          </a:xfrm>
+          <a:prstGeom prst="rect">
+            <a:avLst/>
+          </a:prstGeom>
+          <a:noFill/>
+          <a:ln/>
+        </p:spPr>
+        <p:txBody>
+          <a:bodyPr wrap="square" lIns="0" tIns="0" rIns="0" bIns="0" rtlCol="0" anchor="ctr"/>
+          <a:lstStyle/>
+          <a:p>
+            <a:pPr marL="0" indent="0">
+              <a:buNone/>
+            </a:pPr>
+            <a:r>
+              <a:rPr lang="en-US" sz="1250" i="1" dirty="0">
+                <a:solidFill>
+                  <a:srgbClr val="6C4BC1"/>
+                </a:solidFill>
+                <a:latin typeface="Calibri" pitchFamily="34" charset="0"/>
+                <a:ea typeface="Calibri" pitchFamily="34" charset="-122"/>
+                <a:cs typeface="Calibri" pitchFamily="34" charset="-120"/>
+              </a:rPr>
+              <a:t>Mensagem, e-mail ou conversa individual</a:t>
+            </a:r>
+            <a:endParaRPr lang="en-US" sz="1250" dirty="0"/>
+          </a:p>
+        </p:txBody>
+      </p:sp>
+      <p:sp>
+        <p:nvSpPr>
+          <p:cNvPr id="15" name="Shape 11"/>
+          <p:cNvSpPr/>
+          <p:nvPr/>
+        </p:nvSpPr>
+        <p:spPr>
+          <a:xfrm>
+            <a:off x="6675120" y="4434840"/>
+            <a:ext cx="548640" cy="548640"/>
+          </a:xfrm>
+          <a:prstGeom prst="ellipse">
+            <a:avLst/>
+          </a:prstGeom>
+          <a:solidFill>
+            <a:srgbClr val="6C4BC1"/>
+          </a:solidFill>
+          <a:ln/>
+        </p:spPr>
+      </p:sp>
+      <p:pic>
+        <p:nvPicPr>
+          <p:cNvPr id="16" name="Image 2" descr="preencoded.png"/>
+          <p:cNvPicPr>
+            <a:picLocks noChangeAspect="1"/>
+          </p:cNvPicPr>
+          <p:nvPr/>
+        </p:nvPicPr>
+        <p:blipFill>
+          <a:blip r:embed="rId5"/>
+          <a:stretch>
+            <a:fillRect/>
+          </a:stretch>
+        </p:blipFill>
+        <p:spPr>
+          <a:xfrm>
             <a:off x="6821424" y="4581144"/>
             <a:ext cx="256032" cy="256032"/>
           </a:xfrm>
@@ -12409,7 +12220,7 @@
           <a:bodyPr wrap="square" lIns="0" tIns="0" rIns="0" bIns="0" rtlCol="0" anchor="ctr"/>
           <a:lstStyle/>
           <a:p>
-            <a:pPr indent="0" marL="0">
+            <a:pPr marL="0" indent="0">
               <a:buNone/>
             </a:pPr>
             <a:r>
@@ -12448,7 +12259,7 @@
           <a:bodyPr wrap="square" lIns="0" tIns="0" rIns="0" bIns="0" rtlCol="0" anchor="ctr"/>
           <a:lstStyle/>
           <a:p>
-            <a:pPr indent="0" marL="0">
+            <a:pPr marL="0" indent="0">
               <a:buNone/>
             </a:pPr>
             <a:r>
@@ -12487,7 +12298,7 @@
           <a:bodyPr wrap="square" lIns="0" tIns="0" rIns="0" bIns="0" rtlCol="0" anchor="ctr"/>
           <a:lstStyle/>
           <a:p>
-            <a:pPr algn="r" indent="0" marL="0">
+            <a:pPr marL="0" indent="0" algn="r">
               <a:buNone/>
             </a:pPr>
             <a:r>
@@ -12521,6 +12332,7 @@
         <a:solidFill>
           <a:srgbClr val="FFFFFF"/>
         </a:solidFill>
+        <a:effectLst/>
       </p:bgPr>
     </p:bg>
     <p:spTree>
@@ -12558,11 +12370,11 @@
           <a:bodyPr wrap="square" lIns="0" tIns="0" rIns="0" bIns="0" rtlCol="0" anchor="ctr"/>
           <a:lstStyle/>
           <a:p>
-            <a:pPr algn="l" indent="0" marL="0">
-              <a:buNone/>
-            </a:pPr>
-            <a:r>
-              <a:rPr lang="en-US" sz="1200" b="1" spc="200" kern="0" dirty="0">
+            <a:pPr marL="0" indent="0" algn="l">
+              <a:buNone/>
+            </a:pPr>
+            <a:r>
+              <a:rPr lang="en-US" sz="1200" b="1" kern="0" spc="200" dirty="0">
                 <a:solidFill>
                   <a:srgbClr val="6C4BC1"/>
                 </a:solidFill>
@@ -12597,7 +12409,7 @@
           <a:bodyPr wrap="square" lIns="0" tIns="0" rIns="0" bIns="0" rtlCol="0" anchor="ctr"/>
           <a:lstStyle/>
           <a:p>
-            <a:pPr indent="0" marL="0">
+            <a:pPr marL="0" indent="0">
               <a:buNone/>
             </a:pPr>
             <a:r>
@@ -12636,7 +12448,7 @@
           <a:bodyPr wrap="square" lIns="0" tIns="0" rIns="0" bIns="0" rtlCol="0" anchor="ctr"/>
           <a:lstStyle/>
           <a:p>
-            <a:pPr indent="0" marL="0">
+            <a:pPr marL="0" indent="0">
               <a:buNone/>
             </a:pPr>
             <a:r>
@@ -12698,295 +12510,7 @@
       </p:sp>
       <p:pic>
         <p:nvPicPr>
-          <p:cNvPr id="7" name="Image 0" descr="preencoded.png">    </p:cNvPr>
-          <p:cNvPicPr>
-            <a:picLocks noChangeAspect="1"/>
-          </p:cNvPicPr>
-          <p:nvPr/>
-        </p:nvPicPr>
-        <p:blipFill>
-          <a:blip r:embed="rId1"/>
-          <a:stretch>
-            <a:fillRect/>
-          </a:stretch>
-        </p:blipFill>
-        <p:spPr>
-          <a:xfrm>
-            <a:off x="1014984" y="2455164"/>
-            <a:ext cx="274320" cy="274320"/>
-          </a:xfrm>
-          <a:prstGeom prst="rect">
-            <a:avLst/>
-          </a:prstGeom>
-        </p:spPr>
-      </p:pic>
-      <p:sp>
-        <p:nvSpPr>
-          <p:cNvPr id="8" name="Text 5"/>
-          <p:cNvSpPr/>
-          <p:nvPr/>
-        </p:nvSpPr>
-        <p:spPr>
-          <a:xfrm>
-            <a:off x="1691640" y="2148840"/>
-            <a:ext cx="3291840" cy="886968"/>
-          </a:xfrm>
-          <a:prstGeom prst="rect">
-            <a:avLst/>
-          </a:prstGeom>
-          <a:noFill/>
-          <a:ln/>
-        </p:spPr>
-        <p:txBody>
-          <a:bodyPr wrap="square" lIns="0" tIns="0" rIns="0" bIns="0" rtlCol="0" anchor="ctr"/>
-          <a:lstStyle/>
-          <a:p>
-            <a:pPr indent="0" marL="0">
-              <a:buNone/>
-            </a:pPr>
-            <a:r>
-              <a:rPr lang="en-US" sz="1550" b="1" dirty="0">
-                <a:solidFill>
-                  <a:srgbClr val="1B1B2F"/>
-                </a:solidFill>
-                <a:latin typeface="Calibri" pitchFamily="34" charset="0"/>
-                <a:ea typeface="Calibri" pitchFamily="34" charset="-122"/>
-                <a:cs typeface="Calibri" pitchFamily="34" charset="-120"/>
-              </a:rPr>
-              <a:t>O banco liga</a:t>
-            </a:r>
-            <a:endParaRPr lang="en-US" sz="1550" dirty="0"/>
-          </a:p>
-        </p:txBody>
-      </p:sp>
-      <p:sp>
-        <p:nvSpPr>
-          <p:cNvPr id="9" name="Text 6"/>
-          <p:cNvSpPr/>
-          <p:nvPr/>
-        </p:nvSpPr>
-        <p:spPr>
-          <a:xfrm>
-            <a:off x="5120640" y="2148840"/>
-            <a:ext cx="6217920" cy="886968"/>
-          </a:xfrm>
-          <a:prstGeom prst="rect">
-            <a:avLst/>
-          </a:prstGeom>
-          <a:noFill/>
-          <a:ln/>
-        </p:spPr>
-        <p:txBody>
-          <a:bodyPr wrap="square" lIns="0" tIns="0" rIns="0" bIns="0" rtlCol="0" anchor="ctr"/>
-          <a:lstStyle/>
-          <a:p>
-            <a:pPr indent="0" marL="0">
-              <a:buNone/>
-            </a:pPr>
-            <a:r>
-              <a:rPr lang="en-US" sz="1300" dirty="0">
-                <a:solidFill>
-                  <a:srgbClr val="6B6B80"/>
-                </a:solidFill>
-                <a:latin typeface="Calibri" pitchFamily="34" charset="0"/>
-                <a:ea typeface="Calibri" pitchFamily="34" charset="-122"/>
-                <a:cs typeface="Calibri" pitchFamily="34" charset="-120"/>
-              </a:rPr>
-              <a:t>Quando percebe um gasto fora do seu padrão habitual</a:t>
-            </a:r>
-            <a:endParaRPr lang="en-US" sz="1300" dirty="0"/>
-          </a:p>
-        </p:txBody>
-      </p:sp>
-      <p:sp>
-        <p:nvSpPr>
-          <p:cNvPr id="10" name="Shape 7"/>
-          <p:cNvSpPr/>
-          <p:nvPr/>
-        </p:nvSpPr>
-        <p:spPr>
-          <a:xfrm>
-            <a:off x="640080" y="3200400"/>
-            <a:ext cx="10881360" cy="886968"/>
-          </a:xfrm>
-          <a:prstGeom prst="roundRect">
-            <a:avLst>
-              <a:gd name="adj" fmla="val 10309"/>
-            </a:avLst>
-          </a:prstGeom>
-          <a:solidFill>
-            <a:srgbClr val="F3F1FB"/>
-          </a:solidFill>
-          <a:ln/>
-        </p:spPr>
-      </p:sp>
-      <p:sp>
-        <p:nvSpPr>
-          <p:cNvPr id="11" name="Shape 8"/>
-          <p:cNvSpPr/>
-          <p:nvPr/>
-        </p:nvSpPr>
-        <p:spPr>
-          <a:xfrm>
-            <a:off x="868680" y="3360420"/>
-            <a:ext cx="566928" cy="566928"/>
-          </a:xfrm>
-          <a:prstGeom prst="ellipse">
-            <a:avLst/>
-          </a:prstGeom>
-          <a:solidFill>
-            <a:srgbClr val="6C4BC1"/>
-          </a:solidFill>
-          <a:ln/>
-        </p:spPr>
-      </p:sp>
-      <p:pic>
-        <p:nvPicPr>
-          <p:cNvPr id="12" name="Image 1" descr="preencoded.png">    </p:cNvPr>
-          <p:cNvPicPr>
-            <a:picLocks noChangeAspect="1"/>
-          </p:cNvPicPr>
-          <p:nvPr/>
-        </p:nvPicPr>
-        <p:blipFill>
-          <a:blip r:embed="rId2"/>
-          <a:stretch>
-            <a:fillRect/>
-          </a:stretch>
-        </p:blipFill>
-        <p:spPr>
-          <a:xfrm>
-            <a:off x="1014984" y="3506724"/>
-            <a:ext cx="274320" cy="274320"/>
-          </a:xfrm>
-          <a:prstGeom prst="rect">
-            <a:avLst/>
-          </a:prstGeom>
-        </p:spPr>
-      </p:pic>
-      <p:sp>
-        <p:nvSpPr>
-          <p:cNvPr id="13" name="Text 9"/>
-          <p:cNvSpPr/>
-          <p:nvPr/>
-        </p:nvSpPr>
-        <p:spPr>
-          <a:xfrm>
-            <a:off x="1691640" y="3200400"/>
-            <a:ext cx="3291840" cy="886968"/>
-          </a:xfrm>
-          <a:prstGeom prst="rect">
-            <a:avLst/>
-          </a:prstGeom>
-          <a:noFill/>
-          <a:ln/>
-        </p:spPr>
-        <p:txBody>
-          <a:bodyPr wrap="square" lIns="0" tIns="0" rIns="0" bIns="0" rtlCol="0" anchor="ctr"/>
-          <a:lstStyle/>
-          <a:p>
-            <a:pPr indent="0" marL="0">
-              <a:buNone/>
-            </a:pPr>
-            <a:r>
-              <a:rPr lang="en-US" sz="1550" b="1" dirty="0">
-                <a:solidFill>
-                  <a:srgbClr val="1B1B2F"/>
-                </a:solidFill>
-                <a:latin typeface="Calibri" pitchFamily="34" charset="0"/>
-                <a:ea typeface="Calibri" pitchFamily="34" charset="-122"/>
-                <a:cs typeface="Calibri" pitchFamily="34" charset="-120"/>
-              </a:rPr>
-              <a:t>O plano de saúde avisa</a:t>
-            </a:r>
-            <a:endParaRPr lang="en-US" sz="1550" dirty="0"/>
-          </a:p>
-        </p:txBody>
-      </p:sp>
-      <p:sp>
-        <p:nvSpPr>
-          <p:cNvPr id="14" name="Text 10"/>
-          <p:cNvSpPr/>
-          <p:nvPr/>
-        </p:nvSpPr>
-        <p:spPr>
-          <a:xfrm>
-            <a:off x="5120640" y="3200400"/>
-            <a:ext cx="6217920" cy="886968"/>
-          </a:xfrm>
-          <a:prstGeom prst="rect">
-            <a:avLst/>
-          </a:prstGeom>
-          <a:noFill/>
-          <a:ln/>
-        </p:spPr>
-        <p:txBody>
-          <a:bodyPr wrap="square" lIns="0" tIns="0" rIns="0" bIns="0" rtlCol="0" anchor="ctr"/>
-          <a:lstStyle/>
-          <a:p>
-            <a:pPr indent="0" marL="0">
-              <a:buNone/>
-            </a:pPr>
-            <a:r>
-              <a:rPr lang="en-US" sz="1300" dirty="0">
-                <a:solidFill>
-                  <a:srgbClr val="6B6B80"/>
-                </a:solidFill>
-                <a:latin typeface="Calibri" pitchFamily="34" charset="0"/>
-                <a:ea typeface="Calibri" pitchFamily="34" charset="-122"/>
-                <a:cs typeface="Calibri" pitchFamily="34" charset="-120"/>
-              </a:rPr>
-              <a:t>Quando você está atrasado com o check-up anual</a:t>
-            </a:r>
-            <a:endParaRPr lang="en-US" sz="1300" dirty="0"/>
-          </a:p>
-        </p:txBody>
-      </p:sp>
-      <p:sp>
-        <p:nvSpPr>
-          <p:cNvPr id="15" name="Shape 11"/>
-          <p:cNvSpPr/>
-          <p:nvPr/>
-        </p:nvSpPr>
-        <p:spPr>
-          <a:xfrm>
-            <a:off x="640080" y="4251960"/>
-            <a:ext cx="10881360" cy="886968"/>
-          </a:xfrm>
-          <a:prstGeom prst="roundRect">
-            <a:avLst>
-              <a:gd name="adj" fmla="val 10309"/>
-            </a:avLst>
-          </a:prstGeom>
-          <a:solidFill>
-            <a:srgbClr val="F3F1FB"/>
-          </a:solidFill>
-          <a:ln/>
-        </p:spPr>
-      </p:sp>
-      <p:sp>
-        <p:nvSpPr>
-          <p:cNvPr id="16" name="Shape 12"/>
-          <p:cNvSpPr/>
-          <p:nvPr/>
-        </p:nvSpPr>
-        <p:spPr>
-          <a:xfrm>
-            <a:off x="868680" y="4411980"/>
-            <a:ext cx="566928" cy="566928"/>
-          </a:xfrm>
-          <a:prstGeom prst="ellipse">
-            <a:avLst/>
-          </a:prstGeom>
-          <a:solidFill>
-            <a:srgbClr val="6C4BC1"/>
-          </a:solidFill>
-          <a:ln/>
-        </p:spPr>
-      </p:sp>
-      <p:pic>
-        <p:nvPicPr>
-          <p:cNvPr id="17" name="Image 2" descr="preencoded.png">    </p:cNvPr>
+          <p:cNvPr id="7" name="Image 0" descr="preencoded.png"/>
           <p:cNvPicPr>
             <a:picLocks noChangeAspect="1"/>
           </p:cNvPicPr>
@@ -13000,6 +12524,294 @@
         </p:blipFill>
         <p:spPr>
           <a:xfrm>
+            <a:off x="1014984" y="2455164"/>
+            <a:ext cx="274320" cy="274320"/>
+          </a:xfrm>
+          <a:prstGeom prst="rect">
+            <a:avLst/>
+          </a:prstGeom>
+        </p:spPr>
+      </p:pic>
+      <p:sp>
+        <p:nvSpPr>
+          <p:cNvPr id="8" name="Text 5"/>
+          <p:cNvSpPr/>
+          <p:nvPr/>
+        </p:nvSpPr>
+        <p:spPr>
+          <a:xfrm>
+            <a:off x="1691640" y="2148840"/>
+            <a:ext cx="3291840" cy="886968"/>
+          </a:xfrm>
+          <a:prstGeom prst="rect">
+            <a:avLst/>
+          </a:prstGeom>
+          <a:noFill/>
+          <a:ln/>
+        </p:spPr>
+        <p:txBody>
+          <a:bodyPr wrap="square" lIns="0" tIns="0" rIns="0" bIns="0" rtlCol="0" anchor="ctr"/>
+          <a:lstStyle/>
+          <a:p>
+            <a:pPr marL="0" indent="0">
+              <a:buNone/>
+            </a:pPr>
+            <a:r>
+              <a:rPr lang="en-US" sz="1550" b="1" dirty="0">
+                <a:solidFill>
+                  <a:srgbClr val="1B1B2F"/>
+                </a:solidFill>
+                <a:latin typeface="Calibri" pitchFamily="34" charset="0"/>
+                <a:ea typeface="Calibri" pitchFamily="34" charset="-122"/>
+                <a:cs typeface="Calibri" pitchFamily="34" charset="-120"/>
+              </a:rPr>
+              <a:t>O banco liga</a:t>
+            </a:r>
+            <a:endParaRPr lang="en-US" sz="1550" dirty="0"/>
+          </a:p>
+        </p:txBody>
+      </p:sp>
+      <p:sp>
+        <p:nvSpPr>
+          <p:cNvPr id="9" name="Text 6"/>
+          <p:cNvSpPr/>
+          <p:nvPr/>
+        </p:nvSpPr>
+        <p:spPr>
+          <a:xfrm>
+            <a:off x="5120640" y="2148840"/>
+            <a:ext cx="6217920" cy="886968"/>
+          </a:xfrm>
+          <a:prstGeom prst="rect">
+            <a:avLst/>
+          </a:prstGeom>
+          <a:noFill/>
+          <a:ln/>
+        </p:spPr>
+        <p:txBody>
+          <a:bodyPr wrap="square" lIns="0" tIns="0" rIns="0" bIns="0" rtlCol="0" anchor="ctr"/>
+          <a:lstStyle/>
+          <a:p>
+            <a:pPr marL="0" indent="0">
+              <a:buNone/>
+            </a:pPr>
+            <a:r>
+              <a:rPr lang="en-US" sz="1300" dirty="0">
+                <a:solidFill>
+                  <a:srgbClr val="6B6B80"/>
+                </a:solidFill>
+                <a:latin typeface="Calibri" pitchFamily="34" charset="0"/>
+                <a:ea typeface="Calibri" pitchFamily="34" charset="-122"/>
+                <a:cs typeface="Calibri" pitchFamily="34" charset="-120"/>
+              </a:rPr>
+              <a:t>Quando percebe um gasto fora do seu padrão habitual</a:t>
+            </a:r>
+            <a:endParaRPr lang="en-US" sz="1300" dirty="0"/>
+          </a:p>
+        </p:txBody>
+      </p:sp>
+      <p:sp>
+        <p:nvSpPr>
+          <p:cNvPr id="10" name="Shape 7"/>
+          <p:cNvSpPr/>
+          <p:nvPr/>
+        </p:nvSpPr>
+        <p:spPr>
+          <a:xfrm>
+            <a:off x="640080" y="3200400"/>
+            <a:ext cx="10881360" cy="886968"/>
+          </a:xfrm>
+          <a:prstGeom prst="roundRect">
+            <a:avLst>
+              <a:gd name="adj" fmla="val 10309"/>
+            </a:avLst>
+          </a:prstGeom>
+          <a:solidFill>
+            <a:srgbClr val="F3F1FB"/>
+          </a:solidFill>
+          <a:ln/>
+        </p:spPr>
+      </p:sp>
+      <p:sp>
+        <p:nvSpPr>
+          <p:cNvPr id="11" name="Shape 8"/>
+          <p:cNvSpPr/>
+          <p:nvPr/>
+        </p:nvSpPr>
+        <p:spPr>
+          <a:xfrm>
+            <a:off x="868680" y="3360420"/>
+            <a:ext cx="566928" cy="566928"/>
+          </a:xfrm>
+          <a:prstGeom prst="ellipse">
+            <a:avLst/>
+          </a:prstGeom>
+          <a:solidFill>
+            <a:srgbClr val="6C4BC1"/>
+          </a:solidFill>
+          <a:ln/>
+        </p:spPr>
+      </p:sp>
+      <p:pic>
+        <p:nvPicPr>
+          <p:cNvPr id="12" name="Image 1" descr="preencoded.png"/>
+          <p:cNvPicPr>
+            <a:picLocks noChangeAspect="1"/>
+          </p:cNvPicPr>
+          <p:nvPr/>
+        </p:nvPicPr>
+        <p:blipFill>
+          <a:blip r:embed="rId4"/>
+          <a:stretch>
+            <a:fillRect/>
+          </a:stretch>
+        </p:blipFill>
+        <p:spPr>
+          <a:xfrm>
+            <a:off x="1014984" y="3506724"/>
+            <a:ext cx="274320" cy="274320"/>
+          </a:xfrm>
+          <a:prstGeom prst="rect">
+            <a:avLst/>
+          </a:prstGeom>
+        </p:spPr>
+      </p:pic>
+      <p:sp>
+        <p:nvSpPr>
+          <p:cNvPr id="13" name="Text 9"/>
+          <p:cNvSpPr/>
+          <p:nvPr/>
+        </p:nvSpPr>
+        <p:spPr>
+          <a:xfrm>
+            <a:off x="1691640" y="3200400"/>
+            <a:ext cx="3291840" cy="886968"/>
+          </a:xfrm>
+          <a:prstGeom prst="rect">
+            <a:avLst/>
+          </a:prstGeom>
+          <a:noFill/>
+          <a:ln/>
+        </p:spPr>
+        <p:txBody>
+          <a:bodyPr wrap="square" lIns="0" tIns="0" rIns="0" bIns="0" rtlCol="0" anchor="ctr"/>
+          <a:lstStyle/>
+          <a:p>
+            <a:pPr marL="0" indent="0">
+              <a:buNone/>
+            </a:pPr>
+            <a:r>
+              <a:rPr lang="en-US" sz="1550" b="1" dirty="0">
+                <a:solidFill>
+                  <a:srgbClr val="1B1B2F"/>
+                </a:solidFill>
+                <a:latin typeface="Calibri" pitchFamily="34" charset="0"/>
+                <a:ea typeface="Calibri" pitchFamily="34" charset="-122"/>
+                <a:cs typeface="Calibri" pitchFamily="34" charset="-120"/>
+              </a:rPr>
+              <a:t>O plano de saúde avisa</a:t>
+            </a:r>
+            <a:endParaRPr lang="en-US" sz="1550" dirty="0"/>
+          </a:p>
+        </p:txBody>
+      </p:sp>
+      <p:sp>
+        <p:nvSpPr>
+          <p:cNvPr id="14" name="Text 10"/>
+          <p:cNvSpPr/>
+          <p:nvPr/>
+        </p:nvSpPr>
+        <p:spPr>
+          <a:xfrm>
+            <a:off x="5120640" y="3200400"/>
+            <a:ext cx="6217920" cy="886968"/>
+          </a:xfrm>
+          <a:prstGeom prst="rect">
+            <a:avLst/>
+          </a:prstGeom>
+          <a:noFill/>
+          <a:ln/>
+        </p:spPr>
+        <p:txBody>
+          <a:bodyPr wrap="square" lIns="0" tIns="0" rIns="0" bIns="0" rtlCol="0" anchor="ctr"/>
+          <a:lstStyle/>
+          <a:p>
+            <a:pPr marL="0" indent="0">
+              <a:buNone/>
+            </a:pPr>
+            <a:r>
+              <a:rPr lang="en-US" sz="1300" dirty="0">
+                <a:solidFill>
+                  <a:srgbClr val="6B6B80"/>
+                </a:solidFill>
+                <a:latin typeface="Calibri" pitchFamily="34" charset="0"/>
+                <a:ea typeface="Calibri" pitchFamily="34" charset="-122"/>
+                <a:cs typeface="Calibri" pitchFamily="34" charset="-120"/>
+              </a:rPr>
+              <a:t>Quando você está atrasado com o check-up anual</a:t>
+            </a:r>
+            <a:endParaRPr lang="en-US" sz="1300" dirty="0"/>
+          </a:p>
+        </p:txBody>
+      </p:sp>
+      <p:sp>
+        <p:nvSpPr>
+          <p:cNvPr id="15" name="Shape 11"/>
+          <p:cNvSpPr/>
+          <p:nvPr/>
+        </p:nvSpPr>
+        <p:spPr>
+          <a:xfrm>
+            <a:off x="640080" y="4251960"/>
+            <a:ext cx="10881360" cy="886968"/>
+          </a:xfrm>
+          <a:prstGeom prst="roundRect">
+            <a:avLst>
+              <a:gd name="adj" fmla="val 10309"/>
+            </a:avLst>
+          </a:prstGeom>
+          <a:solidFill>
+            <a:srgbClr val="F3F1FB"/>
+          </a:solidFill>
+          <a:ln/>
+        </p:spPr>
+      </p:sp>
+      <p:sp>
+        <p:nvSpPr>
+          <p:cNvPr id="16" name="Shape 12"/>
+          <p:cNvSpPr/>
+          <p:nvPr/>
+        </p:nvSpPr>
+        <p:spPr>
+          <a:xfrm>
+            <a:off x="868680" y="4411980"/>
+            <a:ext cx="566928" cy="566928"/>
+          </a:xfrm>
+          <a:prstGeom prst="ellipse">
+            <a:avLst/>
+          </a:prstGeom>
+          <a:solidFill>
+            <a:srgbClr val="6C4BC1"/>
+          </a:solidFill>
+          <a:ln/>
+        </p:spPr>
+      </p:sp>
+      <p:pic>
+        <p:nvPicPr>
+          <p:cNvPr id="17" name="Image 2" descr="preencoded.png"/>
+          <p:cNvPicPr>
+            <a:picLocks noChangeAspect="1"/>
+          </p:cNvPicPr>
+          <p:nvPr/>
+        </p:nvPicPr>
+        <p:blipFill>
+          <a:blip r:embed="rId5"/>
+          <a:stretch>
+            <a:fillRect/>
+          </a:stretch>
+        </p:blipFill>
+        <p:spPr>
+          <a:xfrm>
             <a:off x="1014984" y="4558284"/>
             <a:ext cx="274320" cy="274320"/>
           </a:xfrm>
@@ -13029,7 +12841,7 @@
           <a:bodyPr wrap="square" lIns="0" tIns="0" rIns="0" bIns="0" rtlCol="0" anchor="ctr"/>
           <a:lstStyle/>
           <a:p>
-            <a:pPr indent="0" marL="0">
+            <a:pPr marL="0" indent="0">
               <a:buNone/>
             </a:pPr>
             <a:r>
@@ -13068,7 +12880,7 @@
           <a:bodyPr wrap="square" lIns="0" tIns="0" rIns="0" bIns="0" rtlCol="0" anchor="ctr"/>
           <a:lstStyle/>
           <a:p>
-            <a:pPr indent="0" marL="0">
+            <a:pPr marL="0" indent="0">
               <a:buNone/>
             </a:pPr>
             <a:r>
@@ -13107,7 +12919,7 @@
           <a:bodyPr wrap="square" lIns="0" tIns="0" rIns="0" bIns="0" rtlCol="0" anchor="ctr"/>
           <a:lstStyle/>
           <a:p>
-            <a:pPr algn="ctr" indent="0" marL="0">
+            <a:pPr marL="0" indent="0" algn="ctr">
               <a:buNone/>
             </a:pPr>
             <a:r>
@@ -13146,7 +12958,7 @@
           <a:bodyPr wrap="square" lIns="0" tIns="0" rIns="0" bIns="0" rtlCol="0" anchor="ctr"/>
           <a:lstStyle/>
           <a:p>
-            <a:pPr algn="r" indent="0" marL="0">
+            <a:pPr marL="0" indent="0" algn="r">
               <a:buNone/>
             </a:pPr>
             <a:r>
@@ -13180,6 +12992,7 @@
         <a:solidFill>
           <a:srgbClr val="6C4BC1"/>
         </a:solidFill>
+        <a:effectLst/>
       </p:bgPr>
     </p:bg>
     <p:spTree>
@@ -13266,14 +13079,14 @@
       </p:sp>
       <p:pic>
         <p:nvPicPr>
-          <p:cNvPr id="5" name="Image 0" descr="preencoded.png">    </p:cNvPr>
+          <p:cNvPr id="5" name="Image 0" descr="preencoded.png"/>
           <p:cNvPicPr>
             <a:picLocks noChangeAspect="1"/>
           </p:cNvPicPr>
           <p:nvPr/>
         </p:nvPicPr>
         <p:blipFill>
-          <a:blip r:embed="rId1"/>
+          <a:blip r:embed="rId3"/>
           <a:stretch>
             <a:fillRect/>
           </a:stretch>
@@ -13309,11 +13122,11 @@
           <a:bodyPr wrap="square" lIns="0" tIns="0" rIns="0" bIns="0" rtlCol="0" anchor="ctr"/>
           <a:lstStyle/>
           <a:p>
-            <a:pPr indent="0" marL="0">
-              <a:buNone/>
-            </a:pPr>
-            <a:r>
-              <a:rPr lang="en-US" sz="1300" b="1" spc="200" kern="0" dirty="0">
+            <a:pPr marL="0" indent="0">
+              <a:buNone/>
+            </a:pPr>
+            <a:r>
+              <a:rPr lang="en-US" sz="1300" b="1" kern="0" spc="200" dirty="0">
                 <a:solidFill>
                   <a:srgbClr val="2FE6C7"/>
                 </a:solidFill>
@@ -13348,7 +13161,7 @@
           <a:bodyPr wrap="square" lIns="0" tIns="0" rIns="0" bIns="0" rtlCol="0" anchor="ctr"/>
           <a:lstStyle/>
           <a:p>
-            <a:pPr indent="0" marL="0">
+            <a:pPr marL="0" indent="0">
               <a:buNone/>
             </a:pPr>
             <a:r>
@@ -13387,7 +13200,7 @@
           <a:bodyPr wrap="square" lIns="0" tIns="0" rIns="0" bIns="0" rtlCol="0" anchor="ctr"/>
           <a:lstStyle/>
           <a:p>
-            <a:pPr indent="0" marL="0">
+            <a:pPr marL="0" indent="0">
               <a:lnSpc>
                 <a:spcPts val="2400"/>
               </a:lnSpc>
@@ -13424,6 +13237,7 @@
         <a:solidFill>
           <a:srgbClr val="FFFFFF"/>
         </a:solidFill>
+        <a:effectLst/>
       </p:bgPr>
     </p:bg>
     <p:spTree>
@@ -13461,11 +13275,11 @@
           <a:bodyPr wrap="square" lIns="0" tIns="0" rIns="0" bIns="0" rtlCol="0" anchor="ctr"/>
           <a:lstStyle/>
           <a:p>
-            <a:pPr algn="l" indent="0" marL="0">
-              <a:buNone/>
-            </a:pPr>
-            <a:r>
-              <a:rPr lang="en-US" sz="1200" b="1" spc="200" kern="0" dirty="0">
+            <a:pPr marL="0" indent="0" algn="l">
+              <a:buNone/>
+            </a:pPr>
+            <a:r>
+              <a:rPr lang="en-US" sz="1200" b="1" kern="0" spc="200" dirty="0">
                 <a:solidFill>
                   <a:srgbClr val="6C4BC1"/>
                 </a:solidFill>
@@ -13500,7 +13314,7 @@
           <a:bodyPr wrap="square" lIns="0" tIns="0" rIns="0" bIns="0" rtlCol="0" anchor="ctr"/>
           <a:lstStyle/>
           <a:p>
-            <a:pPr indent="0" marL="0">
+            <a:pPr marL="0" indent="0">
               <a:buNone/>
             </a:pPr>
             <a:r>
@@ -13539,7 +13353,7 @@
           <a:bodyPr wrap="square" lIns="0" tIns="0" rIns="0" bIns="0" rtlCol="0" anchor="ctr"/>
           <a:lstStyle/>
           <a:p>
-            <a:pPr indent="0" marL="0">
+            <a:pPr marL="0" indent="0">
               <a:lnSpc>
                 <a:spcPts val="1900"/>
               </a:lnSpc>
@@ -13581,11 +13395,11 @@
           <a:bodyPr wrap="square" lIns="0" tIns="0" rIns="0" bIns="0" rtlCol="0" anchor="ctr"/>
           <a:lstStyle/>
           <a:p>
-            <a:pPr algn="ctr" indent="0" marL="0">
-              <a:buNone/>
-            </a:pPr>
-            <a:r>
-              <a:rPr lang="en-US" sz="1100" b="1" spc="100" kern="0" dirty="0">
+            <a:pPr marL="0" indent="0" algn="ctr">
+              <a:buNone/>
+            </a:pPr>
+            <a:r>
+              <a:rPr lang="en-US" sz="1100" b="1" kern="0" spc="100" dirty="0">
                 <a:solidFill>
                   <a:srgbClr val="E5533D"/>
                 </a:solidFill>
@@ -13621,195 +13435,7 @@
       </p:sp>
       <p:pic>
         <p:nvPicPr>
-          <p:cNvPr id="7" name="Image 0" descr="preencoded.png">    </p:cNvPr>
-          <p:cNvPicPr>
-            <a:picLocks noChangeAspect="1"/>
-          </p:cNvPicPr>
-          <p:nvPr/>
-        </p:nvPicPr>
-        <p:blipFill>
-          <a:blip r:embed="rId1"/>
-          <a:stretch>
-            <a:fillRect/>
-          </a:stretch>
-        </p:blipFill>
-        <p:spPr>
-          <a:xfrm>
-            <a:off x="1865376" y="3625596"/>
-            <a:ext cx="795528" cy="795528"/>
-          </a:xfrm>
-          <a:prstGeom prst="rect">
-            <a:avLst/>
-          </a:prstGeom>
-        </p:spPr>
-      </p:pic>
-      <p:sp>
-        <p:nvSpPr>
-          <p:cNvPr id="8" name="Text 5"/>
-          <p:cNvSpPr/>
-          <p:nvPr/>
-        </p:nvSpPr>
-        <p:spPr>
-          <a:xfrm>
-            <a:off x="640080" y="4846320"/>
-            <a:ext cx="3246120" cy="320040"/>
-          </a:xfrm>
-          <a:prstGeom prst="rect">
-            <a:avLst/>
-          </a:prstGeom>
-          <a:noFill/>
-          <a:ln/>
-        </p:spPr>
-        <p:txBody>
-          <a:bodyPr wrap="square" lIns="0" tIns="0" rIns="0" bIns="0" rtlCol="0" anchor="ctr"/>
-          <a:lstStyle/>
-          <a:p>
-            <a:pPr algn="ctr" indent="0" marL="0">
-              <a:buNone/>
-            </a:pPr>
-            <a:r>
-              <a:rPr lang="en-US" sz="1400" b="1" dirty="0">
-                <a:solidFill>
-                  <a:srgbClr val="1B1B2F"/>
-                </a:solidFill>
-                <a:latin typeface="Calibri" pitchFamily="34" charset="0"/>
-                <a:ea typeface="Calibri" pitchFamily="34" charset="-122"/>
-                <a:cs typeface="Calibri" pitchFamily="34" charset="-120"/>
-              </a:rPr>
-              <a:t>Início do semestre</a:t>
-            </a:r>
-            <a:endParaRPr lang="en-US" sz="1400" dirty="0"/>
-          </a:p>
-        </p:txBody>
-      </p:sp>
-      <p:sp>
-        <p:nvSpPr>
-          <p:cNvPr id="9" name="Text 6"/>
-          <p:cNvSpPr/>
-          <p:nvPr/>
-        </p:nvSpPr>
-        <p:spPr>
-          <a:xfrm>
-            <a:off x="640080" y="5184648"/>
-            <a:ext cx="3246120" cy="548640"/>
-          </a:xfrm>
-          <a:prstGeom prst="rect">
-            <a:avLst/>
-          </a:prstGeom>
-          <a:noFill/>
-          <a:ln/>
-        </p:spPr>
-        <p:txBody>
-          <a:bodyPr wrap="square" lIns="0" tIns="0" rIns="0" bIns="0" rtlCol="0" anchor="ctr"/>
-          <a:lstStyle/>
-          <a:p>
-            <a:pPr algn="ctr" indent="0" marL="0">
-              <a:lnSpc>
-                <a:spcPts val="1400"/>
-              </a:lnSpc>
-              <a:buNone/>
-            </a:pPr>
-            <a:r>
-              <a:rPr lang="en-US" sz="1150" dirty="0">
-                <a:solidFill>
-                  <a:srgbClr val="6B6B80"/>
-                </a:solidFill>
-                <a:latin typeface="Calibri" pitchFamily="34" charset="0"/>
-                <a:ea typeface="Calibri" pitchFamily="34" charset="-122"/>
-                <a:cs typeface="Calibri" pitchFamily="34" charset="-120"/>
-              </a:rPr>
-              <a:t>Dúvidas técnicas ainda sem resposta</a:t>
-            </a:r>
-            <a:endParaRPr lang="en-US" sz="1150" dirty="0"/>
-          </a:p>
-        </p:txBody>
-      </p:sp>
-      <p:pic>
-        <p:nvPicPr>
-          <p:cNvPr id="10" name="Image 1" descr="preencoded.png">    </p:cNvPr>
-          <p:cNvPicPr>
-            <a:picLocks noChangeAspect="1"/>
-          </p:cNvPicPr>
-          <p:nvPr/>
-        </p:nvPicPr>
-        <p:blipFill>
-          <a:blip r:embed="rId2"/>
-          <a:stretch>
-            <a:fillRect/>
-          </a:stretch>
-        </p:blipFill>
-        <p:spPr>
-          <a:xfrm>
-            <a:off x="4000500" y="3931920"/>
-            <a:ext cx="274320" cy="274320"/>
-          </a:xfrm>
-          <a:prstGeom prst="rect">
-            <a:avLst/>
-          </a:prstGeom>
-        </p:spPr>
-      </p:pic>
-      <p:sp>
-        <p:nvSpPr>
-          <p:cNvPr id="11" name="Text 7"/>
-          <p:cNvSpPr/>
-          <p:nvPr/>
-        </p:nvSpPr>
-        <p:spPr>
-          <a:xfrm>
-            <a:off x="4389120" y="2560320"/>
-            <a:ext cx="3246120" cy="274320"/>
-          </a:xfrm>
-          <a:prstGeom prst="rect">
-            <a:avLst/>
-          </a:prstGeom>
-          <a:noFill/>
-          <a:ln/>
-        </p:spPr>
-        <p:txBody>
-          <a:bodyPr wrap="square" lIns="0" tIns="0" rIns="0" bIns="0" rtlCol="0" anchor="ctr"/>
-          <a:lstStyle/>
-          <a:p>
-            <a:pPr algn="ctr" indent="0" marL="0">
-              <a:buNone/>
-            </a:pPr>
-            <a:r>
-              <a:rPr lang="en-US" sz="1100" b="1" spc="100" kern="0" dirty="0">
-                <a:solidFill>
-                  <a:srgbClr val="E8B324"/>
-                </a:solidFill>
-                <a:latin typeface="Calibri" pitchFamily="34" charset="0"/>
-                <a:ea typeface="Calibri" pitchFamily="34" charset="-122"/>
-                <a:cs typeface="Calibri" pitchFamily="34" charset="-120"/>
-              </a:rPr>
-              <a:t>RISCO MÉDIO</a:t>
-            </a:r>
-            <a:endParaRPr lang="en-US" sz="1100" dirty="0"/>
-          </a:p>
-        </p:txBody>
-      </p:sp>
-      <p:sp>
-        <p:nvSpPr>
-          <p:cNvPr id="12" name="Shape 8"/>
-          <p:cNvSpPr/>
-          <p:nvPr/>
-        </p:nvSpPr>
-        <p:spPr>
-          <a:xfrm>
-            <a:off x="5509260" y="3703320"/>
-            <a:ext cx="1005840" cy="1005840"/>
-          </a:xfrm>
-          <a:prstGeom prst="ellipse">
-            <a:avLst/>
-          </a:prstGeom>
-          <a:solidFill>
-            <a:srgbClr val="E8B324"/>
-          </a:solidFill>
-          <a:ln/>
-        </p:spPr>
-      </p:sp>
-      <p:pic>
-        <p:nvPicPr>
-          <p:cNvPr id="13" name="Image 2" descr="preencoded.png">    </p:cNvPr>
+          <p:cNvPr id="7" name="Image 0" descr="preencoded.png"/>
           <p:cNvPicPr>
             <a:picLocks noChangeAspect="1"/>
           </p:cNvPicPr>
@@ -13823,8 +13449,8 @@
         </p:blipFill>
         <p:spPr>
           <a:xfrm>
-            <a:off x="5720486" y="3914546"/>
-            <a:ext cx="583387" cy="583387"/>
+            <a:off x="1865376" y="3625596"/>
+            <a:ext cx="795528" cy="795528"/>
           </a:xfrm>
           <a:prstGeom prst="rect">
             <a:avLst/>
@@ -13833,13 +13459,13 @@
       </p:pic>
       <p:sp>
         <p:nvSpPr>
-          <p:cNvPr id="14" name="Text 9"/>
-          <p:cNvSpPr/>
-          <p:nvPr/>
-        </p:nvSpPr>
-        <p:spPr>
-          <a:xfrm>
-            <a:off x="4389120" y="4846320"/>
+          <p:cNvPr id="8" name="Text 5"/>
+          <p:cNvSpPr/>
+          <p:nvPr/>
+        </p:nvSpPr>
+        <p:spPr>
+          <a:xfrm>
+            <a:off x="640080" y="4846320"/>
             <a:ext cx="3246120" cy="320040"/>
           </a:xfrm>
           <a:prstGeom prst="rect">
@@ -13852,7 +13478,7 @@
           <a:bodyPr wrap="square" lIns="0" tIns="0" rIns="0" bIns="0" rtlCol="0" anchor="ctr"/>
           <a:lstStyle/>
           <a:p>
-            <a:pPr algn="ctr" indent="0" marL="0">
+            <a:pPr marL="0" indent="0" algn="ctr">
               <a:buNone/>
             </a:pPr>
             <a:r>
@@ -13864,7 +13490,7 @@
                 <a:ea typeface="Calibri" pitchFamily="34" charset="-122"/>
                 <a:cs typeface="Calibri" pitchFamily="34" charset="-120"/>
               </a:rPr>
-              <a:t>Meio do semestre</a:t>
+              <a:t>Início do semestre</a:t>
             </a:r>
             <a:endParaRPr lang="en-US" sz="1400" dirty="0"/>
           </a:p>
@@ -13872,13 +13498,13 @@
       </p:sp>
       <p:sp>
         <p:nvSpPr>
-          <p:cNvPr id="15" name="Text 10"/>
-          <p:cNvSpPr/>
-          <p:nvPr/>
-        </p:nvSpPr>
-        <p:spPr>
-          <a:xfrm>
-            <a:off x="4389120" y="5184648"/>
+          <p:cNvPr id="9" name="Text 6"/>
+          <p:cNvSpPr/>
+          <p:nvPr/>
+        </p:nvSpPr>
+        <p:spPr>
+          <a:xfrm>
+            <a:off x="640080" y="5184648"/>
             <a:ext cx="3246120" cy="548640"/>
           </a:xfrm>
           <a:prstGeom prst="rect">
@@ -13891,7 +13517,7 @@
           <a:bodyPr wrap="square" lIns="0" tIns="0" rIns="0" bIns="0" rtlCol="0" anchor="ctr"/>
           <a:lstStyle/>
           <a:p>
-            <a:pPr algn="ctr" indent="0" marL="0">
+            <a:pPr marL="0" indent="0" algn="ctr">
               <a:lnSpc>
                 <a:spcPts val="1400"/>
               </a:lnSpc>
@@ -13906,7 +13532,7 @@
                 <a:ea typeface="Calibri" pitchFamily="34" charset="-122"/>
                 <a:cs typeface="Calibri" pitchFamily="34" charset="-120"/>
               </a:rPr>
-              <a:t>Sem contato, o afastamento cresce</a:t>
+              <a:t>Dúvidas técnicas ainda sem resposta</a:t>
             </a:r>
             <a:endParaRPr lang="en-US" sz="1150" dirty="0"/>
           </a:p>
@@ -13914,7 +13540,7 @@
       </p:sp>
       <p:pic>
         <p:nvPicPr>
-          <p:cNvPr id="16" name="Image 3" descr="preencoded.png">    </p:cNvPr>
+          <p:cNvPr id="10" name="Image 1" descr="preencoded.png"/>
           <p:cNvPicPr>
             <a:picLocks noChangeAspect="1"/>
           </p:cNvPicPr>
@@ -13928,7 +13554,7 @@
         </p:blipFill>
         <p:spPr>
           <a:xfrm>
-            <a:off x="7749540" y="3931920"/>
+            <a:off x="4000500" y="3931920"/>
             <a:ext cx="274320" cy="274320"/>
           </a:xfrm>
           <a:prstGeom prst="rect">
@@ -13938,13 +13564,13 @@
       </p:pic>
       <p:sp>
         <p:nvSpPr>
-          <p:cNvPr id="17" name="Text 11"/>
-          <p:cNvSpPr/>
-          <p:nvPr/>
-        </p:nvSpPr>
-        <p:spPr>
-          <a:xfrm>
-            <a:off x="8138160" y="2560320"/>
+          <p:cNvPr id="11" name="Text 7"/>
+          <p:cNvSpPr/>
+          <p:nvPr/>
+        </p:nvSpPr>
+        <p:spPr>
+          <a:xfrm>
+            <a:off x="4389120" y="2560320"/>
             <a:ext cx="3246120" cy="274320"/>
           </a:xfrm>
           <a:prstGeom prst="rect">
@@ -13957,19 +13583,19 @@
           <a:bodyPr wrap="square" lIns="0" tIns="0" rIns="0" bIns="0" rtlCol="0" anchor="ctr"/>
           <a:lstStyle/>
           <a:p>
-            <a:pPr algn="ctr" indent="0" marL="0">
-              <a:buNone/>
-            </a:pPr>
-            <a:r>
-              <a:rPr lang="en-US" sz="1100" b="1" spc="100" kern="0" dirty="0">
-                <a:solidFill>
-                  <a:srgbClr val="3EBD59"/>
-                </a:solidFill>
-                <a:latin typeface="Calibri" pitchFamily="34" charset="0"/>
-                <a:ea typeface="Calibri" pitchFamily="34" charset="-122"/>
-                <a:cs typeface="Calibri" pitchFamily="34" charset="-120"/>
-              </a:rPr>
-              <a:t>RISCO BAIXO</a:t>
+            <a:pPr marL="0" indent="0" algn="ctr">
+              <a:buNone/>
+            </a:pPr>
+            <a:r>
+              <a:rPr lang="en-US" sz="1100" b="1" kern="0" spc="100" dirty="0">
+                <a:solidFill>
+                  <a:srgbClr val="E8B324"/>
+                </a:solidFill>
+                <a:latin typeface="Calibri" pitchFamily="34" charset="0"/>
+                <a:ea typeface="Calibri" pitchFamily="34" charset="-122"/>
+                <a:cs typeface="Calibri" pitchFamily="34" charset="-120"/>
+              </a:rPr>
+              <a:t>RISCO MÉDIO</a:t>
             </a:r>
             <a:endParaRPr lang="en-US" sz="1100" dirty="0"/>
           </a:p>
@@ -13977,27 +13603,27 @@
       </p:sp>
       <p:sp>
         <p:nvSpPr>
-          <p:cNvPr id="18" name="Shape 12"/>
-          <p:cNvSpPr/>
-          <p:nvPr/>
-        </p:nvSpPr>
-        <p:spPr>
-          <a:xfrm>
-            <a:off x="9404604" y="3995928"/>
-            <a:ext cx="713232" cy="713232"/>
+          <p:cNvPr id="12" name="Shape 8"/>
+          <p:cNvSpPr/>
+          <p:nvPr/>
+        </p:nvSpPr>
+        <p:spPr>
+          <a:xfrm>
+            <a:off x="5509260" y="3703320"/>
+            <a:ext cx="1005840" cy="1005840"/>
           </a:xfrm>
           <a:prstGeom prst="ellipse">
             <a:avLst/>
           </a:prstGeom>
           <a:solidFill>
-            <a:srgbClr val="3EBD59"/>
+            <a:srgbClr val="E8B324"/>
           </a:solidFill>
           <a:ln/>
         </p:spPr>
       </p:sp>
       <p:pic>
         <p:nvPicPr>
-          <p:cNvPr id="19" name="Image 4" descr="preencoded.png">    </p:cNvPr>
+          <p:cNvPr id="13" name="Image 2" descr="preencoded.png"/>
           <p:cNvPicPr>
             <a:picLocks noChangeAspect="1"/>
           </p:cNvPicPr>
@@ -14011,8 +13637,8 @@
         </p:blipFill>
         <p:spPr>
           <a:xfrm>
-            <a:off x="9554383" y="4145707"/>
-            <a:ext cx="413675" cy="413675"/>
+            <a:off x="5720486" y="3914546"/>
+            <a:ext cx="583387" cy="583387"/>
           </a:xfrm>
           <a:prstGeom prst="rect">
             <a:avLst/>
@@ -14021,13 +13647,13 @@
       </p:pic>
       <p:sp>
         <p:nvSpPr>
-          <p:cNvPr id="20" name="Text 13"/>
-          <p:cNvSpPr/>
-          <p:nvPr/>
-        </p:nvSpPr>
-        <p:spPr>
-          <a:xfrm>
-            <a:off x="8138160" y="4846320"/>
+          <p:cNvPr id="14" name="Text 9"/>
+          <p:cNvSpPr/>
+          <p:nvPr/>
+        </p:nvSpPr>
+        <p:spPr>
+          <a:xfrm>
+            <a:off x="4389120" y="4846320"/>
             <a:ext cx="3246120" cy="320040"/>
           </a:xfrm>
           <a:prstGeom prst="rect">
@@ -14040,7 +13666,7 @@
           <a:bodyPr wrap="square" lIns="0" tIns="0" rIns="0" bIns="0" rtlCol="0" anchor="ctr"/>
           <a:lstStyle/>
           <a:p>
-            <a:pPr algn="ctr" indent="0" marL="0">
+            <a:pPr marL="0" indent="0" algn="ctr">
               <a:buNone/>
             </a:pPr>
             <a:r>
@@ -14052,7 +13678,7 @@
                 <a:ea typeface="Calibri" pitchFamily="34" charset="-122"/>
                 <a:cs typeface="Calibri" pitchFamily="34" charset="-120"/>
               </a:rPr>
-              <a:t>Com suporte a tempo</a:t>
+              <a:t>Meio do semestre</a:t>
             </a:r>
             <a:endParaRPr lang="en-US" sz="1400" dirty="0"/>
           </a:p>
@@ -14060,13 +13686,13 @@
       </p:sp>
       <p:sp>
         <p:nvSpPr>
-          <p:cNvPr id="21" name="Text 14"/>
-          <p:cNvSpPr/>
-          <p:nvPr/>
-        </p:nvSpPr>
-        <p:spPr>
-          <a:xfrm>
-            <a:off x="8138160" y="5184648"/>
+          <p:cNvPr id="15" name="Text 10"/>
+          <p:cNvSpPr/>
+          <p:nvPr/>
+        </p:nvSpPr>
+        <p:spPr>
+          <a:xfrm>
+            <a:off x="4389120" y="5184648"/>
             <a:ext cx="3246120" cy="548640"/>
           </a:xfrm>
           <a:prstGeom prst="rect">
@@ -14079,7 +13705,7 @@
           <a:bodyPr wrap="square" lIns="0" tIns="0" rIns="0" bIns="0" rtlCol="0" anchor="ctr"/>
           <a:lstStyle/>
           <a:p>
-            <a:pPr algn="ctr" indent="0" marL="0">
+            <a:pPr marL="0" indent="0" algn="ctr">
               <a:lnSpc>
                 <a:spcPts val="1400"/>
               </a:lnSpc>
@@ -14094,6 +13720,194 @@
                 <a:ea typeface="Calibri" pitchFamily="34" charset="-122"/>
                 <a:cs typeface="Calibri" pitchFamily="34" charset="-120"/>
               </a:rPr>
+              <a:t>Sem contato, o afastamento cresce</a:t>
+            </a:r>
+            <a:endParaRPr lang="en-US" sz="1150" dirty="0"/>
+          </a:p>
+        </p:txBody>
+      </p:sp>
+      <p:pic>
+        <p:nvPicPr>
+          <p:cNvPr id="16" name="Image 3" descr="preencoded.png"/>
+          <p:cNvPicPr>
+            <a:picLocks noChangeAspect="1"/>
+          </p:cNvPicPr>
+          <p:nvPr/>
+        </p:nvPicPr>
+        <p:blipFill>
+          <a:blip r:embed="rId4"/>
+          <a:stretch>
+            <a:fillRect/>
+          </a:stretch>
+        </p:blipFill>
+        <p:spPr>
+          <a:xfrm>
+            <a:off x="7749540" y="3931920"/>
+            <a:ext cx="274320" cy="274320"/>
+          </a:xfrm>
+          <a:prstGeom prst="rect">
+            <a:avLst/>
+          </a:prstGeom>
+        </p:spPr>
+      </p:pic>
+      <p:sp>
+        <p:nvSpPr>
+          <p:cNvPr id="17" name="Text 11"/>
+          <p:cNvSpPr/>
+          <p:nvPr/>
+        </p:nvSpPr>
+        <p:spPr>
+          <a:xfrm>
+            <a:off x="8138160" y="2560320"/>
+            <a:ext cx="3246120" cy="274320"/>
+          </a:xfrm>
+          <a:prstGeom prst="rect">
+            <a:avLst/>
+          </a:prstGeom>
+          <a:noFill/>
+          <a:ln/>
+        </p:spPr>
+        <p:txBody>
+          <a:bodyPr wrap="square" lIns="0" tIns="0" rIns="0" bIns="0" rtlCol="0" anchor="ctr"/>
+          <a:lstStyle/>
+          <a:p>
+            <a:pPr marL="0" indent="0" algn="ctr">
+              <a:buNone/>
+            </a:pPr>
+            <a:r>
+              <a:rPr lang="en-US" sz="1100" b="1" kern="0" spc="100" dirty="0">
+                <a:solidFill>
+                  <a:srgbClr val="3EBD59"/>
+                </a:solidFill>
+                <a:latin typeface="Calibri" pitchFamily="34" charset="0"/>
+                <a:ea typeface="Calibri" pitchFamily="34" charset="-122"/>
+                <a:cs typeface="Calibri" pitchFamily="34" charset="-120"/>
+              </a:rPr>
+              <a:t>RISCO BAIXO</a:t>
+            </a:r>
+            <a:endParaRPr lang="en-US" sz="1100" dirty="0"/>
+          </a:p>
+        </p:txBody>
+      </p:sp>
+      <p:sp>
+        <p:nvSpPr>
+          <p:cNvPr id="18" name="Shape 12"/>
+          <p:cNvSpPr/>
+          <p:nvPr/>
+        </p:nvSpPr>
+        <p:spPr>
+          <a:xfrm>
+            <a:off x="9404604" y="3995928"/>
+            <a:ext cx="713232" cy="713232"/>
+          </a:xfrm>
+          <a:prstGeom prst="ellipse">
+            <a:avLst/>
+          </a:prstGeom>
+          <a:solidFill>
+            <a:srgbClr val="3EBD59"/>
+          </a:solidFill>
+          <a:ln/>
+        </p:spPr>
+      </p:sp>
+      <p:pic>
+        <p:nvPicPr>
+          <p:cNvPr id="19" name="Image 4" descr="preencoded.png"/>
+          <p:cNvPicPr>
+            <a:picLocks noChangeAspect="1"/>
+          </p:cNvPicPr>
+          <p:nvPr/>
+        </p:nvPicPr>
+        <p:blipFill>
+          <a:blip r:embed="rId6"/>
+          <a:stretch>
+            <a:fillRect/>
+          </a:stretch>
+        </p:blipFill>
+        <p:spPr>
+          <a:xfrm>
+            <a:off x="9554383" y="4145707"/>
+            <a:ext cx="413675" cy="413675"/>
+          </a:xfrm>
+          <a:prstGeom prst="rect">
+            <a:avLst/>
+          </a:prstGeom>
+        </p:spPr>
+      </p:pic>
+      <p:sp>
+        <p:nvSpPr>
+          <p:cNvPr id="20" name="Text 13"/>
+          <p:cNvSpPr/>
+          <p:nvPr/>
+        </p:nvSpPr>
+        <p:spPr>
+          <a:xfrm>
+            <a:off x="8138160" y="4846320"/>
+            <a:ext cx="3246120" cy="320040"/>
+          </a:xfrm>
+          <a:prstGeom prst="rect">
+            <a:avLst/>
+          </a:prstGeom>
+          <a:noFill/>
+          <a:ln/>
+        </p:spPr>
+        <p:txBody>
+          <a:bodyPr wrap="square" lIns="0" tIns="0" rIns="0" bIns="0" rtlCol="0" anchor="ctr"/>
+          <a:lstStyle/>
+          <a:p>
+            <a:pPr marL="0" indent="0" algn="ctr">
+              <a:buNone/>
+            </a:pPr>
+            <a:r>
+              <a:rPr lang="en-US" sz="1400" b="1" dirty="0">
+                <a:solidFill>
+                  <a:srgbClr val="1B1B2F"/>
+                </a:solidFill>
+                <a:latin typeface="Calibri" pitchFamily="34" charset="0"/>
+                <a:ea typeface="Calibri" pitchFamily="34" charset="-122"/>
+                <a:cs typeface="Calibri" pitchFamily="34" charset="-120"/>
+              </a:rPr>
+              <a:t>Com suporte a tempo</a:t>
+            </a:r>
+            <a:endParaRPr lang="en-US" sz="1400" dirty="0"/>
+          </a:p>
+        </p:txBody>
+      </p:sp>
+      <p:sp>
+        <p:nvSpPr>
+          <p:cNvPr id="21" name="Text 14"/>
+          <p:cNvSpPr/>
+          <p:nvPr/>
+        </p:nvSpPr>
+        <p:spPr>
+          <a:xfrm>
+            <a:off x="8138160" y="5184648"/>
+            <a:ext cx="3246120" cy="548640"/>
+          </a:xfrm>
+          <a:prstGeom prst="rect">
+            <a:avLst/>
+          </a:prstGeom>
+          <a:noFill/>
+          <a:ln/>
+        </p:spPr>
+        <p:txBody>
+          <a:bodyPr wrap="square" lIns="0" tIns="0" rIns="0" bIns="0" rtlCol="0" anchor="ctr"/>
+          <a:lstStyle/>
+          <a:p>
+            <a:pPr marL="0" indent="0" algn="ctr">
+              <a:lnSpc>
+                <a:spcPts val="1400"/>
+              </a:lnSpc>
+              <a:buNone/>
+            </a:pPr>
+            <a:r>
+              <a:rPr lang="en-US" sz="1150" dirty="0">
+                <a:solidFill>
+                  <a:srgbClr val="6B6B80"/>
+                </a:solidFill>
+                <a:latin typeface="Calibri" pitchFamily="34" charset="0"/>
+                <a:ea typeface="Calibri" pitchFamily="34" charset="-122"/>
+                <a:cs typeface="Calibri" pitchFamily="34" charset="-120"/>
+              </a:rPr>
               <a:t>Busca ativa reduz o problema agora</a:t>
             </a:r>
             <a:endParaRPr lang="en-US" sz="1150" dirty="0"/>
@@ -14121,7 +13935,7 @@
           <a:bodyPr wrap="square" lIns="0" tIns="0" rIns="0" bIns="0" rtlCol="0" anchor="ctr"/>
           <a:lstStyle/>
           <a:p>
-            <a:pPr algn="ctr" indent="0" marL="0">
+            <a:pPr marL="0" indent="0" algn="ctr">
               <a:buNone/>
             </a:pPr>
             <a:r>
@@ -14160,7 +13974,7 @@
           <a:bodyPr wrap="square" lIns="0" tIns="0" rIns="0" bIns="0" rtlCol="0" anchor="ctr"/>
           <a:lstStyle/>
           <a:p>
-            <a:pPr algn="r" indent="0" marL="0">
+            <a:pPr marL="0" indent="0" algn="r">
               <a:buNone/>
             </a:pPr>
             <a:r>
@@ -14194,6 +14008,7 @@
         <a:solidFill>
           <a:srgbClr val="FFFFFF"/>
         </a:solidFill>
+        <a:effectLst/>
       </p:bgPr>
     </p:bg>
     <p:spTree>
@@ -14231,11 +14046,11 @@
           <a:bodyPr wrap="square" lIns="0" tIns="0" rIns="0" bIns="0" rtlCol="0" anchor="ctr"/>
           <a:lstStyle/>
           <a:p>
-            <a:pPr algn="l" indent="0" marL="0">
-              <a:buNone/>
-            </a:pPr>
-            <a:r>
-              <a:rPr lang="en-US" sz="1200" b="1" spc="200" kern="0" dirty="0">
+            <a:pPr marL="0" indent="0" algn="l">
+              <a:buNone/>
+            </a:pPr>
+            <a:r>
+              <a:rPr lang="en-US" sz="1200" b="1" kern="0" spc="200" dirty="0">
                 <a:solidFill>
                   <a:srgbClr val="6C4BC1"/>
                 </a:solidFill>
@@ -14270,7 +14085,7 @@
           <a:bodyPr wrap="square" lIns="0" tIns="0" rIns="0" bIns="0" rtlCol="0" anchor="ctr"/>
           <a:lstStyle/>
           <a:p>
-            <a:pPr indent="0" marL="0">
+            <a:pPr marL="0" indent="0">
               <a:buNone/>
             </a:pPr>
             <a:r>
@@ -14309,7 +14124,7 @@
           <a:bodyPr wrap="square" lIns="0" tIns="0" rIns="0" bIns="0" rtlCol="0" anchor="ctr"/>
           <a:lstStyle/>
           <a:p>
-            <a:pPr indent="0" marL="0">
+            <a:pPr marL="0" indent="0">
               <a:buNone/>
             </a:pPr>
             <a:r>
@@ -14371,14 +14186,14 @@
       </p:sp>
       <p:pic>
         <p:nvPicPr>
-          <p:cNvPr id="7" name="Image 0" descr="preencoded.png">    </p:cNvPr>
+          <p:cNvPr id="7" name="Image 0" descr="preencoded.png"/>
           <p:cNvPicPr>
             <a:picLocks noChangeAspect="1"/>
           </p:cNvPicPr>
           <p:nvPr/>
         </p:nvPicPr>
         <p:blipFill>
-          <a:blip r:embed="rId1"/>
+          <a:blip r:embed="rId3"/>
           <a:stretch>
             <a:fillRect/>
           </a:stretch>
@@ -14414,7 +14229,7 @@
           <a:bodyPr wrap="square" lIns="0" tIns="0" rIns="0" bIns="0" rtlCol="0" anchor="ctr"/>
           <a:lstStyle/>
           <a:p>
-            <a:pPr indent="0" marL="0">
+            <a:pPr marL="0" indent="0">
               <a:buNone/>
             </a:pPr>
             <a:r>
@@ -14570,14 +14385,14 @@
       </p:sp>
       <p:pic>
         <p:nvPicPr>
-          <p:cNvPr id="12" name="Image 1" descr="preencoded.png">    </p:cNvPr>
+          <p:cNvPr id="12" name="Image 1" descr="preencoded.png"/>
           <p:cNvPicPr>
             <a:picLocks noChangeAspect="1"/>
           </p:cNvPicPr>
           <p:nvPr/>
         </p:nvPicPr>
         <p:blipFill>
-          <a:blip r:embed="rId2"/>
+          <a:blip r:embed="rId4"/>
           <a:stretch>
             <a:fillRect/>
           </a:stretch>
@@ -14613,7 +14428,7 @@
           <a:bodyPr wrap="square" lIns="0" tIns="0" rIns="0" bIns="0" rtlCol="0" anchor="ctr"/>
           <a:lstStyle/>
           <a:p>
-            <a:pPr indent="0" marL="0">
+            <a:pPr marL="0" indent="0">
               <a:buNone/>
             </a:pPr>
             <a:r>
@@ -14746,7 +14561,7 @@
           <a:bodyPr wrap="square" lIns="0" tIns="0" rIns="0" bIns="0" rtlCol="0" anchor="ctr"/>
           <a:lstStyle/>
           <a:p>
-            <a:pPr algn="r" indent="0" marL="0">
+            <a:pPr marL="0" indent="0" algn="r">
               <a:buNone/>
             </a:pPr>
             <a:r>
@@ -14780,6 +14595,7 @@
         <a:solidFill>
           <a:srgbClr val="FFFFFF"/>
         </a:solidFill>
+        <a:effectLst/>
       </p:bgPr>
     </p:bg>
     <p:spTree>
@@ -14817,11 +14633,11 @@
           <a:bodyPr wrap="square" lIns="0" tIns="0" rIns="0" bIns="0" rtlCol="0" anchor="ctr"/>
           <a:lstStyle/>
           <a:p>
-            <a:pPr algn="l" indent="0" marL="0">
-              <a:buNone/>
-            </a:pPr>
-            <a:r>
-              <a:rPr lang="en-US" sz="1200" b="1" spc="200" kern="0" dirty="0">
+            <a:pPr marL="0" indent="0" algn="l">
+              <a:buNone/>
+            </a:pPr>
+            <a:r>
+              <a:rPr lang="en-US" sz="1200" b="1" kern="0" spc="200" dirty="0">
                 <a:solidFill>
                   <a:srgbClr val="6C4BC1"/>
                 </a:solidFill>
@@ -14856,7 +14672,7 @@
           <a:bodyPr wrap="square" lIns="0" tIns="0" rIns="0" bIns="0" rtlCol="0" anchor="ctr"/>
           <a:lstStyle/>
           <a:p>
-            <a:pPr indent="0" marL="0">
+            <a:pPr marL="0" indent="0">
               <a:buNone/>
             </a:pPr>
             <a:r>
@@ -14895,7 +14711,7 @@
           <a:bodyPr wrap="square" lIns="0" tIns="0" rIns="0" bIns="0" rtlCol="0" anchor="ctr"/>
           <a:lstStyle/>
           <a:p>
-            <a:pPr indent="0" marL="0">
+            <a:pPr marL="0" indent="0">
               <a:buNone/>
             </a:pPr>
             <a:r>
@@ -14984,14 +14800,14 @@
       </p:sp>
       <p:pic>
         <p:nvPicPr>
-          <p:cNvPr id="8" name="Image 0" descr="preencoded.png">    </p:cNvPr>
+          <p:cNvPr id="8" name="Image 0" descr="preencoded.png"/>
           <p:cNvPicPr>
             <a:picLocks noChangeAspect="1"/>
           </p:cNvPicPr>
           <p:nvPr/>
         </p:nvPicPr>
         <p:blipFill>
-          <a:blip r:embed="rId1"/>
+          <a:blip r:embed="rId3"/>
           <a:stretch>
             <a:fillRect/>
           </a:stretch>
@@ -15027,7 +14843,7 @@
           <a:bodyPr wrap="square" lIns="0" tIns="0" rIns="0" bIns="0" rtlCol="0" anchor="ctr"/>
           <a:lstStyle/>
           <a:p>
-            <a:pPr indent="0" marL="0">
+            <a:pPr marL="0" indent="0">
               <a:lnSpc>
                 <a:spcPts val="1800"/>
               </a:lnSpc>
@@ -15119,14 +14935,14 @@
       </p:sp>
       <p:pic>
         <p:nvPicPr>
-          <p:cNvPr id="13" name="Image 1" descr="preencoded.png">    </p:cNvPr>
+          <p:cNvPr id="13" name="Image 1" descr="preencoded.png"/>
           <p:cNvPicPr>
             <a:picLocks noChangeAspect="1"/>
           </p:cNvPicPr>
           <p:nvPr/>
         </p:nvPicPr>
         <p:blipFill>
-          <a:blip r:embed="rId2"/>
+          <a:blip r:embed="rId4"/>
           <a:stretch>
             <a:fillRect/>
           </a:stretch>
@@ -15162,7 +14978,7 @@
           <a:bodyPr wrap="square" lIns="0" tIns="0" rIns="0" bIns="0" rtlCol="0" anchor="ctr"/>
           <a:lstStyle/>
           <a:p>
-            <a:pPr indent="0" marL="0">
+            <a:pPr marL="0" indent="0">
               <a:lnSpc>
                 <a:spcPts val="1800"/>
               </a:lnSpc>
@@ -15254,14 +15070,14 @@
       </p:sp>
       <p:pic>
         <p:nvPicPr>
-          <p:cNvPr id="18" name="Image 2" descr="preencoded.png">    </p:cNvPr>
+          <p:cNvPr id="18" name="Image 2" descr="preencoded.png"/>
           <p:cNvPicPr>
             <a:picLocks noChangeAspect="1"/>
           </p:cNvPicPr>
           <p:nvPr/>
         </p:nvPicPr>
         <p:blipFill>
-          <a:blip r:embed="rId3"/>
+          <a:blip r:embed="rId5"/>
           <a:stretch>
             <a:fillRect/>
           </a:stretch>
@@ -15297,7 +15113,7 @@
           <a:bodyPr wrap="square" lIns="0" tIns="0" rIns="0" bIns="0" rtlCol="0" anchor="ctr"/>
           <a:lstStyle/>
           <a:p>
-            <a:pPr indent="0" marL="0">
+            <a:pPr marL="0" indent="0">
               <a:lnSpc>
                 <a:spcPts val="1800"/>
               </a:lnSpc>
@@ -15389,14 +15205,14 @@
       </p:sp>
       <p:pic>
         <p:nvPicPr>
-          <p:cNvPr id="23" name="Image 3" descr="preencoded.png">    </p:cNvPr>
+          <p:cNvPr id="23" name="Image 3" descr="preencoded.png"/>
           <p:cNvPicPr>
             <a:picLocks noChangeAspect="1"/>
           </p:cNvPicPr>
           <p:nvPr/>
         </p:nvPicPr>
         <p:blipFill>
-          <a:blip r:embed="rId4"/>
+          <a:blip r:embed="rId6"/>
           <a:stretch>
             <a:fillRect/>
           </a:stretch>
@@ -15432,7 +15248,7 @@
           <a:bodyPr wrap="square" lIns="0" tIns="0" rIns="0" bIns="0" rtlCol="0" anchor="ctr"/>
           <a:lstStyle/>
           <a:p>
-            <a:pPr indent="0" marL="0">
+            <a:pPr marL="0" indent="0">
               <a:lnSpc>
                 <a:spcPts val="1800"/>
               </a:lnSpc>
@@ -15474,7 +15290,7 @@
           <a:bodyPr wrap="square" lIns="0" tIns="0" rIns="0" bIns="0" rtlCol="0" anchor="ctr"/>
           <a:lstStyle/>
           <a:p>
-            <a:pPr algn="r" indent="0" marL="0">
+            <a:pPr marL="0" indent="0" algn="r">
               <a:buNone/>
             </a:pPr>
             <a:r>
@@ -15508,6 +15324,7 @@
         <a:solidFill>
           <a:srgbClr val="FFFFFF"/>
         </a:solidFill>
+        <a:effectLst/>
       </p:bgPr>
     </p:bg>
     <p:spTree>
@@ -15545,11 +15362,11 @@
           <a:bodyPr wrap="square" lIns="0" tIns="0" rIns="0" bIns="0" rtlCol="0" anchor="ctr"/>
           <a:lstStyle/>
           <a:p>
-            <a:pPr algn="l" indent="0" marL="0">
-              <a:buNone/>
-            </a:pPr>
-            <a:r>
-              <a:rPr lang="en-US" sz="1200" b="1" spc="200" kern="0" dirty="0">
+            <a:pPr marL="0" indent="0" algn="l">
+              <a:buNone/>
+            </a:pPr>
+            <a:r>
+              <a:rPr lang="en-US" sz="1200" b="1" kern="0" spc="200" dirty="0">
                 <a:solidFill>
                   <a:srgbClr val="6C4BC1"/>
                 </a:solidFill>
@@ -15584,7 +15401,7 @@
           <a:bodyPr wrap="square" lIns="0" tIns="0" rIns="0" bIns="0" rtlCol="0" anchor="ctr"/>
           <a:lstStyle/>
           <a:p>
-            <a:pPr indent="0" marL="0">
+            <a:pPr marL="0" indent="0">
               <a:buNone/>
             </a:pPr>
             <a:r>
@@ -15646,14 +15463,14 @@
       </p:sp>
       <p:pic>
         <p:nvPicPr>
-          <p:cNvPr id="6" name="Image 0" descr="preencoded.png">    </p:cNvPr>
+          <p:cNvPr id="6" name="Image 0" descr="preencoded.png"/>
           <p:cNvPicPr>
             <a:picLocks noChangeAspect="1"/>
           </p:cNvPicPr>
           <p:nvPr/>
         </p:nvPicPr>
         <p:blipFill>
-          <a:blip r:embed="rId1"/>
+          <a:blip r:embed="rId3"/>
           <a:stretch>
             <a:fillRect/>
           </a:stretch>
@@ -15689,7 +15506,7 @@
           <a:bodyPr wrap="square" lIns="0" tIns="0" rIns="0" bIns="0" rtlCol="0" anchor="ctr"/>
           <a:lstStyle/>
           <a:p>
-            <a:pPr indent="0" marL="0">
+            <a:pPr marL="0" indent="0">
               <a:buNone/>
             </a:pPr>
             <a:r>
@@ -15728,7 +15545,7 @@
           <a:bodyPr wrap="square" lIns="0" tIns="0" rIns="0" bIns="0" rtlCol="0" anchor="ctr"/>
           <a:lstStyle/>
           <a:p>
-            <a:pPr indent="0" marL="0">
+            <a:pPr marL="0" indent="0">
               <a:lnSpc>
                 <a:spcPts val="1800"/>
               </a:lnSpc>
@@ -15793,14 +15610,14 @@
       </p:sp>
       <p:pic>
         <p:nvPicPr>
-          <p:cNvPr id="11" name="Image 1" descr="preencoded.png">    </p:cNvPr>
+          <p:cNvPr id="11" name="Image 1" descr="preencoded.png"/>
           <p:cNvPicPr>
             <a:picLocks noChangeAspect="1"/>
           </p:cNvPicPr>
           <p:nvPr/>
         </p:nvPicPr>
         <p:blipFill>
-          <a:blip r:embed="rId2"/>
+          <a:blip r:embed="rId4"/>
           <a:stretch>
             <a:fillRect/>
           </a:stretch>
@@ -15836,7 +15653,7 @@
           <a:bodyPr wrap="square" lIns="0" tIns="0" rIns="0" bIns="0" rtlCol="0" anchor="ctr"/>
           <a:lstStyle/>
           <a:p>
-            <a:pPr indent="0" marL="0">
+            <a:pPr marL="0" indent="0">
               <a:buNone/>
             </a:pPr>
             <a:r>
@@ -15875,7 +15692,7 @@
           <a:bodyPr wrap="square" lIns="0" tIns="0" rIns="0" bIns="0" rtlCol="0" anchor="ctr"/>
           <a:lstStyle/>
           <a:p>
-            <a:pPr indent="0" marL="0">
+            <a:pPr marL="0" indent="0">
               <a:lnSpc>
                 <a:spcPts val="1800"/>
               </a:lnSpc>
@@ -15917,7 +15734,7 @@
           <a:bodyPr wrap="square" lIns="0" tIns="0" rIns="0" bIns="0" rtlCol="0" anchor="ctr"/>
           <a:lstStyle/>
           <a:p>
-            <a:pPr algn="ctr" indent="0" marL="0">
+            <a:pPr marL="0" indent="0" algn="ctr">
               <a:buNone/>
             </a:pPr>
             <a:r>
@@ -15931,9 +15748,6 @@
               </a:rPr>
               <a:t>Precisa relembrar algum detalhe da ementa? Volte na </a:t>
             </a:r>
-            <a:pPr algn="ctr" indent="0" marL="0">
-              <a:buNone/>
-            </a:pPr>
             <a:r>
               <a:rPr lang="en-US" sz="1250" i="1" u="sng" dirty="0">
                 <a:solidFill>
@@ -15942,7 +15756,7 @@
                 <a:latin typeface="Calibri" pitchFamily="34" charset="0"/>
                 <a:ea typeface="Calibri" pitchFamily="34" charset="-122"/>
                 <a:cs typeface="Calibri" pitchFamily="34" charset="-120"/>
-                <a:hlinkClick r:id="rId3" invalidUrl="" action="" tgtFrame="" tooltip="" history="1" highlightClick="0" endSnd="0">
+                <a:hlinkClick r:id="rId5">
                   <a:extLst>
                     <a:ext uri="{A12FA001-AC4F-418D-AE19-62706E023703}">
                       <ahyp:hlinkClr xmlns:ahyp="http://schemas.microsoft.com/office/drawing/2018/hyperlinkcolor" val="tx"/>
@@ -15952,9 +15766,6 @@
               </a:rPr>
               <a:t>Aula 01</a:t>
             </a:r>
-            <a:pPr algn="ctr" indent="0" marL="0">
-              <a:buNone/>
-            </a:pPr>
             <a:r>
               <a:rPr lang="en-US" sz="1250" i="1" dirty="0">
                 <a:solidFill>
@@ -15991,7 +15802,7 @@
           <a:bodyPr wrap="square" lIns="0" tIns="0" rIns="0" bIns="0" rtlCol="0" anchor="ctr"/>
           <a:lstStyle/>
           <a:p>
-            <a:pPr algn="r" indent="0" marL="0">
+            <a:pPr marL="0" indent="0" algn="r">
               <a:buNone/>
             </a:pPr>
             <a:r>
@@ -16310,4 +16121,319 @@
     </a:ext>
   </a:extLst>
 </a:theme>
+</file>
+
+<file path=ppt/theme/theme2.xml><?xml version="1.0" encoding="utf-8"?>
+<a:theme xmlns:a="http://schemas.openxmlformats.org/drawingml/2006/main" name="Tema do Office">
+  <a:themeElements>
+    <a:clrScheme name="Office">
+      <a:dk1>
+        <a:sysClr val="windowText" lastClr="000000"/>
+      </a:dk1>
+      <a:lt1>
+        <a:sysClr val="window" lastClr="FFFFFF"/>
+      </a:lt1>
+      <a:dk2>
+        <a:srgbClr val="0E2841"/>
+      </a:dk2>
+      <a:lt2>
+        <a:srgbClr val="E8E8E8"/>
+      </a:lt2>
+      <a:accent1>
+        <a:srgbClr val="156082"/>
+      </a:accent1>
+      <a:accent2>
+        <a:srgbClr val="E97132"/>
+      </a:accent2>
+      <a:accent3>
+        <a:srgbClr val="196B24"/>
+      </a:accent3>
+      <a:accent4>
+        <a:srgbClr val="0F9ED5"/>
+      </a:accent4>
+      <a:accent5>
+        <a:srgbClr val="A02B93"/>
+      </a:accent5>
+      <a:accent6>
+        <a:srgbClr val="4EA72E"/>
+      </a:accent6>
+      <a:hlink>
+        <a:srgbClr val="467886"/>
+      </a:hlink>
+      <a:folHlink>
+        <a:srgbClr val="96607D"/>
+      </a:folHlink>
+    </a:clrScheme>
+    <a:fontScheme name="Office">
+      <a:majorFont>
+        <a:latin typeface="Aptos Display" panose="02110004020202020204"/>
+        <a:ea typeface=""/>
+        <a:cs typeface=""/>
+        <a:font script="Jpan" typeface="游ゴシック Light"/>
+        <a:font script="Hang" typeface="맑은 고딕"/>
+        <a:font script="Hans" typeface="等线 Light"/>
+        <a:font script="Hant" typeface="新細明體"/>
+        <a:font script="Arab" typeface="Times New Roman"/>
+        <a:font script="Hebr" typeface="Times New Roman"/>
+        <a:font script="Thai" typeface="Angsana New"/>
+        <a:font script="Ethi" typeface="Nyala"/>
+        <a:font script="Beng" typeface="Vrinda"/>
+        <a:font script="Gujr" typeface="Shruti"/>
+        <a:font script="Khmr" typeface="MoolBoran"/>
+        <a:font script="Knda" typeface="Tunga"/>
+        <a:font script="Guru" typeface="Raavi"/>
+        <a:font script="Cans" typeface="Euphemia"/>
+        <a:font script="Cher" typeface="Plantagenet Cherokee"/>
+        <a:font script="Yiii" typeface="Microsoft Yi Baiti"/>
+        <a:font script="Tibt" typeface="Microsoft Himalaya"/>
+        <a:font script="Thaa" typeface="MV Boli"/>
+        <a:font script="Deva" typeface="Mangal"/>
+        <a:font script="Telu" typeface="Gautami"/>
+        <a:font script="Taml" typeface="Latha"/>
+        <a:font script="Syrc" typeface="Estrangelo Edessa"/>
+        <a:font script="Orya" typeface="Kalinga"/>
+        <a:font script="Mlym" typeface="Kartika"/>
+        <a:font script="Laoo" typeface="DokChampa"/>
+        <a:font script="Sinh" typeface="Iskoola Pota"/>
+        <a:font script="Mong" typeface="Mongolian Baiti"/>
+        <a:font script="Viet" typeface="Times New Roman"/>
+        <a:font script="Uigh" typeface="Microsoft Uighur"/>
+        <a:font script="Geor" typeface="Sylfaen"/>
+        <a:font script="Armn" typeface="Arial"/>
+        <a:font script="Bugi" typeface="Leelawadee UI"/>
+        <a:font script="Bopo" typeface="Microsoft JhengHei"/>
+        <a:font script="Java" typeface="Javanese Text"/>
+        <a:font script="Lisu" typeface="Segoe UI"/>
+        <a:font script="Mymr" typeface="Myanmar Text"/>
+        <a:font script="Nkoo" typeface="Ebrima"/>
+        <a:font script="Olck" typeface="Nirmala UI"/>
+        <a:font script="Osma" typeface="Ebrima"/>
+        <a:font script="Phag" typeface="Phagspa"/>
+        <a:font script="Syrn" typeface="Estrangelo Edessa"/>
+        <a:font script="Syrj" typeface="Estrangelo Edessa"/>
+        <a:font script="Syre" typeface="Estrangelo Edessa"/>
+        <a:font script="Sora" typeface="Nirmala UI"/>
+        <a:font script="Tale" typeface="Microsoft Tai Le"/>
+        <a:font script="Talu" typeface="Microsoft New Tai Lue"/>
+        <a:font script="Tfng" typeface="Ebrima"/>
+      </a:majorFont>
+      <a:minorFont>
+        <a:latin typeface="Aptos" panose="02110004020202020204"/>
+        <a:ea typeface=""/>
+        <a:cs typeface=""/>
+        <a:font script="Jpan" typeface="游ゴシック"/>
+        <a:font script="Hang" typeface="맑은 고딕"/>
+        <a:font script="Hans" typeface="等线"/>
+        <a:font script="Hant" typeface="新細明體"/>
+        <a:font script="Arab" typeface="Arial"/>
+        <a:font script="Hebr" typeface="Arial"/>
+        <a:font script="Thai" typeface="Cordia New"/>
+        <a:font script="Ethi" typeface="Nyala"/>
+        <a:font script="Beng" typeface="Vrinda"/>
+        <a:font script="Gujr" typeface="Shruti"/>
+        <a:font script="Khmr" typeface="DaunPenh"/>
+        <a:font script="Knda" typeface="Tunga"/>
+        <a:font script="Guru" typeface="Raavi"/>
+        <a:font script="Cans" typeface="Euphemia"/>
+        <a:font script="Cher" typeface="Plantagenet Cherokee"/>
+        <a:font script="Yiii" typeface="Microsoft Yi Baiti"/>
+        <a:font script="Tibt" typeface="Microsoft Himalaya"/>
+        <a:font script="Thaa" typeface="MV Boli"/>
+        <a:font script="Deva" typeface="Mangal"/>
+        <a:font script="Telu" typeface="Gautami"/>
+        <a:font script="Taml" typeface="Latha"/>
+        <a:font script="Syrc" typeface="Estrangelo Edessa"/>
+        <a:font script="Orya" typeface="Kalinga"/>
+        <a:font script="Mlym" typeface="Kartika"/>
+        <a:font script="Laoo" typeface="DokChampa"/>
+        <a:font script="Sinh" typeface="Iskoola Pota"/>
+        <a:font script="Mong" typeface="Mongolian Baiti"/>
+        <a:font script="Viet" typeface="Arial"/>
+        <a:font script="Uigh" typeface="Microsoft Uighur"/>
+        <a:font script="Geor" typeface="Sylfaen"/>
+        <a:font script="Armn" typeface="Arial"/>
+        <a:font script="Bugi" typeface="Leelawadee UI"/>
+        <a:font script="Bopo" typeface="Microsoft JhengHei"/>
+        <a:font script="Java" typeface="Javanese Text"/>
+        <a:font script="Lisu" typeface="Segoe UI"/>
+        <a:font script="Mymr" typeface="Myanmar Text"/>
+        <a:font script="Nkoo" typeface="Ebrima"/>
+        <a:font script="Olck" typeface="Nirmala UI"/>
+        <a:font script="Osma" typeface="Ebrima"/>
+        <a:font script="Phag" typeface="Phagspa"/>
+        <a:font script="Syrn" typeface="Estrangelo Edessa"/>
+        <a:font script="Syrj" typeface="Estrangelo Edessa"/>
+        <a:font script="Syre" typeface="Estrangelo Edessa"/>
+        <a:font script="Sora" typeface="Nirmala UI"/>
+        <a:font script="Tale" typeface="Microsoft Tai Le"/>
+        <a:font script="Talu" typeface="Microsoft New Tai Lue"/>
+        <a:font script="Tfng" typeface="Ebrima"/>
+      </a:minorFont>
+    </a:fontScheme>
+    <a:fmtScheme name="Office">
+      <a:fillStyleLst>
+        <a:solidFill>
+          <a:schemeClr val="phClr"/>
+        </a:solidFill>
+        <a:gradFill rotWithShape="1">
+          <a:gsLst>
+            <a:gs pos="0">
+              <a:schemeClr val="phClr">
+                <a:lumMod val="110000"/>
+                <a:satMod val="105000"/>
+                <a:tint val="67000"/>
+              </a:schemeClr>
+            </a:gs>
+            <a:gs pos="50000">
+              <a:schemeClr val="phClr">
+                <a:lumMod val="105000"/>
+                <a:satMod val="103000"/>
+                <a:tint val="73000"/>
+              </a:schemeClr>
+            </a:gs>
+            <a:gs pos="100000">
+              <a:schemeClr val="phClr">
+                <a:lumMod val="105000"/>
+                <a:satMod val="109000"/>
+                <a:tint val="81000"/>
+              </a:schemeClr>
+            </a:gs>
+          </a:gsLst>
+          <a:lin ang="5400000" scaled="0"/>
+        </a:gradFill>
+        <a:gradFill rotWithShape="1">
+          <a:gsLst>
+            <a:gs pos="0">
+              <a:schemeClr val="phClr">
+                <a:satMod val="103000"/>
+                <a:lumMod val="102000"/>
+                <a:tint val="94000"/>
+              </a:schemeClr>
+            </a:gs>
+            <a:gs pos="50000">
+              <a:schemeClr val="phClr">
+                <a:satMod val="110000"/>
+                <a:lumMod val="100000"/>
+                <a:shade val="100000"/>
+              </a:schemeClr>
+            </a:gs>
+            <a:gs pos="100000">
+              <a:schemeClr val="phClr">
+                <a:lumMod val="99000"/>
+                <a:satMod val="120000"/>
+                <a:shade val="78000"/>
+              </a:schemeClr>
+            </a:gs>
+          </a:gsLst>
+          <a:lin ang="5400000" scaled="0"/>
+        </a:gradFill>
+      </a:fillStyleLst>
+      <a:lnStyleLst>
+        <a:ln w="12700" cap="flat" cmpd="sng" algn="ctr">
+          <a:solidFill>
+            <a:schemeClr val="phClr"/>
+          </a:solidFill>
+          <a:prstDash val="solid"/>
+          <a:miter lim="800000"/>
+        </a:ln>
+        <a:ln w="19050" cap="flat" cmpd="sng" algn="ctr">
+          <a:solidFill>
+            <a:schemeClr val="phClr"/>
+          </a:solidFill>
+          <a:prstDash val="solid"/>
+          <a:miter lim="800000"/>
+        </a:ln>
+        <a:ln w="25400" cap="flat" cmpd="sng" algn="ctr">
+          <a:solidFill>
+            <a:schemeClr val="phClr"/>
+          </a:solidFill>
+          <a:prstDash val="solid"/>
+          <a:miter lim="800000"/>
+        </a:ln>
+      </a:lnStyleLst>
+      <a:effectStyleLst>
+        <a:effectStyle>
+          <a:effectLst/>
+        </a:effectStyle>
+        <a:effectStyle>
+          <a:effectLst/>
+        </a:effectStyle>
+        <a:effectStyle>
+          <a:effectLst>
+            <a:outerShdw blurRad="57150" dist="19050" dir="5400000" algn="ctr" rotWithShape="0">
+              <a:srgbClr val="000000">
+                <a:alpha val="63000"/>
+              </a:srgbClr>
+            </a:outerShdw>
+          </a:effectLst>
+        </a:effectStyle>
+      </a:effectStyleLst>
+      <a:bgFillStyleLst>
+        <a:solidFill>
+          <a:schemeClr val="phClr"/>
+        </a:solidFill>
+        <a:solidFill>
+          <a:schemeClr val="phClr">
+            <a:tint val="95000"/>
+            <a:satMod val="170000"/>
+          </a:schemeClr>
+        </a:solidFill>
+        <a:gradFill rotWithShape="1">
+          <a:gsLst>
+            <a:gs pos="0">
+              <a:schemeClr val="phClr">
+                <a:tint val="93000"/>
+                <a:satMod val="150000"/>
+                <a:shade val="98000"/>
+                <a:lumMod val="102000"/>
+              </a:schemeClr>
+            </a:gs>
+            <a:gs pos="50000">
+              <a:schemeClr val="phClr">
+                <a:tint val="98000"/>
+                <a:satMod val="130000"/>
+                <a:shade val="90000"/>
+                <a:lumMod val="103000"/>
+              </a:schemeClr>
+            </a:gs>
+            <a:gs pos="100000">
+              <a:schemeClr val="phClr">
+                <a:shade val="63000"/>
+                <a:satMod val="120000"/>
+              </a:schemeClr>
+            </a:gs>
+          </a:gsLst>
+          <a:lin ang="5400000" scaled="0"/>
+        </a:gradFill>
+      </a:bgFillStyleLst>
+    </a:fmtScheme>
+  </a:themeElements>
+  <a:objectDefaults>
+    <a:lnDef>
+      <a:spPr/>
+      <a:bodyPr/>
+      <a:lstStyle/>
+      <a:style>
+        <a:lnRef idx="2">
+          <a:schemeClr val="accent1"/>
+        </a:lnRef>
+        <a:fillRef idx="0">
+          <a:schemeClr val="accent1"/>
+        </a:fillRef>
+        <a:effectRef idx="1">
+          <a:schemeClr val="accent1"/>
+        </a:effectRef>
+        <a:fontRef idx="minor">
+          <a:schemeClr val="tx1"/>
+        </a:fontRef>
+      </a:style>
+    </a:lnDef>
+  </a:objectDefaults>
+  <a:extraClrSchemeLst/>
+  <a:extLst>
+    <a:ext uri="{05A4C25C-085E-4340-85A3-A5531E510DB2}">
+      <thm15:themeFamily xmlns:thm15="http://schemas.microsoft.com/office/thememl/2012/main" name="Office Theme" id="{2E142A2C-CD16-42D6-873A-C26D2A0506FA}" vid="{1BDDFF52-6CD6-40A5-AB3C-68EB2F1E4D0A}"/>
+    </a:ext>
+  </a:extLst>
+</a:theme>
 </file>
--- a/slide/pratica/02/Aula02 - Busca Ativa.pptx
+++ b/slide/pratica/02/Aula02 - Busca Ativa.pptx
@@ -2444,6 +2444,13 @@
             <a:prstDash val="solid"/>
           </a:ln>
         </p:spPr>
+        <p:txBody>
+          <a:bodyPr/>
+          <a:lstStyle/>
+          <a:p>
+            <a:endParaRPr lang="pt-BR" noProof="0" dirty="0"/>
+          </a:p>
+        </p:txBody>
       </p:sp>
       <p:sp>
         <p:nvSpPr>
@@ -2468,6 +2475,13 @@
             <a:prstDash val="solid"/>
           </a:ln>
         </p:spPr>
+        <p:txBody>
+          <a:bodyPr/>
+          <a:lstStyle/>
+          <a:p>
+            <a:endParaRPr lang="pt-BR" noProof="0" dirty="0"/>
+          </a:p>
+        </p:txBody>
       </p:sp>
       <p:pic>
         <p:nvPicPr>
@@ -2520,7 +2534,7 @@
               <a:buNone/>
             </a:pPr>
             <a:r>
-              <a:rPr lang="en-US" sz="1400" b="1" kern="0" spc="300" dirty="0">
+              <a:rPr lang="pt-BR" sz="1400" b="1" kern="0" spc="300" noProof="0" dirty="0">
                 <a:solidFill>
                   <a:srgbClr val="2FE6C7"/>
                 </a:solidFill>
@@ -2530,7 +2544,7 @@
               </a:rPr>
               <a:t>MATEMÁTICA COMPUTACIONAL APLICADA</a:t>
             </a:r>
-            <a:endParaRPr lang="en-US" sz="1400" dirty="0"/>
+            <a:endParaRPr lang="pt-BR" sz="1400" noProof="0" dirty="0"/>
           </a:p>
         </p:txBody>
       </p:sp>
@@ -2559,7 +2573,7 @@
               <a:buNone/>
             </a:pPr>
             <a:r>
-              <a:rPr lang="en-US" sz="6400" b="1" dirty="0">
+              <a:rPr lang="pt-BR" sz="6400" b="1" noProof="0" dirty="0">
                 <a:solidFill>
                   <a:srgbClr val="FFFFFF"/>
                 </a:solidFill>
@@ -2569,7 +2583,7 @@
               </a:rPr>
               <a:t>Aula 02</a:t>
             </a:r>
-            <a:endParaRPr lang="en-US" sz="6400" dirty="0"/>
+            <a:endParaRPr lang="pt-BR" sz="6400" noProof="0" dirty="0"/>
           </a:p>
         </p:txBody>
       </p:sp>
@@ -2598,7 +2612,7 @@
               <a:buNone/>
             </a:pPr>
             <a:r>
-              <a:rPr lang="en-US" sz="2500" dirty="0">
+              <a:rPr lang="pt-BR" sz="2500" noProof="0" dirty="0">
                 <a:solidFill>
                   <a:srgbClr val="CBC3EE"/>
                 </a:solidFill>
@@ -2608,7 +2622,7 @@
               </a:rPr>
               <a:t>Busca Ativa — Início de Semestre</a:t>
             </a:r>
-            <a:endParaRPr lang="en-US" sz="2500" dirty="0"/>
+            <a:endParaRPr lang="pt-BR" sz="2500" noProof="0" dirty="0"/>
           </a:p>
         </p:txBody>
       </p:sp>
@@ -2637,7 +2651,7 @@
               <a:buNone/>
             </a:pPr>
             <a:r>
-              <a:rPr lang="en-US" sz="1400" i="1" dirty="0">
+              <a:rPr lang="pt-BR" sz="1400" i="1" noProof="0" dirty="0">
                 <a:solidFill>
                   <a:srgbClr val="8E93C4"/>
                 </a:solidFill>
@@ -2647,7 +2661,7 @@
               </a:rPr>
               <a:t>Antes de seguir para a lógica, vamos garantir que ninguém fique pelo caminho.</a:t>
             </a:r>
-            <a:endParaRPr lang="en-US" sz="1400" dirty="0"/>
+            <a:endParaRPr lang="pt-BR" sz="1400" noProof="0" dirty="0"/>
           </a:p>
         </p:txBody>
       </p:sp>
@@ -2676,7 +2690,7 @@
               <a:buNone/>
             </a:pPr>
             <a:r>
-              <a:rPr lang="en-US" sz="1250" b="1" kern="0" spc="100" dirty="0">
+              <a:rPr lang="pt-BR" sz="1250" b="1" kern="0" spc="100" noProof="0" dirty="0">
                 <a:solidFill>
                   <a:srgbClr val="6F76B0"/>
                 </a:solidFill>
@@ -2686,7 +2700,7 @@
               </a:rPr>
               <a:t>ONBOARDING   ·   DIAGNÓSTICO   ·   DESAFIO OPCIONAL</a:t>
             </a:r>
-            <a:endParaRPr lang="en-US" sz="1250" dirty="0"/>
+            <a:endParaRPr lang="pt-BR" sz="1250" noProof="0" dirty="0"/>
           </a:p>
         </p:txBody>
       </p:sp>
@@ -2746,6 +2760,13 @@
             <a:prstDash val="solid"/>
           </a:ln>
         </p:spPr>
+        <p:txBody>
+          <a:bodyPr/>
+          <a:lstStyle/>
+          <a:p>
+            <a:endParaRPr lang="pt-BR" noProof="0" dirty="0"/>
+          </a:p>
+        </p:txBody>
       </p:sp>
       <p:sp>
         <p:nvSpPr>
@@ -2770,6 +2791,13 @@
             <a:prstDash val="solid"/>
           </a:ln>
         </p:spPr>
+        <p:txBody>
+          <a:bodyPr/>
+          <a:lstStyle/>
+          <a:p>
+            <a:endParaRPr lang="pt-BR" noProof="0" dirty="0"/>
+          </a:p>
+        </p:txBody>
       </p:sp>
       <p:sp>
         <p:nvSpPr>
@@ -2790,6 +2818,13 @@
           </a:solidFill>
           <a:ln/>
         </p:spPr>
+        <p:txBody>
+          <a:bodyPr/>
+          <a:lstStyle/>
+          <a:p>
+            <a:endParaRPr lang="pt-BR" noProof="0" dirty="0"/>
+          </a:p>
+        </p:txBody>
       </p:sp>
       <p:pic>
         <p:nvPicPr>
@@ -2840,7 +2875,7 @@
               <a:buNone/>
             </a:pPr>
             <a:r>
-              <a:rPr lang="en-US" sz="1300" b="1" kern="0" spc="200" dirty="0">
+              <a:rPr lang="pt-BR" sz="1300" b="1" kern="0" spc="200" noProof="0" dirty="0">
                 <a:solidFill>
                   <a:srgbClr val="2FE6C7"/>
                 </a:solidFill>
@@ -2850,7 +2885,7 @@
               </a:rPr>
               <a:t>PRIORIDADE DA AULA DE HOJE</a:t>
             </a:r>
-            <a:endParaRPr lang="en-US" sz="1300" dirty="0"/>
+            <a:endParaRPr lang="pt-BR" sz="1300" noProof="0" dirty="0"/>
           </a:p>
         </p:txBody>
       </p:sp>
@@ -2879,7 +2914,7 @@
               <a:buNone/>
             </a:pPr>
             <a:r>
-              <a:rPr lang="en-US" sz="3800" b="1" dirty="0">
+              <a:rPr lang="pt-BR" sz="3800" b="1" noProof="0" dirty="0">
                 <a:solidFill>
                   <a:srgbClr val="FFFFFF"/>
                 </a:solidFill>
@@ -2889,7 +2924,7 @@
               </a:rPr>
               <a:t>Ficou algum item sem marcar?</a:t>
             </a:r>
-            <a:endParaRPr lang="en-US" sz="3800" dirty="0"/>
+            <a:endParaRPr lang="pt-BR" sz="3800" noProof="0" dirty="0"/>
           </a:p>
         </p:txBody>
       </p:sp>
@@ -2921,7 +2956,7 @@
               <a:buNone/>
             </a:pPr>
             <a:r>
-              <a:rPr lang="en-US" sz="1700" dirty="0">
+              <a:rPr lang="pt-BR" sz="1700" noProof="0" dirty="0">
                 <a:solidFill>
                   <a:srgbClr val="CBC3EE"/>
                 </a:solidFill>
@@ -2931,7 +2966,7 @@
               </a:rPr>
               <a:t>Então essa é a prioridade de hoje — antes de tudo o mais. Fale com o professor agora: é exatamente para isso que esta aula existe.</a:t>
             </a:r>
-            <a:endParaRPr lang="en-US" sz="1700" dirty="0"/>
+            <a:endParaRPr lang="pt-BR" sz="1700" noProof="0" dirty="0"/>
           </a:p>
         </p:txBody>
       </p:sp>
@@ -2960,7 +2995,7 @@
               <a:buNone/>
             </a:pPr>
             <a:r>
-              <a:rPr lang="en-US" sz="1350" i="1" dirty="0">
+              <a:rPr lang="pt-BR" sz="1350" i="1" noProof="0" dirty="0">
                 <a:solidFill>
                   <a:srgbClr val="8E93C4"/>
                 </a:solidFill>
@@ -2970,7 +3005,7 @@
               </a:rPr>
               <a:t>Se todos os itens já estão marcados, siga para o desafio opcional a seguir.</a:t>
             </a:r>
-            <a:endParaRPr lang="en-US" sz="1350" dirty="0"/>
+            <a:endParaRPr lang="pt-BR" sz="1350" noProof="0" dirty="0"/>
           </a:p>
         </p:txBody>
       </p:sp>
@@ -3032,7 +3067,7 @@
               <a:buNone/>
             </a:pPr>
             <a:r>
-              <a:rPr lang="en-US" sz="1200" b="1" kern="0" spc="200" dirty="0">
+              <a:rPr lang="pt-BR" sz="1200" b="1" kern="0" spc="200" noProof="0" dirty="0">
                 <a:solidFill>
                   <a:srgbClr val="6C4BC1"/>
                 </a:solidFill>
@@ -3042,7 +3077,7 @@
               </a:rPr>
               <a:t>BÔNUS OPCIONAL</a:t>
             </a:r>
-            <a:endParaRPr lang="en-US" sz="1200" dirty="0"/>
+            <a:endParaRPr lang="pt-BR" sz="1200" noProof="0" dirty="0"/>
           </a:p>
         </p:txBody>
       </p:sp>
@@ -3071,7 +3106,7 @@
               <a:buNone/>
             </a:pPr>
             <a:r>
-              <a:rPr lang="en-US" sz="3400" b="1" dirty="0">
+              <a:rPr lang="pt-BR" sz="3400" b="1" noProof="0" dirty="0">
                 <a:solidFill>
                   <a:srgbClr val="1B1B2F"/>
                 </a:solidFill>
@@ -3081,7 +3116,7 @@
               </a:rPr>
               <a:t>Para quem já está em dia</a:t>
             </a:r>
-            <a:endParaRPr lang="en-US" sz="3400" dirty="0"/>
+            <a:endParaRPr lang="pt-BR" sz="3400" noProof="0" dirty="0"/>
           </a:p>
         </p:txBody>
       </p:sp>
@@ -3104,6 +3139,13 @@
           </a:solidFill>
           <a:ln/>
         </p:spPr>
+        <p:txBody>
+          <a:bodyPr/>
+          <a:lstStyle/>
+          <a:p>
+            <a:endParaRPr lang="pt-BR" noProof="0" dirty="0"/>
+          </a:p>
+        </p:txBody>
       </p:sp>
       <p:pic>
         <p:nvPicPr>
@@ -3157,7 +3199,7 @@
               <a:buNone/>
             </a:pPr>
             <a:r>
-              <a:rPr lang="en-US" sz="1600" dirty="0">
+              <a:rPr lang="pt-BR" sz="1600" noProof="0" dirty="0">
                 <a:solidFill>
                   <a:srgbClr val="6B6B80"/>
                 </a:solidFill>
@@ -3167,7 +3209,7 @@
               </a:rPr>
               <a:t>Um desafio leve de raciocínio lógico, que antecipa o que vem na próxima aula de conteúdo.</a:t>
             </a:r>
-            <a:endParaRPr lang="en-US" sz="1600" dirty="0"/>
+            <a:endParaRPr lang="pt-BR" sz="1600" noProof="0" dirty="0"/>
           </a:p>
         </p:txBody>
       </p:sp>
@@ -3196,7 +3238,7 @@
               <a:buNone/>
             </a:pPr>
             <a:r>
-              <a:rPr lang="en-US" sz="1350" i="1" dirty="0">
+              <a:rPr lang="pt-BR" sz="1350" i="1" noProof="0" dirty="0">
                 <a:solidFill>
                   <a:srgbClr val="6C4BC1"/>
                 </a:solidFill>
@@ -3206,7 +3248,7 @@
               </a:rPr>
               <a:t>Sem chute — só eliminação lógica, passo a passo.</a:t>
             </a:r>
-            <a:endParaRPr lang="en-US" sz="1350" dirty="0"/>
+            <a:endParaRPr lang="pt-BR" sz="1350" noProof="0" dirty="0"/>
           </a:p>
         </p:txBody>
       </p:sp>
@@ -3235,7 +3277,7 @@
               <a:buNone/>
             </a:pPr>
             <a:r>
-              <a:rPr lang="en-US" sz="1000" dirty="0">
+              <a:rPr lang="pt-BR" sz="1000" noProof="0" dirty="0">
                 <a:solidFill>
                   <a:srgbClr val="6B6B80"/>
                 </a:solidFill>
@@ -3245,7 +3287,7 @@
               </a:rPr>
               <a:t>11</a:t>
             </a:r>
-            <a:endParaRPr lang="en-US" sz="1000" dirty="0"/>
+            <a:endParaRPr lang="pt-BR" sz="1000" noProof="0" dirty="0"/>
           </a:p>
         </p:txBody>
       </p:sp>
@@ -3307,7 +3349,7 @@
               <a:buNone/>
             </a:pPr>
             <a:r>
-              <a:rPr lang="en-US" sz="1200" b="1" kern="0" spc="200" dirty="0">
+              <a:rPr lang="pt-BR" sz="1200" b="1" kern="0" spc="200" noProof="0" dirty="0">
                 <a:solidFill>
                   <a:srgbClr val="2FE6C7"/>
                 </a:solidFill>
@@ -3317,7 +3359,7 @@
               </a:rPr>
               <a:t>DESAFIO OPCIONAL</a:t>
             </a:r>
-            <a:endParaRPr lang="en-US" sz="1200" dirty="0"/>
+            <a:endParaRPr lang="pt-BR" sz="1200" noProof="0" dirty="0"/>
           </a:p>
         </p:txBody>
       </p:sp>
@@ -3346,7 +3388,7 @@
               <a:buNone/>
             </a:pPr>
             <a:r>
-              <a:rPr lang="en-US" sz="3200" b="1" dirty="0">
+              <a:rPr lang="pt-BR" sz="3200" b="1" noProof="0" dirty="0">
                 <a:solidFill>
                   <a:srgbClr val="FFFFFF"/>
                 </a:solidFill>
@@ -3356,7 +3398,7 @@
               </a:rPr>
               <a:t>Quem usa qual fantasia?</a:t>
             </a:r>
-            <a:endParaRPr lang="en-US" sz="3200" dirty="0"/>
+            <a:endParaRPr lang="pt-BR" sz="3200" noProof="0" dirty="0"/>
           </a:p>
         </p:txBody>
       </p:sp>
@@ -3388,7 +3430,7 @@
               <a:buNone/>
             </a:pPr>
             <a:r>
-              <a:rPr lang="en-US" sz="1450" dirty="0">
+              <a:rPr lang="pt-BR" sz="1450" noProof="0" dirty="0">
                 <a:solidFill>
                   <a:srgbClr val="CBC3EE"/>
                 </a:solidFill>
@@ -3398,7 +3440,7 @@
               </a:rPr>
               <a:t>Três amigos foram a um bloco de Carnaval do ano anterior, cada um com uma fantasia diferente. Descubra quem usou o quê — só com lógica, sem chute.</a:t>
             </a:r>
-            <a:endParaRPr lang="en-US" sz="1450" dirty="0"/>
+            <a:endParaRPr lang="pt-BR" sz="1450" noProof="0" dirty="0"/>
           </a:p>
         </p:txBody>
       </p:sp>
@@ -3426,6 +3468,13 @@
             <a:prstDash val="solid"/>
           </a:ln>
         </p:spPr>
+        <p:txBody>
+          <a:bodyPr/>
+          <a:lstStyle/>
+          <a:p>
+            <a:endParaRPr lang="pt-BR" noProof="0" dirty="0"/>
+          </a:p>
+        </p:txBody>
       </p:sp>
       <p:sp>
         <p:nvSpPr>
@@ -3452,7 +3501,7 @@
               <a:buNone/>
             </a:pPr>
             <a:r>
-              <a:rPr lang="en-US" sz="3400" b="1" dirty="0">
+              <a:rPr lang="pt-BR" sz="3400" b="1" noProof="0" dirty="0">
                 <a:solidFill>
                   <a:srgbClr val="2FE6C7"/>
                 </a:solidFill>
@@ -3462,7 +3511,7 @@
               </a:rPr>
               <a:t>A</a:t>
             </a:r>
-            <a:endParaRPr lang="en-US" sz="3400" dirty="0"/>
+            <a:endParaRPr lang="pt-BR" sz="3400" noProof="0" dirty="0"/>
           </a:p>
         </p:txBody>
       </p:sp>
@@ -3491,7 +3540,7 @@
               <a:buNone/>
             </a:pPr>
             <a:r>
-              <a:rPr lang="en-US" sz="1500" b="1" dirty="0">
+              <a:rPr lang="pt-BR" sz="1500" b="1" noProof="0" dirty="0">
                 <a:solidFill>
                   <a:srgbClr val="FFFFFF"/>
                 </a:solidFill>
@@ -3501,7 +3550,7 @@
               </a:rPr>
               <a:t>Ana</a:t>
             </a:r>
-            <a:endParaRPr lang="en-US" sz="1500" dirty="0"/>
+            <a:endParaRPr lang="pt-BR" sz="1500" noProof="0" dirty="0"/>
           </a:p>
         </p:txBody>
       </p:sp>
@@ -3529,6 +3578,13 @@
             <a:prstDash val="solid"/>
           </a:ln>
         </p:spPr>
+        <p:txBody>
+          <a:bodyPr/>
+          <a:lstStyle/>
+          <a:p>
+            <a:endParaRPr lang="pt-BR" noProof="0" dirty="0"/>
+          </a:p>
+        </p:txBody>
       </p:sp>
       <p:sp>
         <p:nvSpPr>
@@ -3555,7 +3611,7 @@
               <a:buNone/>
             </a:pPr>
             <a:r>
-              <a:rPr lang="en-US" sz="3400" b="1" dirty="0">
+              <a:rPr lang="pt-BR" sz="3400" b="1" noProof="0" dirty="0">
                 <a:solidFill>
                   <a:srgbClr val="2FE6C7"/>
                 </a:solidFill>
@@ -3565,7 +3621,7 @@
               </a:rPr>
               <a:t>B</a:t>
             </a:r>
-            <a:endParaRPr lang="en-US" sz="3400" dirty="0"/>
+            <a:endParaRPr lang="pt-BR" sz="3400" noProof="0" dirty="0"/>
           </a:p>
         </p:txBody>
       </p:sp>
@@ -3594,7 +3650,7 @@
               <a:buNone/>
             </a:pPr>
             <a:r>
-              <a:rPr lang="en-US" sz="1500" b="1" dirty="0">
+              <a:rPr lang="pt-BR" sz="1500" b="1" noProof="0" dirty="0">
                 <a:solidFill>
                   <a:srgbClr val="FFFFFF"/>
                 </a:solidFill>
@@ -3604,7 +3660,7 @@
               </a:rPr>
               <a:t>Bruno</a:t>
             </a:r>
-            <a:endParaRPr lang="en-US" sz="1500" dirty="0"/>
+            <a:endParaRPr lang="pt-BR" sz="1500" noProof="0" dirty="0"/>
           </a:p>
         </p:txBody>
       </p:sp>
@@ -3632,6 +3688,13 @@
             <a:prstDash val="solid"/>
           </a:ln>
         </p:spPr>
+        <p:txBody>
+          <a:bodyPr/>
+          <a:lstStyle/>
+          <a:p>
+            <a:endParaRPr lang="pt-BR" noProof="0" dirty="0"/>
+          </a:p>
+        </p:txBody>
       </p:sp>
       <p:sp>
         <p:nvSpPr>
@@ -3658,7 +3721,7 @@
               <a:buNone/>
             </a:pPr>
             <a:r>
-              <a:rPr lang="en-US" sz="3400" b="1" dirty="0">
+              <a:rPr lang="pt-BR" sz="3400" b="1" noProof="0" dirty="0">
                 <a:solidFill>
                   <a:srgbClr val="2FE6C7"/>
                 </a:solidFill>
@@ -3668,7 +3731,7 @@
               </a:rPr>
               <a:t>C</a:t>
             </a:r>
-            <a:endParaRPr lang="en-US" sz="3400" dirty="0"/>
+            <a:endParaRPr lang="pt-BR" sz="3400" noProof="0" dirty="0"/>
           </a:p>
         </p:txBody>
       </p:sp>
@@ -3697,7 +3760,7 @@
               <a:buNone/>
             </a:pPr>
             <a:r>
-              <a:rPr lang="en-US" sz="1500" b="1" dirty="0">
+              <a:rPr lang="pt-BR" sz="1500" b="1" noProof="0" dirty="0">
                 <a:solidFill>
                   <a:srgbClr val="FFFFFF"/>
                 </a:solidFill>
@@ -3707,7 +3770,7 @@
               </a:rPr>
               <a:t>Caio</a:t>
             </a:r>
-            <a:endParaRPr lang="en-US" sz="1500" dirty="0"/>
+            <a:endParaRPr lang="pt-BR" sz="1500" noProof="0" dirty="0"/>
           </a:p>
         </p:txBody>
       </p:sp>
@@ -3736,7 +3799,7 @@
               <a:buNone/>
             </a:pPr>
             <a:r>
-              <a:rPr lang="en-US" sz="1100" b="1" kern="0" spc="150" dirty="0">
+              <a:rPr lang="pt-BR" sz="1100" b="1" kern="0" spc="150" noProof="0" dirty="0">
                 <a:solidFill>
                   <a:srgbClr val="8A90C6"/>
                 </a:solidFill>
@@ -3746,7 +3809,7 @@
               </a:rPr>
               <a:t>FANTASIAS DISPONÍVEIS</a:t>
             </a:r>
-            <a:endParaRPr lang="en-US" sz="1100" dirty="0"/>
+            <a:endParaRPr lang="pt-BR" sz="1100" noProof="0" dirty="0"/>
           </a:p>
         </p:txBody>
       </p:sp>
@@ -3771,6 +3834,13 @@
           </a:solidFill>
           <a:ln/>
         </p:spPr>
+        <p:txBody>
+          <a:bodyPr/>
+          <a:lstStyle/>
+          <a:p>
+            <a:endParaRPr lang="pt-BR" noProof="0" dirty="0"/>
+          </a:p>
+        </p:txBody>
       </p:sp>
       <p:sp>
         <p:nvSpPr>
@@ -3791,6 +3861,13 @@
           </a:solidFill>
           <a:ln/>
         </p:spPr>
+        <p:txBody>
+          <a:bodyPr/>
+          <a:lstStyle/>
+          <a:p>
+            <a:endParaRPr lang="pt-BR" noProof="0" dirty="0"/>
+          </a:p>
+        </p:txBody>
       </p:sp>
       <p:pic>
         <p:nvPicPr>
@@ -3841,7 +3918,7 @@
               <a:buNone/>
             </a:pPr>
             <a:r>
-              <a:rPr lang="en-US" sz="1550" b="1" dirty="0">
+              <a:rPr lang="pt-BR" sz="1550" b="1" noProof="0" dirty="0">
                 <a:solidFill>
                   <a:srgbClr val="FFFFFF"/>
                 </a:solidFill>
@@ -3851,7 +3928,7 @@
               </a:rPr>
               <a:t>Pirata</a:t>
             </a:r>
-            <a:endParaRPr lang="en-US" sz="1550" dirty="0"/>
+            <a:endParaRPr lang="pt-BR" sz="1550" noProof="0" dirty="0"/>
           </a:p>
         </p:txBody>
       </p:sp>
@@ -3876,6 +3953,13 @@
           </a:solidFill>
           <a:ln/>
         </p:spPr>
+        <p:txBody>
+          <a:bodyPr/>
+          <a:lstStyle/>
+          <a:p>
+            <a:endParaRPr lang="pt-BR" noProof="0" dirty="0"/>
+          </a:p>
+        </p:txBody>
       </p:sp>
       <p:sp>
         <p:nvSpPr>
@@ -3896,6 +3980,13 @@
           </a:solidFill>
           <a:ln/>
         </p:spPr>
+        <p:txBody>
+          <a:bodyPr/>
+          <a:lstStyle/>
+          <a:p>
+            <a:endParaRPr lang="pt-BR" noProof="0" dirty="0"/>
+          </a:p>
+        </p:txBody>
       </p:sp>
       <p:pic>
         <p:nvPicPr>
@@ -3946,7 +4037,7 @@
               <a:buNone/>
             </a:pPr>
             <a:r>
-              <a:rPr lang="en-US" sz="1550" b="1" dirty="0">
+              <a:rPr lang="pt-BR" sz="1550" b="1" noProof="0" dirty="0">
                 <a:solidFill>
                   <a:srgbClr val="FFFFFF"/>
                 </a:solidFill>
@@ -3956,7 +4047,7 @@
               </a:rPr>
               <a:t>Super-herói</a:t>
             </a:r>
-            <a:endParaRPr lang="en-US" sz="1550" dirty="0"/>
+            <a:endParaRPr lang="pt-BR" sz="1550" noProof="0" dirty="0"/>
           </a:p>
         </p:txBody>
       </p:sp>
@@ -3981,6 +4072,13 @@
           </a:solidFill>
           <a:ln/>
         </p:spPr>
+        <p:txBody>
+          <a:bodyPr/>
+          <a:lstStyle/>
+          <a:p>
+            <a:endParaRPr lang="pt-BR" noProof="0" dirty="0"/>
+          </a:p>
+        </p:txBody>
       </p:sp>
       <p:sp>
         <p:nvSpPr>
@@ -4001,6 +4099,13 @@
           </a:solidFill>
           <a:ln/>
         </p:spPr>
+        <p:txBody>
+          <a:bodyPr/>
+          <a:lstStyle/>
+          <a:p>
+            <a:endParaRPr lang="pt-BR" noProof="0" dirty="0"/>
+          </a:p>
+        </p:txBody>
       </p:sp>
       <p:pic>
         <p:nvPicPr>
@@ -4051,7 +4156,7 @@
               <a:buNone/>
             </a:pPr>
             <a:r>
-              <a:rPr lang="en-US" sz="1550" b="1" dirty="0">
+              <a:rPr lang="pt-BR" sz="1550" b="1" noProof="0" dirty="0">
                 <a:solidFill>
                   <a:srgbClr val="FFFFFF"/>
                 </a:solidFill>
@@ -4061,7 +4166,7 @@
               </a:rPr>
               <a:t>Palhaço</a:t>
             </a:r>
-            <a:endParaRPr lang="en-US" sz="1550" dirty="0"/>
+            <a:endParaRPr lang="pt-BR" sz="1550" noProof="0" dirty="0"/>
           </a:p>
         </p:txBody>
       </p:sp>
@@ -4090,7 +4195,7 @@
               <a:buNone/>
             </a:pPr>
             <a:r>
-              <a:rPr lang="en-US" sz="1000" dirty="0">
+              <a:rPr lang="pt-BR" sz="1000" noProof="0" dirty="0">
                 <a:solidFill>
                   <a:srgbClr val="6B6B80"/>
                 </a:solidFill>
@@ -4100,7 +4205,7 @@
               </a:rPr>
               <a:t>12</a:t>
             </a:r>
-            <a:endParaRPr lang="en-US" sz="1000" dirty="0"/>
+            <a:endParaRPr lang="pt-BR" sz="1000" noProof="0" dirty="0"/>
           </a:p>
         </p:txBody>
       </p:sp>
@@ -4162,7 +4267,7 @@
               <a:buNone/>
             </a:pPr>
             <a:r>
-              <a:rPr lang="en-US" sz="1200" b="1" kern="0" spc="200" dirty="0">
+              <a:rPr lang="pt-BR" sz="1200" b="1" kern="0" spc="200" noProof="0" dirty="0">
                 <a:solidFill>
                   <a:srgbClr val="2FE6C7"/>
                 </a:solidFill>
@@ -4172,7 +4277,7 @@
               </a:rPr>
               <a:t>DESAFIO OPCIONAL</a:t>
             </a:r>
-            <a:endParaRPr lang="en-US" sz="1200" dirty="0"/>
+            <a:endParaRPr lang="pt-BR" sz="1200" noProof="0" dirty="0"/>
           </a:p>
         </p:txBody>
       </p:sp>
@@ -4201,7 +4306,7 @@
               <a:buNone/>
             </a:pPr>
             <a:r>
-              <a:rPr lang="en-US" sz="3400" b="1" dirty="0">
+              <a:rPr lang="pt-BR" sz="3400" b="1" noProof="0" dirty="0">
                 <a:solidFill>
                   <a:srgbClr val="FFFFFF"/>
                 </a:solidFill>
@@ -4211,7 +4316,7 @@
               </a:rPr>
               <a:t>As pistas</a:t>
             </a:r>
-            <a:endParaRPr lang="en-US" sz="3400" dirty="0"/>
+            <a:endParaRPr lang="pt-BR" sz="3400" noProof="0" dirty="0"/>
           </a:p>
         </p:txBody>
       </p:sp>
@@ -4240,7 +4345,7 @@
               <a:buNone/>
             </a:pPr>
             <a:r>
-              <a:rPr lang="en-US" sz="1400" dirty="0">
+              <a:rPr lang="pt-BR" sz="1400" noProof="0" dirty="0">
                 <a:solidFill>
                   <a:srgbClr val="CBC3EE"/>
                 </a:solidFill>
@@ -4250,7 +4355,7 @@
               </a:rPr>
               <a:t>Use as três pistas para eliminar possibilidades até sobrar apenas uma combinação válida.</a:t>
             </a:r>
-            <a:endParaRPr lang="en-US" sz="1400" dirty="0"/>
+            <a:endParaRPr lang="pt-BR" sz="1400" noProof="0" dirty="0"/>
           </a:p>
         </p:txBody>
       </p:sp>
@@ -4275,6 +4380,13 @@
           </a:solidFill>
           <a:ln/>
         </p:spPr>
+        <p:txBody>
+          <a:bodyPr/>
+          <a:lstStyle/>
+          <a:p>
+            <a:endParaRPr lang="pt-BR" noProof="0" dirty="0"/>
+          </a:p>
+        </p:txBody>
       </p:sp>
       <p:sp>
         <p:nvSpPr>
@@ -4295,6 +4407,13 @@
           </a:solidFill>
           <a:ln/>
         </p:spPr>
+        <p:txBody>
+          <a:bodyPr/>
+          <a:lstStyle/>
+          <a:p>
+            <a:endParaRPr lang="pt-BR" noProof="0" dirty="0"/>
+          </a:p>
+        </p:txBody>
       </p:sp>
       <p:sp>
         <p:nvSpPr>
@@ -4321,7 +4440,7 @@
               <a:buNone/>
             </a:pPr>
             <a:r>
-              <a:rPr lang="en-US" sz="2000" b="1" dirty="0">
+              <a:rPr lang="pt-BR" sz="2000" b="1" noProof="0" dirty="0">
                 <a:solidFill>
                   <a:srgbClr val="141B41"/>
                 </a:solidFill>
@@ -4331,7 +4450,7 @@
               </a:rPr>
               <a:t>1</a:t>
             </a:r>
-            <a:endParaRPr lang="en-US" sz="2000" dirty="0"/>
+            <a:endParaRPr lang="pt-BR" sz="2000" noProof="0" dirty="0"/>
           </a:p>
         </p:txBody>
       </p:sp>
@@ -4384,7 +4503,7 @@
               <a:buNone/>
             </a:pPr>
             <a:r>
-              <a:rPr lang="en-US" sz="1600" dirty="0">
+              <a:rPr lang="pt-BR" sz="1600" noProof="0" dirty="0">
                 <a:solidFill>
                   <a:srgbClr val="FFFFFF"/>
                 </a:solidFill>
@@ -4394,7 +4513,7 @@
               </a:rPr>
               <a:t>Ana não estava vestida de pirata.</a:t>
             </a:r>
-            <a:endParaRPr lang="en-US" sz="1600" dirty="0"/>
+            <a:endParaRPr lang="pt-BR" sz="1600" noProof="0" dirty="0"/>
           </a:p>
         </p:txBody>
       </p:sp>
@@ -4419,6 +4538,13 @@
           </a:solidFill>
           <a:ln/>
         </p:spPr>
+        <p:txBody>
+          <a:bodyPr/>
+          <a:lstStyle/>
+          <a:p>
+            <a:endParaRPr lang="pt-BR" noProof="0" dirty="0"/>
+          </a:p>
+        </p:txBody>
       </p:sp>
       <p:sp>
         <p:nvSpPr>
@@ -4439,6 +4565,13 @@
           </a:solidFill>
           <a:ln/>
         </p:spPr>
+        <p:txBody>
+          <a:bodyPr/>
+          <a:lstStyle/>
+          <a:p>
+            <a:endParaRPr lang="pt-BR" noProof="0" dirty="0"/>
+          </a:p>
+        </p:txBody>
       </p:sp>
       <p:sp>
         <p:nvSpPr>
@@ -4465,7 +4598,7 @@
               <a:buNone/>
             </a:pPr>
             <a:r>
-              <a:rPr lang="en-US" sz="2000" b="1" dirty="0">
+              <a:rPr lang="pt-BR" sz="2000" b="1" noProof="0" dirty="0">
                 <a:solidFill>
                   <a:srgbClr val="141B41"/>
                 </a:solidFill>
@@ -4475,7 +4608,7 @@
               </a:rPr>
               <a:t>2</a:t>
             </a:r>
-            <a:endParaRPr lang="en-US" sz="2000" dirty="0"/>
+            <a:endParaRPr lang="pt-BR" sz="2000" noProof="0" dirty="0"/>
           </a:p>
         </p:txBody>
       </p:sp>
@@ -4528,7 +4661,7 @@
               <a:buNone/>
             </a:pPr>
             <a:r>
-              <a:rPr lang="en-US" sz="1600" dirty="0">
+              <a:rPr lang="pt-BR" sz="1600" noProof="0" dirty="0">
                 <a:solidFill>
                   <a:srgbClr val="FFFFFF"/>
                 </a:solidFill>
@@ -4538,7 +4671,7 @@
               </a:rPr>
               <a:t>Quem estava de super-herói não é Bruno.</a:t>
             </a:r>
-            <a:endParaRPr lang="en-US" sz="1600" dirty="0"/>
+            <a:endParaRPr lang="pt-BR" sz="1600" noProof="0" dirty="0"/>
           </a:p>
         </p:txBody>
       </p:sp>
@@ -4563,6 +4696,13 @@
           </a:solidFill>
           <a:ln/>
         </p:spPr>
+        <p:txBody>
+          <a:bodyPr/>
+          <a:lstStyle/>
+          <a:p>
+            <a:endParaRPr lang="pt-BR" noProof="0" dirty="0"/>
+          </a:p>
+        </p:txBody>
       </p:sp>
       <p:sp>
         <p:nvSpPr>
@@ -4583,6 +4723,13 @@
           </a:solidFill>
           <a:ln/>
         </p:spPr>
+        <p:txBody>
+          <a:bodyPr/>
+          <a:lstStyle/>
+          <a:p>
+            <a:endParaRPr lang="pt-BR" noProof="0" dirty="0"/>
+          </a:p>
+        </p:txBody>
       </p:sp>
       <p:sp>
         <p:nvSpPr>
@@ -4609,7 +4756,7 @@
               <a:buNone/>
             </a:pPr>
             <a:r>
-              <a:rPr lang="en-US" sz="2000" b="1" dirty="0">
+              <a:rPr lang="pt-BR" sz="2000" b="1" noProof="0" dirty="0">
                 <a:solidFill>
                   <a:srgbClr val="141B41"/>
                 </a:solidFill>
@@ -4619,7 +4766,7 @@
               </a:rPr>
               <a:t>3</a:t>
             </a:r>
-            <a:endParaRPr lang="en-US" sz="2000" dirty="0"/>
+            <a:endParaRPr lang="pt-BR" sz="2000" noProof="0" dirty="0"/>
           </a:p>
         </p:txBody>
       </p:sp>
@@ -4672,7 +4819,7 @@
               <a:buNone/>
             </a:pPr>
             <a:r>
-              <a:rPr lang="en-US" sz="1600" dirty="0">
+              <a:rPr lang="pt-BR" sz="1600" noProof="0" dirty="0">
                 <a:solidFill>
                   <a:srgbClr val="FFFFFF"/>
                 </a:solidFill>
@@ -4682,7 +4829,7 @@
               </a:rPr>
               <a:t>Caio não estava de palhaço nem de super-herói.</a:t>
             </a:r>
-            <a:endParaRPr lang="en-US" sz="1600" dirty="0"/>
+            <a:endParaRPr lang="pt-BR" sz="1600" noProof="0" dirty="0"/>
           </a:p>
         </p:txBody>
       </p:sp>
@@ -4711,7 +4858,7 @@
               <a:buNone/>
             </a:pPr>
             <a:r>
-              <a:rPr lang="en-US" sz="1000" dirty="0">
+              <a:rPr lang="pt-BR" sz="1000" noProof="0" dirty="0">
                 <a:solidFill>
                   <a:srgbClr val="6B6B80"/>
                 </a:solidFill>
@@ -4721,7 +4868,7 @@
               </a:rPr>
               <a:t>13</a:t>
             </a:r>
-            <a:endParaRPr lang="en-US" sz="1000" dirty="0"/>
+            <a:endParaRPr lang="pt-BR" sz="1000" noProof="0" dirty="0"/>
           </a:p>
         </p:txBody>
       </p:sp>
@@ -4783,7 +4930,7 @@
               <a:buNone/>
             </a:pPr>
             <a:r>
-              <a:rPr lang="en-US" sz="1200" b="1" kern="0" spc="200" dirty="0">
+              <a:rPr lang="pt-BR" sz="1200" b="1" kern="0" spc="200" noProof="0" dirty="0">
                 <a:solidFill>
                   <a:srgbClr val="6C4BC1"/>
                 </a:solidFill>
@@ -4793,7 +4940,7 @@
               </a:rPr>
               <a:t>MÉTODO</a:t>
             </a:r>
-            <a:endParaRPr lang="en-US" sz="1200" dirty="0"/>
+            <a:endParaRPr lang="pt-BR" sz="1200" noProof="0" dirty="0"/>
           </a:p>
         </p:txBody>
       </p:sp>
@@ -4822,7 +4969,7 @@
               <a:buNone/>
             </a:pPr>
             <a:r>
-              <a:rPr lang="en-US" sz="2800" b="1" dirty="0">
+              <a:rPr lang="pt-BR" sz="2800" b="1" noProof="0" dirty="0">
                 <a:solidFill>
                   <a:srgbClr val="1B1B2F"/>
                 </a:solidFill>
@@ -4832,7 +4979,7 @@
               </a:rPr>
               <a:t>Dica: monte uma tabela de eliminação</a:t>
             </a:r>
-            <a:endParaRPr lang="en-US" sz="2800" dirty="0"/>
+            <a:endParaRPr lang="pt-BR" sz="2800" noProof="0" dirty="0"/>
           </a:p>
         </p:txBody>
       </p:sp>
@@ -4864,7 +5011,7 @@
               <a:buNone/>
             </a:pPr>
             <a:r>
-              <a:rPr lang="en-US" sz="1400" dirty="0">
+              <a:rPr lang="pt-BR" sz="1400" noProof="0" dirty="0">
                 <a:solidFill>
                   <a:srgbClr val="6B6B80"/>
                 </a:solidFill>
@@ -4874,7 +5021,7 @@
               </a:rPr>
               <a:t>Coloque as pessoas nas linhas e as fantasias nas colunas. A cada pista, marque X na opção impossível — até sobrar só uma por pessoa.</a:t>
             </a:r>
-            <a:endParaRPr lang="en-US" sz="1400" dirty="0"/>
+            <a:endParaRPr lang="pt-BR" sz="1400" noProof="0" dirty="0"/>
           </a:p>
         </p:txBody>
       </p:sp>
@@ -4887,14 +5034,14 @@
           <p:nvPr>
             <p:extLst>
               <p:ext uri="{D42A27DB-BD31-4B8C-83A1-F6EECF244321}">
-                <p14:modId xmlns:p14="http://schemas.microsoft.com/office/powerpoint/2010/main" val="1579011935"/>
+                <p14:modId xmlns:p14="http://schemas.microsoft.com/office/powerpoint/2010/main" val="1842222618"/>
               </p:ext>
             </p:extLst>
           </p:nvPr>
         </p:nvGraphicFramePr>
         <p:xfrm>
           <a:off x="1737360" y="2240280"/>
-          <a:ext cx="8686800" cy="914400"/>
+          <a:ext cx="8686800" cy="2971800"/>
         </p:xfrm>
         <a:graphic>
           <a:graphicData uri="http://schemas.openxmlformats.org/drawingml/2006/table">
@@ -4939,7 +5086,7 @@
                       <a:pPr marL="0" indent="0">
                         <a:buNone/>
                       </a:pPr>
-                      <a:endParaRPr lang="en-US" sz="1200" dirty="0"/>
+                      <a:endParaRPr lang="pt-BR" sz="1200" noProof="0" dirty="0"/>
                     </a:p>
                   </a:txBody>
                   <a:tcPr>
@@ -4993,7 +5140,7 @@
                         <a:buNone/>
                       </a:pPr>
                       <a:r>
-                        <a:rPr lang="en-US" sz="1500" b="1" dirty="0">
+                        <a:rPr lang="pt-BR" sz="1500" b="1" noProof="0" dirty="0">
                           <a:solidFill>
                             <a:srgbClr val="FFFFFF"/>
                           </a:solidFill>
@@ -5003,7 +5150,7 @@
                         </a:rPr>
                         <a:t>Pirata</a:t>
                       </a:r>
-                      <a:endParaRPr lang="en-US" sz="1500" dirty="0">
+                      <a:endParaRPr lang="pt-BR" sz="1500" noProof="0" dirty="0">
                         <a:latin typeface="Calibri" charset="0"/>
                         <a:ea typeface="Calibri" charset="0"/>
                         <a:cs typeface="Calibri" charset="0"/>
@@ -5061,7 +5208,7 @@
                         <a:buNone/>
                       </a:pPr>
                       <a:r>
-                        <a:rPr lang="en-US" sz="1500" b="1" dirty="0">
+                        <a:rPr lang="pt-BR" sz="1500" b="1" noProof="0" dirty="0">
                           <a:solidFill>
                             <a:srgbClr val="FFFFFF"/>
                           </a:solidFill>
@@ -5071,7 +5218,7 @@
                         </a:rPr>
                         <a:t>Super-herói</a:t>
                       </a:r>
-                      <a:endParaRPr lang="en-US" sz="1500" dirty="0">
+                      <a:endParaRPr lang="pt-BR" sz="1500" noProof="0" dirty="0">
                         <a:latin typeface="Calibri" charset="0"/>
                         <a:ea typeface="Calibri" charset="0"/>
                         <a:cs typeface="Calibri" charset="0"/>
@@ -5129,7 +5276,7 @@
                         <a:buNone/>
                       </a:pPr>
                       <a:r>
-                        <a:rPr lang="en-US" sz="1500" b="1" dirty="0">
+                        <a:rPr lang="pt-BR" sz="1500" b="1" noProof="0" dirty="0">
                           <a:solidFill>
                             <a:srgbClr val="FFFFFF"/>
                           </a:solidFill>
@@ -5139,7 +5286,7 @@
                         </a:rPr>
                         <a:t>Palhaço</a:t>
                       </a:r>
-                      <a:endParaRPr lang="en-US" sz="1500" dirty="0">
+                      <a:endParaRPr lang="pt-BR" sz="1500" noProof="0" dirty="0">
                         <a:latin typeface="Calibri" charset="0"/>
                         <a:ea typeface="Calibri" charset="0"/>
                         <a:cs typeface="Calibri" charset="0"/>
@@ -5204,7 +5351,7 @@
                         <a:buNone/>
                       </a:pPr>
                       <a:r>
-                        <a:rPr lang="en-US" sz="1500" b="1" dirty="0">
+                        <a:rPr lang="pt-BR" sz="1500" b="1" noProof="0" dirty="0">
                           <a:solidFill>
                             <a:srgbClr val="1B1B2F"/>
                           </a:solidFill>
@@ -5214,7 +5361,7 @@
                         </a:rPr>
                         <a:t>Ana</a:t>
                       </a:r>
-                      <a:endParaRPr lang="en-US" sz="1500" dirty="0">
+                      <a:endParaRPr lang="pt-BR" sz="1500" noProof="0" dirty="0">
                         <a:latin typeface="Calibri" charset="0"/>
                         <a:ea typeface="Calibri" charset="0"/>
                         <a:cs typeface="Calibri" charset="0"/>
@@ -5272,7 +5419,7 @@
                         <a:buNone/>
                       </a:pPr>
                       <a:r>
-                        <a:rPr lang="en-US" sz="1500" b="1" dirty="0">
+                        <a:rPr lang="pt-BR" sz="1500" b="1" noProof="0" dirty="0">
                           <a:solidFill>
                             <a:srgbClr val="C6392F"/>
                           </a:solidFill>
@@ -5282,7 +5429,7 @@
                         </a:rPr>
                         <a:t>X</a:t>
                       </a:r>
-                      <a:endParaRPr lang="en-US" sz="1500" dirty="0">
+                      <a:endParaRPr lang="pt-BR" sz="1500" noProof="0" dirty="0">
                         <a:latin typeface="Calibri" charset="0"/>
                         <a:ea typeface="Calibri" charset="0"/>
                         <a:cs typeface="Calibri" charset="0"/>
@@ -5340,7 +5487,7 @@
                         <a:buNone/>
                       </a:pPr>
                       <a:r>
-                        <a:rPr lang="en-US" sz="1500" b="1" dirty="0">
+                        <a:rPr lang="pt-BR" sz="1500" b="1" noProof="0" dirty="0">
                           <a:solidFill>
                             <a:srgbClr val="6B6B80"/>
                           </a:solidFill>
@@ -5350,7 +5497,7 @@
                         </a:rPr>
                         <a:t>?</a:t>
                       </a:r>
-                      <a:endParaRPr lang="en-US" sz="1500" dirty="0">
+                      <a:endParaRPr lang="pt-BR" sz="1500" noProof="0" dirty="0">
                         <a:latin typeface="Calibri" charset="0"/>
                         <a:ea typeface="Calibri" charset="0"/>
                         <a:cs typeface="Calibri" charset="0"/>
@@ -5408,7 +5555,7 @@
                         <a:buNone/>
                       </a:pPr>
                       <a:r>
-                        <a:rPr lang="en-US" sz="1500" b="1" dirty="0">
+                        <a:rPr lang="pt-BR" sz="1500" b="1" noProof="0" dirty="0">
                           <a:solidFill>
                             <a:srgbClr val="6B6B80"/>
                           </a:solidFill>
@@ -5418,7 +5565,7 @@
                         </a:rPr>
                         <a:t>?</a:t>
                       </a:r>
-                      <a:endParaRPr lang="en-US" sz="1500" dirty="0">
+                      <a:endParaRPr lang="pt-BR" sz="1500" noProof="0" dirty="0">
                         <a:latin typeface="Calibri" charset="0"/>
                         <a:ea typeface="Calibri" charset="0"/>
                         <a:cs typeface="Calibri" charset="0"/>
@@ -5483,7 +5630,7 @@
                         <a:buNone/>
                       </a:pPr>
                       <a:r>
-                        <a:rPr lang="en-US" sz="1500" b="1" dirty="0">
+                        <a:rPr lang="pt-BR" sz="1500" b="1" noProof="0" dirty="0">
                           <a:solidFill>
                             <a:srgbClr val="1B1B2F"/>
                           </a:solidFill>
@@ -5493,7 +5640,7 @@
                         </a:rPr>
                         <a:t>Bruno</a:t>
                       </a:r>
-                      <a:endParaRPr lang="en-US" sz="1500" dirty="0">
+                      <a:endParaRPr lang="pt-BR" sz="1500" noProof="0" dirty="0">
                         <a:latin typeface="Calibri" charset="0"/>
                         <a:ea typeface="Calibri" charset="0"/>
                         <a:cs typeface="Calibri" charset="0"/>
@@ -5551,7 +5698,7 @@
                         <a:buNone/>
                       </a:pPr>
                       <a:r>
-                        <a:rPr lang="en-US" sz="1500" b="1" dirty="0">
+                        <a:rPr lang="pt-BR" sz="1500" b="1" noProof="0" dirty="0">
                           <a:solidFill>
                             <a:srgbClr val="6B6B80"/>
                           </a:solidFill>
@@ -5561,7 +5708,7 @@
                         </a:rPr>
                         <a:t>?</a:t>
                       </a:r>
-                      <a:endParaRPr lang="en-US" sz="1500" dirty="0">
+                      <a:endParaRPr lang="pt-BR" sz="1500" noProof="0" dirty="0">
                         <a:latin typeface="Calibri" charset="0"/>
                         <a:ea typeface="Calibri" charset="0"/>
                         <a:cs typeface="Calibri" charset="0"/>
@@ -5619,7 +5766,7 @@
                         <a:buNone/>
                       </a:pPr>
                       <a:r>
-                        <a:rPr lang="en-US" sz="1500" b="1" dirty="0">
+                        <a:rPr lang="pt-BR" sz="1500" b="1" noProof="0" dirty="0">
                           <a:solidFill>
                             <a:srgbClr val="6B6B80"/>
                           </a:solidFill>
@@ -5629,7 +5776,7 @@
                         </a:rPr>
                         <a:t>?</a:t>
                       </a:r>
-                      <a:endParaRPr lang="en-US" sz="1500" dirty="0">
+                      <a:endParaRPr lang="pt-BR" sz="1500" noProof="0" dirty="0">
                         <a:latin typeface="Calibri" charset="0"/>
                         <a:ea typeface="Calibri" charset="0"/>
                         <a:cs typeface="Calibri" charset="0"/>
@@ -5687,7 +5834,7 @@
                         <a:buNone/>
                       </a:pPr>
                       <a:r>
-                        <a:rPr lang="en-US" sz="1500" b="1" dirty="0">
+                        <a:rPr lang="pt-BR" sz="1500" b="1" noProof="0" dirty="0">
                           <a:solidFill>
                             <a:srgbClr val="6B6B80"/>
                           </a:solidFill>
@@ -5697,7 +5844,7 @@
                         </a:rPr>
                         <a:t>?</a:t>
                       </a:r>
-                      <a:endParaRPr lang="en-US" sz="1500" dirty="0">
+                      <a:endParaRPr lang="pt-BR" sz="1500" noProof="0" dirty="0">
                         <a:latin typeface="Calibri" charset="0"/>
                         <a:ea typeface="Calibri" charset="0"/>
                         <a:cs typeface="Calibri" charset="0"/>
@@ -5762,7 +5909,7 @@
                         <a:buNone/>
                       </a:pPr>
                       <a:r>
-                        <a:rPr lang="en-US" sz="1500" b="1" dirty="0">
+                        <a:rPr lang="pt-BR" sz="1500" b="1" noProof="0" dirty="0">
                           <a:solidFill>
                             <a:srgbClr val="1B1B2F"/>
                           </a:solidFill>
@@ -5772,7 +5919,7 @@
                         </a:rPr>
                         <a:t>Caio</a:t>
                       </a:r>
-                      <a:endParaRPr lang="en-US" sz="1500" dirty="0">
+                      <a:endParaRPr lang="pt-BR" sz="1500" noProof="0" dirty="0">
                         <a:latin typeface="Calibri" charset="0"/>
                         <a:ea typeface="Calibri" charset="0"/>
                         <a:cs typeface="Calibri" charset="0"/>
@@ -5830,7 +5977,7 @@
                         <a:buNone/>
                       </a:pPr>
                       <a:r>
-                        <a:rPr lang="en-US" sz="1500" b="1" dirty="0">
+                        <a:rPr lang="pt-BR" sz="1500" b="1" noProof="0" dirty="0">
                           <a:solidFill>
                             <a:srgbClr val="6B6B80"/>
                           </a:solidFill>
@@ -5840,7 +5987,7 @@
                         </a:rPr>
                         <a:t>?</a:t>
                       </a:r>
-                      <a:endParaRPr lang="en-US" sz="1500" dirty="0">
+                      <a:endParaRPr lang="pt-BR" sz="1500" noProof="0" dirty="0">
                         <a:latin typeface="Calibri" charset="0"/>
                         <a:ea typeface="Calibri" charset="0"/>
                         <a:cs typeface="Calibri" charset="0"/>
@@ -5898,7 +6045,7 @@
                         <a:buNone/>
                       </a:pPr>
                       <a:r>
-                        <a:rPr lang="en-US" sz="1500" b="1" dirty="0">
+                        <a:rPr lang="pt-BR" sz="1500" b="1" noProof="0" dirty="0">
                           <a:solidFill>
                             <a:srgbClr val="6B6B80"/>
                           </a:solidFill>
@@ -5908,7 +6055,7 @@
                         </a:rPr>
                         <a:t>?</a:t>
                       </a:r>
-                      <a:endParaRPr lang="en-US" sz="1500" dirty="0">
+                      <a:endParaRPr lang="pt-BR" sz="1500" noProof="0" dirty="0">
                         <a:latin typeface="Calibri" charset="0"/>
                         <a:ea typeface="Calibri" charset="0"/>
                         <a:cs typeface="Calibri" charset="0"/>
@@ -5966,7 +6113,7 @@
                         <a:buNone/>
                       </a:pPr>
                       <a:r>
-                        <a:rPr lang="en-US" sz="1500" b="1" dirty="0">
+                        <a:rPr lang="pt-BR" sz="1500" b="1" noProof="0" dirty="0">
                           <a:solidFill>
                             <a:srgbClr val="6B6B80"/>
                           </a:solidFill>
@@ -5976,7 +6123,7 @@
                         </a:rPr>
                         <a:t>?</a:t>
                       </a:r>
-                      <a:endParaRPr lang="en-US" sz="1500" dirty="0">
+                      <a:endParaRPr lang="pt-BR" sz="1500" noProof="0" dirty="0">
                         <a:latin typeface="Calibri" charset="0"/>
                         <a:ea typeface="Calibri" charset="0"/>
                         <a:cs typeface="Calibri" charset="0"/>
@@ -6060,7 +6207,7 @@
               <a:buNone/>
             </a:pPr>
             <a:r>
-              <a:rPr lang="en-US" sz="1250" i="1" dirty="0">
+              <a:rPr lang="pt-BR" sz="1250" i="1" noProof="0" dirty="0">
                 <a:solidFill>
                   <a:srgbClr val="6C4BC1"/>
                 </a:solidFill>
@@ -6070,7 +6217,7 @@
               </a:rPr>
               <a:t>Exemplo: a pista 1 já elimina “Ana + pirata” — por isso o X já está marcado. Continue com as outras duas pistas.</a:t>
             </a:r>
-            <a:endParaRPr lang="en-US" sz="1250" dirty="0"/>
+            <a:endParaRPr lang="pt-BR" sz="1250" noProof="0" dirty="0"/>
           </a:p>
         </p:txBody>
       </p:sp>
@@ -6099,7 +6246,7 @@
               <a:buNone/>
             </a:pPr>
             <a:r>
-              <a:rPr lang="en-US" sz="1000" dirty="0">
+              <a:rPr lang="pt-BR" sz="1000" noProof="0" dirty="0">
                 <a:solidFill>
                   <a:srgbClr val="6B6B80"/>
                 </a:solidFill>
@@ -6109,7 +6256,7 @@
               </a:rPr>
               <a:t>14</a:t>
             </a:r>
-            <a:endParaRPr lang="en-US" sz="1000" dirty="0"/>
+            <a:endParaRPr lang="pt-BR" sz="1000" noProof="0" dirty="0"/>
           </a:p>
         </p:txBody>
       </p:sp>
@@ -6171,7 +6318,7 @@
               <a:buNone/>
             </a:pPr>
             <a:r>
-              <a:rPr lang="en-US" sz="1200" b="1" kern="0" spc="200" dirty="0">
+              <a:rPr lang="pt-BR" sz="1200" b="1" kern="0" spc="200" noProof="0" dirty="0">
                 <a:solidFill>
                   <a:srgbClr val="6C4BC1"/>
                 </a:solidFill>
@@ -6181,7 +6328,7 @@
               </a:rPr>
               <a:t>RESOLUÇÃO</a:t>
             </a:r>
-            <a:endParaRPr lang="en-US" sz="1200" dirty="0"/>
+            <a:endParaRPr lang="pt-BR" sz="1200" noProof="0" dirty="0"/>
           </a:p>
         </p:txBody>
       </p:sp>
@@ -6210,7 +6357,7 @@
               <a:buNone/>
             </a:pPr>
             <a:r>
-              <a:rPr lang="en-US" sz="2800" b="1" dirty="0">
+              <a:rPr lang="pt-BR" sz="2800" b="1" noProof="0" dirty="0">
                 <a:solidFill>
                   <a:srgbClr val="1B1B2F"/>
                 </a:solidFill>
@@ -6220,7 +6367,7 @@
               </a:rPr>
               <a:t>Resolução guiada, passo a passo</a:t>
             </a:r>
-            <a:endParaRPr lang="en-US" sz="2800" dirty="0"/>
+            <a:endParaRPr lang="pt-BR" sz="2800" noProof="0" dirty="0"/>
           </a:p>
         </p:txBody>
       </p:sp>
@@ -6233,14 +6380,14 @@
           <p:nvPr>
             <p:extLst>
               <p:ext uri="{D42A27DB-BD31-4B8C-83A1-F6EECF244321}">
-                <p14:modId xmlns:p14="http://schemas.microsoft.com/office/powerpoint/2010/main" val="1579011935"/>
+                <p14:modId xmlns:p14="http://schemas.microsoft.com/office/powerpoint/2010/main" val="1176151075"/>
               </p:ext>
             </p:extLst>
           </p:nvPr>
         </p:nvGraphicFramePr>
         <p:xfrm>
           <a:off x="640080" y="1691640"/>
-          <a:ext cx="5120640" cy="914400"/>
+          <a:ext cx="5120640" cy="2368296"/>
         </p:xfrm>
         <a:graphic>
           <a:graphicData uri="http://schemas.openxmlformats.org/drawingml/2006/table">
@@ -6285,7 +6432,7 @@
                       <a:pPr marL="0" indent="0">
                         <a:buNone/>
                       </a:pPr>
-                      <a:endParaRPr lang="en-US" sz="1200" dirty="0"/>
+                      <a:endParaRPr lang="pt-BR" sz="1200" noProof="0" dirty="0"/>
                     </a:p>
                   </a:txBody>
                   <a:tcPr>
@@ -6339,7 +6486,7 @@
                         <a:buNone/>
                       </a:pPr>
                       <a:r>
-                        <a:rPr lang="en-US" sz="1200" b="1" dirty="0">
+                        <a:rPr lang="pt-BR" sz="1200" b="1" noProof="0" dirty="0">
                           <a:solidFill>
                             <a:srgbClr val="FFFFFF"/>
                           </a:solidFill>
@@ -6349,7 +6496,7 @@
                         </a:rPr>
                         <a:t>Pirata</a:t>
                       </a:r>
-                      <a:endParaRPr lang="en-US" sz="1200" dirty="0">
+                      <a:endParaRPr lang="pt-BR" sz="1200" noProof="0" dirty="0">
                         <a:latin typeface="Calibri" charset="0"/>
                         <a:ea typeface="Calibri" charset="0"/>
                         <a:cs typeface="Calibri" charset="0"/>
@@ -6407,7 +6554,7 @@
                         <a:buNone/>
                       </a:pPr>
                       <a:r>
-                        <a:rPr lang="en-US" sz="1200" b="1" dirty="0">
+                        <a:rPr lang="pt-BR" sz="1200" b="1" noProof="0" dirty="0">
                           <a:solidFill>
                             <a:srgbClr val="FFFFFF"/>
                           </a:solidFill>
@@ -6417,7 +6564,7 @@
                         </a:rPr>
                         <a:t>Super-herói</a:t>
                       </a:r>
-                      <a:endParaRPr lang="en-US" sz="1200" dirty="0">
+                      <a:endParaRPr lang="pt-BR" sz="1200" noProof="0" dirty="0">
                         <a:latin typeface="Calibri" charset="0"/>
                         <a:ea typeface="Calibri" charset="0"/>
                         <a:cs typeface="Calibri" charset="0"/>
@@ -6475,7 +6622,7 @@
                         <a:buNone/>
                       </a:pPr>
                       <a:r>
-                        <a:rPr lang="en-US" sz="1200" b="1" dirty="0">
+                        <a:rPr lang="pt-BR" sz="1200" b="1" noProof="0" dirty="0">
                           <a:solidFill>
                             <a:srgbClr val="FFFFFF"/>
                           </a:solidFill>
@@ -6485,7 +6632,7 @@
                         </a:rPr>
                         <a:t>Palhaço</a:t>
                       </a:r>
-                      <a:endParaRPr lang="en-US" sz="1200" dirty="0">
+                      <a:endParaRPr lang="pt-BR" sz="1200" noProof="0" dirty="0">
                         <a:latin typeface="Calibri" charset="0"/>
                         <a:ea typeface="Calibri" charset="0"/>
                         <a:cs typeface="Calibri" charset="0"/>
@@ -6550,7 +6697,7 @@
                         <a:buNone/>
                       </a:pPr>
                       <a:r>
-                        <a:rPr lang="en-US" sz="1350" b="1" dirty="0">
+                        <a:rPr lang="pt-BR" sz="1350" b="1" noProof="0" dirty="0">
                           <a:solidFill>
                             <a:srgbClr val="1B1B2F"/>
                           </a:solidFill>
@@ -6560,7 +6707,7 @@
                         </a:rPr>
                         <a:t>Ana</a:t>
                       </a:r>
-                      <a:endParaRPr lang="en-US" sz="1350" dirty="0">
+                      <a:endParaRPr lang="pt-BR" sz="1350" noProof="0" dirty="0">
                         <a:latin typeface="Calibri" charset="0"/>
                         <a:ea typeface="Calibri" charset="0"/>
                         <a:cs typeface="Calibri" charset="0"/>
@@ -6618,7 +6765,7 @@
                         <a:buNone/>
                       </a:pPr>
                       <a:r>
-                        <a:rPr lang="en-US" sz="1350" b="1" dirty="0">
+                        <a:rPr lang="pt-BR" sz="1350" b="1" noProof="0" dirty="0">
                           <a:solidFill>
                             <a:srgbClr val="C6392F"/>
                           </a:solidFill>
@@ -6628,7 +6775,7 @@
                         </a:rPr>
                         <a:t>X</a:t>
                       </a:r>
-                      <a:endParaRPr lang="en-US" sz="1350" dirty="0">
+                      <a:endParaRPr lang="pt-BR" sz="1350" noProof="0" dirty="0">
                         <a:latin typeface="Calibri" charset="0"/>
                         <a:ea typeface="Calibri" charset="0"/>
                         <a:cs typeface="Calibri" charset="0"/>
@@ -6686,7 +6833,7 @@
                         <a:buNone/>
                       </a:pPr>
                       <a:r>
-                        <a:rPr lang="en-US" sz="1600" b="1" dirty="0">
+                        <a:rPr lang="pt-BR" sz="1600" b="1" noProof="0" dirty="0">
                           <a:solidFill>
                             <a:srgbClr val="0E9C86"/>
                           </a:solidFill>
@@ -6696,7 +6843,7 @@
                         </a:rPr>
                         <a:t>✓</a:t>
                       </a:r>
-                      <a:endParaRPr lang="en-US" sz="1600" dirty="0">
+                      <a:endParaRPr lang="pt-BR" sz="1600" noProof="0" dirty="0">
                         <a:latin typeface="Calibri" charset="0"/>
                         <a:ea typeface="Calibri" charset="0"/>
                         <a:cs typeface="Calibri" charset="0"/>
@@ -6754,7 +6901,7 @@
                         <a:buNone/>
                       </a:pPr>
                       <a:r>
-                        <a:rPr lang="en-US" sz="1350" b="1" dirty="0">
+                        <a:rPr lang="pt-BR" sz="1350" b="1" noProof="0" dirty="0">
                           <a:solidFill>
                             <a:srgbClr val="C6392F"/>
                           </a:solidFill>
@@ -6764,7 +6911,7 @@
                         </a:rPr>
                         <a:t>X</a:t>
                       </a:r>
-                      <a:endParaRPr lang="en-US" sz="1350" dirty="0">
+                      <a:endParaRPr lang="pt-BR" sz="1350" noProof="0" dirty="0">
                         <a:latin typeface="Calibri" charset="0"/>
                         <a:ea typeface="Calibri" charset="0"/>
                         <a:cs typeface="Calibri" charset="0"/>
@@ -6829,7 +6976,7 @@
                         <a:buNone/>
                       </a:pPr>
                       <a:r>
-                        <a:rPr lang="en-US" sz="1350" b="1" dirty="0">
+                        <a:rPr lang="pt-BR" sz="1350" b="1" noProof="0" dirty="0">
                           <a:solidFill>
                             <a:srgbClr val="1B1B2F"/>
                           </a:solidFill>
@@ -6839,7 +6986,7 @@
                         </a:rPr>
                         <a:t>Bruno</a:t>
                       </a:r>
-                      <a:endParaRPr lang="en-US" sz="1350" dirty="0">
+                      <a:endParaRPr lang="pt-BR" sz="1350" noProof="0" dirty="0">
                         <a:latin typeface="Calibri" charset="0"/>
                         <a:ea typeface="Calibri" charset="0"/>
                         <a:cs typeface="Calibri" charset="0"/>
@@ -6897,7 +7044,7 @@
                         <a:buNone/>
                       </a:pPr>
                       <a:r>
-                        <a:rPr lang="en-US" sz="1350" b="1" dirty="0">
+                        <a:rPr lang="pt-BR" sz="1350" b="1" noProof="0" dirty="0">
                           <a:solidFill>
                             <a:srgbClr val="C6392F"/>
                           </a:solidFill>
@@ -6907,7 +7054,7 @@
                         </a:rPr>
                         <a:t>X</a:t>
                       </a:r>
-                      <a:endParaRPr lang="en-US" sz="1350" dirty="0">
+                      <a:endParaRPr lang="pt-BR" sz="1350" noProof="0" dirty="0">
                         <a:latin typeface="Calibri" charset="0"/>
                         <a:ea typeface="Calibri" charset="0"/>
                         <a:cs typeface="Calibri" charset="0"/>
@@ -6965,7 +7112,7 @@
                         <a:buNone/>
                       </a:pPr>
                       <a:r>
-                        <a:rPr lang="en-US" sz="1350" b="1" dirty="0">
+                        <a:rPr lang="pt-BR" sz="1350" b="1" noProof="0" dirty="0">
                           <a:solidFill>
                             <a:srgbClr val="C6392F"/>
                           </a:solidFill>
@@ -6975,7 +7122,7 @@
                         </a:rPr>
                         <a:t>X</a:t>
                       </a:r>
-                      <a:endParaRPr lang="en-US" sz="1350" dirty="0">
+                      <a:endParaRPr lang="pt-BR" sz="1350" noProof="0" dirty="0">
                         <a:latin typeface="Calibri" charset="0"/>
                         <a:ea typeface="Calibri" charset="0"/>
                         <a:cs typeface="Calibri" charset="0"/>
@@ -7033,7 +7180,7 @@
                         <a:buNone/>
                       </a:pPr>
                       <a:r>
-                        <a:rPr lang="en-US" sz="1600" b="1" dirty="0">
+                        <a:rPr lang="pt-BR" sz="1600" b="1" noProof="0" dirty="0">
                           <a:solidFill>
                             <a:srgbClr val="0E9C86"/>
                           </a:solidFill>
@@ -7043,7 +7190,7 @@
                         </a:rPr>
                         <a:t>✓</a:t>
                       </a:r>
-                      <a:endParaRPr lang="en-US" sz="1600" dirty="0">
+                      <a:endParaRPr lang="pt-BR" sz="1600" noProof="0" dirty="0">
                         <a:latin typeface="Calibri" charset="0"/>
                         <a:ea typeface="Calibri" charset="0"/>
                         <a:cs typeface="Calibri" charset="0"/>
@@ -7108,7 +7255,7 @@
                         <a:buNone/>
                       </a:pPr>
                       <a:r>
-                        <a:rPr lang="en-US" sz="1350" b="1" dirty="0">
+                        <a:rPr lang="pt-BR" sz="1350" b="1" noProof="0" dirty="0">
                           <a:solidFill>
                             <a:srgbClr val="1B1B2F"/>
                           </a:solidFill>
@@ -7118,7 +7265,7 @@
                         </a:rPr>
                         <a:t>Caio</a:t>
                       </a:r>
-                      <a:endParaRPr lang="en-US" sz="1350" dirty="0">
+                      <a:endParaRPr lang="pt-BR" sz="1350" noProof="0" dirty="0">
                         <a:latin typeface="Calibri" charset="0"/>
                         <a:ea typeface="Calibri" charset="0"/>
                         <a:cs typeface="Calibri" charset="0"/>
@@ -7176,7 +7323,7 @@
                         <a:buNone/>
                       </a:pPr>
                       <a:r>
-                        <a:rPr lang="en-US" sz="1600" b="1" dirty="0">
+                        <a:rPr lang="pt-BR" sz="1600" b="1" noProof="0" dirty="0">
                           <a:solidFill>
                             <a:srgbClr val="0E9C86"/>
                           </a:solidFill>
@@ -7186,7 +7333,7 @@
                         </a:rPr>
                         <a:t>✓</a:t>
                       </a:r>
-                      <a:endParaRPr lang="en-US" sz="1600" dirty="0">
+                      <a:endParaRPr lang="pt-BR" sz="1600" noProof="0" dirty="0">
                         <a:latin typeface="Calibri" charset="0"/>
                         <a:ea typeface="Calibri" charset="0"/>
                         <a:cs typeface="Calibri" charset="0"/>
@@ -7244,7 +7391,7 @@
                         <a:buNone/>
                       </a:pPr>
                       <a:r>
-                        <a:rPr lang="en-US" sz="1350" b="1" dirty="0">
+                        <a:rPr lang="pt-BR" sz="1350" b="1" noProof="0" dirty="0">
                           <a:solidFill>
                             <a:srgbClr val="C6392F"/>
                           </a:solidFill>
@@ -7254,7 +7401,7 @@
                         </a:rPr>
                         <a:t>X</a:t>
                       </a:r>
-                      <a:endParaRPr lang="en-US" sz="1350" dirty="0">
+                      <a:endParaRPr lang="pt-BR" sz="1350" noProof="0" dirty="0">
                         <a:latin typeface="Calibri" charset="0"/>
                         <a:ea typeface="Calibri" charset="0"/>
                         <a:cs typeface="Calibri" charset="0"/>
@@ -7312,7 +7459,7 @@
                         <a:buNone/>
                       </a:pPr>
                       <a:r>
-                        <a:rPr lang="en-US" sz="1350" b="1" dirty="0">
+                        <a:rPr lang="pt-BR" sz="1350" b="1" noProof="0" dirty="0">
                           <a:solidFill>
                             <a:srgbClr val="C6392F"/>
                           </a:solidFill>
@@ -7322,7 +7469,7 @@
                         </a:rPr>
                         <a:t>X</a:t>
                       </a:r>
-                      <a:endParaRPr lang="en-US" sz="1350" dirty="0">
+                      <a:endParaRPr lang="pt-BR" sz="1350" noProof="0" dirty="0">
                         <a:latin typeface="Calibri" charset="0"/>
                         <a:ea typeface="Calibri" charset="0"/>
                         <a:cs typeface="Calibri" charset="0"/>
@@ -7400,6 +7547,13 @@
           </a:solidFill>
           <a:ln/>
         </p:spPr>
+        <p:txBody>
+          <a:bodyPr/>
+          <a:lstStyle/>
+          <a:p>
+            <a:endParaRPr lang="pt-BR" noProof="0" dirty="0"/>
+          </a:p>
+        </p:txBody>
       </p:sp>
       <p:sp>
         <p:nvSpPr>
@@ -7426,7 +7580,7 @@
               <a:buNone/>
             </a:pPr>
             <a:r>
-              <a:rPr lang="en-US" sz="1400" b="1" dirty="0">
+              <a:rPr lang="pt-BR" sz="1400" b="1" noProof="0" dirty="0">
                 <a:solidFill>
                   <a:srgbClr val="FFFFFF"/>
                 </a:solidFill>
@@ -7436,7 +7590,7 @@
               </a:rPr>
               <a:t>1</a:t>
             </a:r>
-            <a:endParaRPr lang="en-US" sz="1400" dirty="0"/>
+            <a:endParaRPr lang="pt-BR" sz="1400" noProof="0" dirty="0"/>
           </a:p>
         </p:txBody>
       </p:sp>
@@ -7465,7 +7619,7 @@
               <a:buNone/>
             </a:pPr>
             <a:r>
-              <a:rPr lang="en-US" sz="1400" b="1" dirty="0">
+              <a:rPr lang="pt-BR" sz="1400" b="1" noProof="0" dirty="0">
                 <a:solidFill>
                   <a:srgbClr val="6C4BC1"/>
                 </a:solidFill>
@@ -7475,7 +7629,7 @@
               </a:rPr>
               <a:t>Pista 3</a:t>
             </a:r>
-            <a:endParaRPr lang="en-US" sz="1400" dirty="0"/>
+            <a:endParaRPr lang="pt-BR" sz="1400" noProof="0" dirty="0"/>
           </a:p>
         </p:txBody>
       </p:sp>
@@ -7507,7 +7661,7 @@
               <a:buNone/>
             </a:pPr>
             <a:r>
-              <a:rPr lang="en-US" sz="1250" dirty="0">
+              <a:rPr lang="pt-BR" sz="1250" noProof="0" dirty="0">
                 <a:solidFill>
                   <a:srgbClr val="1B1B2F"/>
                 </a:solidFill>
@@ -7517,7 +7671,7 @@
               </a:rPr>
               <a:t>Caio não é palhaço nem super-herói — só resta pirata.</a:t>
             </a:r>
-            <a:endParaRPr lang="en-US" sz="1250" dirty="0"/>
+            <a:endParaRPr lang="pt-BR" sz="1250" noProof="0" dirty="0"/>
           </a:p>
         </p:txBody>
       </p:sp>
@@ -7540,6 +7694,13 @@
           </a:solidFill>
           <a:ln/>
         </p:spPr>
+        <p:txBody>
+          <a:bodyPr/>
+          <a:lstStyle/>
+          <a:p>
+            <a:endParaRPr lang="pt-BR" noProof="0" dirty="0"/>
+          </a:p>
+        </p:txBody>
       </p:sp>
       <p:sp>
         <p:nvSpPr>
@@ -7566,7 +7727,7 @@
               <a:buNone/>
             </a:pPr>
             <a:r>
-              <a:rPr lang="en-US" sz="1400" b="1" dirty="0">
+              <a:rPr lang="pt-BR" sz="1400" b="1" noProof="0" dirty="0">
                 <a:solidFill>
                   <a:srgbClr val="FFFFFF"/>
                 </a:solidFill>
@@ -7576,7 +7737,7 @@
               </a:rPr>
               <a:t>2</a:t>
             </a:r>
-            <a:endParaRPr lang="en-US" sz="1400" dirty="0"/>
+            <a:endParaRPr lang="pt-BR" sz="1400" noProof="0" dirty="0"/>
           </a:p>
         </p:txBody>
       </p:sp>
@@ -7605,7 +7766,7 @@
               <a:buNone/>
             </a:pPr>
             <a:r>
-              <a:rPr lang="en-US" sz="1400" b="1" dirty="0">
+              <a:rPr lang="pt-BR" sz="1400" b="1" noProof="0" dirty="0">
                 <a:solidFill>
                   <a:srgbClr val="6C4BC1"/>
                 </a:solidFill>
@@ -7615,7 +7776,7 @@
               </a:rPr>
               <a:t>Pista 1</a:t>
             </a:r>
-            <a:endParaRPr lang="en-US" sz="1400" dirty="0"/>
+            <a:endParaRPr lang="pt-BR" sz="1400" noProof="0" dirty="0"/>
           </a:p>
         </p:txBody>
       </p:sp>
@@ -7647,7 +7808,7 @@
               <a:buNone/>
             </a:pPr>
             <a:r>
-              <a:rPr lang="en-US" sz="1250" dirty="0">
+              <a:rPr lang="pt-BR" sz="1250" noProof="0" dirty="0">
                 <a:solidFill>
                   <a:srgbClr val="1B1B2F"/>
                 </a:solidFill>
@@ -7657,7 +7818,7 @@
               </a:rPr>
               <a:t>Ana não é pirata (e Caio já ocupou essa vaga, tudo consistente) — resta super-herói ou palhaço para ela.</a:t>
             </a:r>
-            <a:endParaRPr lang="en-US" sz="1250" dirty="0"/>
+            <a:endParaRPr lang="pt-BR" sz="1250" noProof="0" dirty="0"/>
           </a:p>
         </p:txBody>
       </p:sp>
@@ -7680,6 +7841,13 @@
           </a:solidFill>
           <a:ln/>
         </p:spPr>
+        <p:txBody>
+          <a:bodyPr/>
+          <a:lstStyle/>
+          <a:p>
+            <a:endParaRPr lang="pt-BR" noProof="0" dirty="0"/>
+          </a:p>
+        </p:txBody>
       </p:sp>
       <p:sp>
         <p:nvSpPr>
@@ -7706,7 +7874,7 @@
               <a:buNone/>
             </a:pPr>
             <a:r>
-              <a:rPr lang="en-US" sz="1400" b="1" dirty="0">
+              <a:rPr lang="pt-BR" sz="1400" b="1" noProof="0" dirty="0">
                 <a:solidFill>
                   <a:srgbClr val="FFFFFF"/>
                 </a:solidFill>
@@ -7716,7 +7884,7 @@
               </a:rPr>
               <a:t>3</a:t>
             </a:r>
-            <a:endParaRPr lang="en-US" sz="1400" dirty="0"/>
+            <a:endParaRPr lang="pt-BR" sz="1400" noProof="0" dirty="0"/>
           </a:p>
         </p:txBody>
       </p:sp>
@@ -7745,7 +7913,7 @@
               <a:buNone/>
             </a:pPr>
             <a:r>
-              <a:rPr lang="en-US" sz="1400" b="1" dirty="0">
+              <a:rPr lang="pt-BR" sz="1400" b="1" noProof="0" dirty="0">
                 <a:solidFill>
                   <a:srgbClr val="6C4BC1"/>
                 </a:solidFill>
@@ -7755,7 +7923,7 @@
               </a:rPr>
               <a:t>Pista 2</a:t>
             </a:r>
-            <a:endParaRPr lang="en-US" sz="1400" dirty="0"/>
+            <a:endParaRPr lang="pt-BR" sz="1400" noProof="0" dirty="0"/>
           </a:p>
         </p:txBody>
       </p:sp>
@@ -7787,7 +7955,7 @@
               <a:buNone/>
             </a:pPr>
             <a:r>
-              <a:rPr lang="en-US" sz="1250" dirty="0">
+              <a:rPr lang="pt-BR" sz="1250" noProof="0" dirty="0">
                 <a:solidFill>
                   <a:srgbClr val="1B1B2F"/>
                 </a:solidFill>
@@ -7797,7 +7965,7 @@
               </a:rPr>
               <a:t>Quem é super-herói não é Bruno — logo Bruno só pode ser palhaço.</a:t>
             </a:r>
-            <a:endParaRPr lang="en-US" sz="1250" dirty="0"/>
+            <a:endParaRPr lang="pt-BR" sz="1250" noProof="0" dirty="0"/>
           </a:p>
         </p:txBody>
       </p:sp>
@@ -7820,6 +7988,13 @@
           </a:solidFill>
           <a:ln/>
         </p:spPr>
+        <p:txBody>
+          <a:bodyPr/>
+          <a:lstStyle/>
+          <a:p>
+            <a:endParaRPr lang="pt-BR" noProof="0" dirty="0"/>
+          </a:p>
+        </p:txBody>
       </p:sp>
       <p:sp>
         <p:nvSpPr>
@@ -7846,7 +8021,7 @@
               <a:buNone/>
             </a:pPr>
             <a:r>
-              <a:rPr lang="en-US" sz="1400" b="1" dirty="0">
+              <a:rPr lang="pt-BR" sz="1400" b="1" noProof="0" dirty="0">
                 <a:solidFill>
                   <a:srgbClr val="FFFFFF"/>
                 </a:solidFill>
@@ -7856,7 +8031,7 @@
               </a:rPr>
               <a:t>4</a:t>
             </a:r>
-            <a:endParaRPr lang="en-US" sz="1400" dirty="0"/>
+            <a:endParaRPr lang="pt-BR" sz="1400" noProof="0" dirty="0"/>
           </a:p>
         </p:txBody>
       </p:sp>
@@ -7885,7 +8060,7 @@
               <a:buNone/>
             </a:pPr>
             <a:r>
-              <a:rPr lang="en-US" sz="1400" b="1" dirty="0">
+              <a:rPr lang="pt-BR" sz="1400" b="1" noProof="0" dirty="0">
                 <a:solidFill>
                   <a:srgbClr val="6C4BC1"/>
                 </a:solidFill>
@@ -7895,7 +8070,7 @@
               </a:rPr>
               <a:t>Eliminação</a:t>
             </a:r>
-            <a:endParaRPr lang="en-US" sz="1400" dirty="0"/>
+            <a:endParaRPr lang="pt-BR" sz="1400" noProof="0" dirty="0"/>
           </a:p>
         </p:txBody>
       </p:sp>
@@ -7927,7 +8102,7 @@
               <a:buNone/>
             </a:pPr>
             <a:r>
-              <a:rPr lang="en-US" sz="1250" dirty="0">
+              <a:rPr lang="pt-BR" sz="1250" noProof="0" dirty="0">
                 <a:solidFill>
                   <a:srgbClr val="1B1B2F"/>
                 </a:solidFill>
@@ -7937,7 +8112,7 @@
               </a:rPr>
               <a:t>Sobrou super-herói só para Ana.</a:t>
             </a:r>
-            <a:endParaRPr lang="en-US" sz="1250" dirty="0"/>
+            <a:endParaRPr lang="pt-BR" sz="1250" noProof="0" dirty="0"/>
           </a:p>
         </p:txBody>
       </p:sp>
@@ -7966,7 +8141,7 @@
               <a:buNone/>
             </a:pPr>
             <a:r>
-              <a:rPr lang="en-US" sz="1000" dirty="0">
+              <a:rPr lang="pt-BR" sz="1000" noProof="0" dirty="0">
                 <a:solidFill>
                   <a:srgbClr val="6B6B80"/>
                 </a:solidFill>
@@ -7976,7 +8151,7 @@
               </a:rPr>
               <a:t>15</a:t>
             </a:r>
-            <a:endParaRPr lang="en-US" sz="1000" dirty="0"/>
+            <a:endParaRPr lang="pt-BR" sz="1000" noProof="0" dirty="0"/>
           </a:p>
         </p:txBody>
       </p:sp>
@@ -8038,7 +8213,7 @@
               <a:buNone/>
             </a:pPr>
             <a:r>
-              <a:rPr lang="en-US" sz="1200" b="1" kern="0" spc="200" dirty="0">
+              <a:rPr lang="pt-BR" sz="1200" b="1" kern="0" spc="200" noProof="0" dirty="0">
                 <a:solidFill>
                   <a:srgbClr val="6C4BC1"/>
                 </a:solidFill>
@@ -8048,7 +8223,7 @@
               </a:rPr>
               <a:t>CONECTANDO OS PONTOS</a:t>
             </a:r>
-            <a:endParaRPr lang="en-US" sz="1200" dirty="0"/>
+            <a:endParaRPr lang="pt-BR" sz="1200" noProof="0" dirty="0"/>
           </a:p>
         </p:txBody>
       </p:sp>
@@ -8077,7 +8252,7 @@
               <a:buNone/>
             </a:pPr>
             <a:r>
-              <a:rPr lang="en-US" sz="3400" b="1" dirty="0">
+              <a:rPr lang="pt-BR" sz="3400" b="1" noProof="0" dirty="0">
                 <a:solidFill>
                   <a:srgbClr val="1B1B2F"/>
                 </a:solidFill>
@@ -8087,7 +8262,7 @@
               </a:rPr>
               <a:t>Por que isso importa</a:t>
             </a:r>
-            <a:endParaRPr lang="en-US" sz="3400" dirty="0"/>
+            <a:endParaRPr lang="pt-BR" sz="3400" noProof="0" dirty="0"/>
           </a:p>
         </p:txBody>
       </p:sp>
@@ -8110,6 +8285,13 @@
           </a:solidFill>
           <a:ln/>
         </p:spPr>
+        <p:txBody>
+          <a:bodyPr/>
+          <a:lstStyle/>
+          <a:p>
+            <a:endParaRPr lang="pt-BR" noProof="0" dirty="0"/>
+          </a:p>
+        </p:txBody>
       </p:sp>
       <p:pic>
         <p:nvPicPr>
@@ -8163,7 +8345,7 @@
               <a:buNone/>
             </a:pPr>
             <a:r>
-              <a:rPr lang="en-US" sz="1600" dirty="0">
+              <a:rPr lang="pt-BR" sz="1600" noProof="0" dirty="0">
                 <a:solidFill>
                   <a:srgbClr val="1B1B2F"/>
                 </a:solidFill>
@@ -8173,7 +8355,7 @@
               </a:rPr>
               <a:t>Esse tipo de quebra-cabeça de eliminação é resolvido formalmente com lógica proposicional — exatamente o que vem na próxima aula.</a:t>
             </a:r>
-            <a:endParaRPr lang="en-US" sz="1600" dirty="0"/>
+            <a:endParaRPr lang="pt-BR" sz="1600" noProof="0" dirty="0"/>
           </a:p>
         </p:txBody>
       </p:sp>
@@ -8205,7 +8387,7 @@
               <a:buNone/>
             </a:pPr>
             <a:r>
-              <a:rPr lang="en-US" sz="1400" i="1" dirty="0">
+              <a:rPr lang="pt-BR" sz="1400" i="1" noProof="0" dirty="0">
                 <a:solidFill>
                   <a:srgbClr val="6B6B80"/>
                 </a:solidFill>
@@ -8216,7 +8398,7 @@
               <a:t>Se você resolveu “no olho”, parabéns: você já está pensando como a matemática que vamos formalizar em </a:t>
             </a:r>
             <a:r>
-              <a:rPr lang="en-US" sz="1400" i="1" u="sng" dirty="0">
+              <a:rPr lang="pt-BR" sz="1400" i="1" u="sng" noProof="0" dirty="0">
                 <a:solidFill>
                   <a:srgbClr val="000000"/>
                 </a:solidFill>
@@ -8234,7 +8416,7 @@
               <a:t>Fundamentos de Lógica</a:t>
             </a:r>
             <a:r>
-              <a:rPr lang="en-US" sz="1400" i="1" dirty="0">
+              <a:rPr lang="pt-BR" sz="1400" i="1" noProof="0" dirty="0">
                 <a:solidFill>
                   <a:srgbClr val="6B6B80"/>
                 </a:solidFill>
@@ -8244,7 +8426,7 @@
               </a:rPr>
               <a:t>.</a:t>
             </a:r>
-            <a:endParaRPr lang="en-US" sz="1400" dirty="0"/>
+            <a:endParaRPr lang="pt-BR" sz="1400" noProof="0" dirty="0"/>
           </a:p>
         </p:txBody>
       </p:sp>
@@ -8273,7 +8455,7 @@
               <a:buNone/>
             </a:pPr>
             <a:r>
-              <a:rPr lang="en-US" sz="1000" dirty="0">
+              <a:rPr lang="pt-BR" sz="1000" noProof="0" dirty="0">
                 <a:solidFill>
                   <a:srgbClr val="6B6B80"/>
                 </a:solidFill>
@@ -8283,7 +8465,7 @@
               </a:rPr>
               <a:t>16</a:t>
             </a:r>
-            <a:endParaRPr lang="en-US" sz="1000" dirty="0"/>
+            <a:endParaRPr lang="pt-BR" sz="1000" noProof="0" dirty="0"/>
           </a:p>
         </p:txBody>
       </p:sp>
@@ -8345,7 +8527,7 @@
               <a:buNone/>
             </a:pPr>
             <a:r>
-              <a:rPr lang="en-US" sz="1200" b="1" kern="0" spc="200" dirty="0">
+              <a:rPr lang="pt-BR" sz="1200" b="1" kern="0" spc="200" noProof="0" dirty="0">
                 <a:solidFill>
                   <a:srgbClr val="6C4BC1"/>
                 </a:solidFill>
@@ -8355,7 +8537,7 @@
               </a:rPr>
               <a:t>CHECK-IN DE ROTA</a:t>
             </a:r>
-            <a:endParaRPr lang="en-US" sz="1200" dirty="0"/>
+            <a:endParaRPr lang="pt-BR" sz="1200" noProof="0" dirty="0"/>
           </a:p>
         </p:txBody>
       </p:sp>
@@ -8384,7 +8566,7 @@
               <a:buNone/>
             </a:pPr>
             <a:r>
-              <a:rPr lang="en-US" sz="3000" b="1" dirty="0">
+              <a:rPr lang="pt-BR" sz="3000" b="1" noProof="0" dirty="0">
                 <a:solidFill>
                   <a:srgbClr val="1B1B2F"/>
                 </a:solidFill>
@@ -8394,7 +8576,7 @@
               </a:rPr>
               <a:t>Onde estamos no semestre</a:t>
             </a:r>
-            <a:endParaRPr lang="en-US" sz="3000" dirty="0"/>
+            <a:endParaRPr lang="pt-BR" sz="3000" noProof="0" dirty="0"/>
           </a:p>
         </p:txBody>
       </p:sp>
@@ -8417,6 +8599,13 @@
           </a:solidFill>
           <a:ln/>
         </p:spPr>
+        <p:txBody>
+          <a:bodyPr/>
+          <a:lstStyle/>
+          <a:p>
+            <a:endParaRPr lang="pt-BR" noProof="0" dirty="0"/>
+          </a:p>
+        </p:txBody>
       </p:sp>
       <p:sp>
         <p:nvSpPr>
@@ -8437,6 +8626,13 @@
           </a:solidFill>
           <a:ln/>
         </p:spPr>
+        <p:txBody>
+          <a:bodyPr/>
+          <a:lstStyle/>
+          <a:p>
+            <a:endParaRPr lang="pt-BR" noProof="0" dirty="0"/>
+          </a:p>
+        </p:txBody>
       </p:sp>
       <p:pic>
         <p:nvPicPr>
@@ -8487,7 +8683,7 @@
               <a:buNone/>
             </a:pPr>
             <a:r>
-              <a:rPr lang="en-US" sz="1400" b="1" dirty="0">
+              <a:rPr lang="pt-BR" sz="1400" b="1" noProof="0" dirty="0">
                 <a:solidFill>
                   <a:srgbClr val="6B6B80"/>
                 </a:solidFill>
@@ -8497,7 +8693,7 @@
               </a:rPr>
               <a:t>Aula 01</a:t>
             </a:r>
-            <a:endParaRPr lang="en-US" sz="1400" dirty="0"/>
+            <a:endParaRPr lang="pt-BR" sz="1400" noProof="0" dirty="0"/>
           </a:p>
         </p:txBody>
       </p:sp>
@@ -8526,7 +8722,7 @@
               <a:buNone/>
             </a:pPr>
             <a:r>
-              <a:rPr lang="en-US" sz="1150" dirty="0">
+              <a:rPr lang="pt-BR" sz="1150" noProof="0" dirty="0">
                 <a:solidFill>
                   <a:srgbClr val="6B6B80"/>
                 </a:solidFill>
@@ -8536,7 +8732,7 @@
               </a:rPr>
               <a:t>Introdução à UC</a:t>
             </a:r>
-            <a:endParaRPr lang="en-US" sz="1150" dirty="0"/>
+            <a:endParaRPr lang="pt-BR" sz="1150" noProof="0" dirty="0"/>
           </a:p>
         </p:txBody>
       </p:sp>
@@ -8561,6 +8757,13 @@
           </a:solidFill>
           <a:ln/>
         </p:spPr>
+        <p:txBody>
+          <a:bodyPr/>
+          <a:lstStyle/>
+          <a:p>
+            <a:endParaRPr lang="pt-BR" noProof="0" dirty="0"/>
+          </a:p>
+        </p:txBody>
       </p:sp>
       <p:sp>
         <p:nvSpPr>
@@ -8587,7 +8790,7 @@
               <a:buNone/>
             </a:pPr>
             <a:r>
-              <a:rPr lang="en-US" sz="950" b="1" kern="0" spc="50" dirty="0">
+              <a:rPr lang="pt-BR" sz="950" b="1" kern="0" spc="50" noProof="0" dirty="0">
                 <a:solidFill>
                   <a:srgbClr val="141B41"/>
                 </a:solidFill>
@@ -8597,7 +8800,7 @@
               </a:rPr>
               <a:t>VOCÊ ESTÁ AQUI</a:t>
             </a:r>
-            <a:endParaRPr lang="en-US" sz="950" dirty="0"/>
+            <a:endParaRPr lang="pt-BR" sz="950" noProof="0" dirty="0"/>
           </a:p>
         </p:txBody>
       </p:sp>
@@ -8620,6 +8823,13 @@
           </a:solidFill>
           <a:ln/>
         </p:spPr>
+        <p:txBody>
+          <a:bodyPr/>
+          <a:lstStyle/>
+          <a:p>
+            <a:endParaRPr lang="pt-BR" noProof="0" dirty="0"/>
+          </a:p>
+        </p:txBody>
       </p:sp>
       <p:pic>
         <p:nvPicPr>
@@ -8670,7 +8880,7 @@
               <a:buNone/>
             </a:pPr>
             <a:r>
-              <a:rPr lang="en-US" sz="1550" b="1" dirty="0">
+              <a:rPr lang="pt-BR" sz="1550" b="1" noProof="0" dirty="0">
                 <a:solidFill>
                   <a:srgbClr val="1B1B2F"/>
                 </a:solidFill>
@@ -8680,7 +8890,7 @@
               </a:rPr>
               <a:t>Aula 02</a:t>
             </a:r>
-            <a:endParaRPr lang="en-US" sz="1550" dirty="0"/>
+            <a:endParaRPr lang="pt-BR" sz="1550" noProof="0" dirty="0"/>
           </a:p>
         </p:txBody>
       </p:sp>
@@ -8709,7 +8919,7 @@
               <a:buNone/>
             </a:pPr>
             <a:r>
-              <a:rPr lang="en-US" sz="1200" dirty="0">
+              <a:rPr lang="pt-BR" sz="1200" noProof="0" dirty="0">
                 <a:solidFill>
                   <a:srgbClr val="6C4BC1"/>
                 </a:solidFill>
@@ -8719,7 +8929,7 @@
               </a:rPr>
               <a:t>Busca Ativa</a:t>
             </a:r>
-            <a:endParaRPr lang="en-US" sz="1200" dirty="0"/>
+            <a:endParaRPr lang="pt-BR" sz="1200" noProof="0" dirty="0"/>
           </a:p>
         </p:txBody>
       </p:sp>
@@ -8747,6 +8957,13 @@
             <a:prstDash val="solid"/>
           </a:ln>
         </p:spPr>
+        <p:txBody>
+          <a:bodyPr/>
+          <a:lstStyle/>
+          <a:p>
+            <a:endParaRPr lang="pt-BR" noProof="0" dirty="0"/>
+          </a:p>
+        </p:txBody>
       </p:sp>
       <p:pic>
         <p:nvPicPr>
@@ -8797,7 +9014,7 @@
               <a:buNone/>
             </a:pPr>
             <a:r>
-              <a:rPr lang="en-US" sz="1400" b="1" dirty="0">
+              <a:rPr lang="pt-BR" sz="1400" b="1" noProof="0" dirty="0">
                 <a:solidFill>
                   <a:srgbClr val="1B1B2F"/>
                 </a:solidFill>
@@ -8807,7 +9024,7 @@
               </a:rPr>
               <a:t>Aula 03</a:t>
             </a:r>
-            <a:endParaRPr lang="en-US" sz="1400" dirty="0"/>
+            <a:endParaRPr lang="pt-BR" sz="1400" noProof="0" dirty="0"/>
           </a:p>
         </p:txBody>
       </p:sp>
@@ -8836,7 +9053,7 @@
               <a:buNone/>
             </a:pPr>
             <a:r>
-              <a:rPr lang="en-US" sz="1150" dirty="0">
+              <a:rPr lang="pt-BR" sz="1150" noProof="0" dirty="0">
                 <a:solidFill>
                   <a:srgbClr val="6C4BC1"/>
                 </a:solidFill>
@@ -8846,7 +9063,7 @@
               </a:rPr>
               <a:t>Fundamentos de Lógica</a:t>
             </a:r>
-            <a:endParaRPr lang="en-US" sz="1150" dirty="0"/>
+            <a:endParaRPr lang="pt-BR" sz="1150" noProof="0" dirty="0"/>
           </a:p>
         </p:txBody>
       </p:sp>
@@ -8875,7 +9092,7 @@
               <a:buNone/>
             </a:pPr>
             <a:r>
-              <a:rPr lang="en-US" sz="1250" i="1" dirty="0">
+              <a:rPr lang="pt-BR" sz="1250" i="1" noProof="0" dirty="0">
                 <a:solidFill>
                   <a:srgbClr val="6B6B80"/>
                 </a:solidFill>
@@ -8883,9 +9100,31 @@
                 <a:ea typeface="Calibri" pitchFamily="34" charset="-122"/>
                 <a:cs typeface="Calibri" pitchFamily="34" charset="-120"/>
               </a:rPr>
-              <a:t>Depois do onboarding resolvido hoje, o conteúdo novo recomeça na próxima aula.</a:t>
-            </a:r>
-            <a:endParaRPr lang="en-US" sz="1250" dirty="0"/>
+              <a:t>Depois do </a:t>
+            </a:r>
+            <a:r>
+              <a:rPr lang="pt-BR" sz="1250" i="1" noProof="0" dirty="0" err="1">
+                <a:solidFill>
+                  <a:srgbClr val="6B6B80"/>
+                </a:solidFill>
+                <a:latin typeface="Calibri" pitchFamily="34" charset="0"/>
+                <a:ea typeface="Calibri" pitchFamily="34" charset="-122"/>
+                <a:cs typeface="Calibri" pitchFamily="34" charset="-120"/>
+              </a:rPr>
+              <a:t>onboarding</a:t>
+            </a:r>
+            <a:r>
+              <a:rPr lang="pt-BR" sz="1250" i="1" noProof="0" dirty="0">
+                <a:solidFill>
+                  <a:srgbClr val="6B6B80"/>
+                </a:solidFill>
+                <a:latin typeface="Calibri" pitchFamily="34" charset="0"/>
+                <a:ea typeface="Calibri" pitchFamily="34" charset="-122"/>
+                <a:cs typeface="Calibri" pitchFamily="34" charset="-120"/>
+              </a:rPr>
+              <a:t> resolvido hoje, o conteúdo novo recomeça na próxima aula.</a:t>
+            </a:r>
+            <a:endParaRPr lang="pt-BR" sz="1250" noProof="0" dirty="0"/>
           </a:p>
         </p:txBody>
       </p:sp>
@@ -8914,7 +9153,7 @@
               <a:buNone/>
             </a:pPr>
             <a:r>
-              <a:rPr lang="en-US" sz="1000" dirty="0">
+              <a:rPr lang="pt-BR" sz="1000" noProof="0" dirty="0">
                 <a:solidFill>
                   <a:srgbClr val="6B6B80"/>
                 </a:solidFill>
@@ -8924,7 +9163,7 @@
               </a:rPr>
               <a:t>17</a:t>
             </a:r>
-            <a:endParaRPr lang="en-US" sz="1000" dirty="0"/>
+            <a:endParaRPr lang="pt-BR" sz="1000" noProof="0" dirty="0"/>
           </a:p>
         </p:txBody>
       </p:sp>
@@ -8986,7 +9225,7 @@
               <a:buNone/>
             </a:pPr>
             <a:r>
-              <a:rPr lang="en-US" sz="1200" b="1" kern="0" spc="200" dirty="0">
+              <a:rPr lang="pt-BR" sz="1200" b="1" kern="0" spc="200" noProof="0" dirty="0">
                 <a:solidFill>
                   <a:srgbClr val="6C4BC1"/>
                 </a:solidFill>
@@ -8996,7 +9235,7 @@
               </a:rPr>
               <a:t>ANTES DO PRÓXIMO ENCONTRO</a:t>
             </a:r>
-            <a:endParaRPr lang="en-US" sz="1200" dirty="0"/>
+            <a:endParaRPr lang="pt-BR" sz="1200" noProof="0" dirty="0"/>
           </a:p>
         </p:txBody>
       </p:sp>
@@ -9025,7 +9264,7 @@
               <a:buNone/>
             </a:pPr>
             <a:r>
-              <a:rPr lang="en-US" sz="3200" b="1" dirty="0">
+              <a:rPr lang="pt-BR" sz="3200" b="1" noProof="0" dirty="0">
                 <a:solidFill>
                   <a:srgbClr val="1B1B2F"/>
                 </a:solidFill>
@@ -9035,7 +9274,7 @@
               </a:rPr>
               <a:t>Checklist de saída</a:t>
             </a:r>
-            <a:endParaRPr lang="en-US" sz="3200" dirty="0"/>
+            <a:endParaRPr lang="pt-BR" sz="3200" noProof="0" dirty="0"/>
           </a:p>
         </p:txBody>
       </p:sp>
@@ -9060,6 +9299,13 @@
           </a:solidFill>
           <a:ln/>
         </p:spPr>
+        <p:txBody>
+          <a:bodyPr/>
+          <a:lstStyle/>
+          <a:p>
+            <a:endParaRPr lang="pt-BR" noProof="0" dirty="0"/>
+          </a:p>
+        </p:txBody>
       </p:sp>
       <p:sp>
         <p:nvSpPr>
@@ -9087,6 +9333,13 @@
             <a:prstDash val="solid"/>
           </a:ln>
         </p:spPr>
+        <p:txBody>
+          <a:bodyPr/>
+          <a:lstStyle/>
+          <a:p>
+            <a:endParaRPr lang="pt-BR" noProof="0" dirty="0"/>
+          </a:p>
+        </p:txBody>
       </p:sp>
       <p:sp>
         <p:nvSpPr>
@@ -9107,6 +9360,13 @@
           </a:solidFill>
           <a:ln/>
         </p:spPr>
+        <p:txBody>
+          <a:bodyPr/>
+          <a:lstStyle/>
+          <a:p>
+            <a:endParaRPr lang="pt-BR" noProof="0" dirty="0"/>
+          </a:p>
+        </p:txBody>
       </p:sp>
       <p:pic>
         <p:nvPicPr>
@@ -9160,7 +9420,7 @@
               <a:buNone/>
             </a:pPr>
             <a:r>
-              <a:rPr lang="en-US" sz="1450" b="1" dirty="0">
+              <a:rPr lang="pt-BR" sz="1450" b="1" noProof="0" dirty="0">
                 <a:solidFill>
                   <a:srgbClr val="1B1B2F"/>
                 </a:solidFill>
@@ -9168,9 +9428,31 @@
                 <a:ea typeface="Calibri" pitchFamily="34" charset="-122"/>
                 <a:cs typeface="Calibri" pitchFamily="34" charset="-120"/>
               </a:rPr>
-              <a:t>Diagnóstico de onboarding 100% marcado</a:t>
-            </a:r>
-            <a:endParaRPr lang="en-US" sz="1450" dirty="0"/>
+              <a:t>Diagnóstico de </a:t>
+            </a:r>
+            <a:r>
+              <a:rPr lang="pt-BR" sz="1450" b="1" noProof="0" dirty="0" err="1">
+                <a:solidFill>
+                  <a:srgbClr val="1B1B2F"/>
+                </a:solidFill>
+                <a:latin typeface="Calibri" pitchFamily="34" charset="0"/>
+                <a:ea typeface="Calibri" pitchFamily="34" charset="-122"/>
+                <a:cs typeface="Calibri" pitchFamily="34" charset="-120"/>
+              </a:rPr>
+              <a:t>onboarding</a:t>
+            </a:r>
+            <a:r>
+              <a:rPr lang="pt-BR" sz="1450" b="1" noProof="0" dirty="0">
+                <a:solidFill>
+                  <a:srgbClr val="1B1B2F"/>
+                </a:solidFill>
+                <a:latin typeface="Calibri" pitchFamily="34" charset="0"/>
+                <a:ea typeface="Calibri" pitchFamily="34" charset="-122"/>
+                <a:cs typeface="Calibri" pitchFamily="34" charset="-120"/>
+              </a:rPr>
+              <a:t> 100% marcado</a:t>
+            </a:r>
+            <a:endParaRPr lang="pt-BR" sz="1450" noProof="0" dirty="0"/>
           </a:p>
         </p:txBody>
       </p:sp>
@@ -9202,7 +9484,7 @@
               <a:buNone/>
             </a:pPr>
             <a:r>
-              <a:rPr lang="en-US" sz="1200" dirty="0">
+              <a:rPr lang="pt-BR" sz="1200" noProof="0" dirty="0">
                 <a:solidFill>
                   <a:srgbClr val="6B6B80"/>
                 </a:solidFill>
@@ -9212,7 +9494,7 @@
               </a:rPr>
               <a:t>Ou dúvida já reportada ao professor.</a:t>
             </a:r>
-            <a:endParaRPr lang="en-US" sz="1200" dirty="0"/>
+            <a:endParaRPr lang="pt-BR" sz="1200" noProof="0" dirty="0"/>
           </a:p>
         </p:txBody>
       </p:sp>
@@ -9237,6 +9519,13 @@
           </a:solidFill>
           <a:ln/>
         </p:spPr>
+        <p:txBody>
+          <a:bodyPr/>
+          <a:lstStyle/>
+          <a:p>
+            <a:endParaRPr lang="pt-BR" noProof="0" dirty="0"/>
+          </a:p>
+        </p:txBody>
       </p:sp>
       <p:sp>
         <p:nvSpPr>
@@ -9264,6 +9553,13 @@
             <a:prstDash val="solid"/>
           </a:ln>
         </p:spPr>
+        <p:txBody>
+          <a:bodyPr/>
+          <a:lstStyle/>
+          <a:p>
+            <a:endParaRPr lang="pt-BR" noProof="0" dirty="0"/>
+          </a:p>
+        </p:txBody>
       </p:sp>
       <p:sp>
         <p:nvSpPr>
@@ -9284,6 +9580,13 @@
           </a:solidFill>
           <a:ln/>
         </p:spPr>
+        <p:txBody>
+          <a:bodyPr/>
+          <a:lstStyle/>
+          <a:p>
+            <a:endParaRPr lang="pt-BR" noProof="0" dirty="0"/>
+          </a:p>
+        </p:txBody>
       </p:sp>
       <p:pic>
         <p:nvPicPr>
@@ -9337,7 +9640,7 @@
               <a:buNone/>
             </a:pPr>
             <a:r>
-              <a:rPr lang="en-US" sz="1450" b="1" dirty="0">
+              <a:rPr lang="pt-BR" sz="1450" b="1" noProof="0" dirty="0">
                 <a:solidFill>
                   <a:srgbClr val="1B1B2F"/>
                 </a:solidFill>
@@ -9347,7 +9650,7 @@
               </a:rPr>
               <a:t>Ambiente testado e funcionando</a:t>
             </a:r>
-            <a:endParaRPr lang="en-US" sz="1450" dirty="0"/>
+            <a:endParaRPr lang="pt-BR" sz="1450" noProof="0" dirty="0"/>
           </a:p>
         </p:txBody>
       </p:sp>
@@ -9379,7 +9682,7 @@
               <a:buNone/>
             </a:pPr>
             <a:r>
-              <a:rPr lang="en-US" sz="1200" dirty="0">
+              <a:rPr lang="pt-BR" sz="1200" noProof="0" dirty="0">
                 <a:solidFill>
                   <a:srgbClr val="6B6B80"/>
                 </a:solidFill>
@@ -9387,9 +9690,53 @@
                 <a:ea typeface="Calibri" pitchFamily="34" charset="-122"/>
                 <a:cs typeface="Calibri" pitchFamily="34" charset="-120"/>
               </a:rPr>
-              <a:t>C# + VS Code + Git, prontos para a próxima aula.</a:t>
-            </a:r>
-            <a:endParaRPr lang="en-US" sz="1200" dirty="0"/>
+              <a:t>C# + VS </a:t>
+            </a:r>
+            <a:r>
+              <a:rPr lang="pt-BR" sz="1200" noProof="0" dirty="0" err="1">
+                <a:solidFill>
+                  <a:srgbClr val="6B6B80"/>
+                </a:solidFill>
+                <a:latin typeface="Calibri" pitchFamily="34" charset="0"/>
+                <a:ea typeface="Calibri" pitchFamily="34" charset="-122"/>
+                <a:cs typeface="Calibri" pitchFamily="34" charset="-120"/>
+              </a:rPr>
+              <a:t>Code</a:t>
+            </a:r>
+            <a:r>
+              <a:rPr lang="pt-BR" sz="1200" noProof="0" dirty="0">
+                <a:solidFill>
+                  <a:srgbClr val="6B6B80"/>
+                </a:solidFill>
+                <a:latin typeface="Calibri" pitchFamily="34" charset="0"/>
+                <a:ea typeface="Calibri" pitchFamily="34" charset="-122"/>
+                <a:cs typeface="Calibri" pitchFamily="34" charset="-120"/>
+              </a:rPr>
+              <a:t> + </a:t>
+            </a:r>
+            <a:r>
+              <a:rPr lang="pt-BR" sz="1200" noProof="0" dirty="0" err="1">
+                <a:solidFill>
+                  <a:srgbClr val="6B6B80"/>
+                </a:solidFill>
+                <a:latin typeface="Calibri" pitchFamily="34" charset="0"/>
+                <a:ea typeface="Calibri" pitchFamily="34" charset="-122"/>
+                <a:cs typeface="Calibri" pitchFamily="34" charset="-120"/>
+              </a:rPr>
+              <a:t>Git</a:t>
+            </a:r>
+            <a:r>
+              <a:rPr lang="pt-BR" sz="1200" noProof="0" dirty="0">
+                <a:solidFill>
+                  <a:srgbClr val="6B6B80"/>
+                </a:solidFill>
+                <a:latin typeface="Calibri" pitchFamily="34" charset="0"/>
+                <a:ea typeface="Calibri" pitchFamily="34" charset="-122"/>
+                <a:cs typeface="Calibri" pitchFamily="34" charset="-120"/>
+              </a:rPr>
+              <a:t>, prontos para a próxima aula.</a:t>
+            </a:r>
+            <a:endParaRPr lang="pt-BR" sz="1200" noProof="0" dirty="0"/>
           </a:p>
         </p:txBody>
       </p:sp>
@@ -9414,6 +9761,13 @@
           </a:solidFill>
           <a:ln/>
         </p:spPr>
+        <p:txBody>
+          <a:bodyPr/>
+          <a:lstStyle/>
+          <a:p>
+            <a:endParaRPr lang="pt-BR" noProof="0" dirty="0"/>
+          </a:p>
+        </p:txBody>
       </p:sp>
       <p:sp>
         <p:nvSpPr>
@@ -9441,6 +9795,13 @@
             <a:prstDash val="solid"/>
           </a:ln>
         </p:spPr>
+        <p:txBody>
+          <a:bodyPr/>
+          <a:lstStyle/>
+          <a:p>
+            <a:endParaRPr lang="pt-BR" noProof="0" dirty="0"/>
+          </a:p>
+        </p:txBody>
       </p:sp>
       <p:sp>
         <p:nvSpPr>
@@ -9461,6 +9822,13 @@
           </a:solidFill>
           <a:ln/>
         </p:spPr>
+        <p:txBody>
+          <a:bodyPr/>
+          <a:lstStyle/>
+          <a:p>
+            <a:endParaRPr lang="pt-BR" noProof="0" dirty="0"/>
+          </a:p>
+        </p:txBody>
       </p:sp>
       <p:pic>
         <p:nvPicPr>
@@ -9514,7 +9882,7 @@
               <a:buNone/>
             </a:pPr>
             <a:r>
-              <a:rPr lang="en-US" sz="1450" b="1" dirty="0">
+              <a:rPr lang="pt-BR" sz="1450" b="1" noProof="0" dirty="0">
                 <a:solidFill>
                   <a:srgbClr val="1B1B2F"/>
                 </a:solidFill>
@@ -9524,7 +9892,7 @@
               </a:rPr>
               <a:t>Nenhuma dúvida pendente</a:t>
             </a:r>
-            <a:endParaRPr lang="en-US" sz="1450" dirty="0"/>
+            <a:endParaRPr lang="pt-BR" sz="1450" noProof="0" dirty="0"/>
           </a:p>
         </p:txBody>
       </p:sp>
@@ -9556,7 +9924,7 @@
               <a:buNone/>
             </a:pPr>
             <a:r>
-              <a:rPr lang="en-US" sz="1200" dirty="0">
+              <a:rPr lang="pt-BR" sz="1200" noProof="0" dirty="0">
                 <a:solidFill>
                   <a:srgbClr val="6B6B80"/>
                 </a:solidFill>
@@ -9566,7 +9934,7 @@
               </a:rPr>
               <a:t>Sobre cronograma ou critérios de avaliação.</a:t>
             </a:r>
-            <a:endParaRPr lang="en-US" sz="1200" dirty="0"/>
+            <a:endParaRPr lang="pt-BR" sz="1200" noProof="0" dirty="0"/>
           </a:p>
         </p:txBody>
       </p:sp>
@@ -9595,7 +9963,7 @@
               <a:buNone/>
             </a:pPr>
             <a:r>
-              <a:rPr lang="en-US" sz="1000" dirty="0">
+              <a:rPr lang="pt-BR" sz="1000" noProof="0" dirty="0">
                 <a:solidFill>
                   <a:srgbClr val="6B6B80"/>
                 </a:solidFill>
@@ -9605,7 +9973,7 @@
               </a:rPr>
               <a:t>18</a:t>
             </a:r>
-            <a:endParaRPr lang="en-US" sz="1000" dirty="0"/>
+            <a:endParaRPr lang="pt-BR" sz="1000" noProof="0" dirty="0"/>
           </a:p>
         </p:txBody>
       </p:sp>
@@ -9667,7 +10035,7 @@
               <a:buNone/>
             </a:pPr>
             <a:r>
-              <a:rPr lang="en-US" sz="1200" b="1" kern="0" spc="200" dirty="0">
+              <a:rPr lang="pt-BR" sz="1200" b="1" kern="0" spc="200" noProof="0" dirty="0">
                 <a:solidFill>
                   <a:srgbClr val="6C4BC1"/>
                 </a:solidFill>
@@ -9677,7 +10045,7 @@
               </a:rPr>
               <a:t>PARA IR ALÉM</a:t>
             </a:r>
-            <a:endParaRPr lang="en-US" sz="1200" dirty="0"/>
+            <a:endParaRPr lang="pt-BR" sz="1200" noProof="0" dirty="0"/>
           </a:p>
         </p:txBody>
       </p:sp>
@@ -9706,7 +10074,7 @@
               <a:buNone/>
             </a:pPr>
             <a:r>
-              <a:rPr lang="en-US" sz="3200" b="1" dirty="0">
+              <a:rPr lang="pt-BR" sz="3200" b="1" noProof="0" dirty="0">
                 <a:solidFill>
                   <a:srgbClr val="1B1B2F"/>
                 </a:solidFill>
@@ -9716,7 +10084,7 @@
               </a:rPr>
               <a:t>Referências</a:t>
             </a:r>
-            <a:endParaRPr lang="en-US" sz="3200" dirty="0"/>
+            <a:endParaRPr lang="pt-BR" sz="3200" noProof="0" dirty="0"/>
           </a:p>
         </p:txBody>
       </p:sp>
@@ -9745,7 +10113,7 @@
               <a:buNone/>
             </a:pPr>
             <a:r>
-              <a:rPr lang="en-US" sz="1400" i="1" dirty="0">
+              <a:rPr lang="pt-BR" sz="1400" i="1" noProof="0" dirty="0">
                 <a:solidFill>
                   <a:srgbClr val="6C4BC1"/>
                 </a:solidFill>
@@ -9755,7 +10123,7 @@
               </a:rPr>
               <a:t>Evasão e permanência estudantil — contexto institucional</a:t>
             </a:r>
-            <a:endParaRPr lang="en-US" sz="1400" dirty="0"/>
+            <a:endParaRPr lang="pt-BR" sz="1400" noProof="0" dirty="0"/>
           </a:p>
         </p:txBody>
       </p:sp>
@@ -9780,6 +10148,13 @@
           </a:solidFill>
           <a:ln/>
         </p:spPr>
+        <p:txBody>
+          <a:bodyPr/>
+          <a:lstStyle/>
+          <a:p>
+            <a:endParaRPr lang="pt-BR" noProof="0" dirty="0"/>
+          </a:p>
+        </p:txBody>
       </p:sp>
       <p:sp>
         <p:nvSpPr>
@@ -9800,6 +10175,13 @@
           </a:solidFill>
           <a:ln/>
         </p:spPr>
+        <p:txBody>
+          <a:bodyPr/>
+          <a:lstStyle/>
+          <a:p>
+            <a:endParaRPr lang="pt-BR" noProof="0" dirty="0"/>
+          </a:p>
+        </p:txBody>
       </p:sp>
       <p:pic>
         <p:nvPicPr>
@@ -9850,7 +10232,7 @@
               <a:buNone/>
             </a:pPr>
             <a:r>
-              <a:rPr lang="en-US" sz="1800" b="1" dirty="0">
+              <a:rPr lang="pt-BR" sz="1800" b="1" noProof="0" dirty="0">
                 <a:solidFill>
                   <a:srgbClr val="1B1B2F"/>
                 </a:solidFill>
@@ -9860,7 +10242,7 @@
               </a:rPr>
               <a:t>SEMESP</a:t>
             </a:r>
-            <a:endParaRPr lang="en-US" sz="1800" dirty="0"/>
+            <a:endParaRPr lang="pt-BR" sz="1800" noProof="0" dirty="0"/>
           </a:p>
         </p:txBody>
       </p:sp>
@@ -9892,7 +10274,7 @@
               <a:buNone/>
             </a:pPr>
             <a:r>
-              <a:rPr lang="en-US" sz="1300" dirty="0">
+              <a:rPr lang="pt-BR" sz="1300" noProof="0" dirty="0">
                 <a:solidFill>
                   <a:srgbClr val="6B6B80"/>
                 </a:solidFill>
@@ -9902,7 +10284,7 @@
               </a:rPr>
               <a:t>Mapa do Ensino Superior no Brasil — indicadores de evasão e permanência no ensino superior privado.</a:t>
             </a:r>
-            <a:endParaRPr lang="en-US" sz="1300" dirty="0"/>
+            <a:endParaRPr lang="pt-BR" sz="1300" noProof="0" dirty="0"/>
           </a:p>
         </p:txBody>
       </p:sp>
@@ -9927,6 +10309,13 @@
           </a:solidFill>
           <a:ln/>
         </p:spPr>
+        <p:txBody>
+          <a:bodyPr/>
+          <a:lstStyle/>
+          <a:p>
+            <a:endParaRPr lang="pt-BR" noProof="0" dirty="0"/>
+          </a:p>
+        </p:txBody>
       </p:sp>
       <p:sp>
         <p:nvSpPr>
@@ -9947,6 +10336,13 @@
           </a:solidFill>
           <a:ln/>
         </p:spPr>
+        <p:txBody>
+          <a:bodyPr/>
+          <a:lstStyle/>
+          <a:p>
+            <a:endParaRPr lang="pt-BR" noProof="0" dirty="0"/>
+          </a:p>
+        </p:txBody>
       </p:sp>
       <p:pic>
         <p:nvPicPr>
@@ -9997,7 +10393,7 @@
               <a:buNone/>
             </a:pPr>
             <a:r>
-              <a:rPr lang="en-US" sz="1800" b="1" dirty="0">
+              <a:rPr lang="pt-BR" sz="1800" b="1" noProof="0" dirty="0">
                 <a:solidFill>
                   <a:srgbClr val="1B1B2F"/>
                 </a:solidFill>
@@ -10007,7 +10403,7 @@
               </a:rPr>
               <a:t>ABMES</a:t>
             </a:r>
-            <a:endParaRPr lang="en-US" sz="1800" dirty="0"/>
+            <a:endParaRPr lang="pt-BR" sz="1800" noProof="0" dirty="0"/>
           </a:p>
         </p:txBody>
       </p:sp>
@@ -10039,7 +10435,7 @@
               <a:buNone/>
             </a:pPr>
             <a:r>
-              <a:rPr lang="en-US" sz="1300" dirty="0">
+              <a:rPr lang="pt-BR" sz="1300" noProof="0" dirty="0">
                 <a:solidFill>
                   <a:srgbClr val="6B6B80"/>
                 </a:solidFill>
@@ -10049,7 +10445,7 @@
               </a:rPr>
               <a:t>Retenção e permanência estudantil no ensino superior — práticas de acompanhamento e busca ativa.</a:t>
             </a:r>
-            <a:endParaRPr lang="en-US" sz="1300" dirty="0"/>
+            <a:endParaRPr lang="pt-BR" sz="1300" noProof="0" dirty="0"/>
           </a:p>
         </p:txBody>
       </p:sp>
@@ -10078,7 +10474,7 @@
               <a:buNone/>
             </a:pPr>
             <a:r>
-              <a:rPr lang="en-US" sz="1000" dirty="0">
+              <a:rPr lang="pt-BR" sz="1000" noProof="0" dirty="0">
                 <a:solidFill>
                   <a:srgbClr val="6B6B80"/>
                 </a:solidFill>
@@ -10088,7 +10484,7 @@
               </a:rPr>
               <a:t>19</a:t>
             </a:r>
-            <a:endParaRPr lang="en-US" sz="1000" dirty="0"/>
+            <a:endParaRPr lang="pt-BR" sz="1000" noProof="0" dirty="0"/>
           </a:p>
         </p:txBody>
       </p:sp>
@@ -10150,7 +10546,7 @@
               <a:buNone/>
             </a:pPr>
             <a:r>
-              <a:rPr lang="en-US" sz="1200" b="1" kern="0" spc="200" dirty="0">
+              <a:rPr lang="pt-BR" sz="1200" b="1" kern="0" spc="200" noProof="0" dirty="0">
                 <a:solidFill>
                   <a:srgbClr val="6C4BC1"/>
                 </a:solidFill>
@@ -10160,7 +10556,7 @@
               </a:rPr>
               <a:t>AULA 02 · ROTEIRO</a:t>
             </a:r>
-            <a:endParaRPr lang="en-US" sz="1200" dirty="0"/>
+            <a:endParaRPr lang="pt-BR" sz="1200" noProof="0" dirty="0"/>
           </a:p>
         </p:txBody>
       </p:sp>
@@ -10189,7 +10585,7 @@
               <a:buNone/>
             </a:pPr>
             <a:r>
-              <a:rPr lang="en-US" sz="3800" b="1" dirty="0">
+              <a:rPr lang="pt-BR" sz="3800" b="1" noProof="0" dirty="0">
                 <a:solidFill>
                   <a:srgbClr val="1B1B2F"/>
                 </a:solidFill>
@@ -10199,7 +10595,7 @@
               </a:rPr>
               <a:t>Nesta aula</a:t>
             </a:r>
-            <a:endParaRPr lang="en-US" sz="3800" dirty="0"/>
+            <a:endParaRPr lang="pt-BR" sz="3800" noProof="0" dirty="0"/>
           </a:p>
         </p:txBody>
       </p:sp>
@@ -10222,6 +10618,13 @@
           </a:solidFill>
           <a:ln/>
         </p:spPr>
+        <p:txBody>
+          <a:bodyPr/>
+          <a:lstStyle/>
+          <a:p>
+            <a:endParaRPr lang="pt-BR" noProof="0" dirty="0"/>
+          </a:p>
+        </p:txBody>
       </p:sp>
       <p:pic>
         <p:nvPicPr>
@@ -10272,7 +10675,7 @@
               <a:buNone/>
             </a:pPr>
             <a:r>
-              <a:rPr lang="en-US" sz="1800" b="1" dirty="0">
+              <a:rPr lang="pt-BR" sz="1800" b="1" noProof="0" dirty="0">
                 <a:solidFill>
                   <a:srgbClr val="1B1B2F"/>
                 </a:solidFill>
@@ -10282,7 +10685,7 @@
               </a:rPr>
               <a:t>O que é Busca Ativa</a:t>
             </a:r>
-            <a:endParaRPr lang="en-US" sz="1800" dirty="0"/>
+            <a:endParaRPr lang="pt-BR" sz="1800" noProof="0" dirty="0"/>
           </a:p>
         </p:txBody>
       </p:sp>
@@ -10311,7 +10714,7 @@
               <a:buNone/>
             </a:pPr>
             <a:r>
-              <a:rPr lang="en-US" sz="1350" dirty="0">
+              <a:rPr lang="pt-BR" sz="1350" noProof="0" dirty="0">
                 <a:solidFill>
                   <a:srgbClr val="6B6B80"/>
                 </a:solidFill>
@@ -10319,9 +10722,9 @@
                 <a:ea typeface="Calibri" pitchFamily="34" charset="-122"/>
                 <a:cs typeface="Calibri" pitchFamily="34" charset="-120"/>
               </a:rPr>
-              <a:t>O que é essa prática e por que a instituição investe tempo de aula nisso.</a:t>
-            </a:r>
-            <a:endParaRPr lang="en-US" sz="1350" dirty="0"/>
+              <a:t>O que é essa prática e por que eu gosto de investir tempo de aula nisso.</a:t>
+            </a:r>
+            <a:endParaRPr lang="pt-BR" sz="1350" noProof="0" dirty="0"/>
           </a:p>
         </p:txBody>
       </p:sp>
@@ -10344,6 +10747,13 @@
           </a:solidFill>
           <a:ln/>
         </p:spPr>
+        <p:txBody>
+          <a:bodyPr/>
+          <a:lstStyle/>
+          <a:p>
+            <a:endParaRPr lang="pt-BR" noProof="0" dirty="0"/>
+          </a:p>
+        </p:txBody>
       </p:sp>
       <p:pic>
         <p:nvPicPr>
@@ -10394,7 +10804,7 @@
               <a:buNone/>
             </a:pPr>
             <a:r>
-              <a:rPr lang="en-US" sz="1800" b="1" dirty="0">
+              <a:rPr lang="pt-BR" sz="1800" b="1" noProof="0" dirty="0">
                 <a:solidFill>
                   <a:srgbClr val="1B1B2F"/>
                 </a:solidFill>
@@ -10404,7 +10814,7 @@
               </a:rPr>
               <a:t>Como a aula funciona na prática</a:t>
             </a:r>
-            <a:endParaRPr lang="en-US" sz="1800" dirty="0"/>
+            <a:endParaRPr lang="pt-BR" sz="1800" noProof="0" dirty="0"/>
           </a:p>
         </p:txBody>
       </p:sp>
@@ -10433,7 +10843,7 @@
               <a:buNone/>
             </a:pPr>
             <a:r>
-              <a:rPr lang="en-US" sz="1350" dirty="0">
+              <a:rPr lang="pt-BR" sz="1350" noProof="0" dirty="0">
                 <a:solidFill>
                   <a:srgbClr val="6B6B80"/>
                 </a:solidFill>
@@ -10443,7 +10853,7 @@
               </a:rPr>
               <a:t>O que o professor faz, o que você faz — os papéis de hoje.</a:t>
             </a:r>
-            <a:endParaRPr lang="en-US" sz="1350" dirty="0"/>
+            <a:endParaRPr lang="pt-BR" sz="1350" noProof="0" dirty="0"/>
           </a:p>
         </p:txBody>
       </p:sp>
@@ -10466,6 +10876,13 @@
           </a:solidFill>
           <a:ln/>
         </p:spPr>
+        <p:txBody>
+          <a:bodyPr/>
+          <a:lstStyle/>
+          <a:p>
+            <a:endParaRPr lang="pt-BR" noProof="0" dirty="0"/>
+          </a:p>
+        </p:txBody>
       </p:sp>
       <p:pic>
         <p:nvPicPr>
@@ -10516,7 +10933,7 @@
               <a:buNone/>
             </a:pPr>
             <a:r>
-              <a:rPr lang="en-US" sz="1800" b="1" dirty="0">
+              <a:rPr lang="pt-BR" sz="1800" b="1" noProof="0" dirty="0">
                 <a:solidFill>
                   <a:srgbClr val="1B1B2F"/>
                 </a:solidFill>
@@ -10524,9 +10941,20 @@
                 <a:ea typeface="Calibri" pitchFamily="34" charset="-122"/>
                 <a:cs typeface="Calibri" pitchFamily="34" charset="-120"/>
               </a:rPr>
-              <a:t>Diagnóstico rápido de onboarding</a:t>
-            </a:r>
-            <a:endParaRPr lang="en-US" sz="1800" dirty="0"/>
+              <a:t>Diagnóstico rápido de </a:t>
+            </a:r>
+            <a:r>
+              <a:rPr lang="pt-BR" sz="1800" b="1" noProof="0" dirty="0" err="1">
+                <a:solidFill>
+                  <a:srgbClr val="1B1B2F"/>
+                </a:solidFill>
+                <a:latin typeface="Calibri" pitchFamily="34" charset="0"/>
+                <a:ea typeface="Calibri" pitchFamily="34" charset="-122"/>
+                <a:cs typeface="Calibri" pitchFamily="34" charset="-120"/>
+              </a:rPr>
+              <a:t>onboarding</a:t>
+            </a:r>
+            <a:endParaRPr lang="pt-BR" sz="1800" noProof="0" dirty="0"/>
           </a:p>
         </p:txBody>
       </p:sp>
@@ -10555,7 +10983,7 @@
               <a:buNone/>
             </a:pPr>
             <a:r>
-              <a:rPr lang="en-US" sz="1350" dirty="0">
+              <a:rPr lang="pt-BR" sz="1350" noProof="0" dirty="0">
                 <a:solidFill>
                   <a:srgbClr val="6B6B80"/>
                 </a:solidFill>
@@ -10565,7 +10993,7 @@
               </a:rPr>
               <a:t>Ferramentas, acesso e dúvidas de ementa, tudo num checklist.</a:t>
             </a:r>
-            <a:endParaRPr lang="en-US" sz="1350" dirty="0"/>
+            <a:endParaRPr lang="pt-BR" sz="1350" noProof="0" dirty="0"/>
           </a:p>
         </p:txBody>
       </p:sp>
@@ -10588,6 +11016,13 @@
           </a:solidFill>
           <a:ln/>
         </p:spPr>
+        <p:txBody>
+          <a:bodyPr/>
+          <a:lstStyle/>
+          <a:p>
+            <a:endParaRPr lang="pt-BR" noProof="0" dirty="0"/>
+          </a:p>
+        </p:txBody>
       </p:sp>
       <p:pic>
         <p:nvPicPr>
@@ -10638,7 +11073,7 @@
               <a:buNone/>
             </a:pPr>
             <a:r>
-              <a:rPr lang="en-US" sz="1800" b="1" dirty="0">
+              <a:rPr lang="pt-BR" sz="1800" b="1" noProof="0" dirty="0">
                 <a:solidFill>
                   <a:srgbClr val="1B1B2F"/>
                 </a:solidFill>
@@ -10648,7 +11083,7 @@
               </a:rPr>
               <a:t>Desafio lógico opcional</a:t>
             </a:r>
-            <a:endParaRPr lang="en-US" sz="1800" dirty="0"/>
+            <a:endParaRPr lang="pt-BR" sz="1800" noProof="0" dirty="0"/>
           </a:p>
         </p:txBody>
       </p:sp>
@@ -10677,7 +11112,7 @@
               <a:buNone/>
             </a:pPr>
             <a:r>
-              <a:rPr lang="en-US" sz="1350" dirty="0">
+              <a:rPr lang="pt-BR" sz="1350" noProof="0" dirty="0">
                 <a:solidFill>
                   <a:srgbClr val="6B6B80"/>
                 </a:solidFill>
@@ -10687,7 +11122,7 @@
               </a:rPr>
               <a:t>Para quem já está em dia — um aquecimento para a próxima aula.</a:t>
             </a:r>
-            <a:endParaRPr lang="en-US" sz="1350" dirty="0"/>
+            <a:endParaRPr lang="pt-BR" sz="1350" noProof="0" dirty="0"/>
           </a:p>
         </p:txBody>
       </p:sp>
@@ -10716,7 +11151,7 @@
               <a:buNone/>
             </a:pPr>
             <a:r>
-              <a:rPr lang="en-US" sz="1000" dirty="0">
+              <a:rPr lang="pt-BR" sz="1000" noProof="0" dirty="0">
                 <a:solidFill>
                   <a:srgbClr val="6B6B80"/>
                 </a:solidFill>
@@ -10726,7 +11161,7 @@
               </a:rPr>
               <a:t>02</a:t>
             </a:r>
-            <a:endParaRPr lang="en-US" sz="1000" dirty="0"/>
+            <a:endParaRPr lang="pt-BR" sz="1000" noProof="0" dirty="0"/>
           </a:p>
         </p:txBody>
       </p:sp>
@@ -10788,7 +11223,7 @@
               <a:buNone/>
             </a:pPr>
             <a:r>
-              <a:rPr lang="en-US" sz="1200" b="1" kern="0" spc="200" dirty="0">
+              <a:rPr lang="pt-BR" sz="1200" b="1" kern="0" spc="200" noProof="0" dirty="0">
                 <a:solidFill>
                   <a:srgbClr val="6C4BC1"/>
                 </a:solidFill>
@@ -10798,7 +11233,7 @@
               </a:rPr>
               <a:t>PARA IR ALÉM</a:t>
             </a:r>
-            <a:endParaRPr lang="en-US" sz="1200" dirty="0"/>
+            <a:endParaRPr lang="pt-BR" sz="1200" noProof="0" dirty="0"/>
           </a:p>
         </p:txBody>
       </p:sp>
@@ -10827,7 +11262,7 @@
               <a:buNone/>
             </a:pPr>
             <a:r>
-              <a:rPr lang="en-US" sz="3200" b="1" dirty="0">
+              <a:rPr lang="pt-BR" sz="3200" b="1" noProof="0" dirty="0">
                 <a:solidFill>
                   <a:srgbClr val="1B1B2F"/>
                 </a:solidFill>
@@ -10837,7 +11272,7 @@
               </a:rPr>
               <a:t>Ferramentas e vídeos</a:t>
             </a:r>
-            <a:endParaRPr lang="en-US" sz="3200" dirty="0"/>
+            <a:endParaRPr lang="pt-BR" sz="3200" noProof="0" dirty="0"/>
           </a:p>
         </p:txBody>
       </p:sp>
@@ -10862,6 +11297,13 @@
           </a:solidFill>
           <a:ln/>
         </p:spPr>
+        <p:txBody>
+          <a:bodyPr/>
+          <a:lstStyle/>
+          <a:p>
+            <a:endParaRPr lang="pt-BR" noProof="0" dirty="0"/>
+          </a:p>
+        </p:txBody>
       </p:sp>
       <p:sp>
         <p:nvSpPr>
@@ -10882,6 +11324,13 @@
           </a:solidFill>
           <a:ln/>
         </p:spPr>
+        <p:txBody>
+          <a:bodyPr/>
+          <a:lstStyle/>
+          <a:p>
+            <a:endParaRPr lang="pt-BR" noProof="0" dirty="0"/>
+          </a:p>
+        </p:txBody>
       </p:sp>
       <p:pic>
         <p:nvPicPr>
@@ -10932,7 +11381,7 @@
               <a:buNone/>
             </a:pPr>
             <a:r>
-              <a:rPr lang="en-US" sz="1550" b="1" dirty="0">
+              <a:rPr lang="pt-BR" sz="1550" b="1" noProof="0" dirty="0">
                 <a:solidFill>
                   <a:srgbClr val="1B1B2F"/>
                 </a:solidFill>
@@ -10942,7 +11391,7 @@
               </a:rPr>
               <a:t>Ferramentas — revisão rápida</a:t>
             </a:r>
-            <a:endParaRPr lang="en-US" sz="1550" dirty="0"/>
+            <a:endParaRPr lang="pt-BR" sz="1550" noProof="0" dirty="0"/>
           </a:p>
         </p:txBody>
       </p:sp>
@@ -10977,7 +11426,7 @@
               <a:buNone/>
             </a:pPr>
             <a:r>
-              <a:rPr lang="en-US" sz="1200" u="sng" dirty="0">
+              <a:rPr lang="pt-BR" sz="1200" u="sng" noProof="0" dirty="0">
                 <a:solidFill>
                   <a:srgbClr val="6C4BC1"/>
                 </a:solidFill>
@@ -10995,7 +11444,7 @@
               <a:t>Guia de instalação da turma</a:t>
             </a:r>
             <a:r>
-              <a:rPr lang="en-US" sz="1200" dirty="0">
+              <a:rPr lang="pt-BR" sz="1200" noProof="0" dirty="0">
                 <a:solidFill>
                   <a:srgbClr val="6B6B80"/>
                 </a:solidFill>
@@ -11005,7 +11454,7 @@
               </a:rPr>
               <a:t> — passo a passo oficial.</a:t>
             </a:r>
-            <a:endParaRPr lang="en-US" sz="1200" dirty="0"/>
+            <a:endParaRPr lang="pt-BR" sz="1200" noProof="0" dirty="0"/>
           </a:p>
           <a:p>
             <a:pPr marL="0" indent="0">
@@ -11018,7 +11467,7 @@
               <a:buNone/>
             </a:pPr>
             <a:r>
-              <a:rPr lang="en-US" sz="1200" dirty="0">
+              <a:rPr lang="pt-BR" sz="1200" noProof="0" dirty="0">
                 <a:solidFill>
                   <a:srgbClr val="6B6B80"/>
                 </a:solidFill>
@@ -11026,9 +11475,20 @@
                 <a:ea typeface="Calibri" pitchFamily="34" charset="-122"/>
                 <a:cs typeface="Calibri" pitchFamily="34" charset="-120"/>
               </a:rPr>
-              <a:t>SDK do .NET — documentação e instalador oficial: learn.microsoft.com/dotnet</a:t>
-            </a:r>
-            <a:endParaRPr lang="en-US" sz="1200" dirty="0"/>
+              <a:t>SDK do .NET — documentação e instalador oficial: learn.microsoft.com/</a:t>
+            </a:r>
+            <a:r>
+              <a:rPr lang="pt-BR" sz="1200" noProof="0" dirty="0" err="1">
+                <a:solidFill>
+                  <a:srgbClr val="6B6B80"/>
+                </a:solidFill>
+                <a:latin typeface="Calibri" pitchFamily="34" charset="0"/>
+                <a:ea typeface="Calibri" pitchFamily="34" charset="-122"/>
+                <a:cs typeface="Calibri" pitchFamily="34" charset="-120"/>
+              </a:rPr>
+              <a:t>dotnet</a:t>
+            </a:r>
+            <a:endParaRPr lang="pt-BR" sz="1200" noProof="0" dirty="0"/>
           </a:p>
           <a:p>
             <a:pPr marL="0" indent="0">
@@ -11041,7 +11501,7 @@
               <a:buNone/>
             </a:pPr>
             <a:r>
-              <a:rPr lang="en-US" sz="1200" u="sng" dirty="0">
+              <a:rPr lang="pt-BR" sz="1200" u="sng" noProof="0" dirty="0" err="1">
                 <a:solidFill>
                   <a:srgbClr val="6C4BC1"/>
                 </a:solidFill>
@@ -11056,9 +11516,27 @@
                   </a:extLst>
                 </a:hlinkClick>
               </a:rPr>
-              <a:t>Git — instalação oficial</a:t>
-            </a:r>
-            <a:endParaRPr lang="en-US" sz="1200" dirty="0"/>
+              <a:t>Git</a:t>
+            </a:r>
+            <a:r>
+              <a:rPr lang="pt-BR" sz="1200" u="sng" noProof="0" dirty="0">
+                <a:solidFill>
+                  <a:srgbClr val="6C4BC1"/>
+                </a:solidFill>
+                <a:latin typeface="Calibri" pitchFamily="34" charset="0"/>
+                <a:ea typeface="Calibri" pitchFamily="34" charset="-122"/>
+                <a:cs typeface="Calibri" pitchFamily="34" charset="-120"/>
+                <a:hlinkClick r:id="rId5">
+                  <a:extLst>
+                    <a:ext uri="{A12FA001-AC4F-418D-AE19-62706E023703}">
+                      <ahyp:hlinkClr xmlns:ahyp="http://schemas.microsoft.com/office/drawing/2018/hyperlinkcolor" val="tx"/>
+                    </a:ext>
+                  </a:extLst>
+                </a:hlinkClick>
+              </a:rPr>
+              <a:t> — instalação oficial</a:t>
+            </a:r>
+            <a:endParaRPr lang="pt-BR" sz="1200" noProof="0" dirty="0"/>
           </a:p>
           <a:p>
             <a:pPr marL="0" indent="0">
@@ -11071,7 +11549,7 @@
               <a:buNone/>
             </a:pPr>
             <a:r>
-              <a:rPr lang="en-US" sz="1200" dirty="0">
+              <a:rPr lang="pt-BR" sz="1200" noProof="0" dirty="0">
                 <a:solidFill>
                   <a:srgbClr val="6B6B80"/>
                 </a:solidFill>
@@ -11082,7 +11560,7 @@
               <a:t>Python (opcional, para os exemplos comparativos): </a:t>
             </a:r>
             <a:r>
-              <a:rPr lang="en-US" sz="1200" u="sng" dirty="0">
+              <a:rPr lang="pt-BR" sz="1200" u="sng" noProof="0" dirty="0">
                 <a:solidFill>
                   <a:srgbClr val="6C4BC1"/>
                 </a:solidFill>
@@ -11099,7 +11577,7 @@
               </a:rPr>
               <a:t>python.org/downloads</a:t>
             </a:r>
-            <a:endParaRPr lang="en-US" sz="1200" dirty="0"/>
+            <a:endParaRPr lang="pt-BR" sz="1200" noProof="0" dirty="0"/>
           </a:p>
         </p:txBody>
       </p:sp>
@@ -11124,6 +11602,13 @@
           </a:solidFill>
           <a:ln/>
         </p:spPr>
+        <p:txBody>
+          <a:bodyPr/>
+          <a:lstStyle/>
+          <a:p>
+            <a:endParaRPr lang="pt-BR" noProof="0" dirty="0"/>
+          </a:p>
+        </p:txBody>
       </p:sp>
       <p:sp>
         <p:nvSpPr>
@@ -11144,6 +11629,13 @@
           </a:solidFill>
           <a:ln/>
         </p:spPr>
+        <p:txBody>
+          <a:bodyPr/>
+          <a:lstStyle/>
+          <a:p>
+            <a:endParaRPr lang="pt-BR" noProof="0" dirty="0"/>
+          </a:p>
+        </p:txBody>
       </p:sp>
       <p:pic>
         <p:nvPicPr>
@@ -11194,7 +11686,7 @@
               <a:buNone/>
             </a:pPr>
             <a:r>
-              <a:rPr lang="en-US" sz="1550" b="1" dirty="0">
+              <a:rPr lang="pt-BR" sz="1550" b="1" noProof="0" dirty="0">
                 <a:solidFill>
                   <a:srgbClr val="1B1B2F"/>
                 </a:solidFill>
@@ -11204,7 +11696,7 @@
               </a:rPr>
               <a:t>Vídeos</a:t>
             </a:r>
-            <a:endParaRPr lang="en-US" sz="1550" dirty="0"/>
+            <a:endParaRPr lang="pt-BR" sz="1550" noProof="0" dirty="0"/>
           </a:p>
         </p:txBody>
       </p:sp>
@@ -11239,7 +11731,7 @@
               <a:buNone/>
             </a:pPr>
             <a:r>
-              <a:rPr lang="en-US" sz="1200" u="sng" dirty="0">
+              <a:rPr lang="pt-BR" sz="1200" u="sng" noProof="0" dirty="0">
                 <a:solidFill>
                   <a:srgbClr val="6C4BC1"/>
                 </a:solidFill>
@@ -11257,7 +11749,7 @@
               <a:t>Curso em Vídeo (Gustavo Guanabara)</a:t>
             </a:r>
             <a:r>
-              <a:rPr lang="en-US" sz="1200" dirty="0">
+              <a:rPr lang="pt-BR" sz="1200" noProof="0" dirty="0">
                 <a:solidFill>
                   <a:srgbClr val="6B6B80"/>
                 </a:solidFill>
@@ -11267,7 +11759,7 @@
               </a:rPr>
               <a:t> — série de Lógica de Programação, ótima para reforçar o “porquê” do raciocínio lógico antes da próxima aula.</a:t>
             </a:r>
-            <a:endParaRPr lang="en-US" sz="1200" dirty="0"/>
+            <a:endParaRPr lang="pt-BR" sz="1200" noProof="0" dirty="0"/>
           </a:p>
           <a:p>
             <a:pPr marL="0" indent="0">
@@ -11280,7 +11772,7 @@
               <a:buNone/>
             </a:pPr>
             <a:r>
-              <a:rPr lang="en-US" sz="1200" u="sng" dirty="0">
+              <a:rPr lang="pt-BR" sz="1200" u="sng" noProof="0" dirty="0">
                 <a:solidFill>
                   <a:srgbClr val="6C4BC1"/>
                 </a:solidFill>
@@ -11298,7 +11790,7 @@
               <a:t>Tutoriais de configuração de ambiente</a:t>
             </a:r>
             <a:r>
-              <a:rPr lang="en-US" sz="1200" dirty="0">
+              <a:rPr lang="pt-BR" sz="1200" noProof="0" dirty="0">
                 <a:solidFill>
                   <a:srgbClr val="6B6B80"/>
                 </a:solidFill>
@@ -11306,9 +11798,53 @@
                 <a:ea typeface="Calibri" pitchFamily="34" charset="-122"/>
                 <a:cs typeface="Calibri" pitchFamily="34" charset="-120"/>
               </a:rPr>
-              <a:t> — .NET + Git + VS Code para iniciantes.</a:t>
-            </a:r>
-            <a:endParaRPr lang="en-US" sz="1200" dirty="0"/>
+              <a:t> — .NET + </a:t>
+            </a:r>
+            <a:r>
+              <a:rPr lang="pt-BR" sz="1200" noProof="0" dirty="0" err="1">
+                <a:solidFill>
+                  <a:srgbClr val="6B6B80"/>
+                </a:solidFill>
+                <a:latin typeface="Calibri" pitchFamily="34" charset="0"/>
+                <a:ea typeface="Calibri" pitchFamily="34" charset="-122"/>
+                <a:cs typeface="Calibri" pitchFamily="34" charset="-120"/>
+              </a:rPr>
+              <a:t>Git</a:t>
+            </a:r>
+            <a:r>
+              <a:rPr lang="pt-BR" sz="1200" noProof="0" dirty="0">
+                <a:solidFill>
+                  <a:srgbClr val="6B6B80"/>
+                </a:solidFill>
+                <a:latin typeface="Calibri" pitchFamily="34" charset="0"/>
+                <a:ea typeface="Calibri" pitchFamily="34" charset="-122"/>
+                <a:cs typeface="Calibri" pitchFamily="34" charset="-120"/>
+              </a:rPr>
+              <a:t> + VS </a:t>
+            </a:r>
+            <a:r>
+              <a:rPr lang="pt-BR" sz="1200" noProof="0" dirty="0" err="1">
+                <a:solidFill>
+                  <a:srgbClr val="6B6B80"/>
+                </a:solidFill>
+                <a:latin typeface="Calibri" pitchFamily="34" charset="0"/>
+                <a:ea typeface="Calibri" pitchFamily="34" charset="-122"/>
+                <a:cs typeface="Calibri" pitchFamily="34" charset="-120"/>
+              </a:rPr>
+              <a:t>Code</a:t>
+            </a:r>
+            <a:r>
+              <a:rPr lang="pt-BR" sz="1200" noProof="0" dirty="0">
+                <a:solidFill>
+                  <a:srgbClr val="6B6B80"/>
+                </a:solidFill>
+                <a:latin typeface="Calibri" pitchFamily="34" charset="0"/>
+                <a:ea typeface="Calibri" pitchFamily="34" charset="-122"/>
+                <a:cs typeface="Calibri" pitchFamily="34" charset="-120"/>
+              </a:rPr>
+              <a:t> para iniciantes.</a:t>
+            </a:r>
+            <a:endParaRPr lang="pt-BR" sz="1200" noProof="0" dirty="0"/>
           </a:p>
         </p:txBody>
       </p:sp>
@@ -11337,7 +11873,7 @@
               <a:buNone/>
             </a:pPr>
             <a:r>
-              <a:rPr lang="en-US" sz="1000" dirty="0">
+              <a:rPr lang="pt-BR" sz="1000" noProof="0" dirty="0">
                 <a:solidFill>
                   <a:srgbClr val="6B6B80"/>
                 </a:solidFill>
@@ -11347,7 +11883,7 @@
               </a:rPr>
               <a:t>20</a:t>
             </a:r>
-            <a:endParaRPr lang="en-US" sz="1000" dirty="0"/>
+            <a:endParaRPr lang="pt-BR" sz="1000" noProof="0" dirty="0"/>
           </a:p>
         </p:txBody>
       </p:sp>
@@ -11407,6 +11943,13 @@
             <a:prstDash val="solid"/>
           </a:ln>
         </p:spPr>
+        <p:txBody>
+          <a:bodyPr/>
+          <a:lstStyle/>
+          <a:p>
+            <a:endParaRPr lang="pt-BR" noProof="0" dirty="0"/>
+          </a:p>
+        </p:txBody>
       </p:sp>
       <p:sp>
         <p:nvSpPr>
@@ -11431,6 +11974,13 @@
             <a:prstDash val="solid"/>
           </a:ln>
         </p:spPr>
+        <p:txBody>
+          <a:bodyPr/>
+          <a:lstStyle/>
+          <a:p>
+            <a:endParaRPr lang="pt-BR" noProof="0" dirty="0"/>
+          </a:p>
+        </p:txBody>
       </p:sp>
       <p:sp>
         <p:nvSpPr>
@@ -11451,6 +12001,13 @@
           </a:solidFill>
           <a:ln/>
         </p:spPr>
+        <p:txBody>
+          <a:bodyPr/>
+          <a:lstStyle/>
+          <a:p>
+            <a:endParaRPr lang="pt-BR" noProof="0" dirty="0"/>
+          </a:p>
+        </p:txBody>
       </p:sp>
       <p:pic>
         <p:nvPicPr>
@@ -11501,7 +12058,7 @@
               <a:buNone/>
             </a:pPr>
             <a:r>
-              <a:rPr lang="en-US" sz="1300" b="1" kern="0" spc="300" dirty="0">
+              <a:rPr lang="pt-BR" sz="1300" b="1" kern="0" spc="300" noProof="0" dirty="0">
                 <a:solidFill>
                   <a:srgbClr val="2FE6C7"/>
                 </a:solidFill>
@@ -11511,7 +12068,7 @@
               </a:rPr>
               <a:t>PRÓXIMA PARADA</a:t>
             </a:r>
-            <a:endParaRPr lang="en-US" sz="1300" dirty="0"/>
+            <a:endParaRPr lang="pt-BR" sz="1300" noProof="0" dirty="0"/>
           </a:p>
         </p:txBody>
       </p:sp>
@@ -11540,7 +12097,7 @@
               <a:buNone/>
             </a:pPr>
             <a:r>
-              <a:rPr lang="en-US" sz="1600" dirty="0">
+              <a:rPr lang="pt-BR" sz="1600" noProof="0" dirty="0">
                 <a:solidFill>
                   <a:srgbClr val="CBC3EE"/>
                 </a:solidFill>
@@ -11550,7 +12107,7 @@
               </a:rPr>
               <a:t>Fundamentos de Lógica</a:t>
             </a:r>
-            <a:endParaRPr lang="en-US" sz="1600" dirty="0"/>
+            <a:endParaRPr lang="pt-BR" sz="1600" noProof="0" dirty="0"/>
           </a:p>
         </p:txBody>
       </p:sp>
@@ -11582,7 +12139,7 @@
               <a:buNone/>
             </a:pPr>
             <a:r>
-              <a:rPr lang="en-US" sz="3400" b="1" dirty="0">
+              <a:rPr lang="pt-BR" sz="3400" b="1" noProof="0" dirty="0">
                 <a:solidFill>
                   <a:srgbClr val="FFFFFF"/>
                 </a:solidFill>
@@ -11592,7 +12149,7 @@
               </a:rPr>
               <a:t>Com o ambiente e as dúvidas</a:t>
             </a:r>
-            <a:endParaRPr lang="en-US" sz="3400" dirty="0"/>
+            <a:endParaRPr lang="pt-BR" sz="3400" noProof="0" dirty="0"/>
           </a:p>
           <a:p>
             <a:pPr marL="0" indent="0">
@@ -11602,7 +12159,7 @@
               <a:buNone/>
             </a:pPr>
             <a:r>
-              <a:rPr lang="en-US" sz="3400" b="1" dirty="0">
+              <a:rPr lang="pt-BR" sz="3400" b="1" noProof="0" dirty="0">
                 <a:solidFill>
                   <a:srgbClr val="FFFFFF"/>
                 </a:solidFill>
@@ -11612,7 +12169,7 @@
               </a:rPr>
               <a:t>resolvidos, começamos de verdade.</a:t>
             </a:r>
-            <a:endParaRPr lang="en-US" sz="3400" dirty="0"/>
+            <a:endParaRPr lang="pt-BR" sz="3400" noProof="0" dirty="0"/>
           </a:p>
         </p:txBody>
       </p:sp>
@@ -11641,7 +12198,7 @@
               <a:buNone/>
             </a:pPr>
             <a:r>
-              <a:rPr lang="en-US" sz="1600" i="1" dirty="0">
+              <a:rPr lang="pt-BR" sz="1600" i="1" noProof="0" dirty="0">
                 <a:solidFill>
                   <a:srgbClr val="AEB3DE"/>
                 </a:solidFill>
@@ -11651,7 +12208,7 @@
               </a:rPr>
               <a:t>O desafio das fantasias vai voltar — agora com nome e notação: lógica proposicional.</a:t>
             </a:r>
-            <a:endParaRPr lang="en-US" sz="1600" dirty="0"/>
+            <a:endParaRPr lang="pt-BR" sz="1600" noProof="0" dirty="0"/>
           </a:p>
         </p:txBody>
       </p:sp>
@@ -11680,7 +12237,7 @@
               <a:buNone/>
             </a:pPr>
             <a:r>
-              <a:rPr lang="en-US" sz="1150" kern="0" spc="100" dirty="0">
+              <a:rPr lang="pt-BR" sz="1150" kern="0" spc="100" noProof="0" dirty="0">
                 <a:solidFill>
                   <a:srgbClr val="6F76B0"/>
                 </a:solidFill>
@@ -11690,7 +12247,7 @@
               </a:rPr>
               <a:t>Matemática Computacional Aplicada  ·  Aula 02</a:t>
             </a:r>
-            <a:endParaRPr lang="en-US" sz="1150" dirty="0"/>
+            <a:endParaRPr lang="pt-BR" sz="1150" noProof="0" dirty="0"/>
           </a:p>
         </p:txBody>
       </p:sp>
@@ -11752,7 +12309,7 @@
               <a:buNone/>
             </a:pPr>
             <a:r>
-              <a:rPr lang="en-US" sz="1200" b="1" kern="0" spc="200" dirty="0">
+              <a:rPr lang="pt-BR" sz="1200" b="1" kern="0" spc="200" noProof="0" dirty="0">
                 <a:solidFill>
                   <a:srgbClr val="6C4BC1"/>
                 </a:solidFill>
@@ -11762,7 +12319,7 @@
               </a:rPr>
               <a:t>O CONCEITO</a:t>
             </a:r>
-            <a:endParaRPr lang="en-US" sz="1200" dirty="0"/>
+            <a:endParaRPr lang="pt-BR" sz="1200" noProof="0" dirty="0"/>
           </a:p>
         </p:txBody>
       </p:sp>
@@ -11791,7 +12348,7 @@
               <a:buNone/>
             </a:pPr>
             <a:r>
-              <a:rPr lang="en-US" sz="3000" b="1" dirty="0">
+              <a:rPr lang="pt-BR" sz="3000" b="1" noProof="0" dirty="0">
                 <a:solidFill>
                   <a:srgbClr val="1B1B2F"/>
                 </a:solidFill>
@@ -11801,7 +12358,7 @@
               </a:rPr>
               <a:t>O que é Busca Ativa?</a:t>
             </a:r>
-            <a:endParaRPr lang="en-US" sz="3000" dirty="0"/>
+            <a:endParaRPr lang="pt-BR" sz="3000" noProof="0" dirty="0"/>
           </a:p>
         </p:txBody>
       </p:sp>
@@ -11833,7 +12390,7 @@
               <a:buNone/>
             </a:pPr>
             <a:r>
-              <a:rPr lang="en-US" sz="1500" dirty="0">
+              <a:rPr lang="pt-BR" sz="1500" noProof="0" dirty="0">
                 <a:solidFill>
                   <a:srgbClr val="1B1B2F"/>
                 </a:solidFill>
@@ -11843,7 +12400,7 @@
               </a:rPr>
               <a:t>É uma prática de acompanhamento estudantil: em vez de esperar que um aluno sumindo das aulas venha pedir ajuda, a instituição e o professor vão até ele.</a:t>
             </a:r>
-            <a:endParaRPr lang="en-US" sz="1500" dirty="0"/>
+            <a:endParaRPr lang="pt-BR" sz="1500" noProof="0" dirty="0"/>
           </a:p>
         </p:txBody>
       </p:sp>
@@ -11875,7 +12432,7 @@
               <a:buNone/>
             </a:pPr>
             <a:r>
-              <a:rPr lang="en-US" sz="1500" dirty="0">
+              <a:rPr lang="pt-BR" sz="1500" noProof="0" dirty="0">
                 <a:solidFill>
                   <a:srgbClr val="6B6B80"/>
                 </a:solidFill>
@@ -11885,7 +12442,7 @@
               </a:rPr>
               <a:t>Problemas de engajamento detectados cedo são muito mais fáceis de resolver do que problemas descobertos no fim do semestre, quando já não há tempo de recuperação.</a:t>
             </a:r>
-            <a:endParaRPr lang="en-US" sz="1500" dirty="0"/>
+            <a:endParaRPr lang="pt-BR" sz="1500" noProof="0" dirty="0"/>
           </a:p>
         </p:txBody>
       </p:sp>
@@ -11910,6 +12467,13 @@
           </a:solidFill>
           <a:ln/>
         </p:spPr>
+        <p:txBody>
+          <a:bodyPr/>
+          <a:lstStyle/>
+          <a:p>
+            <a:endParaRPr lang="pt-BR" noProof="0" dirty="0"/>
+          </a:p>
+        </p:txBody>
       </p:sp>
       <p:sp>
         <p:nvSpPr>
@@ -11930,6 +12494,13 @@
           </a:solidFill>
           <a:ln/>
         </p:spPr>
+        <p:txBody>
+          <a:bodyPr/>
+          <a:lstStyle/>
+          <a:p>
+            <a:endParaRPr lang="pt-BR" noProof="0" dirty="0"/>
+          </a:p>
+        </p:txBody>
       </p:sp>
       <p:pic>
         <p:nvPicPr>
@@ -11980,7 +12551,7 @@
               <a:buNone/>
             </a:pPr>
             <a:r>
-              <a:rPr lang="en-US" sz="1600" b="1" dirty="0">
+              <a:rPr lang="pt-BR" sz="1600" b="1" noProof="0" dirty="0">
                 <a:solidFill>
                   <a:srgbClr val="1B1B2F"/>
                 </a:solidFill>
@@ -11990,7 +12561,7 @@
               </a:rPr>
               <a:t>Checagem</a:t>
             </a:r>
-            <a:endParaRPr lang="en-US" sz="1600" dirty="0"/>
+            <a:endParaRPr lang="pt-BR" sz="1600" noProof="0" dirty="0"/>
           </a:p>
         </p:txBody>
       </p:sp>
@@ -12019,7 +12590,7 @@
               <a:buNone/>
             </a:pPr>
             <a:r>
-              <a:rPr lang="en-US" sz="1250" i="1" dirty="0">
+              <a:rPr lang="pt-BR" sz="1250" i="1" noProof="0" dirty="0">
                 <a:solidFill>
                   <a:srgbClr val="6C4BC1"/>
                 </a:solidFill>
@@ -12029,7 +12600,7 @@
               </a:rPr>
               <a:t>Frequência e desempenho monitorados</a:t>
             </a:r>
-            <a:endParaRPr lang="en-US" sz="1250" dirty="0"/>
+            <a:endParaRPr lang="pt-BR" sz="1250" noProof="0" dirty="0"/>
           </a:p>
         </p:txBody>
       </p:sp>
@@ -12052,6 +12623,13 @@
           </a:solidFill>
           <a:ln/>
         </p:spPr>
+        <p:txBody>
+          <a:bodyPr/>
+          <a:lstStyle/>
+          <a:p>
+            <a:endParaRPr lang="pt-BR" noProof="0" dirty="0"/>
+          </a:p>
+        </p:txBody>
       </p:sp>
       <p:pic>
         <p:nvPicPr>
@@ -12102,7 +12680,7 @@
               <a:buNone/>
             </a:pPr>
             <a:r>
-              <a:rPr lang="en-US" sz="1600" b="1" dirty="0">
+              <a:rPr lang="pt-BR" sz="1600" b="1" noProof="0" dirty="0">
                 <a:solidFill>
                   <a:srgbClr val="1B1B2F"/>
                 </a:solidFill>
@@ -12112,7 +12690,7 @@
               </a:rPr>
               <a:t>Contato direto</a:t>
             </a:r>
-            <a:endParaRPr lang="en-US" sz="1600" dirty="0"/>
+            <a:endParaRPr lang="pt-BR" sz="1600" noProof="0" dirty="0"/>
           </a:p>
         </p:txBody>
       </p:sp>
@@ -12141,7 +12719,7 @@
               <a:buNone/>
             </a:pPr>
             <a:r>
-              <a:rPr lang="en-US" sz="1250" i="1" dirty="0">
+              <a:rPr lang="pt-BR" sz="1250" i="1" noProof="0" dirty="0">
                 <a:solidFill>
                   <a:srgbClr val="6C4BC1"/>
                 </a:solidFill>
@@ -12151,7 +12729,7 @@
               </a:rPr>
               <a:t>Mensagem, e-mail ou conversa individual</a:t>
             </a:r>
-            <a:endParaRPr lang="en-US" sz="1250" dirty="0"/>
+            <a:endParaRPr lang="pt-BR" sz="1250" noProof="0" dirty="0"/>
           </a:p>
         </p:txBody>
       </p:sp>
@@ -12174,6 +12752,13 @@
           </a:solidFill>
           <a:ln/>
         </p:spPr>
+        <p:txBody>
+          <a:bodyPr/>
+          <a:lstStyle/>
+          <a:p>
+            <a:endParaRPr lang="pt-BR" noProof="0" dirty="0"/>
+          </a:p>
+        </p:txBody>
       </p:sp>
       <p:pic>
         <p:nvPicPr>
@@ -12224,7 +12809,7 @@
               <a:buNone/>
             </a:pPr>
             <a:r>
-              <a:rPr lang="en-US" sz="1600" b="1" dirty="0">
+              <a:rPr lang="pt-BR" sz="1600" b="1" noProof="0" dirty="0">
                 <a:solidFill>
                   <a:srgbClr val="1B1B2F"/>
                 </a:solidFill>
@@ -12234,7 +12819,7 @@
               </a:rPr>
               <a:t>Suporte concreto</a:t>
             </a:r>
-            <a:endParaRPr lang="en-US" sz="1600" dirty="0"/>
+            <a:endParaRPr lang="pt-BR" sz="1600" noProof="0" dirty="0"/>
           </a:p>
         </p:txBody>
       </p:sp>
@@ -12263,7 +12848,7 @@
               <a:buNone/>
             </a:pPr>
             <a:r>
-              <a:rPr lang="en-US" sz="1250" i="1" dirty="0">
+              <a:rPr lang="pt-BR" sz="1250" i="1" noProof="0" dirty="0">
                 <a:solidFill>
                   <a:srgbClr val="6C4BC1"/>
                 </a:solidFill>
@@ -12273,7 +12858,7 @@
               </a:rPr>
               <a:t>Ajuda prática, não só um aviso</a:t>
             </a:r>
-            <a:endParaRPr lang="en-US" sz="1250" dirty="0"/>
+            <a:endParaRPr lang="pt-BR" sz="1250" noProof="0" dirty="0"/>
           </a:p>
         </p:txBody>
       </p:sp>
@@ -12302,7 +12887,7 @@
               <a:buNone/>
             </a:pPr>
             <a:r>
-              <a:rPr lang="en-US" sz="1000" dirty="0">
+              <a:rPr lang="pt-BR" sz="1000" noProof="0" dirty="0">
                 <a:solidFill>
                   <a:srgbClr val="6B6B80"/>
                 </a:solidFill>
@@ -12312,7 +12897,7 @@
               </a:rPr>
               <a:t>03</a:t>
             </a:r>
-            <a:endParaRPr lang="en-US" sz="1000" dirty="0"/>
+            <a:endParaRPr lang="pt-BR" sz="1000" noProof="0" dirty="0"/>
           </a:p>
         </p:txBody>
       </p:sp>
@@ -12374,7 +12959,7 @@
               <a:buNone/>
             </a:pPr>
             <a:r>
-              <a:rPr lang="en-US" sz="1200" b="1" kern="0" spc="200" dirty="0">
+              <a:rPr lang="pt-BR" sz="1200" b="1" kern="0" spc="200" noProof="0" dirty="0">
                 <a:solidFill>
                   <a:srgbClr val="6C4BC1"/>
                 </a:solidFill>
@@ -12384,7 +12969,7 @@
               </a:rPr>
               <a:t>ISSO JÁ É FAMILIAR</a:t>
             </a:r>
-            <a:endParaRPr lang="en-US" sz="1200" dirty="0"/>
+            <a:endParaRPr lang="pt-BR" sz="1200" noProof="0" dirty="0"/>
           </a:p>
         </p:txBody>
       </p:sp>
@@ -12413,7 +12998,7 @@
               <a:buNone/>
             </a:pPr>
             <a:r>
-              <a:rPr lang="en-US" sz="2900" b="1" dirty="0">
+              <a:rPr lang="pt-BR" sz="2900" b="1" noProof="0" dirty="0">
                 <a:solidFill>
                   <a:srgbClr val="1B1B2F"/>
                 </a:solidFill>
@@ -12423,7 +13008,7 @@
               </a:rPr>
               <a:t>Você já viu isso fora da faculdade</a:t>
             </a:r>
-            <a:endParaRPr lang="en-US" sz="2900" dirty="0"/>
+            <a:endParaRPr lang="pt-BR" sz="2900" noProof="0" dirty="0"/>
           </a:p>
         </p:txBody>
       </p:sp>
@@ -12452,7 +13037,7 @@
               <a:buNone/>
             </a:pPr>
             <a:r>
-              <a:rPr lang="en-US" sz="1350" dirty="0">
+              <a:rPr lang="pt-BR" sz="1350" noProof="0" dirty="0">
                 <a:solidFill>
                   <a:srgbClr val="6B6B80"/>
                 </a:solidFill>
@@ -12462,7 +13047,7 @@
               </a:rPr>
               <a:t>Instituições e empresas fazem “busca ativa” o tempo todo — só não usam esse nome.</a:t>
             </a:r>
-            <a:endParaRPr lang="en-US" sz="1350" dirty="0"/>
+            <a:endParaRPr lang="pt-BR" sz="1350" noProof="0" dirty="0"/>
           </a:p>
         </p:txBody>
       </p:sp>
@@ -12487,6 +13072,13 @@
           </a:solidFill>
           <a:ln/>
         </p:spPr>
+        <p:txBody>
+          <a:bodyPr/>
+          <a:lstStyle/>
+          <a:p>
+            <a:endParaRPr lang="pt-BR" noProof="0" dirty="0"/>
+          </a:p>
+        </p:txBody>
       </p:sp>
       <p:sp>
         <p:nvSpPr>
@@ -12507,6 +13099,13 @@
           </a:solidFill>
           <a:ln/>
         </p:spPr>
+        <p:txBody>
+          <a:bodyPr/>
+          <a:lstStyle/>
+          <a:p>
+            <a:endParaRPr lang="pt-BR" noProof="0" dirty="0"/>
+          </a:p>
+        </p:txBody>
       </p:sp>
       <p:pic>
         <p:nvPicPr>
@@ -12557,7 +13156,7 @@
               <a:buNone/>
             </a:pPr>
             <a:r>
-              <a:rPr lang="en-US" sz="1550" b="1" dirty="0">
+              <a:rPr lang="pt-BR" sz="1550" b="1" noProof="0" dirty="0">
                 <a:solidFill>
                   <a:srgbClr val="1B1B2F"/>
                 </a:solidFill>
@@ -12567,7 +13166,7 @@
               </a:rPr>
               <a:t>O banco liga</a:t>
             </a:r>
-            <a:endParaRPr lang="en-US" sz="1550" dirty="0"/>
+            <a:endParaRPr lang="pt-BR" sz="1550" noProof="0" dirty="0"/>
           </a:p>
         </p:txBody>
       </p:sp>
@@ -12596,7 +13195,7 @@
               <a:buNone/>
             </a:pPr>
             <a:r>
-              <a:rPr lang="en-US" sz="1300" dirty="0">
+              <a:rPr lang="pt-BR" sz="1300" noProof="0" dirty="0">
                 <a:solidFill>
                   <a:srgbClr val="6B6B80"/>
                 </a:solidFill>
@@ -12606,7 +13205,7 @@
               </a:rPr>
               <a:t>Quando percebe um gasto fora do seu padrão habitual</a:t>
             </a:r>
-            <a:endParaRPr lang="en-US" sz="1300" dirty="0"/>
+            <a:endParaRPr lang="pt-BR" sz="1300" noProof="0" dirty="0"/>
           </a:p>
         </p:txBody>
       </p:sp>
@@ -12631,6 +13230,13 @@
           </a:solidFill>
           <a:ln/>
         </p:spPr>
+        <p:txBody>
+          <a:bodyPr/>
+          <a:lstStyle/>
+          <a:p>
+            <a:endParaRPr lang="pt-BR" noProof="0" dirty="0"/>
+          </a:p>
+        </p:txBody>
       </p:sp>
       <p:sp>
         <p:nvSpPr>
@@ -12651,6 +13257,13 @@
           </a:solidFill>
           <a:ln/>
         </p:spPr>
+        <p:txBody>
+          <a:bodyPr/>
+          <a:lstStyle/>
+          <a:p>
+            <a:endParaRPr lang="pt-BR" noProof="0" dirty="0"/>
+          </a:p>
+        </p:txBody>
       </p:sp>
       <p:pic>
         <p:nvPicPr>
@@ -12701,7 +13314,7 @@
               <a:buNone/>
             </a:pPr>
             <a:r>
-              <a:rPr lang="en-US" sz="1550" b="1" dirty="0">
+              <a:rPr lang="pt-BR" sz="1550" b="1" noProof="0" dirty="0">
                 <a:solidFill>
                   <a:srgbClr val="1B1B2F"/>
                 </a:solidFill>
@@ -12711,7 +13324,7 @@
               </a:rPr>
               <a:t>O plano de saúde avisa</a:t>
             </a:r>
-            <a:endParaRPr lang="en-US" sz="1550" dirty="0"/>
+            <a:endParaRPr lang="pt-BR" sz="1550" noProof="0" dirty="0"/>
           </a:p>
         </p:txBody>
       </p:sp>
@@ -12740,7 +13353,7 @@
               <a:buNone/>
             </a:pPr>
             <a:r>
-              <a:rPr lang="en-US" sz="1300" dirty="0">
+              <a:rPr lang="pt-BR" sz="1300" noProof="0" dirty="0">
                 <a:solidFill>
                   <a:srgbClr val="6B6B80"/>
                 </a:solidFill>
@@ -12750,7 +13363,7 @@
               </a:rPr>
               <a:t>Quando você está atrasado com o check-up anual</a:t>
             </a:r>
-            <a:endParaRPr lang="en-US" sz="1300" dirty="0"/>
+            <a:endParaRPr lang="pt-BR" sz="1300" noProof="0" dirty="0"/>
           </a:p>
         </p:txBody>
       </p:sp>
@@ -12775,6 +13388,13 @@
           </a:solidFill>
           <a:ln/>
         </p:spPr>
+        <p:txBody>
+          <a:bodyPr/>
+          <a:lstStyle/>
+          <a:p>
+            <a:endParaRPr lang="pt-BR" noProof="0" dirty="0"/>
+          </a:p>
+        </p:txBody>
       </p:sp>
       <p:sp>
         <p:nvSpPr>
@@ -12795,6 +13415,13 @@
           </a:solidFill>
           <a:ln/>
         </p:spPr>
+        <p:txBody>
+          <a:bodyPr/>
+          <a:lstStyle/>
+          <a:p>
+            <a:endParaRPr lang="pt-BR" noProof="0" dirty="0"/>
+          </a:p>
+        </p:txBody>
       </p:sp>
       <p:pic>
         <p:nvPicPr>
@@ -12845,7 +13472,7 @@
               <a:buNone/>
             </a:pPr>
             <a:r>
-              <a:rPr lang="en-US" sz="1550" b="1" dirty="0">
+              <a:rPr lang="pt-BR" sz="1550" b="1" noProof="0" dirty="0">
                 <a:solidFill>
                   <a:srgbClr val="1B1B2F"/>
                 </a:solidFill>
@@ -12855,7 +13482,7 @@
               </a:rPr>
               <a:t>O app de entrega notifica</a:t>
             </a:r>
-            <a:endParaRPr lang="en-US" sz="1550" dirty="0"/>
+            <a:endParaRPr lang="pt-BR" sz="1550" noProof="0" dirty="0"/>
           </a:p>
         </p:txBody>
       </p:sp>
@@ -12884,7 +13511,7 @@
               <a:buNone/>
             </a:pPr>
             <a:r>
-              <a:rPr lang="en-US" sz="1300" dirty="0">
+              <a:rPr lang="pt-BR" sz="1300" noProof="0" dirty="0">
                 <a:solidFill>
                   <a:srgbClr val="6B6B80"/>
                 </a:solidFill>
@@ -12894,7 +13521,7 @@
               </a:rPr>
               <a:t>Antes de você precisar perguntar onde está o pedido</a:t>
             </a:r>
-            <a:endParaRPr lang="en-US" sz="1300" dirty="0"/>
+            <a:endParaRPr lang="pt-BR" sz="1300" noProof="0" dirty="0"/>
           </a:p>
         </p:txBody>
       </p:sp>
@@ -12923,7 +13550,7 @@
               <a:buNone/>
             </a:pPr>
             <a:r>
-              <a:rPr lang="en-US" sz="1250" i="1" dirty="0">
+              <a:rPr lang="pt-BR" sz="1250" i="1" noProof="0" dirty="0">
                 <a:solidFill>
                   <a:srgbClr val="6C4BC1"/>
                 </a:solidFill>
@@ -12933,7 +13560,7 @@
               </a:rPr>
               <a:t>A faculdade está fazendo a mesma coisa — só que pelo seu aprendizado.</a:t>
             </a:r>
-            <a:endParaRPr lang="en-US" sz="1250" dirty="0"/>
+            <a:endParaRPr lang="pt-BR" sz="1250" noProof="0" dirty="0"/>
           </a:p>
         </p:txBody>
       </p:sp>
@@ -12962,7 +13589,7 @@
               <a:buNone/>
             </a:pPr>
             <a:r>
-              <a:rPr lang="en-US" sz="1000" dirty="0">
+              <a:rPr lang="pt-BR" sz="1000" noProof="0" dirty="0">
                 <a:solidFill>
                   <a:srgbClr val="6B6B80"/>
                 </a:solidFill>
@@ -12972,7 +13599,7 @@
               </a:rPr>
               <a:t>04</a:t>
             </a:r>
-            <a:endParaRPr lang="en-US" sz="1000" dirty="0"/>
+            <a:endParaRPr lang="pt-BR" sz="1000" noProof="0" dirty="0"/>
           </a:p>
         </p:txBody>
       </p:sp>
@@ -13032,6 +13659,13 @@
             <a:prstDash val="solid"/>
           </a:ln>
         </p:spPr>
+        <p:txBody>
+          <a:bodyPr/>
+          <a:lstStyle/>
+          <a:p>
+            <a:endParaRPr lang="pt-BR" noProof="0" dirty="0"/>
+          </a:p>
+        </p:txBody>
       </p:sp>
       <p:sp>
         <p:nvSpPr>
@@ -13056,6 +13690,13 @@
             <a:prstDash val="solid"/>
           </a:ln>
         </p:spPr>
+        <p:txBody>
+          <a:bodyPr/>
+          <a:lstStyle/>
+          <a:p>
+            <a:endParaRPr lang="pt-BR" noProof="0" dirty="0"/>
+          </a:p>
+        </p:txBody>
       </p:sp>
       <p:sp>
         <p:nvSpPr>
@@ -13076,6 +13717,13 @@
           </a:solidFill>
           <a:ln/>
         </p:spPr>
+        <p:txBody>
+          <a:bodyPr/>
+          <a:lstStyle/>
+          <a:p>
+            <a:endParaRPr lang="pt-BR" noProof="0" dirty="0"/>
+          </a:p>
+        </p:txBody>
       </p:sp>
       <p:pic>
         <p:nvPicPr>
@@ -13126,7 +13774,7 @@
               <a:buNone/>
             </a:pPr>
             <a:r>
-              <a:rPr lang="en-US" sz="1300" b="1" kern="0" spc="200" dirty="0">
+              <a:rPr lang="pt-BR" sz="1300" b="1" kern="0" spc="200" noProof="0" dirty="0">
                 <a:solidFill>
                   <a:srgbClr val="2FE6C7"/>
                 </a:solidFill>
@@ -13136,7 +13784,7 @@
               </a:rPr>
               <a:t>SE ALGUÉM DA EQUIPE TE PROCURAR ESTA SEMANA</a:t>
             </a:r>
-            <a:endParaRPr lang="en-US" sz="1300" dirty="0"/>
+            <a:endParaRPr lang="pt-BR" sz="1300" noProof="0" dirty="0"/>
           </a:p>
         </p:txBody>
       </p:sp>
@@ -13165,7 +13813,7 @@
               <a:buNone/>
             </a:pPr>
             <a:r>
-              <a:rPr lang="en-US" sz="4600" b="1" dirty="0">
+              <a:rPr lang="pt-BR" sz="4600" b="1" noProof="0" dirty="0">
                 <a:solidFill>
                   <a:srgbClr val="FFFFFF"/>
                 </a:solidFill>
@@ -13175,7 +13823,7 @@
               </a:rPr>
               <a:t>Não é bronca. É cuidado.</a:t>
             </a:r>
-            <a:endParaRPr lang="en-US" sz="4600" dirty="0"/>
+            <a:endParaRPr lang="pt-BR" sz="4600" noProof="0" dirty="0"/>
           </a:p>
         </p:txBody>
       </p:sp>
@@ -13207,7 +13855,7 @@
               <a:buNone/>
             </a:pPr>
             <a:r>
-              <a:rPr lang="en-US" sz="1600" dirty="0">
+              <a:rPr lang="pt-BR" sz="1600" noProof="0" dirty="0">
                 <a:solidFill>
                   <a:srgbClr val="E4DFF7"/>
                 </a:solidFill>
@@ -13217,7 +13865,7 @@
               </a:rPr>
               <a:t>As primeiras semanas são o momento em que um pequeno empurrão faz a maior diferença. Ninguém está te vigiando — estão te dando a chance de resolver agora o que, mais tarde, seria bem mais difícil.</a:t>
             </a:r>
-            <a:endParaRPr lang="en-US" sz="1600" dirty="0"/>
+            <a:endParaRPr lang="pt-BR" sz="1600" noProof="0" dirty="0"/>
           </a:p>
         </p:txBody>
       </p:sp>
@@ -13279,7 +13927,7 @@
               <a:buNone/>
             </a:pPr>
             <a:r>
-              <a:rPr lang="en-US" sz="1200" b="1" kern="0" spc="200" dirty="0">
+              <a:rPr lang="pt-BR" sz="1200" b="1" kern="0" spc="200" noProof="0" dirty="0">
                 <a:solidFill>
                   <a:srgbClr val="6C4BC1"/>
                 </a:solidFill>
@@ -13289,7 +13937,7 @@
               </a:rPr>
               <a:t>O MOMENTO CERTO</a:t>
             </a:r>
-            <a:endParaRPr lang="en-US" sz="1200" dirty="0"/>
+            <a:endParaRPr lang="pt-BR" sz="1200" noProof="0" dirty="0"/>
           </a:p>
         </p:txBody>
       </p:sp>
@@ -13318,7 +13966,7 @@
               <a:buNone/>
             </a:pPr>
             <a:r>
-              <a:rPr lang="en-US" sz="3000" b="1" dirty="0">
+              <a:rPr lang="pt-BR" sz="3000" b="1" noProof="0" dirty="0">
                 <a:solidFill>
                   <a:srgbClr val="1B1B2F"/>
                 </a:solidFill>
@@ -13328,7 +13976,7 @@
               </a:rPr>
               <a:t>Por que logo na segunda aula?</a:t>
             </a:r>
-            <a:endParaRPr lang="en-US" sz="3000" dirty="0"/>
+            <a:endParaRPr lang="pt-BR" sz="3000" noProof="0" dirty="0"/>
           </a:p>
         </p:txBody>
       </p:sp>
@@ -13360,7 +14008,7 @@
               <a:buNone/>
             </a:pPr>
             <a:r>
-              <a:rPr lang="en-US" sz="1350" dirty="0">
+              <a:rPr lang="pt-BR" sz="1350" noProof="0" dirty="0">
                 <a:solidFill>
                   <a:srgbClr val="6B6B80"/>
                 </a:solidFill>
@@ -13370,7 +14018,7 @@
               </a:rPr>
               <a:t>Os primeiros encontros do semestre são o momento de maior risco de afastamento: quem não instalou as ferramentas, ficou com dúvida na ementa, ou faltou na Aula 01 tende a se afastar ainda mais se ninguém procurar agora.</a:t>
             </a:r>
-            <a:endParaRPr lang="en-US" sz="1350" dirty="0"/>
+            <a:endParaRPr lang="pt-BR" sz="1350" noProof="0" dirty="0"/>
           </a:p>
         </p:txBody>
       </p:sp>
@@ -13399,7 +14047,7 @@
               <a:buNone/>
             </a:pPr>
             <a:r>
-              <a:rPr lang="en-US" sz="1100" b="1" kern="0" spc="100" dirty="0">
+              <a:rPr lang="pt-BR" sz="1100" b="1" kern="0" spc="100" noProof="0" dirty="0">
                 <a:solidFill>
                   <a:srgbClr val="E5533D"/>
                 </a:solidFill>
@@ -13409,7 +14057,7 @@
               </a:rPr>
               <a:t>RISCO ALTO</a:t>
             </a:r>
-            <a:endParaRPr lang="en-US" sz="1100" dirty="0"/>
+            <a:endParaRPr lang="pt-BR" sz="1100" noProof="0" dirty="0"/>
           </a:p>
         </p:txBody>
       </p:sp>
@@ -13432,6 +14080,13 @@
           </a:solidFill>
           <a:ln/>
         </p:spPr>
+        <p:txBody>
+          <a:bodyPr/>
+          <a:lstStyle/>
+          <a:p>
+            <a:endParaRPr lang="pt-BR" noProof="0" dirty="0"/>
+          </a:p>
+        </p:txBody>
       </p:sp>
       <p:pic>
         <p:nvPicPr>
@@ -13482,7 +14137,7 @@
               <a:buNone/>
             </a:pPr>
             <a:r>
-              <a:rPr lang="en-US" sz="1400" b="1" dirty="0">
+              <a:rPr lang="pt-BR" sz="1400" b="1" noProof="0" dirty="0">
                 <a:solidFill>
                   <a:srgbClr val="1B1B2F"/>
                 </a:solidFill>
@@ -13492,7 +14147,7 @@
               </a:rPr>
               <a:t>Início do semestre</a:t>
             </a:r>
-            <a:endParaRPr lang="en-US" sz="1400" dirty="0"/>
+            <a:endParaRPr lang="pt-BR" sz="1400" noProof="0" dirty="0"/>
           </a:p>
         </p:txBody>
       </p:sp>
@@ -13524,7 +14179,7 @@
               <a:buNone/>
             </a:pPr>
             <a:r>
-              <a:rPr lang="en-US" sz="1150" dirty="0">
+              <a:rPr lang="pt-BR" sz="1150" noProof="0" dirty="0">
                 <a:solidFill>
                   <a:srgbClr val="6B6B80"/>
                 </a:solidFill>
@@ -13534,7 +14189,7 @@
               </a:rPr>
               <a:t>Dúvidas técnicas ainda sem resposta</a:t>
             </a:r>
-            <a:endParaRPr lang="en-US" sz="1150" dirty="0"/>
+            <a:endParaRPr lang="pt-BR" sz="1150" noProof="0" dirty="0"/>
           </a:p>
         </p:txBody>
       </p:sp>
@@ -13587,7 +14242,7 @@
               <a:buNone/>
             </a:pPr>
             <a:r>
-              <a:rPr lang="en-US" sz="1100" b="1" kern="0" spc="100" dirty="0">
+              <a:rPr lang="pt-BR" sz="1100" b="1" kern="0" spc="100" noProof="0" dirty="0">
                 <a:solidFill>
                   <a:srgbClr val="E8B324"/>
                 </a:solidFill>
@@ -13597,7 +14252,7 @@
               </a:rPr>
               <a:t>RISCO MÉDIO</a:t>
             </a:r>
-            <a:endParaRPr lang="en-US" sz="1100" dirty="0"/>
+            <a:endParaRPr lang="pt-BR" sz="1100" noProof="0" dirty="0"/>
           </a:p>
         </p:txBody>
       </p:sp>
@@ -13620,6 +14275,13 @@
           </a:solidFill>
           <a:ln/>
         </p:spPr>
+        <p:txBody>
+          <a:bodyPr/>
+          <a:lstStyle/>
+          <a:p>
+            <a:endParaRPr lang="pt-BR" noProof="0" dirty="0"/>
+          </a:p>
+        </p:txBody>
       </p:sp>
       <p:pic>
         <p:nvPicPr>
@@ -13670,7 +14332,7 @@
               <a:buNone/>
             </a:pPr>
             <a:r>
-              <a:rPr lang="en-US" sz="1400" b="1" dirty="0">
+              <a:rPr lang="pt-BR" sz="1400" b="1" noProof="0" dirty="0">
                 <a:solidFill>
                   <a:srgbClr val="1B1B2F"/>
                 </a:solidFill>
@@ -13680,7 +14342,7 @@
               </a:rPr>
               <a:t>Meio do semestre</a:t>
             </a:r>
-            <a:endParaRPr lang="en-US" sz="1400" dirty="0"/>
+            <a:endParaRPr lang="pt-BR" sz="1400" noProof="0" dirty="0"/>
           </a:p>
         </p:txBody>
       </p:sp>
@@ -13712,7 +14374,7 @@
               <a:buNone/>
             </a:pPr>
             <a:r>
-              <a:rPr lang="en-US" sz="1150" dirty="0">
+              <a:rPr lang="pt-BR" sz="1150" noProof="0" dirty="0">
                 <a:solidFill>
                   <a:srgbClr val="6B6B80"/>
                 </a:solidFill>
@@ -13722,7 +14384,7 @@
               </a:rPr>
               <a:t>Sem contato, o afastamento cresce</a:t>
             </a:r>
-            <a:endParaRPr lang="en-US" sz="1150" dirty="0"/>
+            <a:endParaRPr lang="pt-BR" sz="1150" noProof="0" dirty="0"/>
           </a:p>
         </p:txBody>
       </p:sp>
@@ -13775,7 +14437,7 @@
               <a:buNone/>
             </a:pPr>
             <a:r>
-              <a:rPr lang="en-US" sz="1100" b="1" kern="0" spc="100" dirty="0">
+              <a:rPr lang="pt-BR" sz="1100" b="1" kern="0" spc="100" noProof="0" dirty="0">
                 <a:solidFill>
                   <a:srgbClr val="3EBD59"/>
                 </a:solidFill>
@@ -13785,7 +14447,7 @@
               </a:rPr>
               <a:t>RISCO BAIXO</a:t>
             </a:r>
-            <a:endParaRPr lang="en-US" sz="1100" dirty="0"/>
+            <a:endParaRPr lang="pt-BR" sz="1100" noProof="0" dirty="0"/>
           </a:p>
         </p:txBody>
       </p:sp>
@@ -13808,6 +14470,13 @@
           </a:solidFill>
           <a:ln/>
         </p:spPr>
+        <p:txBody>
+          <a:bodyPr/>
+          <a:lstStyle/>
+          <a:p>
+            <a:endParaRPr lang="pt-BR" noProof="0" dirty="0"/>
+          </a:p>
+        </p:txBody>
       </p:sp>
       <p:pic>
         <p:nvPicPr>
@@ -13858,7 +14527,7 @@
               <a:buNone/>
             </a:pPr>
             <a:r>
-              <a:rPr lang="en-US" sz="1400" b="1" dirty="0">
+              <a:rPr lang="pt-BR" sz="1400" b="1" noProof="0" dirty="0">
                 <a:solidFill>
                   <a:srgbClr val="1B1B2F"/>
                 </a:solidFill>
@@ -13868,7 +14537,7 @@
               </a:rPr>
               <a:t>Com suporte a tempo</a:t>
             </a:r>
-            <a:endParaRPr lang="en-US" sz="1400" dirty="0"/>
+            <a:endParaRPr lang="pt-BR" sz="1400" noProof="0" dirty="0"/>
           </a:p>
         </p:txBody>
       </p:sp>
@@ -13900,7 +14569,7 @@
               <a:buNone/>
             </a:pPr>
             <a:r>
-              <a:rPr lang="en-US" sz="1150" dirty="0">
+              <a:rPr lang="pt-BR" sz="1150" noProof="0" dirty="0">
                 <a:solidFill>
                   <a:srgbClr val="6B6B80"/>
                 </a:solidFill>
@@ -13910,7 +14579,7 @@
               </a:rPr>
               <a:t>Busca ativa reduz o problema agora</a:t>
             </a:r>
-            <a:endParaRPr lang="en-US" sz="1150" dirty="0"/>
+            <a:endParaRPr lang="pt-BR" sz="1150" noProof="0" dirty="0"/>
           </a:p>
         </p:txBody>
       </p:sp>
@@ -13939,7 +14608,7 @@
               <a:buNone/>
             </a:pPr>
             <a:r>
-              <a:rPr lang="en-US" sz="1150" i="1" dirty="0">
+              <a:rPr lang="pt-BR" sz="1150" i="1" noProof="0" dirty="0">
                 <a:solidFill>
                   <a:srgbClr val="6C4BC1"/>
                 </a:solidFill>
@@ -13949,7 +14618,7 @@
               </a:rPr>
               <a:t>Ilustrativo — quanto antes o suporte chega, menor a chance de o afastamento se tornar evasão.</a:t>
             </a:r>
-            <a:endParaRPr lang="en-US" sz="1150" dirty="0"/>
+            <a:endParaRPr lang="pt-BR" sz="1150" noProof="0" dirty="0"/>
           </a:p>
         </p:txBody>
       </p:sp>
@@ -13978,7 +14647,7 @@
               <a:buNone/>
             </a:pPr>
             <a:r>
-              <a:rPr lang="en-US" sz="1000" dirty="0">
+              <a:rPr lang="pt-BR" sz="1000" noProof="0" dirty="0">
                 <a:solidFill>
                   <a:srgbClr val="6B6B80"/>
                 </a:solidFill>
@@ -13988,7 +14657,7 @@
               </a:rPr>
               <a:t>06</a:t>
             </a:r>
-            <a:endParaRPr lang="en-US" sz="1000" dirty="0"/>
+            <a:endParaRPr lang="pt-BR" sz="1000" noProof="0" dirty="0"/>
           </a:p>
         </p:txBody>
       </p:sp>
@@ -14050,7 +14719,7 @@
               <a:buNone/>
             </a:pPr>
             <a:r>
-              <a:rPr lang="en-US" sz="1200" b="1" kern="0" spc="200" dirty="0">
+              <a:rPr lang="pt-BR" sz="1200" b="1" kern="0" spc="200" noProof="0" dirty="0">
                 <a:solidFill>
                   <a:srgbClr val="6C4BC1"/>
                 </a:solidFill>
@@ -14060,7 +14729,7 @@
               </a:rPr>
               <a:t>PAPÉIS DE HOJE</a:t>
             </a:r>
-            <a:endParaRPr lang="en-US" sz="1200" dirty="0"/>
+            <a:endParaRPr lang="pt-BR" sz="1200" noProof="0" dirty="0"/>
           </a:p>
         </p:txBody>
       </p:sp>
@@ -14089,7 +14758,7 @@
               <a:buNone/>
             </a:pPr>
             <a:r>
-              <a:rPr lang="en-US" sz="3200" b="1" dirty="0">
+              <a:rPr lang="pt-BR" sz="3200" b="1" noProof="0" dirty="0">
                 <a:solidFill>
                   <a:srgbClr val="1B1B2F"/>
                 </a:solidFill>
@@ -14099,7 +14768,7 @@
               </a:rPr>
               <a:t>Como esta aula funciona</a:t>
             </a:r>
-            <a:endParaRPr lang="en-US" sz="3200" dirty="0"/>
+            <a:endParaRPr lang="pt-BR" sz="3200" noProof="0" dirty="0"/>
           </a:p>
         </p:txBody>
       </p:sp>
@@ -14128,7 +14797,7 @@
               <a:buNone/>
             </a:pPr>
             <a:r>
-              <a:rPr lang="en-US" sz="1300" dirty="0">
+              <a:rPr lang="pt-BR" sz="1300" noProof="0" dirty="0">
                 <a:solidFill>
                   <a:srgbClr val="6B6B80"/>
                 </a:solidFill>
@@ -14138,7 +14807,7 @@
               </a:rPr>
               <a:t>Uma dinâmica diferente das aulas de conteúdo — hoje o foco é garantir que todo mundo embarcou.</a:t>
             </a:r>
-            <a:endParaRPr lang="en-US" sz="1300" dirty="0"/>
+            <a:endParaRPr lang="pt-BR" sz="1300" noProof="0" dirty="0"/>
           </a:p>
         </p:txBody>
       </p:sp>
@@ -14163,6 +14832,13 @@
           </a:solidFill>
           <a:ln/>
         </p:spPr>
+        <p:txBody>
+          <a:bodyPr/>
+          <a:lstStyle/>
+          <a:p>
+            <a:endParaRPr lang="pt-BR" noProof="0" dirty="0"/>
+          </a:p>
+        </p:txBody>
       </p:sp>
       <p:sp>
         <p:nvSpPr>
@@ -14183,6 +14859,13 @@
           </a:solidFill>
           <a:ln/>
         </p:spPr>
+        <p:txBody>
+          <a:bodyPr/>
+          <a:lstStyle/>
+          <a:p>
+            <a:endParaRPr lang="pt-BR" noProof="0" dirty="0"/>
+          </a:p>
+        </p:txBody>
       </p:sp>
       <p:pic>
         <p:nvPicPr>
@@ -14233,7 +14916,7 @@
               <a:buNone/>
             </a:pPr>
             <a:r>
-              <a:rPr lang="en-US" sz="1800" b="1" dirty="0">
+              <a:rPr lang="pt-BR" sz="1800" b="1" noProof="0" dirty="0">
                 <a:solidFill>
                   <a:srgbClr val="FFFFFF"/>
                 </a:solidFill>
@@ -14243,7 +14926,7 @@
               </a:rPr>
               <a:t>O professor</a:t>
             </a:r>
-            <a:endParaRPr lang="en-US" sz="1800" dirty="0"/>
+            <a:endParaRPr lang="pt-BR" sz="1800" noProof="0" dirty="0"/>
           </a:p>
         </p:txBody>
       </p:sp>
@@ -14279,7 +14962,7 @@
               <a:buChar char="•"/>
             </a:pPr>
             <a:r>
-              <a:rPr lang="en-US" sz="1300" dirty="0">
+              <a:rPr lang="pt-BR" sz="1300" noProof="0" dirty="0">
                 <a:solidFill>
                   <a:srgbClr val="DCD8F2"/>
                 </a:solidFill>
@@ -14287,9 +14970,31 @@
                 <a:ea typeface="Calibri" pitchFamily="34" charset="-122"/>
                 <a:cs typeface="Calibri" pitchFamily="34" charset="-120"/>
               </a:rPr>
-              <a:t>Confere frequência e o checklist de onboarding da Aula 01</a:t>
-            </a:r>
-            <a:endParaRPr lang="en-US" sz="1300" dirty="0"/>
+              <a:t>Confere frequência e o checklist de </a:t>
+            </a:r>
+            <a:r>
+              <a:rPr lang="pt-BR" sz="1300" noProof="0" dirty="0" err="1">
+                <a:solidFill>
+                  <a:srgbClr val="DCD8F2"/>
+                </a:solidFill>
+                <a:latin typeface="Calibri" pitchFamily="34" charset="0"/>
+                <a:ea typeface="Calibri" pitchFamily="34" charset="-122"/>
+                <a:cs typeface="Calibri" pitchFamily="34" charset="-120"/>
+              </a:rPr>
+              <a:t>onboarding</a:t>
+            </a:r>
+            <a:r>
+              <a:rPr lang="pt-BR" sz="1300" noProof="0" dirty="0">
+                <a:solidFill>
+                  <a:srgbClr val="DCD8F2"/>
+                </a:solidFill>
+                <a:latin typeface="Calibri" pitchFamily="34" charset="0"/>
+                <a:ea typeface="Calibri" pitchFamily="34" charset="-122"/>
+                <a:cs typeface="Calibri" pitchFamily="34" charset="-120"/>
+              </a:rPr>
+              <a:t> da Aula 01</a:t>
+            </a:r>
+            <a:endParaRPr lang="pt-BR" sz="1300" noProof="0" dirty="0"/>
           </a:p>
           <a:p>
             <a:pPr marL="177800" indent="-177800">
@@ -14303,7 +15008,7 @@
               <a:buChar char="•"/>
             </a:pPr>
             <a:r>
-              <a:rPr lang="en-US" sz="1300" dirty="0">
+              <a:rPr lang="pt-BR" sz="1300" noProof="0" dirty="0">
                 <a:solidFill>
                   <a:srgbClr val="DCD8F2"/>
                 </a:solidFill>
@@ -14313,7 +15018,7 @@
               </a:rPr>
               <a:t>Contata individualmente quem faltou ou não iniciou a configuração do ambiente</a:t>
             </a:r>
-            <a:endParaRPr lang="en-US" sz="1300" dirty="0"/>
+            <a:endParaRPr lang="pt-BR" sz="1300" noProof="0" dirty="0"/>
           </a:p>
           <a:p>
             <a:pPr marL="177800" indent="-177800">
@@ -14327,7 +15032,7 @@
               <a:buChar char="•"/>
             </a:pPr>
             <a:r>
-              <a:rPr lang="en-US" sz="1300" dirty="0">
+              <a:rPr lang="pt-BR" sz="1300" noProof="0" dirty="0">
                 <a:solidFill>
                   <a:srgbClr val="DCD8F2"/>
                 </a:solidFill>
@@ -14337,7 +15042,7 @@
               </a:rPr>
               <a:t>Esclarece dúvidas de ementa, avaliação e cronograma que ainda não foram resolvidas</a:t>
             </a:r>
-            <a:endParaRPr lang="en-US" sz="1300" dirty="0"/>
+            <a:endParaRPr lang="pt-BR" sz="1300" noProof="0" dirty="0"/>
           </a:p>
         </p:txBody>
       </p:sp>
@@ -14362,6 +15067,13 @@
           </a:solidFill>
           <a:ln/>
         </p:spPr>
+        <p:txBody>
+          <a:bodyPr/>
+          <a:lstStyle/>
+          <a:p>
+            <a:endParaRPr lang="pt-BR" noProof="0" dirty="0"/>
+          </a:p>
+        </p:txBody>
       </p:sp>
       <p:sp>
         <p:nvSpPr>
@@ -14382,6 +15094,13 @@
           </a:solidFill>
           <a:ln/>
         </p:spPr>
+        <p:txBody>
+          <a:bodyPr/>
+          <a:lstStyle/>
+          <a:p>
+            <a:endParaRPr lang="pt-BR" noProof="0" dirty="0"/>
+          </a:p>
+        </p:txBody>
       </p:sp>
       <p:pic>
         <p:nvPicPr>
@@ -14432,7 +15151,7 @@
               <a:buNone/>
             </a:pPr>
             <a:r>
-              <a:rPr lang="en-US" sz="1800" b="1" dirty="0">
+              <a:rPr lang="pt-BR" sz="1800" b="1" noProof="0" dirty="0">
                 <a:solidFill>
                   <a:srgbClr val="FFFFFF"/>
                 </a:solidFill>
@@ -14442,7 +15161,7 @@
               </a:rPr>
               <a:t>Você</a:t>
             </a:r>
-            <a:endParaRPr lang="en-US" sz="1800" dirty="0"/>
+            <a:endParaRPr lang="pt-BR" sz="1800" noProof="0" dirty="0"/>
           </a:p>
         </p:txBody>
       </p:sp>
@@ -14478,7 +15197,7 @@
               <a:buChar char="•"/>
             </a:pPr>
             <a:r>
-              <a:rPr lang="en-US" sz="1300" dirty="0">
+              <a:rPr lang="pt-BR" sz="1300" noProof="0" dirty="0">
                 <a:solidFill>
                   <a:srgbClr val="DCD8F2"/>
                 </a:solidFill>
@@ -14486,9 +15205,31 @@
                 <a:ea typeface="Calibri" pitchFamily="34" charset="-122"/>
                 <a:cs typeface="Calibri" pitchFamily="34" charset="-120"/>
               </a:rPr>
-              <a:t>Confirma o seu próprio diagnóstico de onboarding, item por item</a:t>
-            </a:r>
-            <a:endParaRPr lang="en-US" sz="1300" dirty="0"/>
+              <a:t>Confirma o seu próprio diagnóstico de </a:t>
+            </a:r>
+            <a:r>
+              <a:rPr lang="pt-BR" sz="1300" noProof="0" dirty="0" err="1">
+                <a:solidFill>
+                  <a:srgbClr val="DCD8F2"/>
+                </a:solidFill>
+                <a:latin typeface="Calibri" pitchFamily="34" charset="0"/>
+                <a:ea typeface="Calibri" pitchFamily="34" charset="-122"/>
+                <a:cs typeface="Calibri" pitchFamily="34" charset="-120"/>
+              </a:rPr>
+              <a:t>onboarding</a:t>
+            </a:r>
+            <a:r>
+              <a:rPr lang="pt-BR" sz="1300" noProof="0" dirty="0">
+                <a:solidFill>
+                  <a:srgbClr val="DCD8F2"/>
+                </a:solidFill>
+                <a:latin typeface="Calibri" pitchFamily="34" charset="0"/>
+                <a:ea typeface="Calibri" pitchFamily="34" charset="-122"/>
+                <a:cs typeface="Calibri" pitchFamily="34" charset="-120"/>
+              </a:rPr>
+              <a:t>, item por item</a:t>
+            </a:r>
+            <a:endParaRPr lang="pt-BR" sz="1300" noProof="0" dirty="0"/>
           </a:p>
           <a:p>
             <a:pPr marL="177800" indent="-177800">
@@ -14502,7 +15243,7 @@
               <a:buChar char="•"/>
             </a:pPr>
             <a:r>
-              <a:rPr lang="en-US" sz="1300" dirty="0">
+              <a:rPr lang="pt-BR" sz="1300" noProof="0" dirty="0">
                 <a:solidFill>
                   <a:srgbClr val="DCD8F2"/>
                 </a:solidFill>
@@ -14512,7 +15253,7 @@
               </a:rPr>
               <a:t>Tira as dúvidas que ainda tiver agora — não depois, quando for tarde</a:t>
             </a:r>
-            <a:endParaRPr lang="en-US" sz="1300" dirty="0"/>
+            <a:endParaRPr lang="pt-BR" sz="1300" noProof="0" dirty="0"/>
           </a:p>
           <a:p>
             <a:pPr marL="177800" indent="-177800">
@@ -14526,7 +15267,7 @@
               <a:buChar char="•"/>
             </a:pPr>
             <a:r>
-              <a:rPr lang="en-US" sz="1300" dirty="0">
+              <a:rPr lang="pt-BR" sz="1300" noProof="0" dirty="0">
                 <a:solidFill>
                   <a:srgbClr val="DCD8F2"/>
                 </a:solidFill>
@@ -14536,7 +15277,7 @@
               </a:rPr>
               <a:t>Encara o desafio lógico opcional, se já estiver em dia com tudo</a:t>
             </a:r>
-            <a:endParaRPr lang="en-US" sz="1300" dirty="0"/>
+            <a:endParaRPr lang="pt-BR" sz="1300" noProof="0" dirty="0"/>
           </a:p>
         </p:txBody>
       </p:sp>
@@ -14565,7 +15306,7 @@
               <a:buNone/>
             </a:pPr>
             <a:r>
-              <a:rPr lang="en-US" sz="1000" dirty="0">
+              <a:rPr lang="pt-BR" sz="1000" noProof="0" dirty="0">
                 <a:solidFill>
                   <a:srgbClr val="6B6B80"/>
                 </a:solidFill>
@@ -14575,7 +15316,7 @@
               </a:rPr>
               <a:t>07</a:t>
             </a:r>
-            <a:endParaRPr lang="en-US" sz="1000" dirty="0"/>
+            <a:endParaRPr lang="pt-BR" sz="1000" noProof="0" dirty="0"/>
           </a:p>
         </p:txBody>
       </p:sp>
@@ -14637,7 +15378,7 @@
               <a:buNone/>
             </a:pPr>
             <a:r>
-              <a:rPr lang="en-US" sz="1200" b="1" kern="0" spc="200" dirty="0">
+              <a:rPr lang="pt-BR" sz="1200" b="1" kern="0" spc="200" noProof="0" dirty="0">
                 <a:solidFill>
                   <a:srgbClr val="6C4BC1"/>
                 </a:solidFill>
@@ -14647,7 +15388,7 @@
               </a:rPr>
               <a:t>DIAGNÓSTICO RÁPIDO DE ONBOARDING</a:t>
             </a:r>
-            <a:endParaRPr lang="en-US" sz="1200" dirty="0"/>
+            <a:endParaRPr lang="pt-BR" sz="1200" noProof="0" dirty="0"/>
           </a:p>
         </p:txBody>
       </p:sp>
@@ -14676,7 +15417,7 @@
               <a:buNone/>
             </a:pPr>
             <a:r>
-              <a:rPr lang="en-US" sz="3000" b="1" dirty="0">
+              <a:rPr lang="pt-BR" sz="3000" b="1" noProof="0" dirty="0">
                 <a:solidFill>
                   <a:srgbClr val="1B1B2F"/>
                 </a:solidFill>
@@ -14686,7 +15427,7 @@
               </a:rPr>
               <a:t>Confira seu ambiente técnico</a:t>
             </a:r>
-            <a:endParaRPr lang="en-US" sz="3000" dirty="0"/>
+            <a:endParaRPr lang="pt-BR" sz="3000" noProof="0" dirty="0"/>
           </a:p>
         </p:txBody>
       </p:sp>
@@ -14715,7 +15456,7 @@
               <a:buNone/>
             </a:pPr>
             <a:r>
-              <a:rPr lang="en-US" sz="1300" dirty="0">
+              <a:rPr lang="pt-BR" sz="1300" noProof="0" dirty="0">
                 <a:solidFill>
                   <a:srgbClr val="6B6B80"/>
                 </a:solidFill>
@@ -14725,7 +15466,7 @@
               </a:rPr>
               <a:t>O mesmo setup que vimos na Aula 01 — marque o que já está funcionando.</a:t>
             </a:r>
-            <a:endParaRPr lang="en-US" sz="1300" dirty="0"/>
+            <a:endParaRPr lang="pt-BR" sz="1300" noProof="0" dirty="0"/>
           </a:p>
         </p:txBody>
       </p:sp>
@@ -14750,6 +15491,13 @@
           </a:solidFill>
           <a:ln/>
         </p:spPr>
+        <p:txBody>
+          <a:bodyPr/>
+          <a:lstStyle/>
+          <a:p>
+            <a:endParaRPr lang="pt-BR" noProof="0" dirty="0"/>
+          </a:p>
+        </p:txBody>
       </p:sp>
       <p:sp>
         <p:nvSpPr>
@@ -14777,6 +15525,13 @@
             <a:prstDash val="solid"/>
           </a:ln>
         </p:spPr>
+        <p:txBody>
+          <a:bodyPr/>
+          <a:lstStyle/>
+          <a:p>
+            <a:endParaRPr lang="pt-BR" noProof="0" dirty="0"/>
+          </a:p>
+        </p:txBody>
       </p:sp>
       <p:sp>
         <p:nvSpPr>
@@ -14797,6 +15552,13 @@
           </a:solidFill>
           <a:ln/>
         </p:spPr>
+        <p:txBody>
+          <a:bodyPr/>
+          <a:lstStyle/>
+          <a:p>
+            <a:endParaRPr lang="pt-BR" noProof="0" dirty="0"/>
+          </a:p>
+        </p:txBody>
       </p:sp>
       <p:pic>
         <p:nvPicPr>
@@ -14850,7 +15612,7 @@
               <a:buNone/>
             </a:pPr>
             <a:r>
-              <a:rPr lang="en-US" sz="1400" b="1" dirty="0">
+              <a:rPr lang="pt-BR" sz="1400" b="1" noProof="0" dirty="0">
                 <a:solidFill>
                   <a:srgbClr val="1B1B2F"/>
                 </a:solidFill>
@@ -14858,9 +15620,31 @@
                 <a:ea typeface="Calibri" pitchFamily="34" charset="-122"/>
                 <a:cs typeface="Calibri" pitchFamily="34" charset="-120"/>
               </a:rPr>
-              <a:t>VS Code instalado, com o projeto do curso aberto ao menos uma vez</a:t>
-            </a:r>
-            <a:endParaRPr lang="en-US" sz="1400" dirty="0"/>
+              <a:t>VS </a:t>
+            </a:r>
+            <a:r>
+              <a:rPr lang="pt-BR" sz="1400" b="1" noProof="0" dirty="0" err="1">
+                <a:solidFill>
+                  <a:srgbClr val="1B1B2F"/>
+                </a:solidFill>
+                <a:latin typeface="Calibri" pitchFamily="34" charset="0"/>
+                <a:ea typeface="Calibri" pitchFamily="34" charset="-122"/>
+                <a:cs typeface="Calibri" pitchFamily="34" charset="-120"/>
+              </a:rPr>
+              <a:t>Code</a:t>
+            </a:r>
+            <a:r>
+              <a:rPr lang="pt-BR" sz="1400" b="1" noProof="0" dirty="0">
+                <a:solidFill>
+                  <a:srgbClr val="1B1B2F"/>
+                </a:solidFill>
+                <a:latin typeface="Calibri" pitchFamily="34" charset="0"/>
+                <a:ea typeface="Calibri" pitchFamily="34" charset="-122"/>
+                <a:cs typeface="Calibri" pitchFamily="34" charset="-120"/>
+              </a:rPr>
+              <a:t> instalado, com o projeto do curso aberto ao menos uma vez</a:t>
+            </a:r>
+            <a:endParaRPr lang="pt-BR" sz="1400" noProof="0" dirty="0"/>
           </a:p>
         </p:txBody>
       </p:sp>
@@ -14885,6 +15669,13 @@
           </a:solidFill>
           <a:ln/>
         </p:spPr>
+        <p:txBody>
+          <a:bodyPr/>
+          <a:lstStyle/>
+          <a:p>
+            <a:endParaRPr lang="pt-BR" noProof="0" dirty="0"/>
+          </a:p>
+        </p:txBody>
       </p:sp>
       <p:sp>
         <p:nvSpPr>
@@ -14912,6 +15703,13 @@
             <a:prstDash val="solid"/>
           </a:ln>
         </p:spPr>
+        <p:txBody>
+          <a:bodyPr/>
+          <a:lstStyle/>
+          <a:p>
+            <a:endParaRPr lang="pt-BR" noProof="0" dirty="0"/>
+          </a:p>
+        </p:txBody>
       </p:sp>
       <p:sp>
         <p:nvSpPr>
@@ -14932,6 +15730,13 @@
           </a:solidFill>
           <a:ln/>
         </p:spPr>
+        <p:txBody>
+          <a:bodyPr/>
+          <a:lstStyle/>
+          <a:p>
+            <a:endParaRPr lang="pt-BR" noProof="0" dirty="0"/>
+          </a:p>
+        </p:txBody>
       </p:sp>
       <p:pic>
         <p:nvPicPr>
@@ -14985,7 +15790,7 @@
               <a:buNone/>
             </a:pPr>
             <a:r>
-              <a:rPr lang="en-US" sz="1400" b="1" dirty="0">
+              <a:rPr lang="pt-BR" sz="1400" b="1" noProof="0" dirty="0">
                 <a:solidFill>
                   <a:srgbClr val="1B1B2F"/>
                 </a:solidFill>
@@ -14993,9 +15798,53 @@
                 <a:ea typeface="Calibri" pitchFamily="34" charset="-122"/>
                 <a:cs typeface="Calibri" pitchFamily="34" charset="-120"/>
               </a:rPr>
-              <a:t>SDK do .NET instalado e dotnet --version funcionando no terminal</a:t>
-            </a:r>
-            <a:endParaRPr lang="en-US" sz="1400" dirty="0"/>
+              <a:t>SDK do .NET instalado e </a:t>
+            </a:r>
+            <a:r>
+              <a:rPr lang="pt-BR" sz="1400" b="1" noProof="0" dirty="0" err="1">
+                <a:solidFill>
+                  <a:srgbClr val="1B1B2F"/>
+                </a:solidFill>
+                <a:latin typeface="Calibri" pitchFamily="34" charset="0"/>
+                <a:ea typeface="Calibri" pitchFamily="34" charset="-122"/>
+                <a:cs typeface="Calibri" pitchFamily="34" charset="-120"/>
+              </a:rPr>
+              <a:t>dotnet</a:t>
+            </a:r>
+            <a:r>
+              <a:rPr lang="pt-BR" sz="1400" b="1" noProof="0" dirty="0">
+                <a:solidFill>
+                  <a:srgbClr val="1B1B2F"/>
+                </a:solidFill>
+                <a:latin typeface="Calibri" pitchFamily="34" charset="0"/>
+                <a:ea typeface="Calibri" pitchFamily="34" charset="-122"/>
+                <a:cs typeface="Calibri" pitchFamily="34" charset="-120"/>
+              </a:rPr>
+              <a:t> --</a:t>
+            </a:r>
+            <a:r>
+              <a:rPr lang="pt-BR" sz="1400" b="1" noProof="0" dirty="0" err="1">
+                <a:solidFill>
+                  <a:srgbClr val="1B1B2F"/>
+                </a:solidFill>
+                <a:latin typeface="Calibri" pitchFamily="34" charset="0"/>
+                <a:ea typeface="Calibri" pitchFamily="34" charset="-122"/>
+                <a:cs typeface="Calibri" pitchFamily="34" charset="-120"/>
+              </a:rPr>
+              <a:t>version</a:t>
+            </a:r>
+            <a:r>
+              <a:rPr lang="pt-BR" sz="1400" b="1" noProof="0" dirty="0">
+                <a:solidFill>
+                  <a:srgbClr val="1B1B2F"/>
+                </a:solidFill>
+                <a:latin typeface="Calibri" pitchFamily="34" charset="0"/>
+                <a:ea typeface="Calibri" pitchFamily="34" charset="-122"/>
+                <a:cs typeface="Calibri" pitchFamily="34" charset="-120"/>
+              </a:rPr>
+              <a:t> funcionando no terminal</a:t>
+            </a:r>
+            <a:endParaRPr lang="pt-BR" sz="1400" noProof="0" dirty="0"/>
           </a:p>
         </p:txBody>
       </p:sp>
@@ -15020,6 +15869,13 @@
           </a:solidFill>
           <a:ln/>
         </p:spPr>
+        <p:txBody>
+          <a:bodyPr/>
+          <a:lstStyle/>
+          <a:p>
+            <a:endParaRPr lang="pt-BR" noProof="0" dirty="0"/>
+          </a:p>
+        </p:txBody>
       </p:sp>
       <p:sp>
         <p:nvSpPr>
@@ -15047,6 +15903,13 @@
             <a:prstDash val="solid"/>
           </a:ln>
         </p:spPr>
+        <p:txBody>
+          <a:bodyPr/>
+          <a:lstStyle/>
+          <a:p>
+            <a:endParaRPr lang="pt-BR" noProof="0" dirty="0"/>
+          </a:p>
+        </p:txBody>
       </p:sp>
       <p:sp>
         <p:nvSpPr>
@@ -15067,6 +15930,13 @@
           </a:solidFill>
           <a:ln/>
         </p:spPr>
+        <p:txBody>
+          <a:bodyPr/>
+          <a:lstStyle/>
+          <a:p>
+            <a:endParaRPr lang="pt-BR" noProof="0" dirty="0"/>
+          </a:p>
+        </p:txBody>
       </p:sp>
       <p:pic>
         <p:nvPicPr>
@@ -15120,7 +15990,7 @@
               <a:buNone/>
             </a:pPr>
             <a:r>
-              <a:rPr lang="en-US" sz="1400" b="1" dirty="0">
+              <a:rPr lang="pt-BR" sz="1400" b="1" noProof="0" dirty="0" err="1">
                 <a:solidFill>
                   <a:srgbClr val="1B1B2F"/>
                 </a:solidFill>
@@ -15128,9 +15998,42 @@
                 <a:ea typeface="Calibri" pitchFamily="34" charset="-122"/>
                 <a:cs typeface="Calibri" pitchFamily="34" charset="-120"/>
               </a:rPr>
-              <a:t>Git instalado, com user.name e user.email configurados</a:t>
-            </a:r>
-            <a:endParaRPr lang="en-US" sz="1400" dirty="0"/>
+              <a:t>Git</a:t>
+            </a:r>
+            <a:r>
+              <a:rPr lang="pt-BR" sz="1400" b="1" noProof="0" dirty="0">
+                <a:solidFill>
+                  <a:srgbClr val="1B1B2F"/>
+                </a:solidFill>
+                <a:latin typeface="Calibri" pitchFamily="34" charset="0"/>
+                <a:ea typeface="Calibri" pitchFamily="34" charset="-122"/>
+                <a:cs typeface="Calibri" pitchFamily="34" charset="-120"/>
+              </a:rPr>
+              <a:t> instalado, com user.name e </a:t>
+            </a:r>
+            <a:r>
+              <a:rPr lang="pt-BR" sz="1400" b="1" noProof="0" dirty="0" err="1">
+                <a:solidFill>
+                  <a:srgbClr val="1B1B2F"/>
+                </a:solidFill>
+                <a:latin typeface="Calibri" pitchFamily="34" charset="0"/>
+                <a:ea typeface="Calibri" pitchFamily="34" charset="-122"/>
+                <a:cs typeface="Calibri" pitchFamily="34" charset="-120"/>
+              </a:rPr>
+              <a:t>user.email</a:t>
+            </a:r>
+            <a:r>
+              <a:rPr lang="pt-BR" sz="1400" b="1" noProof="0" dirty="0">
+                <a:solidFill>
+                  <a:srgbClr val="1B1B2F"/>
+                </a:solidFill>
+                <a:latin typeface="Calibri" pitchFamily="34" charset="0"/>
+                <a:ea typeface="Calibri" pitchFamily="34" charset="-122"/>
+                <a:cs typeface="Calibri" pitchFamily="34" charset="-120"/>
+              </a:rPr>
+              <a:t> configurados</a:t>
+            </a:r>
+            <a:endParaRPr lang="pt-BR" sz="1400" noProof="0" dirty="0"/>
           </a:p>
         </p:txBody>
       </p:sp>
@@ -15155,6 +16058,13 @@
           </a:solidFill>
           <a:ln/>
         </p:spPr>
+        <p:txBody>
+          <a:bodyPr/>
+          <a:lstStyle/>
+          <a:p>
+            <a:endParaRPr lang="pt-BR" noProof="0" dirty="0"/>
+          </a:p>
+        </p:txBody>
       </p:sp>
       <p:sp>
         <p:nvSpPr>
@@ -15182,6 +16092,13 @@
             <a:prstDash val="solid"/>
           </a:ln>
         </p:spPr>
+        <p:txBody>
+          <a:bodyPr/>
+          <a:lstStyle/>
+          <a:p>
+            <a:endParaRPr lang="pt-BR" noProof="0" dirty="0"/>
+          </a:p>
+        </p:txBody>
       </p:sp>
       <p:sp>
         <p:nvSpPr>
@@ -15202,6 +16119,13 @@
           </a:solidFill>
           <a:ln/>
         </p:spPr>
+        <p:txBody>
+          <a:bodyPr/>
+          <a:lstStyle/>
+          <a:p>
+            <a:endParaRPr lang="pt-BR" noProof="0" dirty="0"/>
+          </a:p>
+        </p:txBody>
       </p:sp>
       <p:pic>
         <p:nvPicPr>
@@ -15255,7 +16179,7 @@
               <a:buNone/>
             </a:pPr>
             <a:r>
-              <a:rPr lang="en-US" sz="1400" b="1" dirty="0">
+              <a:rPr lang="pt-BR" sz="1400" b="1" noProof="0" dirty="0">
                 <a:solidFill>
                   <a:srgbClr val="1B1B2F"/>
                 </a:solidFill>
@@ -15265,7 +16189,7 @@
               </a:rPr>
               <a:t>Conta no GitHub criada</a:t>
             </a:r>
-            <a:endParaRPr lang="en-US" sz="1400" dirty="0"/>
+            <a:endParaRPr lang="pt-BR" sz="1400" noProof="0" dirty="0"/>
           </a:p>
         </p:txBody>
       </p:sp>
@@ -15294,7 +16218,7 @@
               <a:buNone/>
             </a:pPr>
             <a:r>
-              <a:rPr lang="en-US" sz="1000" dirty="0">
+              <a:rPr lang="pt-BR" sz="1000" noProof="0" dirty="0">
                 <a:solidFill>
                   <a:srgbClr val="6B6B80"/>
                 </a:solidFill>
@@ -15304,7 +16228,7 @@
               </a:rPr>
               <a:t>08</a:t>
             </a:r>
-            <a:endParaRPr lang="en-US" sz="1000" dirty="0"/>
+            <a:endParaRPr lang="pt-BR" sz="1000" noProof="0" dirty="0"/>
           </a:p>
         </p:txBody>
       </p:sp>
@@ -15366,7 +16290,7 @@
               <a:buNone/>
             </a:pPr>
             <a:r>
-              <a:rPr lang="en-US" sz="1200" b="1" kern="0" spc="200" dirty="0">
+              <a:rPr lang="pt-BR" sz="1200" b="1" kern="0" spc="200" noProof="0" dirty="0">
                 <a:solidFill>
                   <a:srgbClr val="6C4BC1"/>
                 </a:solidFill>
@@ -15376,7 +16300,7 @@
               </a:rPr>
               <a:t>DIAGNÓSTICO RÁPIDO DE ONBOARDING</a:t>
             </a:r>
-            <a:endParaRPr lang="en-US" sz="1200" dirty="0"/>
+            <a:endParaRPr lang="pt-BR" sz="1200" noProof="0" dirty="0"/>
           </a:p>
         </p:txBody>
       </p:sp>
@@ -15405,7 +16329,7 @@
               <a:buNone/>
             </a:pPr>
             <a:r>
-              <a:rPr lang="en-US" sz="3000" b="1" dirty="0">
+              <a:rPr lang="pt-BR" sz="3000" b="1" noProof="0" dirty="0">
                 <a:solidFill>
                   <a:srgbClr val="1B1B2F"/>
                 </a:solidFill>
@@ -15415,7 +16339,7 @@
               </a:rPr>
               <a:t>Confira o seu contexto de curso</a:t>
             </a:r>
-            <a:endParaRPr lang="en-US" sz="3000" dirty="0"/>
+            <a:endParaRPr lang="pt-BR" sz="3000" noProof="0" dirty="0"/>
           </a:p>
         </p:txBody>
       </p:sp>
@@ -15440,6 +16364,13 @@
           </a:solidFill>
           <a:ln/>
         </p:spPr>
+        <p:txBody>
+          <a:bodyPr/>
+          <a:lstStyle/>
+          <a:p>
+            <a:endParaRPr lang="pt-BR" noProof="0" dirty="0"/>
+          </a:p>
+        </p:txBody>
       </p:sp>
       <p:sp>
         <p:nvSpPr>
@@ -15460,6 +16391,13 @@
           </a:solidFill>
           <a:ln/>
         </p:spPr>
+        <p:txBody>
+          <a:bodyPr/>
+          <a:lstStyle/>
+          <a:p>
+            <a:endParaRPr lang="pt-BR" noProof="0" dirty="0"/>
+          </a:p>
+        </p:txBody>
       </p:sp>
       <p:pic>
         <p:nvPicPr>
@@ -15510,7 +16448,7 @@
               <a:buNone/>
             </a:pPr>
             <a:r>
-              <a:rPr lang="en-US" sz="1700" b="1" dirty="0">
+              <a:rPr lang="pt-BR" sz="1700" b="1" noProof="0" dirty="0">
                 <a:solidFill>
                   <a:srgbClr val="1B1B2F"/>
                 </a:solidFill>
@@ -15520,7 +16458,7 @@
               </a:rPr>
               <a:t>Acesso confirmado</a:t>
             </a:r>
-            <a:endParaRPr lang="en-US" sz="1700" dirty="0"/>
+            <a:endParaRPr lang="pt-BR" sz="1700" noProof="0" dirty="0"/>
           </a:p>
         </p:txBody>
       </p:sp>
@@ -15552,7 +16490,7 @@
               <a:buNone/>
             </a:pPr>
             <a:r>
-              <a:rPr lang="en-US" sz="1300" dirty="0">
+              <a:rPr lang="pt-BR" sz="1300" noProof="0" dirty="0">
                 <a:solidFill>
                   <a:srgbClr val="6B6B80"/>
                 </a:solidFill>
@@ -15560,9 +16498,31 @@
                 <a:ea typeface="Calibri" pitchFamily="34" charset="-122"/>
                 <a:cs typeface="Calibri" pitchFamily="34" charset="-120"/>
               </a:rPr>
-              <a:t>Você tem acesso ao canal oficial da turma (Google Classroom ou equivalente).</a:t>
-            </a:r>
-            <a:endParaRPr lang="en-US" sz="1300" dirty="0"/>
+              <a:t>Você tem acesso ao canal oficial da turma (Google </a:t>
+            </a:r>
+            <a:r>
+              <a:rPr lang="pt-BR" sz="1300" noProof="0" dirty="0" err="1">
+                <a:solidFill>
+                  <a:srgbClr val="6B6B80"/>
+                </a:solidFill>
+                <a:latin typeface="Calibri" pitchFamily="34" charset="0"/>
+                <a:ea typeface="Calibri" pitchFamily="34" charset="-122"/>
+                <a:cs typeface="Calibri" pitchFamily="34" charset="-120"/>
+              </a:rPr>
+              <a:t>Classroom</a:t>
+            </a:r>
+            <a:r>
+              <a:rPr lang="pt-BR" sz="1300" noProof="0" dirty="0">
+                <a:solidFill>
+                  <a:srgbClr val="6B6B80"/>
+                </a:solidFill>
+                <a:latin typeface="Calibri" pitchFamily="34" charset="0"/>
+                <a:ea typeface="Calibri" pitchFamily="34" charset="-122"/>
+                <a:cs typeface="Calibri" pitchFamily="34" charset="-120"/>
+              </a:rPr>
+              <a:t> ou equivalente).</a:t>
+            </a:r>
+            <a:endParaRPr lang="pt-BR" sz="1300" noProof="0" dirty="0"/>
           </a:p>
         </p:txBody>
       </p:sp>
@@ -15587,6 +16547,13 @@
           </a:solidFill>
           <a:ln/>
         </p:spPr>
+        <p:txBody>
+          <a:bodyPr/>
+          <a:lstStyle/>
+          <a:p>
+            <a:endParaRPr lang="pt-BR" noProof="0" dirty="0"/>
+          </a:p>
+        </p:txBody>
       </p:sp>
       <p:sp>
         <p:nvSpPr>
@@ -15607,6 +16574,13 @@
           </a:solidFill>
           <a:ln/>
         </p:spPr>
+        <p:txBody>
+          <a:bodyPr/>
+          <a:lstStyle/>
+          <a:p>
+            <a:endParaRPr lang="pt-BR" noProof="0" dirty="0"/>
+          </a:p>
+        </p:txBody>
       </p:sp>
       <p:pic>
         <p:nvPicPr>
@@ -15657,7 +16631,7 @@
               <a:buNone/>
             </a:pPr>
             <a:r>
-              <a:rPr lang="en-US" sz="1700" b="1" dirty="0">
+              <a:rPr lang="pt-BR" sz="1700" b="1" noProof="0" dirty="0">
                 <a:solidFill>
                   <a:srgbClr val="1B1B2F"/>
                 </a:solidFill>
@@ -15667,7 +16641,7 @@
               </a:rPr>
               <a:t>Ementa e avaliação claras</a:t>
             </a:r>
-            <a:endParaRPr lang="en-US" sz="1700" dirty="0"/>
+            <a:endParaRPr lang="pt-BR" sz="1700" noProof="0" dirty="0"/>
           </a:p>
         </p:txBody>
       </p:sp>
@@ -15699,7 +16673,7 @@
               <a:buNone/>
             </a:pPr>
             <a:r>
-              <a:rPr lang="en-US" sz="1300" dirty="0">
+              <a:rPr lang="pt-BR" sz="1300" noProof="0" dirty="0">
                 <a:solidFill>
                   <a:srgbClr val="6B6B80"/>
                 </a:solidFill>
@@ -15709,7 +16683,7 @@
               </a:rPr>
               <a:t>Dúvidas sobre a ementa ou a atividade avaliativa em grupo já foram esclarecidas.</a:t>
             </a:r>
-            <a:endParaRPr lang="en-US" sz="1300" dirty="0"/>
+            <a:endParaRPr lang="pt-BR" sz="1300" noProof="0" dirty="0"/>
           </a:p>
         </p:txBody>
       </p:sp>
@@ -15738,7 +16712,7 @@
               <a:buNone/>
             </a:pPr>
             <a:r>
-              <a:rPr lang="en-US" sz="1250" i="1" dirty="0">
+              <a:rPr lang="pt-BR" sz="1250" i="1" noProof="0" dirty="0">
                 <a:solidFill>
                   <a:srgbClr val="6B6B80"/>
                 </a:solidFill>
@@ -15749,7 +16723,7 @@
               <a:t>Precisa relembrar algum detalhe da ementa? Volte na </a:t>
             </a:r>
             <a:r>
-              <a:rPr lang="en-US" sz="1250" i="1" u="sng" dirty="0">
+              <a:rPr lang="pt-BR" sz="1250" i="1" u="sng" noProof="0" dirty="0">
                 <a:solidFill>
                   <a:srgbClr val="000000"/>
                 </a:solidFill>
@@ -15767,7 +16741,7 @@
               <a:t>Aula 01</a:t>
             </a:r>
             <a:r>
-              <a:rPr lang="en-US" sz="1250" i="1" dirty="0">
+              <a:rPr lang="pt-BR" sz="1250" i="1" noProof="0" dirty="0">
                 <a:solidFill>
                   <a:srgbClr val="6B6B80"/>
                 </a:solidFill>
@@ -15777,7 +16751,7 @@
               </a:rPr>
               <a:t>.</a:t>
             </a:r>
-            <a:endParaRPr lang="en-US" sz="1250" dirty="0"/>
+            <a:endParaRPr lang="pt-BR" sz="1250" noProof="0" dirty="0"/>
           </a:p>
         </p:txBody>
       </p:sp>
@@ -15806,7 +16780,7 @@
               <a:buNone/>
             </a:pPr>
             <a:r>
-              <a:rPr lang="en-US" sz="1000" dirty="0">
+              <a:rPr lang="pt-BR" sz="1000" noProof="0" dirty="0">
                 <a:solidFill>
                   <a:srgbClr val="6B6B80"/>
                 </a:solidFill>
@@ -15816,7 +16790,7 @@
               </a:rPr>
               <a:t>09</a:t>
             </a:r>
-            <a:endParaRPr lang="en-US" sz="1000" dirty="0"/>
+            <a:endParaRPr lang="pt-BR" sz="1000" noProof="0" dirty="0"/>
           </a:p>
         </p:txBody>
       </p:sp>

--- a/slide/pratica/02/Aula02 - Busca Ativa.pptx
+++ b/slide/pratica/02/Aula02 - Busca Ativa.pptx
@@ -5,7 +5,7 @@
     <p:sldMasterId id="2147483648" r:id="rId1"/>
   </p:sldMasterIdLst>
   <p:notesMasterIdLst>
-    <p:notesMasterId r:id="rId23"/>
+    <p:notesMasterId r:id="rId24"/>
   </p:notesMasterIdLst>
   <p:sldIdLst>
     <p:sldId id="256" r:id="rId2"/>
@@ -29,6 +29,7 @@
     <p:sldId id="274" r:id="rId20"/>
     <p:sldId id="275" r:id="rId21"/>
     <p:sldId id="276" r:id="rId22"/>
+    <p:sldId id="277" r:id="rId23"/>
   </p:sldIdLst>
   <p:sldSz cx="12192000" cy="6858000"/>
   <p:notesSz cx="6858000" cy="12192000"/>
@@ -1466,6 +1467,117 @@
     <p:extLst>
       <p:ext uri="{BB962C8B-B14F-4D97-AF65-F5344CB8AC3E}">
         <p14:creationId xmlns:p14="http://schemas.microsoft.com/office/powerpoint/2010/main" val="1024086991"/>
+      </p:ext>
+    </p:extLst>
+  </p:cSld>
+  <p:clrMapOvr>
+    <a:masterClrMapping/>
+  </p:clrMapOvr>
+</p:notes>
+</file>
+
+<file path=ppt/notesSlides/notesSlide22.xml><?xml version="1.0" encoding="utf-8"?>
+<p:notes xmlns:a="http://schemas.openxmlformats.org/drawingml/2006/main" xmlns:r="http://schemas.openxmlformats.org/officeDocument/2006/relationships" xmlns:p="http://schemas.openxmlformats.org/presentationml/2006/main">
+  <p:cSld>
+    <p:spTree>
+      <p:nvGrpSpPr>
+        <p:cNvPr id="1" name="">
+          <a:extLst>
+            <a:ext uri="{FF2B5EF4-FFF2-40B4-BE49-F238E27FC236}">
+              <a16:creationId xmlns:a16="http://schemas.microsoft.com/office/drawing/2014/main" id="{CCB7803D-69A9-647C-A3B9-385E5FE8AE53}"/>
+            </a:ext>
+          </a:extLst>
+        </p:cNvPr>
+        <p:cNvGrpSpPr/>
+        <p:nvPr/>
+      </p:nvGrpSpPr>
+      <p:grpSpPr>
+        <a:xfrm>
+          <a:off x="0" y="0"/>
+          <a:ext cx="0" cy="0"/>
+          <a:chOff x="0" y="0"/>
+          <a:chExt cx="0" cy="0"/>
+        </a:xfrm>
+      </p:grpSpPr>
+      <p:sp>
+        <p:nvSpPr>
+          <p:cNvPr id="2" name="Slide Image Placeholder 1">
+            <a:extLst>
+              <a:ext uri="{FF2B5EF4-FFF2-40B4-BE49-F238E27FC236}">
+                <a16:creationId xmlns:a16="http://schemas.microsoft.com/office/drawing/2014/main" id="{E580C3FF-9713-7792-068E-13A2E98D0212}"/>
+              </a:ext>
+            </a:extLst>
+          </p:cNvPr>
+          <p:cNvSpPr>
+            <a:spLocks noGrp="1" noRot="1" noChangeAspect="1"/>
+          </p:cNvSpPr>
+          <p:nvPr>
+            <p:ph type="sldImg"/>
+          </p:nvPr>
+        </p:nvSpPr>
+        <p:spPr/>
+      </p:sp>
+      <p:sp>
+        <p:nvSpPr>
+          <p:cNvPr id="3" name="Notes Placeholder 2">
+            <a:extLst>
+              <a:ext uri="{FF2B5EF4-FFF2-40B4-BE49-F238E27FC236}">
+                <a16:creationId xmlns:a16="http://schemas.microsoft.com/office/drawing/2014/main" id="{586542D6-B2E0-4CE5-8F83-76BABAD4654B}"/>
+              </a:ext>
+            </a:extLst>
+          </p:cNvPr>
+          <p:cNvSpPr>
+            <a:spLocks noGrp="1"/>
+          </p:cNvSpPr>
+          <p:nvPr>
+            <p:ph type="body" idx="1"/>
+          </p:nvPr>
+        </p:nvSpPr>
+        <p:spPr/>
+        <p:txBody>
+          <a:bodyPr/>
+          <a:lstStyle/>
+          <a:p>
+            <a:r>
+              <a:rPr lang="en-US" dirty="0"/>
+              <a:t>Fechar retomando o convite: quem topou o desafio já viu, na prática, o assunto da próxima aula.</a:t>
+            </a:r>
+          </a:p>
+        </p:txBody>
+      </p:sp>
+      <p:sp>
+        <p:nvSpPr>
+          <p:cNvPr id="4" name="Slide Number Placeholder 3">
+            <a:extLst>
+              <a:ext uri="{FF2B5EF4-FFF2-40B4-BE49-F238E27FC236}">
+                <a16:creationId xmlns:a16="http://schemas.microsoft.com/office/drawing/2014/main" id="{400D643C-AD21-C0D4-3534-6C6FD3B7A9CC}"/>
+              </a:ext>
+            </a:extLst>
+          </p:cNvPr>
+          <p:cNvSpPr>
+            <a:spLocks noGrp="1"/>
+          </p:cNvSpPr>
+          <p:nvPr>
+            <p:ph type="sldNum" sz="quarter" idx="10"/>
+          </p:nvPr>
+        </p:nvSpPr>
+        <p:spPr/>
+        <p:txBody>
+          <a:bodyPr/>
+          <a:lstStyle/>
+          <a:p>
+            <a:fld id="{F7021451-1387-4CA6-816F-3879F97B5CBC}" type="slidenum">
+              <a:rPr lang="en-US"/>
+              <a:t>22</a:t>
+            </a:fld>
+            <a:endParaRPr lang="en-US"/>
+          </a:p>
+        </p:txBody>
+      </p:sp>
+    </p:spTree>
+    <p:extLst>
+      <p:ext uri="{BB962C8B-B14F-4D97-AF65-F5344CB8AC3E}">
+        <p14:creationId xmlns:p14="http://schemas.microsoft.com/office/powerpoint/2010/main" val="463997882"/>
       </p:ext>
     </p:extLst>
   </p:cSld>
@@ -12259,6 +12371,415 @@
 </p:sld>
 </file>
 
+<file path=ppt/slides/slide22.xml><?xml version="1.0" encoding="utf-8"?>
+<p:sld xmlns:a="http://schemas.openxmlformats.org/drawingml/2006/main" xmlns:r="http://schemas.openxmlformats.org/officeDocument/2006/relationships" xmlns:p="http://schemas.openxmlformats.org/presentationml/2006/main">
+  <p:cSld>
+    <p:bg>
+      <p:bgPr>
+        <a:solidFill>
+          <a:srgbClr val="141B41"/>
+        </a:solidFill>
+        <a:effectLst/>
+      </p:bgPr>
+    </p:bg>
+    <p:spTree>
+      <p:nvGrpSpPr>
+        <p:cNvPr id="1" name="">
+          <a:extLst>
+            <a:ext uri="{FF2B5EF4-FFF2-40B4-BE49-F238E27FC236}">
+              <a16:creationId xmlns:a16="http://schemas.microsoft.com/office/drawing/2014/main" id="{C9A688C4-1EAD-C0D1-E6ED-3B884AAA35C1}"/>
+            </a:ext>
+          </a:extLst>
+        </p:cNvPr>
+        <p:cNvGrpSpPr/>
+        <p:nvPr/>
+      </p:nvGrpSpPr>
+      <p:grpSpPr>
+        <a:xfrm>
+          <a:off x="0" y="0"/>
+          <a:ext cx="0" cy="0"/>
+          <a:chOff x="0" y="0"/>
+          <a:chExt cx="0" cy="0"/>
+        </a:xfrm>
+      </p:grpSpPr>
+      <p:sp>
+        <p:nvSpPr>
+          <p:cNvPr id="2" name="Shape 0">
+            <a:extLst>
+              <a:ext uri="{FF2B5EF4-FFF2-40B4-BE49-F238E27FC236}">
+                <a16:creationId xmlns:a16="http://schemas.microsoft.com/office/drawing/2014/main" id="{F4818616-D5D8-A972-49DD-007C26FD0FCD}"/>
+              </a:ext>
+            </a:extLst>
+          </p:cNvPr>
+          <p:cNvSpPr/>
+          <p:nvPr/>
+        </p:nvSpPr>
+        <p:spPr>
+          <a:xfrm>
+            <a:off x="-1828800" y="-2011680"/>
+            <a:ext cx="5486400" cy="5486400"/>
+          </a:xfrm>
+          <a:prstGeom prst="ellipse">
+            <a:avLst/>
+          </a:prstGeom>
+          <a:ln w="19050">
+            <a:solidFill>
+              <a:srgbClr val="6C4BC1">
+                <a:alpha val="55000"/>
+              </a:srgbClr>
+            </a:solidFill>
+            <a:prstDash val="solid"/>
+          </a:ln>
+        </p:spPr>
+        <p:txBody>
+          <a:bodyPr/>
+          <a:lstStyle/>
+          <a:p>
+            <a:endParaRPr lang="pt-BR" noProof="0" dirty="0"/>
+          </a:p>
+        </p:txBody>
+      </p:sp>
+      <p:sp>
+        <p:nvSpPr>
+          <p:cNvPr id="3" name="Shape 1">
+            <a:extLst>
+              <a:ext uri="{FF2B5EF4-FFF2-40B4-BE49-F238E27FC236}">
+                <a16:creationId xmlns:a16="http://schemas.microsoft.com/office/drawing/2014/main" id="{468BDC67-4C0D-2D0B-2FC5-9EF518C1BCB5}"/>
+              </a:ext>
+            </a:extLst>
+          </p:cNvPr>
+          <p:cNvSpPr/>
+          <p:nvPr/>
+        </p:nvSpPr>
+        <p:spPr>
+          <a:xfrm>
+            <a:off x="9509760" y="4206240"/>
+            <a:ext cx="3840480" cy="3840480"/>
+          </a:xfrm>
+          <a:prstGeom prst="ellipse">
+            <a:avLst/>
+          </a:prstGeom>
+          <a:ln w="19050">
+            <a:solidFill>
+              <a:srgbClr val="2FE6C7">
+                <a:alpha val="50000"/>
+              </a:srgbClr>
+            </a:solidFill>
+            <a:prstDash val="solid"/>
+          </a:ln>
+        </p:spPr>
+        <p:txBody>
+          <a:bodyPr/>
+          <a:lstStyle/>
+          <a:p>
+            <a:endParaRPr lang="pt-BR" noProof="0" dirty="0"/>
+          </a:p>
+        </p:txBody>
+      </p:sp>
+      <p:sp>
+        <p:nvSpPr>
+          <p:cNvPr id="4" name="Shape 2">
+            <a:extLst>
+              <a:ext uri="{FF2B5EF4-FFF2-40B4-BE49-F238E27FC236}">
+                <a16:creationId xmlns:a16="http://schemas.microsoft.com/office/drawing/2014/main" id="{F4E68E36-9F94-AC5F-DBA8-A508BD8CEEC3}"/>
+              </a:ext>
+            </a:extLst>
+          </p:cNvPr>
+          <p:cNvSpPr/>
+          <p:nvPr/>
+        </p:nvSpPr>
+        <p:spPr>
+          <a:xfrm>
+            <a:off x="640080" y="1051560"/>
+            <a:ext cx="777240" cy="777240"/>
+          </a:xfrm>
+          <a:prstGeom prst="ellipse">
+            <a:avLst/>
+          </a:prstGeom>
+          <a:solidFill>
+            <a:srgbClr val="2FE6C7"/>
+          </a:solidFill>
+          <a:ln/>
+        </p:spPr>
+        <p:txBody>
+          <a:bodyPr/>
+          <a:lstStyle/>
+          <a:p>
+            <a:endParaRPr lang="pt-BR" noProof="0" dirty="0"/>
+          </a:p>
+        </p:txBody>
+      </p:sp>
+      <p:pic>
+        <p:nvPicPr>
+          <p:cNvPr id="5" name="Image 0" descr="preencoded.png">
+            <a:extLst>
+              <a:ext uri="{FF2B5EF4-FFF2-40B4-BE49-F238E27FC236}">
+                <a16:creationId xmlns:a16="http://schemas.microsoft.com/office/drawing/2014/main" id="{60BA5495-316C-6839-BC20-80A6801F977C}"/>
+              </a:ext>
+            </a:extLst>
+          </p:cNvPr>
+          <p:cNvPicPr>
+            <a:picLocks noChangeAspect="1"/>
+          </p:cNvPicPr>
+          <p:nvPr/>
+        </p:nvPicPr>
+        <p:blipFill>
+          <a:blip r:embed="rId3"/>
+          <a:stretch>
+            <a:fillRect/>
+          </a:stretch>
+        </p:blipFill>
+        <p:spPr>
+          <a:xfrm>
+            <a:off x="786384" y="1197864"/>
+            <a:ext cx="484632" cy="484632"/>
+          </a:xfrm>
+          <a:prstGeom prst="rect">
+            <a:avLst/>
+          </a:prstGeom>
+        </p:spPr>
+      </p:pic>
+      <p:sp>
+        <p:nvSpPr>
+          <p:cNvPr id="6" name="Text 3">
+            <a:extLst>
+              <a:ext uri="{FF2B5EF4-FFF2-40B4-BE49-F238E27FC236}">
+                <a16:creationId xmlns:a16="http://schemas.microsoft.com/office/drawing/2014/main" id="{6F2DC736-AF73-D55E-4D46-9B724CD1A98B}"/>
+              </a:ext>
+            </a:extLst>
+          </p:cNvPr>
+          <p:cNvSpPr/>
+          <p:nvPr/>
+        </p:nvSpPr>
+        <p:spPr>
+          <a:xfrm>
+            <a:off x="1600200" y="1170432"/>
+            <a:ext cx="4572000" cy="320040"/>
+          </a:xfrm>
+          <a:prstGeom prst="rect">
+            <a:avLst/>
+          </a:prstGeom>
+          <a:noFill/>
+          <a:ln/>
+        </p:spPr>
+        <p:txBody>
+          <a:bodyPr wrap="square" lIns="0" tIns="0" rIns="0" bIns="0" rtlCol="0" anchor="ctr"/>
+          <a:lstStyle/>
+          <a:p>
+            <a:pPr marL="0" indent="0">
+              <a:buNone/>
+            </a:pPr>
+            <a:r>
+              <a:rPr lang="pt-BR" sz="1300" b="1" kern="0" spc="300" noProof="0" dirty="0">
+                <a:solidFill>
+                  <a:srgbClr val="2FE6C7"/>
+                </a:solidFill>
+                <a:latin typeface="Calibri" pitchFamily="34" charset="0"/>
+                <a:ea typeface="Calibri" pitchFamily="34" charset="-122"/>
+                <a:cs typeface="Calibri" pitchFamily="34" charset="-120"/>
+              </a:rPr>
+              <a:t>PRÓXIMA PARADA</a:t>
+            </a:r>
+            <a:endParaRPr lang="pt-BR" sz="1300" noProof="0" dirty="0"/>
+          </a:p>
+        </p:txBody>
+      </p:sp>
+      <p:sp>
+        <p:nvSpPr>
+          <p:cNvPr id="7" name="Text 4">
+            <a:extLst>
+              <a:ext uri="{FF2B5EF4-FFF2-40B4-BE49-F238E27FC236}">
+                <a16:creationId xmlns:a16="http://schemas.microsoft.com/office/drawing/2014/main" id="{9BE1189E-9685-5909-3733-C167112FFAA0}"/>
+              </a:ext>
+            </a:extLst>
+          </p:cNvPr>
+          <p:cNvSpPr/>
+          <p:nvPr/>
+        </p:nvSpPr>
+        <p:spPr>
+          <a:xfrm>
+            <a:off x="1600200" y="1463040"/>
+            <a:ext cx="8686800" cy="457200"/>
+          </a:xfrm>
+          <a:prstGeom prst="rect">
+            <a:avLst/>
+          </a:prstGeom>
+          <a:noFill/>
+          <a:ln/>
+        </p:spPr>
+        <p:txBody>
+          <a:bodyPr wrap="square" lIns="0" tIns="0" rIns="0" bIns="0" rtlCol="0" anchor="ctr"/>
+          <a:lstStyle/>
+          <a:p>
+            <a:pPr marL="0" indent="0">
+              <a:buNone/>
+            </a:pPr>
+            <a:r>
+              <a:rPr lang="pt-BR" sz="1600" noProof="0" dirty="0">
+                <a:solidFill>
+                  <a:srgbClr val="CBC3EE"/>
+                </a:solidFill>
+                <a:latin typeface="Calibri" pitchFamily="34" charset="0"/>
+                <a:ea typeface="Calibri" pitchFamily="34" charset="-122"/>
+                <a:cs typeface="Calibri" pitchFamily="34" charset="-120"/>
+              </a:rPr>
+              <a:t>Fundamentos de Lógica</a:t>
+            </a:r>
+            <a:endParaRPr lang="pt-BR" sz="1600" noProof="0" dirty="0"/>
+          </a:p>
+        </p:txBody>
+      </p:sp>
+      <p:sp>
+        <p:nvSpPr>
+          <p:cNvPr id="8" name="Text 5">
+            <a:extLst>
+              <a:ext uri="{FF2B5EF4-FFF2-40B4-BE49-F238E27FC236}">
+                <a16:creationId xmlns:a16="http://schemas.microsoft.com/office/drawing/2014/main" id="{C84B69DD-11FD-552D-B2DD-7FAF1C44CE42}"/>
+              </a:ext>
+            </a:extLst>
+          </p:cNvPr>
+          <p:cNvSpPr/>
+          <p:nvPr/>
+        </p:nvSpPr>
+        <p:spPr>
+          <a:xfrm>
+            <a:off x="640080" y="2606040"/>
+            <a:ext cx="10058400" cy="1371600"/>
+          </a:xfrm>
+          <a:prstGeom prst="rect">
+            <a:avLst/>
+          </a:prstGeom>
+          <a:noFill/>
+          <a:ln/>
+        </p:spPr>
+        <p:txBody>
+          <a:bodyPr wrap="square" lIns="0" tIns="0" rIns="0" bIns="0" rtlCol="0" anchor="ctr"/>
+          <a:lstStyle/>
+          <a:p>
+            <a:pPr marL="0" indent="0">
+              <a:lnSpc>
+                <a:spcPts val="4000"/>
+              </a:lnSpc>
+              <a:buNone/>
+            </a:pPr>
+            <a:r>
+              <a:rPr lang="pt-BR" sz="3400" b="1" noProof="0" dirty="0">
+                <a:solidFill>
+                  <a:srgbClr val="FFFFFF"/>
+                </a:solidFill>
+                <a:latin typeface="Cambria" pitchFamily="34" charset="0"/>
+                <a:ea typeface="Cambria" pitchFamily="34" charset="-122"/>
+                <a:cs typeface="Cambria" pitchFamily="34" charset="-120"/>
+              </a:rPr>
+              <a:t>Dúvidas,</a:t>
+            </a:r>
+            <a:endParaRPr lang="pt-BR" sz="3400" noProof="0" dirty="0"/>
+          </a:p>
+        </p:txBody>
+      </p:sp>
+      <p:sp>
+        <p:nvSpPr>
+          <p:cNvPr id="9" name="Text 6">
+            <a:extLst>
+              <a:ext uri="{FF2B5EF4-FFF2-40B4-BE49-F238E27FC236}">
+                <a16:creationId xmlns:a16="http://schemas.microsoft.com/office/drawing/2014/main" id="{6DCBA9B0-A321-DDA7-6AB4-5DF61510D3FF}"/>
+              </a:ext>
+            </a:extLst>
+          </p:cNvPr>
+          <p:cNvSpPr/>
+          <p:nvPr/>
+        </p:nvSpPr>
+        <p:spPr>
+          <a:xfrm>
+            <a:off x="640080" y="4114800"/>
+            <a:ext cx="9144000" cy="548640"/>
+          </a:xfrm>
+          <a:prstGeom prst="rect">
+            <a:avLst/>
+          </a:prstGeom>
+          <a:noFill/>
+          <a:ln/>
+        </p:spPr>
+        <p:txBody>
+          <a:bodyPr wrap="square" lIns="0" tIns="0" rIns="0" bIns="0" rtlCol="0" anchor="ctr"/>
+          <a:lstStyle/>
+          <a:p>
+            <a:pPr marL="0" indent="0">
+              <a:buNone/>
+            </a:pPr>
+            <a:r>
+              <a:rPr lang="pt-BR" sz="1600" i="1" noProof="0" dirty="0">
+                <a:solidFill>
+                  <a:srgbClr val="AEB3DE"/>
+                </a:solidFill>
+                <a:latin typeface="Calibri" pitchFamily="34" charset="0"/>
+                <a:ea typeface="Calibri" pitchFamily="34" charset="-122"/>
+                <a:cs typeface="Calibri" pitchFamily="34" charset="-120"/>
+              </a:rPr>
+              <a:t>daniel.h.paiva@ulife.com.br</a:t>
+            </a:r>
+            <a:endParaRPr lang="pt-BR" sz="1600" noProof="0" dirty="0"/>
+          </a:p>
+        </p:txBody>
+      </p:sp>
+      <p:sp>
+        <p:nvSpPr>
+          <p:cNvPr id="10" name="Text 7">
+            <a:extLst>
+              <a:ext uri="{FF2B5EF4-FFF2-40B4-BE49-F238E27FC236}">
+                <a16:creationId xmlns:a16="http://schemas.microsoft.com/office/drawing/2014/main" id="{5CB037F1-547D-8C0F-9E63-88C8914AA832}"/>
+              </a:ext>
+            </a:extLst>
+          </p:cNvPr>
+          <p:cNvSpPr/>
+          <p:nvPr/>
+        </p:nvSpPr>
+        <p:spPr>
+          <a:xfrm>
+            <a:off x="640080" y="6172200"/>
+            <a:ext cx="7315200" cy="320040"/>
+          </a:xfrm>
+          <a:prstGeom prst="rect">
+            <a:avLst/>
+          </a:prstGeom>
+          <a:noFill/>
+          <a:ln/>
+        </p:spPr>
+        <p:txBody>
+          <a:bodyPr wrap="square" lIns="0" tIns="0" rIns="0" bIns="0" rtlCol="0" anchor="ctr"/>
+          <a:lstStyle/>
+          <a:p>
+            <a:pPr marL="0" indent="0">
+              <a:buNone/>
+            </a:pPr>
+            <a:r>
+              <a:rPr lang="pt-BR" sz="1150" kern="0" spc="100" noProof="0" dirty="0">
+                <a:solidFill>
+                  <a:srgbClr val="6F76B0"/>
+                </a:solidFill>
+                <a:latin typeface="Calibri" pitchFamily="34" charset="0"/>
+                <a:ea typeface="Calibri" pitchFamily="34" charset="-122"/>
+                <a:cs typeface="Calibri" pitchFamily="34" charset="-120"/>
+              </a:rPr>
+              <a:t>Matemática Computacional Aplicada  ·  Aula 02</a:t>
+            </a:r>
+            <a:endParaRPr lang="pt-BR" sz="1150" noProof="0" dirty="0"/>
+          </a:p>
+        </p:txBody>
+      </p:sp>
+    </p:spTree>
+    <p:extLst>
+      <p:ext uri="{BB962C8B-B14F-4D97-AF65-F5344CB8AC3E}">
+        <p14:creationId xmlns:p14="http://schemas.microsoft.com/office/powerpoint/2010/main" val="978340156"/>
+      </p:ext>
+    </p:extLst>
+  </p:cSld>
+  <p:clrMapOvr>
+    <a:masterClrMapping/>
+  </p:clrMapOvr>
+</p:sld>
+</file>
+
 <file path=ppt/slides/slide3.xml><?xml version="1.0" encoding="utf-8"?>
 <p:sld xmlns:a="http://schemas.openxmlformats.org/drawingml/2006/main" xmlns:r="http://schemas.openxmlformats.org/officeDocument/2006/relationships" xmlns:p="http://schemas.openxmlformats.org/presentationml/2006/main">
   <p:cSld name="Slide 3">
